--- a/docs/Group_Meeting_2026-08-10.pptx
+++ b/docs/Group_Meeting_2026-08-10.pptx
@@ -11129,7 +11129,7 @@
                 <a:ea typeface="Arial" pitchFamily="34" charset="-122"/>
                 <a:cs typeface="Arial" pitchFamily="34" charset="-120"/>
               </a:rPr>
-              <a:t>A hypothesis that was backwards</a:t>
+              <a:t>A backwards hypothesis</a:t>
             </a:r>
             <a:endParaRPr lang="en-US" sz="1600" dirty="0"/>
           </a:p>
@@ -11168,7 +11168,7 @@
                 <a:ea typeface="Arial" pitchFamily="34" charset="-122"/>
                 <a:cs typeface="Arial" pitchFamily="34" charset="-120"/>
               </a:rPr>
-              <a:t>finer patches made the task EASIER</a:t>
+              <a:t>finer patches = an easier task</a:t>
             </a:r>
             <a:endParaRPr lang="en-US" sz="1400" dirty="0"/>
           </a:p>
@@ -28952,7 +28952,7 @@
         <p:spPr>
           <a:xfrm>
             <a:off x="502920" y="1600200"/>
-            <a:ext cx="2670048" cy="1481328"/>
+            <a:ext cx="2615184" cy="1481328"/>
           </a:xfrm>
           <a:prstGeom prst="roundRect">
             <a:avLst>
@@ -29013,7 +29013,7 @@
         <p:spPr>
           <a:xfrm>
             <a:off x="630936" y="2176272"/>
-            <a:ext cx="2414016" cy="804672"/>
+            <a:ext cx="2359152" cy="804672"/>
           </a:xfrm>
           <a:prstGeom prst="rect">
             <a:avLst/>
@@ -29027,12 +29027,12 @@
           <a:p>
             <a:pPr indent="0" marL="0">
               <a:lnSpc>
-                <a:spcPts val="1800"/>
+                <a:spcPts val="1750"/>
               </a:lnSpc>
               <a:buNone/>
             </a:pPr>
             <a:r>
-              <a:rPr lang="en-US" sz="1500" dirty="0">
+              <a:rPr lang="en-US" sz="1450" dirty="0">
                 <a:solidFill>
                   <a:srgbClr val="1A1A1A"/>
                 </a:solidFill>
@@ -29042,17 +29042,17 @@
               </a:rPr>
               <a:t>Water suppression only</a:t>
             </a:r>
-            <a:endParaRPr lang="en-US" sz="1500" dirty="0"/>
+            <a:endParaRPr lang="en-US" sz="1450" dirty="0"/>
           </a:p>
           <a:p>
             <a:pPr indent="0" marL="0">
               <a:lnSpc>
-                <a:spcPts val="1800"/>
+                <a:spcPts val="1750"/>
               </a:lnSpc>
               <a:buNone/>
             </a:pPr>
             <a:r>
-              <a:rPr lang="en-US" sz="1500" dirty="0">
+              <a:rPr lang="en-US" sz="1450" dirty="0">
                 <a:solidFill>
                   <a:srgbClr val="1A1A1A"/>
                 </a:solidFill>
@@ -29062,7 +29062,7 @@
               </a:rPr>
               <a:t>points 62,500–68,000 → 0</a:t>
             </a:r>
-            <a:endParaRPr lang="en-US" sz="1500" dirty="0"/>
+            <a:endParaRPr lang="en-US" sz="1450" dirty="0"/>
           </a:p>
         </p:txBody>
       </p:sp>
@@ -29074,7 +29074,7 @@
         </p:nvSpPr>
         <p:spPr>
           <a:xfrm>
-            <a:off x="3200400" y="2267712"/>
+            <a:off x="3145536" y="2267712"/>
             <a:ext cx="137160" cy="155448"/>
           </a:xfrm>
           <a:prstGeom prst="rightArrow">
@@ -29094,8 +29094,8 @@
         </p:nvSpPr>
         <p:spPr>
           <a:xfrm>
-            <a:off x="3364992" y="1600200"/>
-            <a:ext cx="2670048" cy="1481328"/>
+            <a:off x="3337560" y="1600200"/>
+            <a:ext cx="2615184" cy="1481328"/>
           </a:xfrm>
           <a:prstGeom prst="roundRect">
             <a:avLst>
@@ -29116,7 +29116,7 @@
         </p:nvSpPr>
         <p:spPr>
           <a:xfrm>
-            <a:off x="3493008" y="1737360"/>
+            <a:off x="3465576" y="1737360"/>
             <a:ext cx="914400" cy="402336"/>
           </a:xfrm>
           <a:prstGeom prst="rect">
@@ -29155,8 +29155,8 @@
         </p:nvSpPr>
         <p:spPr>
           <a:xfrm>
-            <a:off x="3493008" y="2176272"/>
-            <a:ext cx="2414016" cy="804672"/>
+            <a:off x="3465576" y="2176272"/>
+            <a:ext cx="2359152" cy="804672"/>
           </a:xfrm>
           <a:prstGeom prst="rect">
             <a:avLst/>
@@ -29170,12 +29170,12 @@
           <a:p>
             <a:pPr indent="0" marL="0">
               <a:lnSpc>
-                <a:spcPts val="1800"/>
+                <a:spcPts val="1750"/>
               </a:lnSpc>
               <a:buNone/>
             </a:pPr>
             <a:r>
-              <a:rPr lang="en-US" sz="1500" dirty="0">
+              <a:rPr lang="en-US" sz="1450" dirty="0">
                 <a:solidFill>
                   <a:srgbClr val="1A1A1A"/>
                 </a:solidFill>
@@ -29185,17 +29185,17 @@
               </a:rPr>
               <a:t>EDTA window skipped</a:t>
             </a:r>
-            <a:endParaRPr lang="en-US" sz="1500" dirty="0"/>
+            <a:endParaRPr lang="en-US" sz="1450" dirty="0"/>
           </a:p>
           <a:p>
             <a:pPr indent="0" marL="0">
               <a:lnSpc>
-                <a:spcPts val="1800"/>
+                <a:spcPts val="1750"/>
               </a:lnSpc>
               <a:buNone/>
             </a:pPr>
             <a:r>
-              <a:rPr lang="en-US" sz="1500" dirty="0">
+              <a:rPr lang="en-US" sz="1450" dirty="0">
                 <a:solidFill>
                   <a:srgbClr val="1A1A1A"/>
                 </a:solidFill>
@@ -29205,7 +29205,7 @@
               </a:rPr>
               <a:t>(left largely untouched)</a:t>
             </a:r>
-            <a:endParaRPr lang="en-US" sz="1500" dirty="0"/>
+            <a:endParaRPr lang="en-US" sz="1450" dirty="0"/>
           </a:p>
         </p:txBody>
       </p:sp>
@@ -29217,7 +29217,7 @@
         </p:nvSpPr>
         <p:spPr>
           <a:xfrm>
-            <a:off x="6062472" y="2267712"/>
+            <a:off x="5980176" y="2267712"/>
             <a:ext cx="137160" cy="155448"/>
           </a:xfrm>
           <a:prstGeom prst="rightArrow">
@@ -29237,8 +29237,8 @@
         </p:nvSpPr>
         <p:spPr>
           <a:xfrm>
-            <a:off x="6227064" y="1600200"/>
-            <a:ext cx="2670048" cy="1481328"/>
+            <a:off x="6172200" y="1600200"/>
+            <a:ext cx="2615184" cy="1481328"/>
           </a:xfrm>
           <a:prstGeom prst="roundRect">
             <a:avLst>
@@ -29259,7 +29259,7 @@
         </p:nvSpPr>
         <p:spPr>
           <a:xfrm>
-            <a:off x="6355080" y="1737360"/>
+            <a:off x="6300216" y="1737360"/>
             <a:ext cx="914400" cy="402336"/>
           </a:xfrm>
           <a:prstGeom prst="rect">
@@ -29298,8 +29298,8 @@
         </p:nvSpPr>
         <p:spPr>
           <a:xfrm>
-            <a:off x="6355080" y="2176272"/>
-            <a:ext cx="2414016" cy="804672"/>
+            <a:off x="6300216" y="2176272"/>
+            <a:ext cx="2359152" cy="804672"/>
           </a:xfrm>
           <a:prstGeom prst="rect">
             <a:avLst/>
@@ -29313,12 +29313,12 @@
           <a:p>
             <a:pPr indent="0" marL="0">
               <a:lnSpc>
-                <a:spcPts val="1800"/>
+                <a:spcPts val="1750"/>
               </a:lnSpc>
               <a:buNone/>
             </a:pPr>
             <a:r>
-              <a:rPr lang="en-US" sz="1500" dirty="0">
+              <a:rPr lang="en-US" sz="1450" dirty="0">
                 <a:solidFill>
                   <a:srgbClr val="1A1A1A"/>
                 </a:solidFill>
@@ -29328,17 +29328,17 @@
               </a:rPr>
               <a:t>Uniform magnitude-based</a:t>
             </a:r>
-            <a:endParaRPr lang="en-US" sz="1500" dirty="0"/>
+            <a:endParaRPr lang="en-US" sz="1450" dirty="0"/>
           </a:p>
           <a:p>
             <a:pPr indent="0" marL="0">
               <a:lnSpc>
-                <a:spcPts val="1800"/>
+                <a:spcPts val="1750"/>
               </a:lnSpc>
               <a:buNone/>
             </a:pPr>
             <a:r>
-              <a:rPr lang="en-US" sz="1500" dirty="0">
+              <a:rPr lang="en-US" sz="1450" dirty="0">
                 <a:solidFill>
                   <a:srgbClr val="1A1A1A"/>
                 </a:solidFill>
@@ -29348,7 +29348,7 @@
               </a:rPr>
               <a:t>EDTA suppression</a:t>
             </a:r>
-            <a:endParaRPr lang="en-US" sz="1500" dirty="0"/>
+            <a:endParaRPr lang="en-US" sz="1450" dirty="0"/>
           </a:p>
         </p:txBody>
       </p:sp>
@@ -29360,7 +29360,7 @@
         </p:nvSpPr>
         <p:spPr>
           <a:xfrm>
-            <a:off x="8924544" y="2267712"/>
+            <a:off x="8814816" y="2267712"/>
             <a:ext cx="137160" cy="155448"/>
           </a:xfrm>
           <a:prstGeom prst="rightArrow">
@@ -29380,8 +29380,8 @@
         </p:nvSpPr>
         <p:spPr>
           <a:xfrm>
-            <a:off x="9089136" y="1600200"/>
-            <a:ext cx="2670048" cy="1481328"/>
+            <a:off x="9006840" y="1600200"/>
+            <a:ext cx="2615184" cy="1481328"/>
           </a:xfrm>
           <a:prstGeom prst="roundRect">
             <a:avLst>
@@ -29402,7 +29402,7 @@
         </p:nvSpPr>
         <p:spPr>
           <a:xfrm>
-            <a:off x="9217152" y="1737360"/>
+            <a:off x="9134856" y="1737360"/>
             <a:ext cx="914400" cy="402336"/>
           </a:xfrm>
           <a:prstGeom prst="rect">
@@ -29441,8 +29441,8 @@
         </p:nvSpPr>
         <p:spPr>
           <a:xfrm>
-            <a:off x="9217152" y="2176272"/>
-            <a:ext cx="2414016" cy="804672"/>
+            <a:off x="9134856" y="2176272"/>
+            <a:ext cx="2359152" cy="804672"/>
           </a:xfrm>
           <a:prstGeom prst="rect">
             <a:avLst/>
@@ -29456,12 +29456,12 @@
           <a:p>
             <a:pPr indent="0" marL="0">
               <a:lnSpc>
-                <a:spcPts val="1800"/>
+                <a:spcPts val="1750"/>
               </a:lnSpc>
               <a:buNone/>
             </a:pPr>
             <a:r>
-              <a:rPr lang="en-US" sz="1500" dirty="0">
+              <a:rPr lang="en-US" sz="1450" dirty="0">
                 <a:solidFill>
                   <a:srgbClr val="1A1A1A"/>
                 </a:solidFill>
@@ -29471,17 +29471,17 @@
               </a:rPr>
               <a:t>EDTA cutoff FIXED to the</a:t>
             </a:r>
-            <a:endParaRPr lang="en-US" sz="1500" dirty="0"/>
+            <a:endParaRPr lang="en-US" sz="1450" dirty="0"/>
           </a:p>
           <a:p>
             <a:pPr indent="0" marL="0">
               <a:lnSpc>
-                <a:spcPts val="1800"/>
+                <a:spcPts val="1750"/>
               </a:lnSpc>
               <a:buNone/>
             </a:pPr>
             <a:r>
-              <a:rPr lang="en-US" sz="1500" dirty="0">
+              <a:rPr lang="en-US" sz="1450" dirty="0">
                 <a:solidFill>
                   <a:srgbClr val="1A1A1A"/>
                 </a:solidFill>
@@ -29491,7 +29491,7 @@
               </a:rPr>
               <a:t>baseline-to-peak midpoint</a:t>
             </a:r>
-            <a:endParaRPr lang="en-US" sz="1500" dirty="0"/>
+            <a:endParaRPr lang="en-US" sz="1450" dirty="0"/>
           </a:p>
         </p:txBody>
       </p:sp>
@@ -29705,7 +29705,7 @@
                 <a:ea typeface="Arial" pitchFamily="34" charset="-122"/>
                 <a:cs typeface="Arial" pitchFamily="34" charset="-120"/>
               </a:rPr>
-              <a:t>…but the version does not matter downstream</a:t>
+              <a:t>…but it does not matter downstream</a:t>
             </a:r>
             <a:endParaRPr lang="en-US" sz="1800" dirty="0"/>
           </a:p>
@@ -29719,8 +29719,8 @@
         </p:nvSpPr>
         <p:spPr>
           <a:xfrm>
-            <a:off x="6492240" y="3877056"/>
-            <a:ext cx="4937760" cy="1792224"/>
+            <a:off x="6492240" y="3913632"/>
+            <a:ext cx="4937760" cy="1737360"/>
           </a:xfrm>
           <a:prstGeom prst="rect">
             <a:avLst/>

--- a/docs/Group_Meeting_2026-08-10.pptx
+++ b/docs/Group_Meeting_2026-08-10.pptx
@@ -4042,8 +4042,8 @@
         </p:blipFill>
         <p:spPr>
           <a:xfrm>
-            <a:off x="1051537" y="1417320"/>
-            <a:ext cx="10058446" cy="4343400"/>
+            <a:off x="1057046" y="1371600"/>
+            <a:ext cx="10047428" cy="4197096"/>
           </a:xfrm>
           <a:prstGeom prst="rect">
             <a:avLst/>
@@ -4058,12 +4058,12 @@
         </p:nvSpPr>
         <p:spPr>
           <a:xfrm>
-            <a:off x="502920" y="5815584"/>
-            <a:ext cx="11155680" cy="603504"/>
+            <a:off x="502920" y="5669280"/>
+            <a:ext cx="11155680" cy="731520"/>
           </a:xfrm>
           <a:prstGeom prst="roundRect">
             <a:avLst>
-              <a:gd name="adj" fmla="val 12121"/>
+              <a:gd name="adj" fmla="val 10000"/>
             </a:avLst>
           </a:prstGeom>
           <a:solidFill>
@@ -4080,8 +4080,8 @@
         </p:nvSpPr>
         <p:spPr>
           <a:xfrm>
-            <a:off x="777240" y="5870448"/>
-            <a:ext cx="10607040" cy="512064"/>
+            <a:off x="777240" y="5742432"/>
+            <a:ext cx="10607040" cy="603504"/>
           </a:xfrm>
           <a:prstGeom prst="rect">
             <a:avLst/>
@@ -4100,7 +4100,7 @@
               <a:buNone/>
             </a:pPr>
             <a:r>
-              <a:rPr lang="en-US" sz="1500" dirty="0">
+              <a:rPr lang="en-US" sz="1550" dirty="0">
                 <a:solidFill>
                   <a:srgbClr val="1A1A1A"/>
                 </a:solidFill>
@@ -4110,7 +4110,7 @@
               </a:rPr>
               <a:t>Consistent ordering: masked &gt; jigsaw ≈ joint. Two of the gaps are large (0.14–0.18). Barth and MTBLS326 are effectively ties — half a sample and one sample respectively.</a:t>
             </a:r>
-            <a:endParaRPr lang="en-US" sz="1500" dirty="0"/>
+            <a:endParaRPr lang="en-US" sz="1550" dirty="0"/>
           </a:p>
         </p:txBody>
       </p:sp>
@@ -7270,12 +7270,12 @@
         </p:nvSpPr>
         <p:spPr>
           <a:xfrm>
-            <a:off x="502920" y="5660136"/>
-            <a:ext cx="11155680" cy="777240"/>
+            <a:off x="502920" y="5669280"/>
+            <a:ext cx="11155680" cy="731520"/>
           </a:xfrm>
           <a:prstGeom prst="roundRect">
             <a:avLst>
-              <a:gd name="adj" fmla="val 9412"/>
+              <a:gd name="adj" fmla="val 10000"/>
             </a:avLst>
           </a:prstGeom>
           <a:solidFill>
@@ -7293,7 +7293,7 @@
         <p:spPr>
           <a:xfrm>
             <a:off x="777240" y="5733288"/>
-            <a:ext cx="10607040" cy="640080"/>
+            <a:ext cx="10607040" cy="603504"/>
           </a:xfrm>
           <a:prstGeom prst="rect">
             <a:avLst/>
@@ -10621,12 +10621,12 @@
         </p:nvSpPr>
         <p:spPr>
           <a:xfrm>
-            <a:off x="502920" y="5660136"/>
-            <a:ext cx="5440680" cy="777240"/>
+            <a:off x="502920" y="5669280"/>
+            <a:ext cx="5440680" cy="731520"/>
           </a:xfrm>
           <a:prstGeom prst="roundRect">
             <a:avLst>
-              <a:gd name="adj" fmla="val 9412"/>
+              <a:gd name="adj" fmla="val 10000"/>
             </a:avLst>
           </a:prstGeom>
           <a:solidFill>
@@ -10643,8 +10643,8 @@
         </p:nvSpPr>
         <p:spPr>
           <a:xfrm>
-            <a:off x="731520" y="5715000"/>
-            <a:ext cx="4992624" cy="676656"/>
+            <a:off x="731520" y="5724144"/>
+            <a:ext cx="4992624" cy="621792"/>
           </a:xfrm>
           <a:prstGeom prst="rect">
             <a:avLst/>
@@ -10685,12 +10685,12 @@
         </p:nvSpPr>
         <p:spPr>
           <a:xfrm>
-            <a:off x="6217920" y="5660136"/>
-            <a:ext cx="5440680" cy="777240"/>
+            <a:off x="6217920" y="5669280"/>
+            <a:ext cx="5440680" cy="731520"/>
           </a:xfrm>
           <a:prstGeom prst="roundRect">
             <a:avLst>
-              <a:gd name="adj" fmla="val 9412"/>
+              <a:gd name="adj" fmla="val 10000"/>
             </a:avLst>
           </a:prstGeom>
           <a:solidFill>
@@ -10707,8 +10707,8 @@
         </p:nvSpPr>
         <p:spPr>
           <a:xfrm>
-            <a:off x="6446520" y="5715000"/>
-            <a:ext cx="4992624" cy="676656"/>
+            <a:off x="6446520" y="5724144"/>
+            <a:ext cx="4992624" cy="621792"/>
           </a:xfrm>
           <a:prstGeom prst="rect">
             <a:avLst/>
@@ -14084,7 +14084,7 @@
         </p:nvSpPr>
         <p:spPr>
           <a:xfrm>
-            <a:off x="502920" y="4261104"/>
+            <a:off x="502920" y="4297680"/>
             <a:ext cx="11155680" cy="310896"/>
           </a:xfrm>
           <a:prstGeom prst="rect">
@@ -14123,12 +14123,12 @@
         </p:nvSpPr>
         <p:spPr>
           <a:xfrm>
-            <a:off x="502920" y="4681728"/>
-            <a:ext cx="11155680" cy="1517904"/>
+            <a:off x="502920" y="4773168"/>
+            <a:ext cx="11155680" cy="1444752"/>
           </a:xfrm>
           <a:prstGeom prst="roundRect">
             <a:avLst>
-              <a:gd name="adj" fmla="val 4819"/>
+              <a:gd name="adj" fmla="val 5063"/>
             </a:avLst>
           </a:prstGeom>
           <a:solidFill>
@@ -14145,7 +14145,7 @@
         </p:nvSpPr>
         <p:spPr>
           <a:xfrm>
-            <a:off x="777240" y="4791456"/>
+            <a:off x="777240" y="4864608"/>
             <a:ext cx="7315200" cy="310896"/>
           </a:xfrm>
           <a:prstGeom prst="rect">
@@ -14184,8 +14184,8 @@
         </p:nvSpPr>
         <p:spPr>
           <a:xfrm>
-            <a:off x="777240" y="5120640"/>
-            <a:ext cx="10607040" cy="1005840"/>
+            <a:off x="777240" y="5193792"/>
+            <a:ext cx="10607040" cy="950976"/>
           </a:xfrm>
           <a:prstGeom prst="rect">
             <a:avLst/>
@@ -15023,12 +15023,12 @@
         </p:nvSpPr>
         <p:spPr>
           <a:xfrm>
-            <a:off x="502920" y="5724144"/>
-            <a:ext cx="11155680" cy="640080"/>
+            <a:off x="502920" y="5705856"/>
+            <a:ext cx="11155680" cy="658368"/>
           </a:xfrm>
           <a:prstGeom prst="roundRect">
             <a:avLst>
-              <a:gd name="adj" fmla="val 11429"/>
+              <a:gd name="adj" fmla="val 11111"/>
             </a:avLst>
           </a:prstGeom>
           <a:solidFill>
@@ -15241,8 +15241,8 @@
         </p:blipFill>
         <p:spPr>
           <a:xfrm>
-            <a:off x="1051555" y="1371600"/>
-            <a:ext cx="10058409" cy="4480560"/>
+            <a:off x="1057046" y="1371600"/>
+            <a:ext cx="10047428" cy="4197096"/>
           </a:xfrm>
           <a:prstGeom prst="rect">
             <a:avLst/>
@@ -15257,12 +15257,12 @@
         </p:nvSpPr>
         <p:spPr>
           <a:xfrm>
-            <a:off x="502920" y="5925312"/>
-            <a:ext cx="11155680" cy="658368"/>
+            <a:off x="502920" y="5669280"/>
+            <a:ext cx="11155680" cy="731520"/>
           </a:xfrm>
           <a:prstGeom prst="roundRect">
             <a:avLst>
-              <a:gd name="adj" fmla="val 11111"/>
+              <a:gd name="adj" fmla="val 10000"/>
             </a:avLst>
           </a:prstGeom>
           <a:solidFill>
@@ -15279,8 +15279,8 @@
         </p:nvSpPr>
         <p:spPr>
           <a:xfrm>
-            <a:off x="777240" y="5989320"/>
-            <a:ext cx="10607040" cy="548640"/>
+            <a:off x="777240" y="5742432"/>
+            <a:ext cx="10607040" cy="603504"/>
           </a:xfrm>
           <a:prstGeom prst="rect">
             <a:avLst/>
@@ -15299,7 +15299,7 @@
               <a:buNone/>
             </a:pPr>
             <a:r>
-              <a:rPr lang="en-US" sz="1450" dirty="0">
+              <a:rPr lang="en-US" sz="1550" dirty="0">
                 <a:solidFill>
                   <a:srgbClr val="1A1A1A"/>
                 </a:solidFill>
@@ -15309,7 +15309,7 @@
               </a:rPr>
               <a:t>The 0.888 reference was rank 1 of 5 and sits +1.6 sd above its own distribution. The gap does not shrink — it vanishes and marginally reverses. §5f retracted; experiments #8 and #13 were hunting the mechanism of a non-effect.</a:t>
             </a:r>
-            <a:endParaRPr lang="en-US" sz="1450" dirty="0"/>
+            <a:endParaRPr lang="en-US" sz="1550" dirty="0"/>
           </a:p>
         </p:txBody>
       </p:sp>
@@ -16275,8 +16275,8 @@
         </p:blipFill>
         <p:spPr>
           <a:xfrm>
-            <a:off x="1051555" y="1371600"/>
-            <a:ext cx="10058409" cy="4480560"/>
+            <a:off x="1057046" y="1371600"/>
+            <a:ext cx="10047428" cy="4197096"/>
           </a:xfrm>
           <a:prstGeom prst="rect">
             <a:avLst/>
@@ -16291,12 +16291,12 @@
         </p:nvSpPr>
         <p:spPr>
           <a:xfrm>
-            <a:off x="502920" y="5925312"/>
-            <a:ext cx="5532120" cy="658368"/>
+            <a:off x="502920" y="5669280"/>
+            <a:ext cx="5532120" cy="731520"/>
           </a:xfrm>
           <a:prstGeom prst="roundRect">
             <a:avLst>
-              <a:gd name="adj" fmla="val 11111"/>
+              <a:gd name="adj" fmla="val 10000"/>
             </a:avLst>
           </a:prstGeom>
           <a:solidFill>
@@ -16313,8 +16313,8 @@
         </p:nvSpPr>
         <p:spPr>
           <a:xfrm>
-            <a:off x="731520" y="5980176"/>
-            <a:ext cx="5074920" cy="566928"/>
+            <a:off x="731520" y="5724144"/>
+            <a:ext cx="5074920" cy="621792"/>
           </a:xfrm>
           <a:prstGeom prst="rect">
             <a:avLst/>
@@ -16355,12 +16355,12 @@
         </p:nvSpPr>
         <p:spPr>
           <a:xfrm>
-            <a:off x="6309360" y="5925312"/>
-            <a:ext cx="5349240" cy="658368"/>
+            <a:off x="6309360" y="5669280"/>
+            <a:ext cx="5349240" cy="731520"/>
           </a:xfrm>
           <a:prstGeom prst="roundRect">
             <a:avLst>
-              <a:gd name="adj" fmla="val 11111"/>
+              <a:gd name="adj" fmla="val 10000"/>
             </a:avLst>
           </a:prstGeom>
           <a:solidFill>
@@ -16377,8 +16377,8 @@
         </p:nvSpPr>
         <p:spPr>
           <a:xfrm>
-            <a:off x="6537960" y="5980176"/>
-            <a:ext cx="4892040" cy="566928"/>
+            <a:off x="6537960" y="5724144"/>
+            <a:ext cx="4892040" cy="621792"/>
           </a:xfrm>
           <a:prstGeom prst="rect">
             <a:avLst/>
@@ -17550,12 +17550,12 @@
         </p:nvSpPr>
         <p:spPr>
           <a:xfrm>
-            <a:off x="502920" y="5687568"/>
-            <a:ext cx="11155680" cy="749808"/>
+            <a:off x="502920" y="5696712"/>
+            <a:ext cx="11155680" cy="704088"/>
           </a:xfrm>
           <a:prstGeom prst="roundRect">
             <a:avLst>
-              <a:gd name="adj" fmla="val 9756"/>
+              <a:gd name="adj" fmla="val 10390"/>
             </a:avLst>
           </a:prstGeom>
           <a:solidFill>
@@ -17573,7 +17573,7 @@
         <p:spPr>
           <a:xfrm>
             <a:off x="777240" y="5760720"/>
-            <a:ext cx="10607040" cy="621792"/>
+            <a:ext cx="10607040" cy="585216"/>
           </a:xfrm>
           <a:prstGeom prst="rect">
             <a:avLst/>
@@ -17771,8 +17771,8 @@
         </p:blipFill>
         <p:spPr>
           <a:xfrm>
-            <a:off x="1056710" y="1371600"/>
-            <a:ext cx="10048100" cy="4425696"/>
+            <a:off x="1057046" y="1371600"/>
+            <a:ext cx="10047428" cy="4197096"/>
           </a:xfrm>
           <a:prstGeom prst="rect">
             <a:avLst/>
@@ -17787,12 +17787,12 @@
         </p:nvSpPr>
         <p:spPr>
           <a:xfrm>
-            <a:off x="502920" y="5870448"/>
-            <a:ext cx="5532120" cy="621792"/>
+            <a:off x="502920" y="5669280"/>
+            <a:ext cx="5532120" cy="731520"/>
           </a:xfrm>
           <a:prstGeom prst="roundRect">
             <a:avLst>
-              <a:gd name="adj" fmla="val 11765"/>
+              <a:gd name="adj" fmla="val 10000"/>
             </a:avLst>
           </a:prstGeom>
           <a:solidFill>
@@ -17809,8 +17809,72 @@
         </p:nvSpPr>
         <p:spPr>
           <a:xfrm>
-            <a:off x="731520" y="5916168"/>
-            <a:ext cx="5074920" cy="530352"/>
+            <a:off x="731520" y="5724144"/>
+            <a:ext cx="5074920" cy="621792"/>
+          </a:xfrm>
+          <a:prstGeom prst="rect">
+            <a:avLst/>
+          </a:prstGeom>
+          <a:noFill/>
+          <a:ln/>
+        </p:spPr>
+        <p:txBody>
+          <a:bodyPr wrap="square" lIns="0" tIns="0" rIns="0" bIns="0" rtlCol="0" anchor="ctr"/>
+          <a:lstStyle/>
+          <a:p>
+            <a:pPr indent="0" marL="0">
+              <a:lnSpc>
+                <a:spcPts val="1700"/>
+              </a:lnSpc>
+              <a:buNone/>
+            </a:pPr>
+            <a:r>
+              <a:rPr lang="en-US" sz="1450" dirty="0">
+                <a:solidFill>
+                  <a:srgbClr val="1A1A1A"/>
+                </a:solidFill>
+                <a:latin typeface="Arial" pitchFamily="34" charset="0"/>
+                <a:ea typeface="Arial" pitchFamily="34" charset="-122"/>
+                <a:cs typeface="Arial" pitchFamily="34" charset="-120"/>
+              </a:rPr>
+              <a:t>Pooled across all five targets at 2 labels/class: +0.0012 ± 0.0162, p = 0.74. Dead even. What looked like a low-shot edge is just both methods sitting near chance.</a:t>
+            </a:r>
+            <a:endParaRPr lang="en-US" sz="1450" dirty="0"/>
+          </a:p>
+        </p:txBody>
+      </p:sp>
+      <p:sp>
+        <p:nvSpPr>
+          <p:cNvPr id="8" name="Shape 5"/>
+          <p:cNvSpPr/>
+          <p:nvPr/>
+        </p:nvSpPr>
+        <p:spPr>
+          <a:xfrm>
+            <a:off x="6309360" y="5669280"/>
+            <a:ext cx="5349240" cy="731520"/>
+          </a:xfrm>
+          <a:prstGeom prst="roundRect">
+            <a:avLst>
+              <a:gd name="adj" fmla="val 10000"/>
+            </a:avLst>
+          </a:prstGeom>
+          <a:solidFill>
+            <a:srgbClr val="EEF3F7"/>
+          </a:solidFill>
+          <a:ln/>
+        </p:spPr>
+      </p:sp>
+      <p:sp>
+        <p:nvSpPr>
+          <p:cNvPr id="9" name="Text 6"/>
+          <p:cNvSpPr/>
+          <p:nvPr/>
+        </p:nvSpPr>
+        <p:spPr>
+          <a:xfrm>
+            <a:off x="6537960" y="5724144"/>
+            <a:ext cx="4892040" cy="621792"/>
           </a:xfrm>
           <a:prstGeom prst="rect">
             <a:avLst/>
@@ -17829,7 +17893,7 @@
               <a:buNone/>
             </a:pPr>
             <a:r>
-              <a:rPr lang="en-US" sz="1400" dirty="0">
+              <a:rPr lang="en-US" sz="1450" dirty="0">
                 <a:solidFill>
                   <a:srgbClr val="1A1A1A"/>
                 </a:solidFill>
@@ -17837,73 +17901,9 @@
                 <a:ea typeface="Arial" pitchFamily="34" charset="-122"/>
                 <a:cs typeface="Arial" pitchFamily="34" charset="-120"/>
               </a:rPr>
-              <a:t>Pooled across all five targets at 2 labels/class: +0.0012 ± 0.0162, p = 0.74. Dead even. What looked like a low-shot edge is just both methods sitting near chance.</a:t>
-            </a:r>
-            <a:endParaRPr lang="en-US" sz="1400" dirty="0"/>
-          </a:p>
-        </p:txBody>
-      </p:sp>
-      <p:sp>
-        <p:nvSpPr>
-          <p:cNvPr id="8" name="Shape 5"/>
-          <p:cNvSpPr/>
-          <p:nvPr/>
-        </p:nvSpPr>
-        <p:spPr>
-          <a:xfrm>
-            <a:off x="6309360" y="5870448"/>
-            <a:ext cx="5349240" cy="621792"/>
-          </a:xfrm>
-          <a:prstGeom prst="roundRect">
-            <a:avLst>
-              <a:gd name="adj" fmla="val 11765"/>
-            </a:avLst>
-          </a:prstGeom>
-          <a:solidFill>
-            <a:srgbClr val="EEF3F7"/>
-          </a:solidFill>
-          <a:ln/>
-        </p:spPr>
-      </p:sp>
-      <p:sp>
-        <p:nvSpPr>
-          <p:cNvPr id="9" name="Text 6"/>
-          <p:cNvSpPr/>
-          <p:nvPr/>
-        </p:nvSpPr>
-        <p:spPr>
-          <a:xfrm>
-            <a:off x="6537960" y="5916168"/>
-            <a:ext cx="4892040" cy="530352"/>
-          </a:xfrm>
-          <a:prstGeom prst="rect">
-            <a:avLst/>
-          </a:prstGeom>
-          <a:noFill/>
-          <a:ln/>
-        </p:spPr>
-        <p:txBody>
-          <a:bodyPr wrap="square" lIns="0" tIns="0" rIns="0" bIns="0" rtlCol="0" anchor="ctr"/>
-          <a:lstStyle/>
-          <a:p>
-            <a:pPr indent="0" marL="0">
-              <a:lnSpc>
-                <a:spcPts val="1600"/>
-              </a:lnSpc>
-              <a:buNone/>
-            </a:pPr>
-            <a:r>
-              <a:rPr lang="en-US" sz="1400" dirty="0">
-                <a:solidFill>
-                  <a:srgbClr val="1A1A1A"/>
-                </a:solidFill>
-                <a:latin typeface="Arial" pitchFamily="34" charset="0"/>
-                <a:ea typeface="Arial" pitchFamily="34" charset="-122"/>
-                <a:cs typeface="Arial" pitchFamily="34" charset="-120"/>
-              </a:rPr>
               <a:t>And the deficit WIDENS with more labels (negative trend on 4 of 5) — the opposite of what transfer learning predicts.</a:t>
             </a:r>
-            <a:endParaRPr lang="en-US" sz="1400" dirty="0"/>
+            <a:endParaRPr lang="en-US" sz="1450" dirty="0"/>
           </a:p>
         </p:txBody>
       </p:sp>
@@ -24705,10 +24705,10 @@
           <a:p>
             <a:pPr marL="342900" indent="-342900">
               <a:lnSpc>
-                <a:spcPts val="1850"/>
+                <a:spcPts val="1900"/>
               </a:lnSpc>
               <a:spcAft>
-                <a:spcPts val="900"/>
+                <a:spcPts val="1500"/>
               </a:spcAft>
               <a:buSzPct val="100000"/>
               <a:buChar char="•"/>
@@ -24729,10 +24729,10 @@
           <a:p>
             <a:pPr marL="342900" indent="-342900">
               <a:lnSpc>
-                <a:spcPts val="1850"/>
+                <a:spcPts val="1900"/>
               </a:lnSpc>
               <a:spcAft>
-                <a:spcPts val="900"/>
+                <a:spcPts val="1500"/>
               </a:spcAft>
               <a:buSzPct val="100000"/>
               <a:buChar char="•"/>
@@ -24753,10 +24753,10 @@
           <a:p>
             <a:pPr marL="342900" indent="-342900">
               <a:lnSpc>
-                <a:spcPts val="1850"/>
+                <a:spcPts val="1900"/>
               </a:lnSpc>
               <a:spcAft>
-                <a:spcPts val="900"/>
+                <a:spcPts val="1500"/>
               </a:spcAft>
               <a:buSzPct val="100000"/>
               <a:buChar char="•"/>
@@ -24777,10 +24777,10 @@
           <a:p>
             <a:pPr marL="342900" indent="-342900">
               <a:lnSpc>
-                <a:spcPts val="1850"/>
+                <a:spcPts val="1900"/>
               </a:lnSpc>
               <a:spcAft>
-                <a:spcPts val="900"/>
+                <a:spcPts val="1500"/>
               </a:spcAft>
               <a:buSzPct val="100000"/>
               <a:buChar char="•"/>
@@ -24801,10 +24801,10 @@
           <a:p>
             <a:pPr marL="342900" indent="-342900">
               <a:lnSpc>
-                <a:spcPts val="1850"/>
+                <a:spcPts val="1900"/>
               </a:lnSpc>
               <a:spcAft>
-                <a:spcPts val="900"/>
+                <a:spcPts val="1500"/>
               </a:spcAft>
               <a:buSzPct val="100000"/>
               <a:buChar char="•"/>
@@ -31544,7 +31544,7 @@
         </p:blipFill>
         <p:spPr>
           <a:xfrm>
-            <a:off x="1051651" y="1389888"/>
+            <a:off x="1051651" y="1371600"/>
             <a:ext cx="10058217" cy="3703320"/>
           </a:xfrm>
           <a:prstGeom prst="rect">
@@ -31561,7 +31561,7 @@
         <p:spPr>
           <a:xfrm>
             <a:off x="502920" y="5138928"/>
-            <a:ext cx="11155680" cy="310896"/>
+            <a:ext cx="11155680" cy="292608"/>
           </a:xfrm>
           <a:prstGeom prst="rect">
             <a:avLst/>
@@ -31641,12 +31641,12 @@
         </p:nvSpPr>
         <p:spPr>
           <a:xfrm>
-            <a:off x="502920" y="5504688"/>
-            <a:ext cx="11155680" cy="841248"/>
+            <a:off x="502920" y="5541264"/>
+            <a:ext cx="11155680" cy="859536"/>
           </a:xfrm>
           <a:prstGeom prst="roundRect">
             <a:avLst>
-              <a:gd name="adj" fmla="val 8696"/>
+              <a:gd name="adj" fmla="val 8511"/>
             </a:avLst>
           </a:prstGeom>
           <a:solidFill>
@@ -31663,8 +31663,8 @@
         </p:nvSpPr>
         <p:spPr>
           <a:xfrm>
-            <a:off x="777240" y="5596128"/>
-            <a:ext cx="10607040" cy="676656"/>
+            <a:off x="777240" y="5605272"/>
+            <a:ext cx="10607040" cy="731520"/>
           </a:xfrm>
           <a:prstGeom prst="rect">
             <a:avLst/>
@@ -31871,12 +31871,12 @@
         </p:nvSpPr>
         <p:spPr>
           <a:xfrm>
-            <a:off x="502920" y="1517904"/>
-            <a:ext cx="6766560" cy="1152144"/>
+            <a:off x="502920" y="1481328"/>
+            <a:ext cx="6766560" cy="1316736"/>
           </a:xfrm>
           <a:prstGeom prst="roundRect">
             <a:avLst>
-              <a:gd name="adj" fmla="val 6349"/>
+              <a:gd name="adj" fmla="val 5556"/>
             </a:avLst>
           </a:prstGeom>
           <a:solidFill>
@@ -31893,7 +31893,7 @@
         </p:nvSpPr>
         <p:spPr>
           <a:xfrm>
-            <a:off x="777240" y="1627632"/>
+            <a:off x="777240" y="1609344"/>
             <a:ext cx="6217920" cy="329184"/>
           </a:xfrm>
           <a:prstGeom prst="rect">
@@ -31933,316 +31933,7 @@
         <p:spPr>
           <a:xfrm>
             <a:off x="777240" y="1975104"/>
-            <a:ext cx="6263640" cy="603504"/>
-          </a:xfrm>
-          <a:prstGeom prst="rect">
-            <a:avLst/>
-          </a:prstGeom>
-          <a:noFill/>
-          <a:ln/>
-        </p:spPr>
-        <p:txBody>
-          <a:bodyPr wrap="square" lIns="0" tIns="0" rIns="0" bIns="0" rtlCol="0" anchor="ctr"/>
-          <a:lstStyle/>
-          <a:p>
-            <a:pPr indent="0" marL="0">
-              <a:lnSpc>
-                <a:spcPts val="1850"/>
-              </a:lnSpc>
-              <a:buNone/>
-            </a:pPr>
-            <a:r>
-              <a:rPr lang="en-US" sz="1550" dirty="0">
-                <a:solidFill>
-                  <a:srgbClr val="1A1A1A"/>
-                </a:solidFill>
-                <a:latin typeface="Arial" pitchFamily="34" charset="0"/>
-                <a:ea typeface="Arial" pitchFamily="34" charset="-122"/>
-                <a:cs typeface="Arial" pitchFamily="34" charset="-120"/>
-              </a:rPr>
-              <a:t>Both tracks see exactly the same splits — LOOCV for Barth / MTBLS326, stratified 10-fold (seed 42) for the rest.</a:t>
-            </a:r>
-            <a:endParaRPr lang="en-US" sz="1550" dirty="0"/>
-          </a:p>
-        </p:txBody>
-      </p:sp>
-      <p:sp>
-        <p:nvSpPr>
-          <p:cNvPr id="8" name="Shape 6"/>
-          <p:cNvSpPr/>
-          <p:nvPr/>
-        </p:nvSpPr>
-        <p:spPr>
-          <a:xfrm>
-            <a:off x="502920" y="2834640"/>
-            <a:ext cx="6766560" cy="1152144"/>
-          </a:xfrm>
-          <a:prstGeom prst="roundRect">
-            <a:avLst>
-              <a:gd name="adj" fmla="val 6349"/>
-            </a:avLst>
-          </a:prstGeom>
-          <a:solidFill>
-            <a:srgbClr val="EEF3F7"/>
-          </a:solidFill>
-          <a:ln/>
-        </p:spPr>
-      </p:sp>
-      <p:sp>
-        <p:nvSpPr>
-          <p:cNvPr id="9" name="Text 7"/>
-          <p:cNvSpPr/>
-          <p:nvPr/>
-        </p:nvSpPr>
-        <p:spPr>
-          <a:xfrm>
-            <a:off x="777240" y="2944368"/>
-            <a:ext cx="6217920" cy="329184"/>
-          </a:xfrm>
-          <a:prstGeom prst="rect">
-            <a:avLst/>
-          </a:prstGeom>
-          <a:noFill/>
-          <a:ln/>
-        </p:spPr>
-        <p:txBody>
-          <a:bodyPr wrap="square" lIns="0" tIns="0" rIns="0" bIns="0" rtlCol="0" anchor="ctr"/>
-          <a:lstStyle/>
-          <a:p>
-            <a:pPr indent="0" marL="0">
-              <a:buNone/>
-            </a:pPr>
-            <a:r>
-              <a:rPr lang="en-US" sz="1800" b="1" dirty="0">
-                <a:solidFill>
-                  <a:srgbClr val="065A82"/>
-                </a:solidFill>
-                <a:latin typeface="Arial" pitchFamily="34" charset="0"/>
-                <a:ea typeface="Arial" pitchFamily="34" charset="-122"/>
-                <a:cs typeface="Arial" pitchFamily="34" charset="-120"/>
-              </a:rPr>
-              <a:t>Identical metric</a:t>
-            </a:r>
-            <a:endParaRPr lang="en-US" sz="1800" dirty="0"/>
-          </a:p>
-        </p:txBody>
-      </p:sp>
-      <p:sp>
-        <p:nvSpPr>
-          <p:cNvPr id="10" name="Text 8"/>
-          <p:cNvSpPr/>
-          <p:nvPr/>
-        </p:nvSpPr>
-        <p:spPr>
-          <a:xfrm>
-            <a:off x="777240" y="3291840"/>
-            <a:ext cx="6263640" cy="603504"/>
-          </a:xfrm>
-          <a:prstGeom prst="rect">
-            <a:avLst/>
-          </a:prstGeom>
-          <a:noFill/>
-          <a:ln/>
-        </p:spPr>
-        <p:txBody>
-          <a:bodyPr wrap="square" lIns="0" tIns="0" rIns="0" bIns="0" rtlCol="0" anchor="ctr"/>
-          <a:lstStyle/>
-          <a:p>
-            <a:pPr indent="0" marL="0">
-              <a:lnSpc>
-                <a:spcPts val="1850"/>
-              </a:lnSpc>
-              <a:buNone/>
-            </a:pPr>
-            <a:r>
-              <a:rPr lang="en-US" sz="1550" dirty="0">
-                <a:solidFill>
-                  <a:srgbClr val="1A1A1A"/>
-                </a:solidFill>
-                <a:latin typeface="Arial" pitchFamily="34" charset="0"/>
-                <a:ea typeface="Arial" pitchFamily="34" charset="-122"/>
-                <a:cs typeface="Arial" pitchFamily="34" charset="-120"/>
-              </a:rPr>
-              <a:t>Balanced accuracy everywhere, because several targets are imbalanced (Barth is 14 / 23).</a:t>
-            </a:r>
-            <a:endParaRPr lang="en-US" sz="1550" dirty="0"/>
-          </a:p>
-        </p:txBody>
-      </p:sp>
-      <p:sp>
-        <p:nvSpPr>
-          <p:cNvPr id="11" name="Shape 9"/>
-          <p:cNvSpPr/>
-          <p:nvPr/>
-        </p:nvSpPr>
-        <p:spPr>
-          <a:xfrm>
-            <a:off x="502920" y="4151376"/>
-            <a:ext cx="6766560" cy="1152144"/>
-          </a:xfrm>
-          <a:prstGeom prst="roundRect">
-            <a:avLst>
-              <a:gd name="adj" fmla="val 6349"/>
-            </a:avLst>
-          </a:prstGeom>
-          <a:solidFill>
-            <a:srgbClr val="EEF3F7"/>
-          </a:solidFill>
-          <a:ln/>
-        </p:spPr>
-      </p:sp>
-      <p:sp>
-        <p:nvSpPr>
-          <p:cNvPr id="12" name="Text 10"/>
-          <p:cNvSpPr/>
-          <p:nvPr/>
-        </p:nvSpPr>
-        <p:spPr>
-          <a:xfrm>
-            <a:off x="777240" y="4261104"/>
-            <a:ext cx="6217920" cy="329184"/>
-          </a:xfrm>
-          <a:prstGeom prst="rect">
-            <a:avLst/>
-          </a:prstGeom>
-          <a:noFill/>
-          <a:ln/>
-        </p:spPr>
-        <p:txBody>
-          <a:bodyPr wrap="square" lIns="0" tIns="0" rIns="0" bIns="0" rtlCol="0" anchor="ctr"/>
-          <a:lstStyle/>
-          <a:p>
-            <a:pPr indent="0" marL="0">
-              <a:buNone/>
-            </a:pPr>
-            <a:r>
-              <a:rPr lang="en-US" sz="1800" b="1" dirty="0">
-                <a:solidFill>
-                  <a:srgbClr val="065A82"/>
-                </a:solidFill>
-                <a:latin typeface="Arial" pitchFamily="34" charset="0"/>
-                <a:ea typeface="Arial" pitchFamily="34" charset="-122"/>
-                <a:cs typeface="Arial" pitchFamily="34" charset="-120"/>
-              </a:rPr>
-              <a:t>Both classifiers linear</a:t>
-            </a:r>
-            <a:endParaRPr lang="en-US" sz="1800" dirty="0"/>
-          </a:p>
-        </p:txBody>
-      </p:sp>
-      <p:sp>
-        <p:nvSpPr>
-          <p:cNvPr id="13" name="Text 11"/>
-          <p:cNvSpPr/>
-          <p:nvPr/>
-        </p:nvSpPr>
-        <p:spPr>
-          <a:xfrm>
-            <a:off x="777240" y="4608576"/>
-            <a:ext cx="6263640" cy="603504"/>
-          </a:xfrm>
-          <a:prstGeom prst="rect">
-            <a:avLst/>
-          </a:prstGeom>
-          <a:noFill/>
-          <a:ln/>
-        </p:spPr>
-        <p:txBody>
-          <a:bodyPr wrap="square" lIns="0" tIns="0" rIns="0" bIns="0" rtlCol="0" anchor="ctr"/>
-          <a:lstStyle/>
-          <a:p>
-            <a:pPr indent="0" marL="0">
-              <a:lnSpc>
-                <a:spcPts val="1850"/>
-              </a:lnSpc>
-              <a:buNone/>
-            </a:pPr>
-            <a:r>
-              <a:rPr lang="en-US" sz="1550" dirty="0">
-                <a:solidFill>
-                  <a:srgbClr val="1A1A1A"/>
-                </a:solidFill>
-                <a:latin typeface="Arial" pitchFamily="34" charset="0"/>
-                <a:ea typeface="Arial" pitchFamily="34" charset="-122"/>
-                <a:cs typeface="Arial" pitchFamily="34" charset="-120"/>
-              </a:rPr>
-              <a:t>Classical = StandardScaler → LogReg. SSL = frozen embedding → LogReg probe. So a difference is about the FEATURES, not the classifier.</a:t>
-            </a:r>
-            <a:endParaRPr lang="en-US" sz="1550" dirty="0"/>
-          </a:p>
-        </p:txBody>
-      </p:sp>
-      <p:sp>
-        <p:nvSpPr>
-          <p:cNvPr id="14" name="Shape 12"/>
-          <p:cNvSpPr/>
-          <p:nvPr/>
-        </p:nvSpPr>
-        <p:spPr>
-          <a:xfrm>
-            <a:off x="7543800" y="1517904"/>
-            <a:ext cx="4114800" cy="3877056"/>
-          </a:xfrm>
-          <a:prstGeom prst="roundRect">
-            <a:avLst>
-              <a:gd name="adj" fmla="val 1887"/>
-            </a:avLst>
-          </a:prstGeom>
-          <a:solidFill>
-            <a:srgbClr val="EBF5EE"/>
-          </a:solidFill>
-          <a:ln/>
-        </p:spPr>
-      </p:sp>
-      <p:sp>
-        <p:nvSpPr>
-          <p:cNvPr id="15" name="Text 13"/>
-          <p:cNvSpPr/>
-          <p:nvPr/>
-        </p:nvSpPr>
-        <p:spPr>
-          <a:xfrm>
-            <a:off x="7818120" y="1682496"/>
-            <a:ext cx="3611880" cy="347472"/>
-          </a:xfrm>
-          <a:prstGeom prst="rect">
-            <a:avLst/>
-          </a:prstGeom>
-          <a:noFill/>
-          <a:ln/>
-        </p:spPr>
-        <p:txBody>
-          <a:bodyPr wrap="square" lIns="0" tIns="0" rIns="0" bIns="0" rtlCol="0" anchor="ctr"/>
-          <a:lstStyle/>
-          <a:p>
-            <a:pPr indent="0" marL="0">
-              <a:buNone/>
-            </a:pPr>
-            <a:r>
-              <a:rPr lang="en-US" sz="1900" b="1" dirty="0">
-                <a:solidFill>
-                  <a:srgbClr val="1A7A3C"/>
-                </a:solidFill>
-                <a:latin typeface="Arial" pitchFamily="34" charset="0"/>
-                <a:ea typeface="Arial" pitchFamily="34" charset="-122"/>
-                <a:cs typeface="Arial" pitchFamily="34" charset="-120"/>
-              </a:rPr>
-              <a:t>The validation gate</a:t>
-            </a:r>
-            <a:endParaRPr lang="en-US" sz="1900" dirty="0"/>
-          </a:p>
-        </p:txBody>
-      </p:sp>
-      <p:sp>
-        <p:nvSpPr>
-          <p:cNvPr id="16" name="Text 14"/>
-          <p:cNvSpPr/>
-          <p:nvPr/>
-        </p:nvSpPr>
-        <p:spPr>
-          <a:xfrm>
-            <a:off x="7818120" y="2066544"/>
-            <a:ext cx="3611880" cy="914400"/>
+            <a:ext cx="6263640" cy="749808"/>
           </a:xfrm>
           <a:prstGeom prst="rect">
             <a:avLst/>
@@ -32269,7 +31960,7 @@
                 <a:ea typeface="Arial" pitchFamily="34" charset="-122"/>
                 <a:cs typeface="Arial" pitchFamily="34" charset="-120"/>
               </a:rPr>
-              <a:t>Before drawing any conclusion, the harness had to reproduce the committed classical numbers to 6 decimal places on all five targets:</a:t>
+              <a:t>Both tracks see exactly the same splits — LOOCV for Barth / MTBLS326, stratified 10-fold (seed 42) for the rest.</a:t>
             </a:r>
             <a:endParaRPr lang="en-US" sz="1550" dirty="0"/>
           </a:p>
@@ -32277,14 +31968,75 @@
       </p:sp>
       <p:sp>
         <p:nvSpPr>
-          <p:cNvPr id="17" name="Text 15"/>
-          <p:cNvSpPr/>
-          <p:nvPr/>
-        </p:nvSpPr>
-        <p:spPr>
-          <a:xfrm>
-            <a:off x="7818120" y="3017520"/>
-            <a:ext cx="2103120" cy="1463040"/>
+          <p:cNvPr id="8" name="Shape 6"/>
+          <p:cNvSpPr/>
+          <p:nvPr/>
+        </p:nvSpPr>
+        <p:spPr>
+          <a:xfrm>
+            <a:off x="502920" y="2962656"/>
+            <a:ext cx="6766560" cy="1316736"/>
+          </a:xfrm>
+          <a:prstGeom prst="roundRect">
+            <a:avLst>
+              <a:gd name="adj" fmla="val 5556"/>
+            </a:avLst>
+          </a:prstGeom>
+          <a:solidFill>
+            <a:srgbClr val="EEF3F7"/>
+          </a:solidFill>
+          <a:ln/>
+        </p:spPr>
+      </p:sp>
+      <p:sp>
+        <p:nvSpPr>
+          <p:cNvPr id="9" name="Text 7"/>
+          <p:cNvSpPr/>
+          <p:nvPr/>
+        </p:nvSpPr>
+        <p:spPr>
+          <a:xfrm>
+            <a:off x="777240" y="3090672"/>
+            <a:ext cx="6217920" cy="329184"/>
+          </a:xfrm>
+          <a:prstGeom prst="rect">
+            <a:avLst/>
+          </a:prstGeom>
+          <a:noFill/>
+          <a:ln/>
+        </p:spPr>
+        <p:txBody>
+          <a:bodyPr wrap="square" lIns="0" tIns="0" rIns="0" bIns="0" rtlCol="0" anchor="ctr"/>
+          <a:lstStyle/>
+          <a:p>
+            <a:pPr indent="0" marL="0">
+              <a:buNone/>
+            </a:pPr>
+            <a:r>
+              <a:rPr lang="en-US" sz="1800" b="1" dirty="0">
+                <a:solidFill>
+                  <a:srgbClr val="065A82"/>
+                </a:solidFill>
+                <a:latin typeface="Arial" pitchFamily="34" charset="0"/>
+                <a:ea typeface="Arial" pitchFamily="34" charset="-122"/>
+                <a:cs typeface="Arial" pitchFamily="34" charset="-120"/>
+              </a:rPr>
+              <a:t>Identical metric</a:t>
+            </a:r>
+            <a:endParaRPr lang="en-US" sz="1800" dirty="0"/>
+          </a:p>
+        </p:txBody>
+      </p:sp>
+      <p:sp>
+        <p:nvSpPr>
+          <p:cNvPr id="10" name="Text 8"/>
+          <p:cNvSpPr/>
+          <p:nvPr/>
+        </p:nvSpPr>
+        <p:spPr>
+          <a:xfrm>
+            <a:off x="777240" y="3456432"/>
+            <a:ext cx="6263640" cy="749808"/>
           </a:xfrm>
           <a:prstGeom prst="rect">
             <a:avLst/>
@@ -32298,67 +32050,255 @@
           <a:p>
             <a:pPr indent="0" marL="0">
               <a:lnSpc>
-                <a:spcPts val="2200"/>
+                <a:spcPts val="1900"/>
               </a:lnSpc>
               <a:buNone/>
             </a:pPr>
             <a:r>
-              <a:rPr lang="en-US" sz="1500" dirty="0">
-                <a:solidFill>
-                  <a:srgbClr val="21295C"/>
-                </a:solidFill>
-                <a:latin typeface="Arial" pitchFamily="34" charset="0"/>
-                <a:ea typeface="Arial" pitchFamily="34" charset="-122"/>
-                <a:cs typeface="Arial" pitchFamily="34" charset="-120"/>
-              </a:rPr>
-              <a:t>BrC-T2D cancer</a:t>
-            </a:r>
-            <a:endParaRPr lang="en-US" sz="1500" dirty="0"/>
-          </a:p>
+              <a:rPr lang="en-US" sz="1550" dirty="0">
+                <a:solidFill>
+                  <a:srgbClr val="1A1A1A"/>
+                </a:solidFill>
+                <a:latin typeface="Arial" pitchFamily="34" charset="0"/>
+                <a:ea typeface="Arial" pitchFamily="34" charset="-122"/>
+                <a:cs typeface="Arial" pitchFamily="34" charset="-120"/>
+              </a:rPr>
+              <a:t>Balanced accuracy everywhere, because several targets are imbalanced (Barth is 14 / 23).</a:t>
+            </a:r>
+            <a:endParaRPr lang="en-US" sz="1550" dirty="0"/>
+          </a:p>
+        </p:txBody>
+      </p:sp>
+      <p:sp>
+        <p:nvSpPr>
+          <p:cNvPr id="11" name="Shape 9"/>
+          <p:cNvSpPr/>
+          <p:nvPr/>
+        </p:nvSpPr>
+        <p:spPr>
+          <a:xfrm>
+            <a:off x="502920" y="4443984"/>
+            <a:ext cx="6766560" cy="1316736"/>
+          </a:xfrm>
+          <a:prstGeom prst="roundRect">
+            <a:avLst>
+              <a:gd name="adj" fmla="val 5556"/>
+            </a:avLst>
+          </a:prstGeom>
+          <a:solidFill>
+            <a:srgbClr val="EEF3F7"/>
+          </a:solidFill>
+          <a:ln/>
+        </p:spPr>
+      </p:sp>
+      <p:sp>
+        <p:nvSpPr>
+          <p:cNvPr id="12" name="Text 10"/>
+          <p:cNvSpPr/>
+          <p:nvPr/>
+        </p:nvSpPr>
+        <p:spPr>
+          <a:xfrm>
+            <a:off x="777240" y="4572000"/>
+            <a:ext cx="6217920" cy="329184"/>
+          </a:xfrm>
+          <a:prstGeom prst="rect">
+            <a:avLst/>
+          </a:prstGeom>
+          <a:noFill/>
+          <a:ln/>
+        </p:spPr>
+        <p:txBody>
+          <a:bodyPr wrap="square" lIns="0" tIns="0" rIns="0" bIns="0" rtlCol="0" anchor="ctr"/>
+          <a:lstStyle/>
+          <a:p>
+            <a:pPr indent="0" marL="0">
+              <a:buNone/>
+            </a:pPr>
+            <a:r>
+              <a:rPr lang="en-US" sz="1800" b="1" dirty="0">
+                <a:solidFill>
+                  <a:srgbClr val="065A82"/>
+                </a:solidFill>
+                <a:latin typeface="Arial" pitchFamily="34" charset="0"/>
+                <a:ea typeface="Arial" pitchFamily="34" charset="-122"/>
+                <a:cs typeface="Arial" pitchFamily="34" charset="-120"/>
+              </a:rPr>
+              <a:t>Both classifiers linear</a:t>
+            </a:r>
+            <a:endParaRPr lang="en-US" sz="1800" dirty="0"/>
+          </a:p>
+        </p:txBody>
+      </p:sp>
+      <p:sp>
+        <p:nvSpPr>
+          <p:cNvPr id="13" name="Text 11"/>
+          <p:cNvSpPr/>
+          <p:nvPr/>
+        </p:nvSpPr>
+        <p:spPr>
+          <a:xfrm>
+            <a:off x="777240" y="4937760"/>
+            <a:ext cx="6263640" cy="749808"/>
+          </a:xfrm>
+          <a:prstGeom prst="rect">
+            <a:avLst/>
+          </a:prstGeom>
+          <a:noFill/>
+          <a:ln/>
+        </p:spPr>
+        <p:txBody>
+          <a:bodyPr wrap="square" lIns="0" tIns="0" rIns="0" bIns="0" rtlCol="0" anchor="ctr"/>
+          <a:lstStyle/>
           <a:p>
             <a:pPr indent="0" marL="0">
               <a:lnSpc>
-                <a:spcPts val="2200"/>
+                <a:spcPts val="1900"/>
               </a:lnSpc>
               <a:buNone/>
             </a:pPr>
             <a:r>
-              <a:rPr lang="en-US" sz="1500" dirty="0">
-                <a:solidFill>
-                  <a:srgbClr val="21295C"/>
-                </a:solidFill>
-                <a:latin typeface="Arial" pitchFamily="34" charset="0"/>
-                <a:ea typeface="Arial" pitchFamily="34" charset="-122"/>
-                <a:cs typeface="Arial" pitchFamily="34" charset="-120"/>
-              </a:rPr>
-              <a:t>BrC-T2D diabetes</a:t>
-            </a:r>
-            <a:endParaRPr lang="en-US" sz="1500" dirty="0"/>
-          </a:p>
+              <a:rPr lang="en-US" sz="1550" dirty="0">
+                <a:solidFill>
+                  <a:srgbClr val="1A1A1A"/>
+                </a:solidFill>
+                <a:latin typeface="Arial" pitchFamily="34" charset="0"/>
+                <a:ea typeface="Arial" pitchFamily="34" charset="-122"/>
+                <a:cs typeface="Arial" pitchFamily="34" charset="-120"/>
+              </a:rPr>
+              <a:t>Classical = StandardScaler → LogReg. SSL = frozen embedding → LogReg probe. So a difference is about the FEATURES, not the classifier.</a:t>
+            </a:r>
+            <a:endParaRPr lang="en-US" sz="1550" dirty="0"/>
+          </a:p>
+        </p:txBody>
+      </p:sp>
+      <p:sp>
+        <p:nvSpPr>
+          <p:cNvPr id="14" name="Shape 12"/>
+          <p:cNvSpPr/>
+          <p:nvPr/>
+        </p:nvSpPr>
+        <p:spPr>
+          <a:xfrm>
+            <a:off x="7543800" y="1481328"/>
+            <a:ext cx="4114800" cy="4443984"/>
+          </a:xfrm>
+          <a:prstGeom prst="roundRect">
+            <a:avLst>
+              <a:gd name="adj" fmla="val 1778"/>
+            </a:avLst>
+          </a:prstGeom>
+          <a:solidFill>
+            <a:srgbClr val="EBF5EE"/>
+          </a:solidFill>
+          <a:ln/>
+        </p:spPr>
+      </p:sp>
+      <p:sp>
+        <p:nvSpPr>
+          <p:cNvPr id="15" name="Text 13"/>
+          <p:cNvSpPr/>
+          <p:nvPr/>
+        </p:nvSpPr>
+        <p:spPr>
+          <a:xfrm>
+            <a:off x="7818120" y="1645920"/>
+            <a:ext cx="3611880" cy="347472"/>
+          </a:xfrm>
+          <a:prstGeom prst="rect">
+            <a:avLst/>
+          </a:prstGeom>
+          <a:noFill/>
+          <a:ln/>
+        </p:spPr>
+        <p:txBody>
+          <a:bodyPr wrap="square" lIns="0" tIns="0" rIns="0" bIns="0" rtlCol="0" anchor="ctr"/>
+          <a:lstStyle/>
+          <a:p>
+            <a:pPr indent="0" marL="0">
+              <a:buNone/>
+            </a:pPr>
+            <a:r>
+              <a:rPr lang="en-US" sz="1900" b="1" dirty="0">
+                <a:solidFill>
+                  <a:srgbClr val="1A7A3C"/>
+                </a:solidFill>
+                <a:latin typeface="Arial" pitchFamily="34" charset="0"/>
+                <a:ea typeface="Arial" pitchFamily="34" charset="-122"/>
+                <a:cs typeface="Arial" pitchFamily="34" charset="-120"/>
+              </a:rPr>
+              <a:t>The validation gate</a:t>
+            </a:r>
+            <a:endParaRPr lang="en-US" sz="1900" dirty="0"/>
+          </a:p>
+        </p:txBody>
+      </p:sp>
+      <p:sp>
+        <p:nvSpPr>
+          <p:cNvPr id="16" name="Text 14"/>
+          <p:cNvSpPr/>
+          <p:nvPr/>
+        </p:nvSpPr>
+        <p:spPr>
+          <a:xfrm>
+            <a:off x="7818120" y="2048256"/>
+            <a:ext cx="3611880" cy="960120"/>
+          </a:xfrm>
+          <a:prstGeom prst="rect">
+            <a:avLst/>
+          </a:prstGeom>
+          <a:noFill/>
+          <a:ln/>
+        </p:spPr>
+        <p:txBody>
+          <a:bodyPr wrap="square" lIns="0" tIns="0" rIns="0" bIns="0" rtlCol="0" anchor="ctr"/>
+          <a:lstStyle/>
           <a:p>
             <a:pPr indent="0" marL="0">
               <a:lnSpc>
-                <a:spcPts val="2200"/>
+                <a:spcPts val="1900"/>
               </a:lnSpc>
               <a:buNone/>
             </a:pPr>
             <a:r>
-              <a:rPr lang="en-US" sz="1500" dirty="0">
-                <a:solidFill>
-                  <a:srgbClr val="21295C"/>
-                </a:solidFill>
-                <a:latin typeface="Arial" pitchFamily="34" charset="0"/>
-                <a:ea typeface="Arial" pitchFamily="34" charset="-122"/>
-                <a:cs typeface="Arial" pitchFamily="34" charset="-120"/>
-              </a:rPr>
-              <a:t>MTBLS563</a:t>
-            </a:r>
-            <a:endParaRPr lang="en-US" sz="1500" dirty="0"/>
-          </a:p>
+              <a:rPr lang="en-US" sz="1550" dirty="0">
+                <a:solidFill>
+                  <a:srgbClr val="1A1A1A"/>
+                </a:solidFill>
+                <a:latin typeface="Arial" pitchFamily="34" charset="0"/>
+                <a:ea typeface="Arial" pitchFamily="34" charset="-122"/>
+                <a:cs typeface="Arial" pitchFamily="34" charset="-120"/>
+              </a:rPr>
+              <a:t>Before drawing any conclusion, the harness had to reproduce the committed classical numbers to 6 decimal places on all five targets:</a:t>
+            </a:r>
+            <a:endParaRPr lang="en-US" sz="1550" dirty="0"/>
+          </a:p>
+        </p:txBody>
+      </p:sp>
+      <p:sp>
+        <p:nvSpPr>
+          <p:cNvPr id="17" name="Text 15"/>
+          <p:cNvSpPr/>
+          <p:nvPr/>
+        </p:nvSpPr>
+        <p:spPr>
+          <a:xfrm>
+            <a:off x="7818120" y="3127248"/>
+            <a:ext cx="2103120" cy="1600200"/>
+          </a:xfrm>
+          <a:prstGeom prst="rect">
+            <a:avLst/>
+          </a:prstGeom>
+          <a:noFill/>
+          <a:ln/>
+        </p:spPr>
+        <p:txBody>
+          <a:bodyPr wrap="square" lIns="0" tIns="0" rIns="0" bIns="0" rtlCol="0" anchor="ctr"/>
+          <a:lstStyle/>
           <a:p>
             <a:pPr indent="0" marL="0">
               <a:lnSpc>
-                <a:spcPts val="2200"/>
+                <a:spcPts val="2400"/>
               </a:lnSpc>
               <a:buNone/>
             </a:pPr>
@@ -32371,14 +32311,14 @@
                 <a:ea typeface="Arial" pitchFamily="34" charset="-122"/>
                 <a:cs typeface="Arial" pitchFamily="34" charset="-120"/>
               </a:rPr>
-              <a:t>MTBLS326</a:t>
+              <a:t>BrC-T2D cancer</a:t>
             </a:r>
             <a:endParaRPr lang="en-US" sz="1500" dirty="0"/>
           </a:p>
           <a:p>
             <a:pPr indent="0" marL="0">
               <a:lnSpc>
-                <a:spcPts val="2200"/>
+                <a:spcPts val="2400"/>
               </a:lnSpc>
               <a:buNone/>
             </a:pPr>
@@ -32391,6 +32331,66 @@
                 <a:ea typeface="Arial" pitchFamily="34" charset="-122"/>
                 <a:cs typeface="Arial" pitchFamily="34" charset="-120"/>
               </a:rPr>
+              <a:t>BrC-T2D diabetes</a:t>
+            </a:r>
+            <a:endParaRPr lang="en-US" sz="1500" dirty="0"/>
+          </a:p>
+          <a:p>
+            <a:pPr indent="0" marL="0">
+              <a:lnSpc>
+                <a:spcPts val="2400"/>
+              </a:lnSpc>
+              <a:buNone/>
+            </a:pPr>
+            <a:r>
+              <a:rPr lang="en-US" sz="1500" dirty="0">
+                <a:solidFill>
+                  <a:srgbClr val="21295C"/>
+                </a:solidFill>
+                <a:latin typeface="Arial" pitchFamily="34" charset="0"/>
+                <a:ea typeface="Arial" pitchFamily="34" charset="-122"/>
+                <a:cs typeface="Arial" pitchFamily="34" charset="-120"/>
+              </a:rPr>
+              <a:t>MTBLS563</a:t>
+            </a:r>
+            <a:endParaRPr lang="en-US" sz="1500" dirty="0"/>
+          </a:p>
+          <a:p>
+            <a:pPr indent="0" marL="0">
+              <a:lnSpc>
+                <a:spcPts val="2400"/>
+              </a:lnSpc>
+              <a:buNone/>
+            </a:pPr>
+            <a:r>
+              <a:rPr lang="en-US" sz="1500" dirty="0">
+                <a:solidFill>
+                  <a:srgbClr val="21295C"/>
+                </a:solidFill>
+                <a:latin typeface="Arial" pitchFamily="34" charset="0"/>
+                <a:ea typeface="Arial" pitchFamily="34" charset="-122"/>
+                <a:cs typeface="Arial" pitchFamily="34" charset="-120"/>
+              </a:rPr>
+              <a:t>MTBLS326</a:t>
+            </a:r>
+            <a:endParaRPr lang="en-US" sz="1500" dirty="0"/>
+          </a:p>
+          <a:p>
+            <a:pPr indent="0" marL="0">
+              <a:lnSpc>
+                <a:spcPts val="2400"/>
+              </a:lnSpc>
+              <a:buNone/>
+            </a:pPr>
+            <a:r>
+              <a:rPr lang="en-US" sz="1500" dirty="0">
+                <a:solidFill>
+                  <a:srgbClr val="21295C"/>
+                </a:solidFill>
+                <a:latin typeface="Arial" pitchFamily="34" charset="0"/>
+                <a:ea typeface="Arial" pitchFamily="34" charset="-122"/>
+                <a:cs typeface="Arial" pitchFamily="34" charset="-120"/>
+              </a:rPr>
               <a:t>Barth</a:t>
             </a:r>
             <a:endParaRPr lang="en-US" sz="1500" dirty="0"/>
@@ -32405,8 +32405,8 @@
         </p:nvSpPr>
         <p:spPr>
           <a:xfrm>
-            <a:off x="9921240" y="3017520"/>
-            <a:ext cx="1508760" cy="1463040"/>
+            <a:off x="9921240" y="3127248"/>
+            <a:ext cx="1508760" cy="1600200"/>
           </a:xfrm>
           <a:prstGeom prst="rect">
             <a:avLst/>
@@ -32527,8 +32527,8 @@
         </p:nvSpPr>
         <p:spPr>
           <a:xfrm>
-            <a:off x="7818120" y="4590288"/>
-            <a:ext cx="3611880" cy="658368"/>
+            <a:off x="7818120" y="4864608"/>
+            <a:ext cx="3611880" cy="914400"/>
           </a:xfrm>
           <a:prstGeom prst="rect">
             <a:avLst/>

--- a/docs/Group_Meeting_2026-08-10.pptx
+++ b/docs/Group_Meeting_2026-08-10.pptx
@@ -14109,7 +14109,7 @@
                 <a:ea typeface="Arial" pitchFamily="34" charset="-122"/>
                 <a:cs typeface="Arial" pitchFamily="34" charset="-120"/>
               </a:rPr>
-              <a:t>Finer patches lost on 0 of 5 wins. Both arms were worse.</a:t>
+              <a:t>Finer patches won 0 of 5 targets — both arms were worse.</a:t>
             </a:r>
             <a:endParaRPr lang="en-US" sz="1650" dirty="0"/>
           </a:p>

--- a/docs/Group_Meeting_2026-08-10.pptx
+++ b/docs/Group_Meeting_2026-08-10.pptx
@@ -7055,8 +7055,8 @@
         </p:nvSpPr>
         <p:spPr>
           <a:xfrm>
-            <a:off x="502920" y="5870448"/>
-            <a:ext cx="11155680" cy="512064"/>
+            <a:off x="502920" y="5961888"/>
+            <a:ext cx="11155680" cy="475488"/>
           </a:xfrm>
           <a:prstGeom prst="rect">
             <a:avLst/>
@@ -16629,8 +16629,8 @@
         </p:nvSpPr>
         <p:spPr>
           <a:xfrm>
-            <a:off x="777240" y="1993392"/>
-            <a:ext cx="4937760" cy="1325880"/>
+            <a:off x="777240" y="1956816"/>
+            <a:ext cx="4937760" cy="1371600"/>
           </a:xfrm>
           <a:prstGeom prst="rect">
             <a:avLst/>
@@ -16644,12 +16644,12 @@
           <a:p>
             <a:pPr indent="0" marL="0">
               <a:lnSpc>
-                <a:spcPts val="1900"/>
+                <a:spcPts val="1800"/>
               </a:lnSpc>
               <a:buNone/>
             </a:pPr>
             <a:r>
-              <a:rPr lang="en-US" sz="1550" dirty="0">
+              <a:rPr lang="en-US" sz="1500" dirty="0">
                 <a:solidFill>
                   <a:srgbClr val="1A1A1A"/>
                 </a:solidFill>
@@ -16659,7 +16659,7 @@
               </a:rPr>
               <a:t>Training writes a "best so far" checkpoint continuously. Evaluate one mid-run and you get a real-looking number for a model that was still training. It happened three times — including once when I claimed --seed was broken on GPU, because I compared a mid-training checkpoint against a finished one.</a:t>
             </a:r>
-            <a:endParaRPr lang="en-US" sz="1550" dirty="0"/>
+            <a:endParaRPr lang="en-US" sz="1500" dirty="0"/>
           </a:p>
         </p:txBody>
       </p:sp>
@@ -18188,7 +18188,7 @@
                 <a:gridCol w="1051560"/>
                 <a:gridCol w="1051560"/>
               </a:tblGrid>
-              <a:tr h="306324">
+              <a:tr h="288036">
                 <a:tc>
                   <a:txBody>
                     <a:bodyPr/>
@@ -18614,7 +18614,7 @@
                   </a:tcPr>
                 </a:tc>
               </a:tr>
-              <a:tr h="306324">
+              <a:tr h="288036">
                 <a:tc>
                   <a:txBody>
                     <a:bodyPr/>
@@ -18956,7 +18956,7 @@
                   </a:tcPr>
                 </a:tc>
               </a:tr>
-              <a:tr h="306324">
+              <a:tr h="288036">
                 <a:tc>
                   <a:txBody>
                     <a:bodyPr/>
@@ -19298,7 +19298,7 @@
                   </a:tcPr>
                 </a:tc>
               </a:tr>
-              <a:tr h="306324">
+              <a:tr h="288036">
                 <a:tc>
                   <a:txBody>
                     <a:bodyPr/>
@@ -19640,7 +19640,7 @@
                   </a:tcPr>
                 </a:tc>
               </a:tr>
-              <a:tr h="306324">
+              <a:tr h="288036">
                 <a:tc>
                   <a:txBody>
                     <a:bodyPr/>
@@ -19982,7 +19982,7 @@
                   </a:tcPr>
                 </a:tc>
               </a:tr>
-              <a:tr h="306324">
+              <a:tr h="288036">
                 <a:tc>
                   <a:txBody>
                     <a:bodyPr/>
@@ -20324,7 +20324,7 @@
                   </a:tcPr>
                 </a:tc>
               </a:tr>
-              <a:tr h="306324">
+              <a:tr h="288036">
                 <a:tc>
                   <a:txBody>
                     <a:bodyPr/>
@@ -20678,12 +20678,12 @@
         </p:nvSpPr>
         <p:spPr>
           <a:xfrm>
-            <a:off x="502920" y="4133088"/>
-            <a:ext cx="11155680" cy="1078992"/>
+            <a:off x="502920" y="4169664"/>
+            <a:ext cx="11155680" cy="1060704"/>
           </a:xfrm>
           <a:prstGeom prst="roundRect">
             <a:avLst>
-              <a:gd name="adj" fmla="val 6780"/>
+              <a:gd name="adj" fmla="val 6897"/>
             </a:avLst>
           </a:prstGeom>
           <a:solidFill>
@@ -20700,7 +20700,7 @@
         </p:nvSpPr>
         <p:spPr>
           <a:xfrm>
-            <a:off x="777240" y="4233672"/>
+            <a:off x="777240" y="4261104"/>
             <a:ext cx="10607040" cy="310896"/>
           </a:xfrm>
           <a:prstGeom prst="rect">
@@ -20739,7 +20739,7 @@
         </p:nvSpPr>
         <p:spPr>
           <a:xfrm>
-            <a:off x="777240" y="4562856"/>
+            <a:off x="777240" y="4590288"/>
             <a:ext cx="10607040" cy="585216"/>
           </a:xfrm>
           <a:prstGeom prst="rect">
@@ -22423,8 +22423,8 @@
         </p:nvSpPr>
         <p:spPr>
           <a:xfrm>
-            <a:off x="777240" y="5833872"/>
-            <a:ext cx="10607040" cy="512064"/>
+            <a:off x="777240" y="5760720"/>
+            <a:ext cx="10607040" cy="658368"/>
           </a:xfrm>
           <a:prstGeom prst="rect">
             <a:avLst/>
@@ -22440,7 +22440,7 @@
               <a:buNone/>
             </a:pPr>
             <a:r>
-              <a:rPr lang="en-US" sz="1650" b="1" dirty="0">
+              <a:rPr lang="en-US" sz="1600" b="1" dirty="0">
                 <a:solidFill>
                   <a:srgbClr val="FFFFFF"/>
                 </a:solidFill>
@@ -22450,7 +22450,7 @@
               </a:rPr>
               <a:t>The pattern: every surviving result is PAIRED — one fixed checkpoint, one thing varied. Every retracted result compared two separately-trained networks.</a:t>
             </a:r>
-            <a:endParaRPr lang="en-US" sz="1650" dirty="0"/>
+            <a:endParaRPr lang="en-US" sz="1600" dirty="0"/>
           </a:p>
         </p:txBody>
       </p:sp>
@@ -24441,7 +24441,7 @@
         </p:nvSpPr>
         <p:spPr>
           <a:xfrm>
-            <a:off x="914400" y="6108192"/>
+            <a:off x="914400" y="6236208"/>
             <a:ext cx="10332720" cy="320040"/>
           </a:xfrm>
           <a:prstGeom prst="rect">
@@ -29503,12 +29503,12 @@
         </p:nvSpPr>
         <p:spPr>
           <a:xfrm>
-            <a:off x="502920" y="3310128"/>
-            <a:ext cx="5440680" cy="2395728"/>
+            <a:off x="502920" y="3273552"/>
+            <a:ext cx="5440680" cy="2542032"/>
           </a:xfrm>
           <a:prstGeom prst="roundRect">
             <a:avLst>
-              <a:gd name="adj" fmla="val 3053"/>
+              <a:gd name="adj" fmla="val 2878"/>
             </a:avLst>
           </a:prstGeom>
           <a:solidFill>
@@ -29525,7 +29525,7 @@
         </p:nvSpPr>
         <p:spPr>
           <a:xfrm>
-            <a:off x="777240" y="3456432"/>
+            <a:off x="777240" y="3401568"/>
             <a:ext cx="4937760" cy="329184"/>
           </a:xfrm>
           <a:prstGeom prst="rect">
@@ -29564,8 +29564,8 @@
         </p:nvSpPr>
         <p:spPr>
           <a:xfrm>
-            <a:off x="777240" y="3822192"/>
-            <a:ext cx="4937760" cy="1828800"/>
+            <a:off x="777240" y="3785616"/>
+            <a:ext cx="4937760" cy="1883664"/>
           </a:xfrm>
           <a:prstGeom prst="rect">
             <a:avLst/>
@@ -29579,16 +29579,16 @@
           <a:p>
             <a:pPr marL="342900" indent="-342900">
               <a:lnSpc>
-                <a:spcPts val="1900"/>
+                <a:spcPts val="1800"/>
               </a:lnSpc>
               <a:spcAft>
-                <a:spcPts val="900"/>
+                <a:spcPts val="800"/>
               </a:spcAft>
               <a:buSzPct val="100000"/>
               <a:buChar char="•"/>
             </a:pPr>
             <a:r>
-              <a:rPr lang="en-US" sz="1550" dirty="0">
+              <a:rPr lang="en-US" sz="1500" dirty="0">
                 <a:solidFill>
                   <a:srgbClr val="1A1A1A"/>
                 </a:solidFill>
@@ -29598,21 +29598,21 @@
               </a:rPr>
               <a:t>Blood-collection tubes leave EDTA peaks that can dominate a spectrum and swamp the row normalisation.</a:t>
             </a:r>
-            <a:endParaRPr lang="en-US" sz="1550" dirty="0"/>
+            <a:endParaRPr lang="en-US" sz="1500" dirty="0"/>
           </a:p>
           <a:p>
             <a:pPr marL="342900" indent="-342900">
               <a:lnSpc>
-                <a:spcPts val="1900"/>
+                <a:spcPts val="1800"/>
               </a:lnSpc>
               <a:spcAft>
-                <a:spcPts val="900"/>
+                <a:spcPts val="800"/>
               </a:spcAft>
               <a:buSzPct val="100000"/>
               <a:buChar char="•"/>
             </a:pPr>
             <a:r>
-              <a:rPr lang="en-US" sz="1550" dirty="0">
+              <a:rPr lang="en-US" sz="1500" dirty="0">
                 <a:solidFill>
                   <a:srgbClr val="1A1A1A"/>
                 </a:solidFill>
@@ -29622,21 +29622,21 @@
               </a:rPr>
               <a:t>v3 → v4 fixed a genuine cutoff bug: the suppression was removing too much of the surrounding signal.</a:t>
             </a:r>
-            <a:endParaRPr lang="en-US" sz="1550" dirty="0"/>
+            <a:endParaRPr lang="en-US" sz="1500" dirty="0"/>
           </a:p>
           <a:p>
             <a:pPr marL="342900" indent="-342900">
               <a:lnSpc>
-                <a:spcPts val="1900"/>
+                <a:spcPts val="1800"/>
               </a:lnSpc>
               <a:spcAft>
-                <a:spcPts val="900"/>
+                <a:spcPts val="800"/>
               </a:spcAft>
               <a:buSzPct val="100000"/>
               <a:buChar char="•"/>
             </a:pPr>
             <a:r>
-              <a:rPr lang="en-US" sz="1550" dirty="0">
+              <a:rPr lang="en-US" sz="1500" dirty="0">
                 <a:solidFill>
                   <a:srgbClr val="1A1A1A"/>
                 </a:solidFill>
@@ -29646,7 +29646,7 @@
               </a:rPr>
               <a:t>7 rows repo-wide still retain a dominant EDTA peak — documented, not hidden.</a:t>
             </a:r>
-            <a:endParaRPr lang="en-US" sz="1550" dirty="0"/>
+            <a:endParaRPr lang="en-US" sz="1500" dirty="0"/>
           </a:p>
         </p:txBody>
       </p:sp>
@@ -29658,12 +29658,12 @@
         </p:nvSpPr>
         <p:spPr>
           <a:xfrm>
-            <a:off x="6217920" y="3310128"/>
-            <a:ext cx="5440680" cy="2395728"/>
+            <a:off x="6217920" y="3273552"/>
+            <a:ext cx="5440680" cy="2542032"/>
           </a:xfrm>
           <a:prstGeom prst="roundRect">
             <a:avLst>
-              <a:gd name="adj" fmla="val 3053"/>
+              <a:gd name="adj" fmla="val 2878"/>
             </a:avLst>
           </a:prstGeom>
           <a:solidFill>
@@ -29680,7 +29680,7 @@
         </p:nvSpPr>
         <p:spPr>
           <a:xfrm>
-            <a:off x="6492240" y="3456432"/>
+            <a:off x="6492240" y="3401568"/>
             <a:ext cx="4937760" cy="365760"/>
           </a:xfrm>
           <a:prstGeom prst="rect">
@@ -29719,8 +29719,8 @@
         </p:nvSpPr>
         <p:spPr>
           <a:xfrm>
-            <a:off x="6492240" y="3913632"/>
-            <a:ext cx="4937760" cy="1737360"/>
+            <a:off x="6492240" y="3785616"/>
+            <a:ext cx="4937760" cy="1883664"/>
           </a:xfrm>
           <a:prstGeom prst="rect">
             <a:avLst/>
@@ -31544,8 +31544,8 @@
         </p:blipFill>
         <p:spPr>
           <a:xfrm>
-            <a:off x="1051651" y="1371600"/>
-            <a:ext cx="10058217" cy="3703320"/>
+            <a:off x="1051638" y="1371600"/>
+            <a:ext cx="10058245" cy="3931920"/>
           </a:xfrm>
           <a:prstGeom prst="rect">
             <a:avLst/>
@@ -31560,8 +31560,8 @@
         </p:nvSpPr>
         <p:spPr>
           <a:xfrm>
-            <a:off x="502920" y="5138928"/>
-            <a:ext cx="11155680" cy="292608"/>
+            <a:off x="502920" y="5340096"/>
+            <a:ext cx="11155680" cy="274320"/>
           </a:xfrm>
           <a:prstGeom prst="rect">
             <a:avLst/>
@@ -31615,20 +31615,6 @@
               </a:rPr>
               <a:t>  on the hidden bins only</a:t>
             </a:r>
-            <a:pPr algn="ctr" indent="0" marL="0">
-              <a:buNone/>
-            </a:pPr>
-            <a:r>
-              <a:rPr lang="en-US" sz="1500" i="1" dirty="0">
-                <a:solidFill>
-                  <a:srgbClr val="5A6068"/>
-                </a:solidFill>
-                <a:latin typeface="Arial" pitchFamily="34" charset="0"/>
-                <a:ea typeface="Arial" pitchFamily="34" charset="-122"/>
-                <a:cs typeface="Arial" pitchFamily="34" charset="-120"/>
-              </a:rPr>
-              <a:t>     (whole-spectrum r = 0.979 — but that includes the 75% of bins the model was given)</a:t>
-            </a:r>
             <a:endParaRPr lang="en-US" sz="1500" dirty="0"/>
           </a:p>
         </p:txBody>
@@ -31641,12 +31627,12 @@
         </p:nvSpPr>
         <p:spPr>
           <a:xfrm>
-            <a:off x="502920" y="5541264"/>
-            <a:ext cx="11155680" cy="859536"/>
+            <a:off x="502920" y="5669280"/>
+            <a:ext cx="11155680" cy="731520"/>
           </a:xfrm>
           <a:prstGeom prst="roundRect">
             <a:avLst>
-              <a:gd name="adj" fmla="val 8511"/>
+              <a:gd name="adj" fmla="val 10000"/>
             </a:avLst>
           </a:prstGeom>
           <a:solidFill>
@@ -31663,8 +31649,8 @@
         </p:nvSpPr>
         <p:spPr>
           <a:xfrm>
-            <a:off x="777240" y="5605272"/>
-            <a:ext cx="10607040" cy="731520"/>
+            <a:off x="777240" y="5705856"/>
+            <a:ext cx="10607040" cy="658368"/>
           </a:xfrm>
           <a:prstGeom prst="rect">
             <a:avLst/>
@@ -31678,12 +31664,12 @@
           <a:p>
             <a:pPr indent="0" marL="0">
               <a:lnSpc>
-                <a:spcPts val="1900"/>
+                <a:spcPts val="1800"/>
               </a:lnSpc>
               <a:buNone/>
             </a:pPr>
             <a:r>
-              <a:rPr lang="en-US" sz="1550" b="1" dirty="0">
+              <a:rPr lang="en-US" sz="1500" b="1" dirty="0">
                 <a:solidFill>
                   <a:srgbClr val="C1435B"/>
                 </a:solidFill>
@@ -31695,12 +31681,12 @@
             </a:r>
             <a:pPr indent="0" marL="0">
               <a:lnSpc>
-                <a:spcPts val="1900"/>
+                <a:spcPts val="1800"/>
               </a:lnSpc>
               <a:buNone/>
             </a:pPr>
             <a:r>
-              <a:rPr lang="en-US" sz="1550" dirty="0">
+              <a:rPr lang="en-US" sz="1500" dirty="0">
                 <a:solidFill>
                   <a:srgbClr val="1A1A1A"/>
                 </a:solidFill>
@@ -31708,9 +31694,9 @@
                 <a:ea typeface="Arial" pitchFamily="34" charset="-122"/>
                 <a:cs typeface="Arial" pitchFamily="34" charset="-120"/>
               </a:rPr>
-              <a:t>the pretext task is genuinely solved well — and it still tells you almost nothing. Across five backbones, BETTER reconstruction went with WORSE transfer; our 2.3×-better-reconstructing model transferred 0.06 worse. So we never select a checkpoint, architecture or epoch on reconstruction loss.</a:t>
-            </a:r>
-            <a:endParaRPr lang="en-US" sz="1550" dirty="0"/>
+              <a:t>the pretext task is genuinely solved well — and it still tells you almost nothing. (February's r = 0.999 was whole-spectrum, which includes the 75% of bins the model is handed.) Across five backbones BETTER reconstruction went with WORSE transfer, so we never select a checkpoint, architecture or epoch on reconstruction loss.</a:t>
+            </a:r>
+            <a:endParaRPr lang="en-US" sz="1500" dirty="0"/>
           </a:p>
         </p:txBody>
       </p:sp>

--- a/docs/Group_Meeting_2026-08-10.pptx
+++ b/docs/Group_Meeting_2026-08-10.pptx
@@ -24441,8 +24441,8 @@
         </p:nvSpPr>
         <p:spPr>
           <a:xfrm>
-            <a:off x="914400" y="6236208"/>
-            <a:ext cx="10332720" cy="320040"/>
+            <a:off x="914400" y="6126480"/>
+            <a:ext cx="10332720" cy="292608"/>
           </a:xfrm>
           <a:prstGeom prst="rect">
             <a:avLst/>

--- a/docs/Group_Meeting_2026-08-10.pptx
+++ b/docs/Group_Meeting_2026-08-10.pptx
@@ -2573,7 +2573,15 @@
           <a:p>
             <a:r>
               <a:rPr lang="en-US" dirty="0"/>
-              <a:t>Priority 1 is the one I most want feedback on — it is the last strong argument for the backbone, and it is cheap because it needs no retraining.</a:t>
+              <a:t>This slide was reordered after the last group meeting's version — worth saying so.
+WHAT CHANGED AND WHY. The old priority 1 was 'cross-cohort transfer: train the probe on one cohort, test on another'. That was wrong on two counts and I am glad it was caught.
+(a) It conflated two different things. The 9,670-spectra pretraining is ALREADY unsupervised and already spans many cohorts — that part is done, and it is the sense in which the model is 'foundational'.
+(b) Read literally as supervised label transfer, it is not executable: Barth syndrome, MTBLS326 IP3R expression, MTBLS563 3-class diagnosis, cancer status and diabetes status are five different tasks with no shared label space. And BrC-T2D cancer and diabetes are the same spectra, so there are only 4 independent cohorts, not 5.
+WHAT REPLACED IT (experiment #20). Measuring the pretrain/eval distribution gap directly. Two results:
+- No leakage. Zero evaluation spectra have a near-duplicate anywhere in the pretraining corpus, so 'held-out' is accurate. Good news, and it needed checking after §19 found the corpus contains near-duplicates of itself.
+- But coverage is poor. Within-corpus median best match is 0.994; for Barth it is 0.78, MTBLS563 0.77, MTBLS326 0.68, BrC-T2D 0.37. The corpus is narrow, not merely small. That is why 'more of the same spectra' (the old priority 2) is now priority 4.
+Caveat if pressed: TBI Tirupati's number is even lower but its array never went through the v4 rowMinMax pipeline, so that one mixes a real gap with a preprocessing difference.
+Priority 1 and 2 are the two I want feedback on. They are also the two that would change the answer rather than further document the negative result.</a:t>
             </a:r>
             <a:endParaRPr lang="en-US" dirty="0"/>
           </a:p>
@@ -25288,7 +25296,7 @@
                 <a:ea typeface="Arial" pitchFamily="34" charset="-122"/>
                 <a:cs typeface="Arial" pitchFamily="34" charset="-120"/>
               </a:rPr>
-              <a:t>Ranked by what would actually change the answer</a:t>
+              <a:t>Re-ranked by what §18–§20 actually leave open</a:t>
             </a:r>
             <a:endParaRPr lang="en-US" sz="1700" dirty="0"/>
           </a:p>
@@ -25341,12 +25349,12 @@
         </p:nvSpPr>
         <p:spPr>
           <a:xfrm>
-            <a:off x="502920" y="1417320"/>
-            <a:ext cx="11155680" cy="1005840"/>
+            <a:off x="502920" y="1371600"/>
+            <a:ext cx="11155680" cy="969264"/>
           </a:xfrm>
           <a:prstGeom prst="roundRect">
             <a:avLst>
-              <a:gd name="adj" fmla="val 7273"/>
+              <a:gd name="adj" fmla="val 7547"/>
             </a:avLst>
           </a:prstGeom>
           <a:solidFill>
@@ -25363,8 +25371,8 @@
         </p:nvSpPr>
         <p:spPr>
           <a:xfrm>
-            <a:off x="713232" y="1691640"/>
-            <a:ext cx="512064" cy="512064"/>
+            <a:off x="713232" y="1627632"/>
+            <a:ext cx="475488" cy="475488"/>
           </a:xfrm>
           <a:prstGeom prst="ellipse">
             <a:avLst/>
@@ -25383,8 +25391,8 @@
         </p:nvSpPr>
         <p:spPr>
           <a:xfrm>
-            <a:off x="713232" y="1691640"/>
-            <a:ext cx="512064" cy="512064"/>
+            <a:off x="713232" y="1627632"/>
+            <a:ext cx="475488" cy="475488"/>
           </a:xfrm>
           <a:prstGeom prst="rect">
             <a:avLst/>
@@ -25400,7 +25408,7 @@
               <a:buNone/>
             </a:pPr>
             <a:r>
-              <a:rPr lang="en-US" sz="1800" b="1" dirty="0">
+              <a:rPr lang="en-US" sz="1700" b="1" dirty="0">
                 <a:solidFill>
                   <a:srgbClr val="FFFFFF"/>
                 </a:solidFill>
@@ -25410,7 +25418,7 @@
               </a:rPr>
               <a:t>1</a:t>
             </a:r>
-            <a:endParaRPr lang="en-US" sz="1800" dirty="0"/>
+            <a:endParaRPr lang="en-US" sz="1700" dirty="0"/>
           </a:p>
         </p:txBody>
       </p:sp>
@@ -25422,8 +25430,8 @@
         </p:nvSpPr>
         <p:spPr>
           <a:xfrm>
-            <a:off x="1389888" y="1490472"/>
-            <a:ext cx="10012680" cy="329184"/>
+            <a:off x="1353312" y="1426464"/>
+            <a:ext cx="10058400" cy="292608"/>
           </a:xfrm>
           <a:prstGeom prst="rect">
             <a:avLst/>
@@ -25439,7 +25447,7 @@
               <a:buNone/>
             </a:pPr>
             <a:r>
-              <a:rPr lang="en-US" sz="1750" b="1" dirty="0">
+              <a:rPr lang="en-US" sz="1650" b="1" dirty="0">
                 <a:solidFill>
                   <a:srgbClr val="1A7A3C"/>
                 </a:solidFill>
@@ -25447,9 +25455,9 @@
                 <a:ea typeface="Arial" pitchFamily="34" charset="-122"/>
                 <a:cs typeface="Arial" pitchFamily="34" charset="-120"/>
               </a:rPr>
-              <a:t>Cross-cohort transfer — the strongest untested case</a:t>
-            </a:r>
-            <a:endParaRPr lang="en-US" sz="1750" dirty="0"/>
+              <a:t>Widen the pretraining corpus — it does not cover our cohorts</a:t>
+            </a:r>
+            <a:endParaRPr lang="en-US" sz="1650" dirty="0"/>
           </a:p>
         </p:txBody>
       </p:sp>
@@ -25461,8 +25469,8 @@
         </p:nvSpPr>
         <p:spPr>
           <a:xfrm>
-            <a:off x="1389888" y="1783080"/>
-            <a:ext cx="10012680" cy="603504"/>
+            <a:off x="1353312" y="1700784"/>
+            <a:ext cx="10058400" cy="603504"/>
           </a:xfrm>
           <a:prstGeom prst="rect">
             <a:avLst/>
@@ -25476,12 +25484,12 @@
           <a:p>
             <a:pPr indent="0" marL="0">
               <a:lnSpc>
-                <a:spcPts val="1700"/>
+                <a:spcPts val="1550"/>
               </a:lnSpc>
               <a:buNone/>
             </a:pPr>
             <a:r>
-              <a:rPr lang="en-US" sz="1400" dirty="0">
+              <a:rPr lang="en-US" sz="1300" dirty="0">
                 <a:solidFill>
                   <a:srgbClr val="1A1A1A"/>
                 </a:solidFill>
@@ -25489,9 +25497,9 @@
                 <a:ea typeface="Arial" pitchFamily="34" charset="-122"/>
                 <a:cs typeface="Arial" pitchFamily="34" charset="-120"/>
               </a:rPr>
-              <a:t>Every evaluation so far is WITHIN a cohort. A foundation model's real selling point is generalising across instruments, sites and batches — exactly where absolute binned intensities should break down and a learned representation might not. Train the probe on one cohort, test on another. Cheap; we have 4 cohorts. If SSL wins anywhere, it is here.</a:t>
-            </a:r>
-            <a:endParaRPr lang="en-US" sz="1400" dirty="0"/>
+              <a:t>Not "more data" — DIFFERENT data. Within the corpus a spectrum's nearest neighbour sits at r = 0.99; for our evaluation cohorts the nearest corpus match is only r = 0.37–0.78. We pretrain on a narrow, 55%-redundant distribution and then test far outside it. Fold the eval-like cohorts (incl. the unused TBI Tirupati set) into pretraining, dedup near-duplicates, re-measure. Also confirms no leakage today — there is none.</a:t>
+            </a:r>
+            <a:endParaRPr lang="en-US" sz="1300" dirty="0"/>
           </a:p>
         </p:txBody>
       </p:sp>
@@ -25503,12 +25511,12 @@
         </p:nvSpPr>
         <p:spPr>
           <a:xfrm>
-            <a:off x="502920" y="2633472"/>
-            <a:ext cx="11155680" cy="1005840"/>
+            <a:off x="502920" y="2505456"/>
+            <a:ext cx="11155680" cy="969264"/>
           </a:xfrm>
           <a:prstGeom prst="roundRect">
             <a:avLst>
-              <a:gd name="adj" fmla="val 7273"/>
+              <a:gd name="adj" fmla="val 7547"/>
             </a:avLst>
           </a:prstGeom>
           <a:solidFill>
@@ -25525,8 +25533,8 @@
         </p:nvSpPr>
         <p:spPr>
           <a:xfrm>
-            <a:off x="713232" y="2907792"/>
-            <a:ext cx="512064" cy="512064"/>
+            <a:off x="713232" y="2761488"/>
+            <a:ext cx="475488" cy="475488"/>
           </a:xfrm>
           <a:prstGeom prst="ellipse">
             <a:avLst/>
@@ -25545,8 +25553,8 @@
         </p:nvSpPr>
         <p:spPr>
           <a:xfrm>
-            <a:off x="713232" y="2907792"/>
-            <a:ext cx="512064" cy="512064"/>
+            <a:off x="713232" y="2761488"/>
+            <a:ext cx="475488" cy="475488"/>
           </a:xfrm>
           <a:prstGeom prst="rect">
             <a:avLst/>
@@ -25562,7 +25570,7 @@
               <a:buNone/>
             </a:pPr>
             <a:r>
-              <a:rPr lang="en-US" sz="1800" b="1" dirty="0">
+              <a:rPr lang="en-US" sz="1700" b="1" dirty="0">
                 <a:solidFill>
                   <a:srgbClr val="FFFFFF"/>
                 </a:solidFill>
@@ -25572,7 +25580,7 @@
               </a:rPr>
               <a:t>2</a:t>
             </a:r>
-            <a:endParaRPr lang="en-US" sz="1800" dirty="0"/>
+            <a:endParaRPr lang="en-US" sz="1700" dirty="0"/>
           </a:p>
         </p:txBody>
       </p:sp>
@@ -25584,8 +25592,8 @@
         </p:nvSpPr>
         <p:spPr>
           <a:xfrm>
-            <a:off x="1389888" y="2706624"/>
-            <a:ext cx="10012680" cy="329184"/>
+            <a:off x="1353312" y="2560320"/>
+            <a:ext cx="10058400" cy="292608"/>
           </a:xfrm>
           <a:prstGeom prst="rect">
             <a:avLst/>
@@ -25601,7 +25609,7 @@
               <a:buNone/>
             </a:pPr>
             <a:r>
-              <a:rPr lang="en-US" sz="1750" b="1" dirty="0">
+              <a:rPr lang="en-US" sz="1650" b="1" dirty="0">
                 <a:solidFill>
                   <a:srgbClr val="065A82"/>
                 </a:solidFill>
@@ -25609,9 +25617,9 @@
                 <a:ea typeface="Arial" pitchFamily="34" charset="-122"/>
                 <a:cs typeface="Arial" pitchFamily="34" charset="-120"/>
               </a:rPr>
-              <a:t>Corpus scaling curve — upward this time</a:t>
-            </a:r>
-            <a:endParaRPr lang="en-US" sz="1750" dirty="0"/>
+              <a:t>Change the objective — reconstruction is nearly free</a:t>
+            </a:r>
+            <a:endParaRPr lang="en-US" sz="1650" dirty="0"/>
           </a:p>
         </p:txBody>
       </p:sp>
@@ -25623,8 +25631,8 @@
         </p:nvSpPr>
         <p:spPr>
           <a:xfrm>
-            <a:off x="1389888" y="2999232"/>
-            <a:ext cx="10012680" cy="603504"/>
+            <a:off x="1353312" y="2834640"/>
+            <a:ext cx="10058400" cy="603504"/>
           </a:xfrm>
           <a:prstGeom prst="rect">
             <a:avLst/>
@@ -25638,12 +25646,12 @@
           <a:p>
             <a:pPr indent="0" marL="0">
               <a:lnSpc>
-                <a:spcPts val="1700"/>
+                <a:spcPts val="1550"/>
               </a:lnSpc>
               <a:buNone/>
             </a:pPr>
             <a:r>
-              <a:rPr lang="en-US" sz="1400" dirty="0">
+              <a:rPr lang="en-US" sz="1300" dirty="0">
                 <a:solidFill>
                   <a:srgbClr val="1A1A1A"/>
                 </a:solidFill>
@@ -25651,9 +25659,9 @@
                 <a:ea typeface="Arial" pitchFamily="34" charset="-122"/>
                 <a:cs typeface="Arial" pitchFamily="34" charset="-120"/>
               </a:rPr>
-              <a:t>Pretrain at 25 / 50 / 100% of available spectra and see whether downstream utility is still climbing at 9,670. Flat ⇒ the objective is the problem. Rising ⇒ the answer is "needs 10–100× more data". Either is publishable and actionable. Needs ≥5 seeds per point (~23 GPU-h each).</a:t>
-            </a:r>
-            <a:endParaRPr lang="en-US" sz="1400" dirty="0"/>
+              <a:t>Slide 9: copy-a-neighbour already scores 0.90 on hidden bins. A loss dominated by the 5 components holding 86% of variance cannot be forced to encode disease. Try variance-normalised or peak-weighted reconstruction, or a contrastive objective, and judge it by whether the pretext task is actually HARD (baseline-relative), not by r.</a:t>
+            </a:r>
+            <a:endParaRPr lang="en-US" sz="1300" dirty="0"/>
           </a:p>
         </p:txBody>
       </p:sp>
@@ -25665,12 +25673,12 @@
         </p:nvSpPr>
         <p:spPr>
           <a:xfrm>
-            <a:off x="502920" y="3849624"/>
-            <a:ext cx="11155680" cy="1005840"/>
+            <a:off x="502920" y="3639312"/>
+            <a:ext cx="11155680" cy="969264"/>
           </a:xfrm>
           <a:prstGeom prst="roundRect">
             <a:avLst>
-              <a:gd name="adj" fmla="val 7273"/>
+              <a:gd name="adj" fmla="val 7547"/>
             </a:avLst>
           </a:prstGeom>
           <a:solidFill>
@@ -25687,8 +25695,8 @@
         </p:nvSpPr>
         <p:spPr>
           <a:xfrm>
-            <a:off x="713232" y="4123944"/>
-            <a:ext cx="512064" cy="512064"/>
+            <a:off x="713232" y="3895344"/>
+            <a:ext cx="475488" cy="475488"/>
           </a:xfrm>
           <a:prstGeom prst="ellipse">
             <a:avLst/>
@@ -25707,8 +25715,8 @@
         </p:nvSpPr>
         <p:spPr>
           <a:xfrm>
-            <a:off x="713232" y="4123944"/>
-            <a:ext cx="512064" cy="512064"/>
+            <a:off x="713232" y="3895344"/>
+            <a:ext cx="475488" cy="475488"/>
           </a:xfrm>
           <a:prstGeom prst="rect">
             <a:avLst/>
@@ -25724,7 +25732,7 @@
               <a:buNone/>
             </a:pPr>
             <a:r>
-              <a:rPr lang="en-US" sz="1800" b="1" dirty="0">
+              <a:rPr lang="en-US" sz="1700" b="1" dirty="0">
                 <a:solidFill>
                   <a:srgbClr val="FFFFFF"/>
                 </a:solidFill>
@@ -25734,7 +25742,7 @@
               </a:rPr>
               <a:t>3</a:t>
             </a:r>
-            <a:endParaRPr lang="en-US" sz="1800" dirty="0"/>
+            <a:endParaRPr lang="en-US" sz="1700" dirty="0"/>
           </a:p>
         </p:txBody>
       </p:sp>
@@ -25746,8 +25754,8 @@
         </p:nvSpPr>
         <p:spPr>
           <a:xfrm>
-            <a:off x="1389888" y="3922776"/>
-            <a:ext cx="10012680" cy="329184"/>
+            <a:off x="1353312" y="3694176"/>
+            <a:ext cx="10058400" cy="292608"/>
           </a:xfrm>
           <a:prstGeom prst="rect">
             <a:avLst/>
@@ -25763,7 +25771,7 @@
               <a:buNone/>
             </a:pPr>
             <a:r>
-              <a:rPr lang="en-US" sz="1750" b="1" dirty="0">
+              <a:rPr lang="en-US" sz="1650" b="1" dirty="0">
                 <a:solidFill>
                   <a:srgbClr val="B8860B"/>
                 </a:solidFill>
@@ -25773,7 +25781,7 @@
               </a:rPr>
               <a:t>MTBLS326 batch-confound audit</a:t>
             </a:r>
-            <a:endParaRPr lang="en-US" sz="1750" dirty="0"/>
+            <a:endParaRPr lang="en-US" sz="1650" dirty="0"/>
           </a:p>
         </p:txBody>
       </p:sp>
@@ -25785,8 +25793,8 @@
         </p:nvSpPr>
         <p:spPr>
           <a:xfrm>
-            <a:off x="1389888" y="4215384"/>
-            <a:ext cx="10012680" cy="603504"/>
+            <a:off x="1353312" y="3968496"/>
+            <a:ext cx="10058400" cy="603504"/>
           </a:xfrm>
           <a:prstGeom prst="rect">
             <a:avLst/>
@@ -25800,12 +25808,12 @@
           <a:p>
             <a:pPr indent="0" marL="0">
               <a:lnSpc>
-                <a:spcPts val="1700"/>
+                <a:spcPts val="1550"/>
               </a:lnSpc>
               <a:buNone/>
             </a:pPr>
             <a:r>
-              <a:rPr lang="en-US" sz="1400" dirty="0">
+              <a:rPr lang="en-US" sz="1300" dirty="0">
                 <a:solidFill>
                   <a:srgbClr val="1A1A1A"/>
                 </a:solidFill>
@@ -25813,9 +25821,9 @@
                 <a:ea typeface="Arial" pitchFamily="34" charset="-122"/>
                 <a:cs typeface="Arial" pitchFamily="34" charset="-120"/>
               </a:rPr>
-              <a:t>Still outstanding, cheap, and MTBLS326 is one of only two targets where SSL is competitive. Its perfect 1.000 on n=42 is unverified as biology rather than run-order artifact.</a:t>
-            </a:r>
-            <a:endParaRPr lang="en-US" sz="1400" dirty="0"/>
+              <a:t>Still outstanding, still cheap, and MTBLS326 is now one of only two targets where SSL is even competitive. Its perfect 1.000 on n=42 remains unverified as biology rather than a run-order artifact.</a:t>
+            </a:r>
+            <a:endParaRPr lang="en-US" sz="1300" dirty="0"/>
           </a:p>
         </p:txBody>
       </p:sp>
@@ -25827,12 +25835,12 @@
         </p:nvSpPr>
         <p:spPr>
           <a:xfrm>
-            <a:off x="502920" y="5065776"/>
-            <a:ext cx="11155680" cy="1005840"/>
+            <a:off x="502920" y="4773168"/>
+            <a:ext cx="11155680" cy="969264"/>
           </a:xfrm>
           <a:prstGeom prst="roundRect">
             <a:avLst>
-              <a:gd name="adj" fmla="val 7273"/>
+              <a:gd name="adj" fmla="val 7547"/>
             </a:avLst>
           </a:prstGeom>
           <a:solidFill>
@@ -25849,8 +25857,8 @@
         </p:nvSpPr>
         <p:spPr>
           <a:xfrm>
-            <a:off x="713232" y="5340096"/>
-            <a:ext cx="512064" cy="512064"/>
+            <a:off x="713232" y="5029200"/>
+            <a:ext cx="475488" cy="475488"/>
           </a:xfrm>
           <a:prstGeom prst="ellipse">
             <a:avLst/>
@@ -25869,8 +25877,8 @@
         </p:nvSpPr>
         <p:spPr>
           <a:xfrm>
-            <a:off x="713232" y="5340096"/>
-            <a:ext cx="512064" cy="512064"/>
+            <a:off x="713232" y="5029200"/>
+            <a:ext cx="475488" cy="475488"/>
           </a:xfrm>
           <a:prstGeom prst="rect">
             <a:avLst/>
@@ -25886,7 +25894,7 @@
               <a:buNone/>
             </a:pPr>
             <a:r>
-              <a:rPr lang="en-US" sz="1800" b="1" dirty="0">
+              <a:rPr lang="en-US" sz="1700" b="1" dirty="0">
                 <a:solidFill>
                   <a:srgbClr val="FFFFFF"/>
                 </a:solidFill>
@@ -25896,7 +25904,7 @@
               </a:rPr>
               <a:t>4</a:t>
             </a:r>
-            <a:endParaRPr lang="en-US" sz="1800" dirty="0"/>
+            <a:endParaRPr lang="en-US" sz="1700" dirty="0"/>
           </a:p>
         </p:txBody>
       </p:sp>
@@ -25908,8 +25916,8 @@
         </p:nvSpPr>
         <p:spPr>
           <a:xfrm>
-            <a:off x="1389888" y="5138928"/>
-            <a:ext cx="10012680" cy="329184"/>
+            <a:off x="1353312" y="4828032"/>
+            <a:ext cx="10058400" cy="292608"/>
           </a:xfrm>
           <a:prstGeom prst="rect">
             <a:avLst/>
@@ -25925,7 +25933,7 @@
               <a:buNone/>
             </a:pPr>
             <a:r>
-              <a:rPr lang="en-US" sz="1750" b="1" dirty="0">
+              <a:rPr lang="en-US" sz="1650" b="1" dirty="0">
                 <a:solidFill>
                   <a:srgbClr val="1C7293"/>
                 </a:solidFill>
@@ -25933,9 +25941,9 @@
                 <a:ea typeface="Arial" pitchFamily="34" charset="-122"/>
                 <a:cs typeface="Arial" pitchFamily="34" charset="-120"/>
               </a:rPr>
-              <a:t>Finish jigsaw / joint few-shot arms</a:t>
-            </a:r>
-            <a:endParaRPr lang="en-US" sz="1750" dirty="0"/>
+              <a:t>Corpus scaling curve — only after near-duplicate dedup</a:t>
+            </a:r>
+            <a:endParaRPr lang="en-US" sz="1650" dirty="0"/>
           </a:p>
         </p:txBody>
       </p:sp>
@@ -25947,8 +25955,8 @@
         </p:nvSpPr>
         <p:spPr>
           <a:xfrm>
-            <a:off x="1389888" y="5431536"/>
-            <a:ext cx="10012680" cy="603504"/>
+            <a:off x="1353312" y="5102352"/>
+            <a:ext cx="10058400" cy="603504"/>
           </a:xfrm>
           <a:prstGeom prst="rect">
             <a:avLst/>
@@ -25962,12 +25970,12 @@
           <a:p>
             <a:pPr indent="0" marL="0">
               <a:lnSpc>
-                <a:spcPts val="1700"/>
+                <a:spcPts val="1550"/>
               </a:lnSpc>
               <a:buNone/>
             </a:pPr>
             <a:r>
-              <a:rPr lang="en-US" sz="1400" dirty="0">
+              <a:rPr lang="en-US" sz="1300" dirty="0">
                 <a:solidFill>
                   <a:srgbClr val="1A1A1A"/>
                 </a:solidFill>
@@ -25975,9 +25983,9 @@
                 <a:ea typeface="Arial" pitchFamily="34" charset="-122"/>
                 <a:cs typeface="Arial" pitchFamily="34" charset="-120"/>
               </a:rPr>
-              <a:t>Running now. The random-init control already predicts they will be worse than masking, so this is completeness rather than discovery.</a:t>
-            </a:r>
-            <a:endParaRPr lang="en-US" sz="1400" dirty="0"/>
+              <a:t>Demoted. 55% of rows have a neighbour at r &gt; 0.99, so subsampling by row count does not subsample information: the curve would flatten for the wrong reason. Needs ≥5 seeds per point (~23 GPU-h each).</a:t>
+            </a:r>
+            <a:endParaRPr lang="en-US" sz="1300" dirty="0"/>
           </a:p>
         </p:txBody>
       </p:sp>
@@ -25989,19 +25997,78 @@
         </p:nvSpPr>
         <p:spPr>
           <a:xfrm>
-            <a:off x="502920" y="6236208"/>
-            <a:ext cx="11155680" cy="914"/>
+            <a:off x="502920" y="5925312"/>
+            <a:ext cx="11155680" cy="566928"/>
           </a:xfrm>
           <a:prstGeom prst="roundRect">
             <a:avLst>
-              <a:gd name="adj" fmla="val 8003501"/>
+              <a:gd name="adj" fmla="val 12903"/>
             </a:avLst>
           </a:prstGeom>
           <a:solidFill>
-            <a:srgbClr val="FFFFFF"/>
+            <a:srgbClr val="FBEEF1"/>
           </a:solidFill>
           <a:ln/>
         </p:spPr>
+      </p:sp>
+      <p:sp>
+        <p:nvSpPr>
+          <p:cNvPr id="26" name="Text 24"/>
+          <p:cNvSpPr/>
+          <p:nvPr/>
+        </p:nvSpPr>
+        <p:spPr>
+          <a:xfrm>
+            <a:off x="777240" y="5952744"/>
+            <a:ext cx="10607040" cy="512064"/>
+          </a:xfrm>
+          <a:prstGeom prst="rect">
+            <a:avLst/>
+          </a:prstGeom>
+          <a:noFill/>
+          <a:ln/>
+        </p:spPr>
+        <p:txBody>
+          <a:bodyPr wrap="square" lIns="0" tIns="0" rIns="0" bIns="0" rtlCol="0" anchor="ctr"/>
+          <a:lstStyle/>
+          <a:p>
+            <a:pPr indent="0" marL="0">
+              <a:lnSpc>
+                <a:spcPts val="1600"/>
+              </a:lnSpc>
+              <a:buNone/>
+            </a:pPr>
+            <a:r>
+              <a:rPr lang="en-US" sz="1350" b="1" dirty="0">
+                <a:solidFill>
+                  <a:srgbClr val="C1435B"/>
+                </a:solidFill>
+                <a:latin typeface="Arial" pitchFamily="34" charset="0"/>
+                <a:ea typeface="Arial" pitchFamily="34" charset="-122"/>
+                <a:cs typeface="Arial" pitchFamily="34" charset="-120"/>
+              </a:rPr>
+              <a:t>Dropped from this list:  </a:t>
+            </a:r>
+            <a:pPr indent="0" marL="0">
+              <a:lnSpc>
+                <a:spcPts val="1600"/>
+              </a:lnSpc>
+              <a:buNone/>
+            </a:pPr>
+            <a:r>
+              <a:rPr lang="en-US" sz="1350" dirty="0">
+                <a:solidFill>
+                  <a:srgbClr val="1A1A1A"/>
+                </a:solidFill>
+                <a:latin typeface="Arial" pitchFamily="34" charset="0"/>
+                <a:ea typeface="Arial" pitchFamily="34" charset="-122"/>
+                <a:cs typeface="Arial" pitchFamily="34" charset="-120"/>
+              </a:rPr>
+              <a:t>supervised cross-cohort transfer (train the probe on one cohort, test on another). All five targets are different diseases with no shared label space — it is not executable on the data we have, at any sample size.</a:t>
+            </a:r>
+            <a:endParaRPr lang="en-US" sz="1350" dirty="0"/>
+          </a:p>
+        </p:txBody>
       </p:sp>
     </p:spTree>
   </p:cSld>

--- a/docs/Group_Meeting_2026-08-10.pptx
+++ b/docs/Group_Meeting_2026-08-10.pptx
@@ -36,9 +36,10 @@
     <p:sldId id="284" r:id="rId30"/>
     <p:sldId id="285" r:id="rId31"/>
     <p:sldId id="286" r:id="rId32"/>
+    <p:sldId id="287" r:id="rId33"/>
   </p:sldIdLst>
   <p:notesMasterIdLst>
-    <p:notesMasterId r:id="rId33"/>
+    <p:notesMasterId r:id="rId34"/>
   </p:notesMasterIdLst>
   <p:sldSz cx="12192000" cy="6858000"/>
   <p:notesSz cx="6858000" cy="12192000"/>
@@ -1869,7 +1870,14 @@
           <a:p>
             <a:r>
               <a:rPr lang="en-US" dirty="0"/>
-              <a:t>Mention that all of this is now in a written lab record with the retractions kept in place rather than edited out, so the reasoning is auditable.</a:t>
+              <a:t>This closes the loop on the caveat from slide 5 — I flagged it as unverified, and it turned out badly.
+WHY THE PERMUTATION NULL MISSED IT. MTBLS326 clears a label-permutation null at p &lt;= 0.02, and that is worthless here: permuting the labels destroys the batch structure and the biology at the same time. A fully confounded dataset passes that test. This is the single most important methodological point on the slide.
+TEST 1, the design. The trailing number in each sample folder is the original experiment number. Cancer = 1 to 27, control = 101 to 130. Disjoint and contiguous, zero overlap. So instrument drift, shim quality, tube lot, storage time and reagent batch are ALL perfectly collinear with the label. Biology and batch are not separable in this dataset by any method at any sample size. That is a fact about the experiment, not about our analysis.
+TEST 2, the measurement. Serum CPMG has no metabolite resonances above 9.5 ppm or below -0.5 ppm. Using ONLY those regions — 17% of the spectrum, pure noise and baseline — a LogReg classifies the label at 0.726 with p &lt; 0.005 against a 200-permutation null. Biology cannot be visible there.
+THE CONTROL IS THE CLEVER BIT. The same noise features CANNOT predict early-versus-late acquisition within the cancer block (0.555, p = 0.28). So this is not smooth instrument drift — the noise separates the two BLOCKS specifically. Signature of two distinct acquisition sessions.
+One uncomfortable detail worth admitting: rowMinMax normalisation makes it WORSE. 0.726 normalised vs 0.641 un-normalised. Per-row min-max turns an absolute intensity offset into a noise-to-peak ratio, i.e. an SNR feature, which is exactly a technical quantity. Our own preprocessing made the confound more learnable.
+WHAT I DID NOT HAVE: the Bruker acqus DATE stamps, which would be definitive. The raw MTBLS326 folders are not on this machine. But test 1's verdict cannot change — the sample numbering is already disjoint.
+BOTTOM LINE, combining with the previous slide: Barth's win was a seed, MTBLS326 is confounded. On the three targets that remain admissible — MTBLS563 and the two BrC-T2D labels — the record is 0 wins, 3 losses, and those are the biggest cohorts with real error bars. This does NOT weaken the few-shot result; it removes a target that was making SSL look better than it is.</a:t>
             </a:r>
             <a:endParaRPr lang="en-US" dirty="0"/>
           </a:p>
@@ -1957,7 +1965,7 @@
           <a:p>
             <a:r>
               <a:rPr lang="en-US" dirty="0"/>
-              <a:t>This experiment was on the queue since July as #6. It is the one that actually tests what we set out to build.</a:t>
+              <a:t>Mention that all of this is now in a written lab record with the retractions kept in place rather than edited out, so the reasoning is auditable.</a:t>
             </a:r>
             <a:endParaRPr lang="en-US" dirty="0"/>
           </a:p>
@@ -2045,7 +2053,7 @@
           <a:p>
             <a:r>
               <a:rPr lang="en-US" dirty="0"/>
-              <a:t>Note one methodological fix that mattered: the few-shot classifiers still had the OLD hardcoded mean-pooling. Left alone, that would have handicapped SSL by 0.03-0.13 in exactly the experiment meant to favour it. We ported the pooling fix in first.</a:t>
+              <a:t>This experiment was on the queue since July as #6. It is the one that actually tests what we set out to build.</a:t>
             </a:r>
             <a:endParaRPr lang="en-US" dirty="0"/>
           </a:p>
@@ -2133,7 +2141,7 @@
           <a:p>
             <a:r>
               <a:rPr lang="en-US" dirty="0"/>
-              <a:t>Explain pairing plainly: for a fixed episode both models saw the same 4 training samples and the same test samples, so their difference removes the luck of the draw. Single-episode std is 0.07-0.15; the paired se is ~0.016.</a:t>
+              <a:t>Note one methodological fix that mattered: the few-shot classifiers still had the OLD hardcoded mean-pooling. Left alone, that would have handicapped SSL by 0.03-0.13 in exactly the experiment meant to favour it. We ported the pooling fix in first.</a:t>
             </a:r>
             <a:endParaRPr lang="en-US" dirty="0"/>
           </a:p>
@@ -2221,7 +2229,7 @@
           <a:p>
             <a:r>
               <a:rPr lang="en-US" dirty="0"/>
-              <a:t>I want to be seen trying to break my own negative result. If someone in the room has another way it could be an artifact, that is exactly the feedback I want.</a:t>
+              <a:t>Explain pairing plainly: for a fixed episode both models saw the same 4 training samples and the same test samples, so their difference removes the luck of the draw. Single-episode std is 0.07-0.15; the paired se is ~0.016.</a:t>
             </a:r>
             <a:endParaRPr lang="en-US" dirty="0"/>
           </a:p>
@@ -2309,7 +2317,7 @@
           <a:p>
             <a:r>
               <a:rPr lang="en-US" dirty="0"/>
-              <a:t>If there is one slide to remember, it is this one. The methodological pattern is cleaner than any individual result.</a:t>
+              <a:t>I want to be seen trying to break my own negative result. If someone in the room has another way it could be an artifact, that is exactly the feedback I want.</a:t>
             </a:r>
             <a:endParaRPr lang="en-US" dirty="0"/>
           </a:p>
@@ -2397,7 +2405,7 @@
           <a:p>
             <a:r>
               <a:rPr lang="en-US" dirty="0"/>
-              <a:t>Be direct here. I would rather bring the group an honest negative with good methodology than keep tuning until something crosses a threshold by chance.</a:t>
+              <a:t>If there is one slide to remember, it is this one. The methodological pattern is cleaner than any individual result.</a:t>
             </a:r>
             <a:endParaRPr lang="en-US" dirty="0"/>
           </a:p>
@@ -2573,15 +2581,7 @@
           <a:p>
             <a:r>
               <a:rPr lang="en-US" dirty="0"/>
-              <a:t>This slide was reordered after the last group meeting's version — worth saying so.
-WHAT CHANGED AND WHY. The old priority 1 was 'cross-cohort transfer: train the probe on one cohort, test on another'. That was wrong on two counts and I am glad it was caught.
-(a) It conflated two different things. The 9,670-spectra pretraining is ALREADY unsupervised and already spans many cohorts — that part is done, and it is the sense in which the model is 'foundational'.
-(b) Read literally as supervised label transfer, it is not executable: Barth syndrome, MTBLS326 IP3R expression, MTBLS563 3-class diagnosis, cancer status and diabetes status are five different tasks with no shared label space. And BrC-T2D cancer and diabetes are the same spectra, so there are only 4 independent cohorts, not 5.
-WHAT REPLACED IT (experiment #20). Measuring the pretrain/eval distribution gap directly. Two results:
-- No leakage. Zero evaluation spectra have a near-duplicate anywhere in the pretraining corpus, so 'held-out' is accurate. Good news, and it needed checking after §19 found the corpus contains near-duplicates of itself.
-- But coverage is poor. Within-corpus median best match is 0.994; for Barth it is 0.78, MTBLS563 0.77, MTBLS326 0.68, BrC-T2D 0.37. The corpus is narrow, not merely small. That is why 'more of the same spectra' (the old priority 2) is now priority 4.
-Caveat if pressed: TBI Tirupati's number is even lower but its array never went through the v4 rowMinMax pipeline, so that one mixes a real gap with a preprocessing difference.
-Priority 1 and 2 are the two I want feedback on. They are also the two that would change the answer rather than further document the negative result.</a:t>
+              <a:t>Be direct here. I would rather bring the group an honest negative with good methodology than keep tuning until something crosses a threshold by chance.</a:t>
             </a:r>
             <a:endParaRPr lang="en-US" dirty="0"/>
           </a:p>
@@ -2669,7 +2669,15 @@
           <a:p>
             <a:r>
               <a:rPr lang="en-US" dirty="0"/>
-              <a:t>Leave plenty of time here. The three questions are genuine — especially #2, since the scaling answer depends on data we may not have.</a:t>
+              <a:t>This slide was reordered after the last group meeting's version — worth saying so.
+WHAT CHANGED AND WHY. The old priority 1 was 'cross-cohort transfer: train the probe on one cohort, test on another'. That was wrong on two counts and I am glad it was caught.
+(a) It conflated two different things. The 9,670-spectra pretraining is ALREADY unsupervised and already spans many cohorts — that part is done, and it is the sense in which the model is 'foundational'.
+(b) Read literally as supervised label transfer, it is not executable: Barth syndrome, MTBLS326 IP3R expression, MTBLS563 3-class diagnosis, cancer status and diabetes status are five different tasks with no shared label space. And BrC-T2D cancer and diabetes are the same spectra, so there are only 4 independent cohorts, not 5.
+WHAT REPLACED IT (experiment #20). Measuring the pretrain/eval distribution gap directly. Two results:
+- No leakage. Zero evaluation spectra have a near-duplicate anywhere in the pretraining corpus, so 'held-out' is accurate. Good news, and it needed checking after §19 found the corpus contains near-duplicates of itself.
+- But coverage is poor. Within-corpus median best match is 0.994; for Barth it is 0.78, MTBLS563 0.77, MTBLS326 0.68, BrC-T2D 0.37. The corpus is narrow, not merely small. That is why 'more of the same spectra' (the old priority 2) is now priority 4.
+Caveat if pressed: TBI Tirupati's number is even lower but its array never went through the v4 rowMinMax pipeline, so that one mixes a real gap with a preprocessing difference.
+Priority 1 and 2 are the two I want feedback on. They are also the two that would change the answer rather than further document the negative result.</a:t>
             </a:r>
             <a:endParaRPr lang="en-US" dirty="0"/>
           </a:p>
@@ -2693,6 +2701,94 @@
             <a:fld id="{F7021451-1387-4CA6-816F-3879F97B5CBC}" type="slidenum">
               <a:rPr lang="en-US"/>
               <a:t>31</a:t>
+            </a:fld>
+            <a:endParaRPr lang="en-US"/>
+          </a:p>
+        </p:txBody>
+      </p:sp>
+    </p:spTree>
+    <p:extLst>
+      <p:ext uri="{BB962C8B-B14F-4D97-AF65-F5344CB8AC3E}">
+        <p14:creationId xmlns:p14="http://schemas.microsoft.com/office/powerpoint/2010/main" val="1024086991"/>
+      </p:ext>
+    </p:extLst>
+  </p:cSld>
+  <p:clrMapOvr>
+    <a:masterClrMapping/>
+  </p:clrMapOvr>
+</p:notes>
+</file>
+
+<file path=ppt/notesSlides/notesSlide32.xml><?xml version="1.0" encoding="utf-8"?>
+<p:notes xmlns:a="http://schemas.openxmlformats.org/drawingml/2006/main" xmlns:r="http://schemas.openxmlformats.org/officeDocument/2006/relationships" xmlns:p="http://schemas.openxmlformats.org/presentationml/2006/main">
+  <p:cSld>
+    <p:spTree>
+      <p:nvGrpSpPr>
+        <p:cNvPr id="1" name=""/>
+        <p:cNvGrpSpPr/>
+        <p:nvPr/>
+      </p:nvGrpSpPr>
+      <p:grpSpPr>
+        <a:xfrm>
+          <a:off x="0" y="0"/>
+          <a:ext cx="0" cy="0"/>
+          <a:chOff x="0" y="0"/>
+          <a:chExt cx="0" cy="0"/>
+        </a:xfrm>
+      </p:grpSpPr>
+      <p:sp>
+        <p:nvSpPr>
+          <p:cNvPr id="2" name="Slide Image Placeholder 1"/>
+          <p:cNvSpPr>
+            <a:spLocks noGrp="1" noRot="1" noChangeAspect="1"/>
+          </p:cNvSpPr>
+          <p:nvPr>
+            <p:ph type="sldImg"/>
+          </p:nvPr>
+        </p:nvSpPr>
+        <p:spPr/>
+      </p:sp>
+      <p:sp>
+        <p:nvSpPr>
+          <p:cNvPr id="3" name="Notes Placeholder 2"/>
+          <p:cNvSpPr>
+            <a:spLocks noGrp="1"/>
+          </p:cNvSpPr>
+          <p:nvPr>
+            <p:ph type="body" idx="1"/>
+          </p:nvPr>
+        </p:nvSpPr>
+        <p:spPr/>
+        <p:txBody>
+          <a:bodyPr/>
+          <a:lstStyle/>
+          <a:p>
+            <a:r>
+              <a:rPr lang="en-US" dirty="0"/>
+              <a:t>Leave plenty of time here. The three questions are genuine — especially #2, since the scaling answer depends on data we may not have.</a:t>
+            </a:r>
+            <a:endParaRPr lang="en-US" dirty="0"/>
+          </a:p>
+        </p:txBody>
+      </p:sp>
+      <p:sp>
+        <p:nvSpPr>
+          <p:cNvPr id="4" name="Slide Number Placeholder 3"/>
+          <p:cNvSpPr>
+            <a:spLocks noGrp="1"/>
+          </p:cNvSpPr>
+          <p:nvPr>
+            <p:ph type="sldNum" sz="quarter" idx="10"/>
+          </p:nvPr>
+        </p:nvSpPr>
+        <p:spPr/>
+        <p:txBody>
+          <a:bodyPr/>
+          <a:lstStyle/>
+          <a:p>
+            <a:fld id="{F7021451-1387-4CA6-816F-3879F97B5CBC}" type="slidenum">
+              <a:rPr lang="en-US"/>
+              <a:t>32</a:t>
             </a:fld>
             <a:endParaRPr lang="en-US"/>
           </a:p>
@@ -9720,7 +9816,7 @@
                       <a:r>
                         <a:rPr lang="en-US" sz="1600" b="1" dirty="0">
                           <a:solidFill>
-                            <a:srgbClr val="5A6068"/>
+                            <a:srgbClr val="C1435B"/>
                           </a:solidFill>
                           <a:latin typeface="Arial" pitchFamily="34" charset="0"/>
                           <a:ea typeface="Arial" pitchFamily="34" charset="-122"/>
@@ -9788,13 +9884,13 @@
                       <a:r>
                         <a:rPr lang="en-US" sz="1600" b="1" dirty="0">
                           <a:solidFill>
-                            <a:srgbClr val="5A6068"/>
+                            <a:srgbClr val="C1435B"/>
                           </a:solidFill>
                           <a:latin typeface="Arial" pitchFamily="34" charset="0"/>
                           <a:ea typeface="Arial" pitchFamily="34" charset="-122"/>
                           <a:cs typeface="Arial" pitchFamily="34" charset="-120"/>
                         </a:rPr>
-                        <a:t>tie</a:t>
+                        <a:t>confounded †</a:t>
                       </a:r>
                       <a:endParaRPr lang="en-US" sz="1600" dirty="0">
                         <a:latin typeface="Arial" charset="0"/>
@@ -11482,7 +11578,7 @@
                 <a:ea typeface="Arial" pitchFamily="34" charset="-122"/>
                 <a:cs typeface="Arial" pitchFamily="34" charset="-120"/>
               </a:rPr>
-              <a:t>* This is what we believed in June. The Barth win rests on ONE pretraining seed — it does not survive n=5. We come back to it.</a:t>
+              <a:t>* Barth's win rests on ONE pretraining seed — it does not survive n=5 (slide 22).   † MTBLS326 is confounded by acquisition batch (slide 23). Neither target survives.</a:t>
             </a:r>
             <a:endParaRPr lang="en-US" sz="1600" dirty="0"/>
           </a:p>
@@ -17778,7 +17874,7 @@
                 <a:ea typeface="Arial" pitchFamily="34" charset="-122"/>
                 <a:cs typeface="Arial" pitchFamily="34" charset="-120"/>
               </a:rPr>
-              <a:t>A fourth, more mundane failure — and the guardrails</a:t>
+              <a:t>And the other "good" target is confounded</a:t>
             </a:r>
             <a:endParaRPr lang="en-US" sz="3000" dirty="0"/>
           </a:p>
@@ -17817,7 +17913,7 @@
                 <a:ea typeface="Arial" pitchFamily="34" charset="-122"/>
                 <a:cs typeface="Arial" pitchFamily="34" charset="-120"/>
               </a:rPr>
-              <a:t>Three wrong numbers in this project came from the same cause</a:t>
+              <a:t>The batch audit we had been deferring since February — MTBLS326's perfect 1.000</a:t>
             </a:r>
             <a:endParaRPr lang="en-US" sz="1700" dirty="0"/>
           </a:p>
@@ -17862,20 +17958,44 @@
           </a:p>
         </p:txBody>
       </p:sp>
-      <p:sp>
-        <p:nvSpPr>
-          <p:cNvPr id="5" name="Shape 3"/>
-          <p:cNvSpPr/>
-          <p:nvPr/>
-        </p:nvSpPr>
-        <p:spPr>
-          <a:xfrm>
-            <a:off x="502920" y="1481328"/>
-            <a:ext cx="5440680" cy="1920240"/>
+      <p:pic>
+        <p:nvPicPr>
+          <p:cNvPr id="5" name="Image 0" descr="/home/nmrbox/0012/shasharma/Desktop/NMR_Metabolomics/docs/gm_figures/gm11_batch_audit.png">    </p:cNvPr>
+          <p:cNvPicPr>
+            <a:picLocks noChangeAspect="1"/>
+          </p:cNvPicPr>
+          <p:nvPr/>
+        </p:nvPicPr>
+        <p:blipFill>
+          <a:blip r:embed="rId1"/>
+          <a:stretch>
+            <a:fillRect/>
+          </a:stretch>
+        </p:blipFill>
+        <p:spPr>
+          <a:xfrm>
+            <a:off x="1051459" y="1353312"/>
+            <a:ext cx="10058601" cy="4224528"/>
+          </a:xfrm>
+          <a:prstGeom prst="rect">
+            <a:avLst/>
+          </a:prstGeom>
+        </p:spPr>
+      </p:pic>
+      <p:sp>
+        <p:nvSpPr>
+          <p:cNvPr id="6" name="Shape 3"/>
+          <p:cNvSpPr/>
+          <p:nvPr/>
+        </p:nvSpPr>
+        <p:spPr>
+          <a:xfrm>
+            <a:off x="502920" y="5687568"/>
+            <a:ext cx="5440680" cy="749808"/>
           </a:xfrm>
           <a:prstGeom prst="roundRect">
             <a:avLst>
-              <a:gd name="adj" fmla="val 3810"/>
+              <a:gd name="adj" fmla="val 9756"/>
             </a:avLst>
           </a:prstGeom>
           <a:solidFill>
@@ -17886,53 +18006,14 @@
       </p:sp>
       <p:sp>
         <p:nvSpPr>
-          <p:cNvPr id="6" name="Text 4"/>
-          <p:cNvSpPr/>
-          <p:nvPr/>
-        </p:nvSpPr>
-        <p:spPr>
-          <a:xfrm>
-            <a:off x="777240" y="1627632"/>
-            <a:ext cx="4937760" cy="329184"/>
-          </a:xfrm>
-          <a:prstGeom prst="rect">
-            <a:avLst/>
-          </a:prstGeom>
-          <a:noFill/>
-          <a:ln/>
-        </p:spPr>
-        <p:txBody>
-          <a:bodyPr wrap="square" lIns="0" tIns="0" rIns="0" bIns="0" rtlCol="0" anchor="ctr"/>
-          <a:lstStyle/>
-          <a:p>
-            <a:pPr indent="0" marL="0">
-              <a:buNone/>
-            </a:pPr>
-            <a:r>
-              <a:rPr lang="en-US" sz="1850" b="1" dirty="0">
-                <a:solidFill>
-                  <a:srgbClr val="C1435B"/>
-                </a:solidFill>
-                <a:latin typeface="Arial" pitchFamily="34" charset="0"/>
-                <a:ea typeface="Arial" pitchFamily="34" charset="-122"/>
-                <a:cs typeface="Arial" pitchFamily="34" charset="-120"/>
-              </a:rPr>
-              <a:t>Scoring unfinished checkpoints</a:t>
-            </a:r>
-            <a:endParaRPr lang="en-US" sz="1850" dirty="0"/>
-          </a:p>
-        </p:txBody>
-      </p:sp>
-      <p:sp>
-        <p:nvSpPr>
-          <p:cNvPr id="7" name="Text 5"/>
-          <p:cNvSpPr/>
-          <p:nvPr/>
-        </p:nvSpPr>
-        <p:spPr>
-          <a:xfrm>
-            <a:off x="777240" y="1956816"/>
-            <a:ext cx="4937760" cy="1371600"/>
+          <p:cNvPr id="7" name="Text 4"/>
+          <p:cNvSpPr/>
+          <p:nvPr/>
+        </p:nvSpPr>
+        <p:spPr>
+          <a:xfrm>
+            <a:off x="731520" y="5724144"/>
+            <a:ext cx="4992624" cy="676656"/>
           </a:xfrm>
           <a:prstGeom prst="rect">
             <a:avLst/>
@@ -17946,12 +18027,29 @@
           <a:p>
             <a:pPr indent="0" marL="0">
               <a:lnSpc>
-                <a:spcPts val="1800"/>
+                <a:spcPts val="1700"/>
               </a:lnSpc>
               <a:buNone/>
             </a:pPr>
             <a:r>
-              <a:rPr lang="en-US" sz="1500" dirty="0">
+              <a:rPr lang="en-US" sz="1450" b="1" dirty="0">
+                <a:solidFill>
+                  <a:srgbClr val="C1435B"/>
+                </a:solidFill>
+                <a:latin typeface="Arial" pitchFamily="34" charset="0"/>
+                <a:ea typeface="Arial" pitchFamily="34" charset="-122"/>
+                <a:cs typeface="Arial" pitchFamily="34" charset="-120"/>
+              </a:rPr>
+              <a:t>Confounded by design.  </a:t>
+            </a:r>
+            <a:pPr indent="0" marL="0">
+              <a:lnSpc>
+                <a:spcPts val="1700"/>
+              </a:lnSpc>
+              <a:buNone/>
+            </a:pPr>
+            <a:r>
+              <a:rPr lang="en-US" sz="1450" dirty="0">
                 <a:solidFill>
                   <a:srgbClr val="1A1A1A"/>
                 </a:solidFill>
@@ -17959,83 +18057,44 @@
                 <a:ea typeface="Arial" pitchFamily="34" charset="-122"/>
                 <a:cs typeface="Arial" pitchFamily="34" charset="-120"/>
               </a:rPr>
-              <a:t>Training writes a "best so far" checkpoint continuously. Evaluate one mid-run and you get a real-looking number for a model that was still training. It happened three times — including once when I claimed --seed was broken on GPU, because I compared a mid-training checkpoint against a finished one.</a:t>
-            </a:r>
-            <a:endParaRPr lang="en-US" sz="1500" dirty="0"/>
-          </a:p>
-        </p:txBody>
-      </p:sp>
-      <p:sp>
-        <p:nvSpPr>
-          <p:cNvPr id="8" name="Shape 6"/>
-          <p:cNvSpPr/>
-          <p:nvPr/>
-        </p:nvSpPr>
-        <p:spPr>
-          <a:xfrm>
-            <a:off x="6217920" y="1481328"/>
-            <a:ext cx="5440680" cy="1152144"/>
+              <a:t>Cases are samples 1–27, controls 101–130. Separate acquisition blocks, so every run-order variable predicts the label perfectly.</a:t>
+            </a:r>
+            <a:endParaRPr lang="en-US" sz="1450" dirty="0"/>
+          </a:p>
+        </p:txBody>
+      </p:sp>
+      <p:sp>
+        <p:nvSpPr>
+          <p:cNvPr id="8" name="Shape 5"/>
+          <p:cNvSpPr/>
+          <p:nvPr/>
+        </p:nvSpPr>
+        <p:spPr>
+          <a:xfrm>
+            <a:off x="6217920" y="5687568"/>
+            <a:ext cx="5440680" cy="749808"/>
           </a:xfrm>
           <a:prstGeom prst="roundRect">
             <a:avLst>
-              <a:gd name="adj" fmla="val 6349"/>
+              <a:gd name="adj" fmla="val 9756"/>
             </a:avLst>
           </a:prstGeom>
           <a:solidFill>
-            <a:srgbClr val="EBF5EE"/>
+            <a:srgbClr val="FBEEF1"/>
           </a:solidFill>
           <a:ln/>
         </p:spPr>
       </p:sp>
       <p:sp>
         <p:nvSpPr>
-          <p:cNvPr id="9" name="Text 7"/>
-          <p:cNvSpPr/>
-          <p:nvPr/>
-        </p:nvSpPr>
-        <p:spPr>
-          <a:xfrm>
-            <a:off x="6473952" y="1591056"/>
-            <a:ext cx="4937760" cy="310896"/>
-          </a:xfrm>
-          <a:prstGeom prst="rect">
-            <a:avLst/>
-          </a:prstGeom>
-          <a:noFill/>
-          <a:ln/>
-        </p:spPr>
-        <p:txBody>
-          <a:bodyPr wrap="square" lIns="0" tIns="0" rIns="0" bIns="0" rtlCol="0" anchor="ctr"/>
-          <a:lstStyle/>
-          <a:p>
-            <a:pPr indent="0" marL="0">
-              <a:buNone/>
-            </a:pPr>
-            <a:r>
-              <a:rPr lang="en-US" sz="1700" b="1" dirty="0">
-                <a:solidFill>
-                  <a:srgbClr val="1A7A3C"/>
-                </a:solidFill>
-                <a:latin typeface="Arial" pitchFamily="34" charset="0"/>
-                <a:ea typeface="Arial" pitchFamily="34" charset="-122"/>
-                <a:cs typeface="Arial" pitchFamily="34" charset="-120"/>
-              </a:rPr>
-              <a:t>Provenance stamp</a:t>
-            </a:r>
-            <a:endParaRPr lang="en-US" sz="1700" dirty="0"/>
-          </a:p>
-        </p:txBody>
-      </p:sp>
-      <p:sp>
-        <p:nvSpPr>
-          <p:cNvPr id="10" name="Text 8"/>
-          <p:cNvSpPr/>
-          <p:nvPr/>
-        </p:nvSpPr>
-        <p:spPr>
-          <a:xfrm>
-            <a:off x="6473952" y="1920240"/>
-            <a:ext cx="4956048" cy="640080"/>
+          <p:cNvPr id="9" name="Text 6"/>
+          <p:cNvSpPr/>
+          <p:nvPr/>
+        </p:nvSpPr>
+        <p:spPr>
+          <a:xfrm>
+            <a:off x="6446520" y="5724144"/>
+            <a:ext cx="4992624" cy="676656"/>
           </a:xfrm>
           <a:prstGeom prst="rect">
             <a:avLst/>
@@ -18049,115 +18108,29 @@
           <a:p>
             <a:pPr indent="0" marL="0">
               <a:lnSpc>
-                <a:spcPts val="1800"/>
+                <a:spcPts val="1700"/>
               </a:lnSpc>
               <a:buNone/>
             </a:pPr>
             <a:r>
-              <a:rPr lang="en-US" sz="1500" dirty="0">
-                <a:solidFill>
-                  <a:srgbClr val="1A1A1A"/>
-                </a:solidFill>
-                <a:latin typeface="Arial" pitchFamily="34" charset="0"/>
-                <a:ea typeface="Arial" pitchFamily="34" charset="-122"/>
-                <a:cs typeface="Arial" pitchFamily="34" charset="-120"/>
-              </a:rPr>
-              <a:t>Checkpoints are written with finished: false and only flipped to true after the training loop exits cleanly.</a:t>
-            </a:r>
-            <a:endParaRPr lang="en-US" sz="1500" dirty="0"/>
-          </a:p>
-        </p:txBody>
-      </p:sp>
-      <p:sp>
-        <p:nvSpPr>
-          <p:cNvPr id="11" name="Shape 9"/>
-          <p:cNvSpPr/>
-          <p:nvPr/>
-        </p:nvSpPr>
-        <p:spPr>
-          <a:xfrm>
-            <a:off x="6217920" y="2779776"/>
-            <a:ext cx="5440680" cy="1152144"/>
-          </a:xfrm>
-          <a:prstGeom prst="roundRect">
-            <a:avLst>
-              <a:gd name="adj" fmla="val 6349"/>
-            </a:avLst>
-          </a:prstGeom>
-          <a:solidFill>
-            <a:srgbClr val="EBF5EE"/>
-          </a:solidFill>
-          <a:ln/>
-        </p:spPr>
-      </p:sp>
-      <p:sp>
-        <p:nvSpPr>
-          <p:cNvPr id="12" name="Text 10"/>
-          <p:cNvSpPr/>
-          <p:nvPr/>
-        </p:nvSpPr>
-        <p:spPr>
-          <a:xfrm>
-            <a:off x="6473952" y="2889504"/>
-            <a:ext cx="4937760" cy="310896"/>
-          </a:xfrm>
-          <a:prstGeom prst="rect">
-            <a:avLst/>
-          </a:prstGeom>
-          <a:noFill/>
-          <a:ln/>
-        </p:spPr>
-        <p:txBody>
-          <a:bodyPr wrap="square" lIns="0" tIns="0" rIns="0" bIns="0" rtlCol="0" anchor="ctr"/>
-          <a:lstStyle/>
-          <a:p>
-            <a:pPr indent="0" marL="0">
-              <a:buNone/>
-            </a:pPr>
-            <a:r>
-              <a:rPr lang="en-US" sz="1700" b="1" dirty="0">
-                <a:solidFill>
-                  <a:srgbClr val="1A7A3C"/>
-                </a:solidFill>
-                <a:latin typeface="Arial" pitchFamily="34" charset="0"/>
-                <a:ea typeface="Arial" pitchFamily="34" charset="-122"/>
-                <a:cs typeface="Arial" pitchFamily="34" charset="-120"/>
-              </a:rPr>
-              <a:t>Evaluator refuses</a:t>
-            </a:r>
-            <a:endParaRPr lang="en-US" sz="1700" dirty="0"/>
-          </a:p>
-        </p:txBody>
-      </p:sp>
-      <p:sp>
-        <p:nvSpPr>
-          <p:cNvPr id="13" name="Text 11"/>
-          <p:cNvSpPr/>
-          <p:nvPr/>
-        </p:nvSpPr>
-        <p:spPr>
-          <a:xfrm>
-            <a:off x="6473952" y="3218688"/>
-            <a:ext cx="4956048" cy="640080"/>
-          </a:xfrm>
-          <a:prstGeom prst="rect">
-            <a:avLst/>
-          </a:prstGeom>
-          <a:noFill/>
-          <a:ln/>
-        </p:spPr>
-        <p:txBody>
-          <a:bodyPr wrap="square" lIns="0" tIns="0" rIns="0" bIns="0" rtlCol="0" anchor="ctr"/>
-          <a:lstStyle/>
-          <a:p>
+              <a:rPr lang="en-US" sz="1450" b="1" dirty="0">
+                <a:solidFill>
+                  <a:srgbClr val="C1435B"/>
+                </a:solidFill>
+                <a:latin typeface="Arial" pitchFamily="34" charset="0"/>
+                <a:ea typeface="Arial" pitchFamily="34" charset="-122"/>
+                <a:cs typeface="Arial" pitchFamily="34" charset="-120"/>
+              </a:rPr>
+              <a:t>And measurable.  </a:t>
+            </a:r>
             <a:pPr indent="0" marL="0">
               <a:lnSpc>
-                <a:spcPts val="1800"/>
+                <a:spcPts val="1700"/>
               </a:lnSpc>
               <a:buNone/>
             </a:pPr>
             <a:r>
-              <a:rPr lang="en-US" sz="1500" dirty="0">
+              <a:rPr lang="en-US" sz="1450" dirty="0">
                 <a:solidFill>
                   <a:srgbClr val="1A1A1A"/>
                 </a:solidFill>
@@ -18165,257 +18138,9 @@
                 <a:ea typeface="Arial" pitchFamily="34" charset="-122"/>
                 <a:cs typeface="Arial" pitchFamily="34" charset="-120"/>
               </a:rPr>
-              <a:t>The probe evaluator hard-errors on an unfinished checkpoint and warns on legacy ones with no flag.</a:t>
-            </a:r>
-            <a:endParaRPr lang="en-US" sz="1500" dirty="0"/>
-          </a:p>
-        </p:txBody>
-      </p:sp>
-      <p:sp>
-        <p:nvSpPr>
-          <p:cNvPr id="14" name="Shape 12"/>
-          <p:cNvSpPr/>
-          <p:nvPr/>
-        </p:nvSpPr>
-        <p:spPr>
-          <a:xfrm>
-            <a:off x="6217920" y="4078224"/>
-            <a:ext cx="5440680" cy="1152144"/>
-          </a:xfrm>
-          <a:prstGeom prst="roundRect">
-            <a:avLst>
-              <a:gd name="adj" fmla="val 6349"/>
-            </a:avLst>
-          </a:prstGeom>
-          <a:solidFill>
-            <a:srgbClr val="EBF5EE"/>
-          </a:solidFill>
-          <a:ln/>
-        </p:spPr>
-      </p:sp>
-      <p:sp>
-        <p:nvSpPr>
-          <p:cNvPr id="15" name="Text 13"/>
-          <p:cNvSpPr/>
-          <p:nvPr/>
-        </p:nvSpPr>
-        <p:spPr>
-          <a:xfrm>
-            <a:off x="6473952" y="4187952"/>
-            <a:ext cx="4937760" cy="310896"/>
-          </a:xfrm>
-          <a:prstGeom prst="rect">
-            <a:avLst/>
-          </a:prstGeom>
-          <a:noFill/>
-          <a:ln/>
-        </p:spPr>
-        <p:txBody>
-          <a:bodyPr wrap="square" lIns="0" tIns="0" rIns="0" bIns="0" rtlCol="0" anchor="ctr"/>
-          <a:lstStyle/>
-          <a:p>
-            <a:pPr indent="0" marL="0">
-              <a:buNone/>
-            </a:pPr>
-            <a:r>
-              <a:rPr lang="en-US" sz="1700" b="1" dirty="0">
-                <a:solidFill>
-                  <a:srgbClr val="1A7A3C"/>
-                </a:solidFill>
-                <a:latin typeface="Arial" pitchFamily="34" charset="0"/>
-                <a:ea typeface="Arial" pitchFamily="34" charset="-122"/>
-                <a:cs typeface="Arial" pitchFamily="34" charset="-120"/>
-              </a:rPr>
-              <a:t>Loud failure on missing data</a:t>
-            </a:r>
-            <a:endParaRPr lang="en-US" sz="1700" dirty="0"/>
-          </a:p>
-        </p:txBody>
-      </p:sp>
-      <p:sp>
-        <p:nvSpPr>
-          <p:cNvPr id="16" name="Text 14"/>
-          <p:cNvSpPr/>
-          <p:nvPr/>
-        </p:nvSpPr>
-        <p:spPr>
-          <a:xfrm>
-            <a:off x="6473952" y="4517136"/>
-            <a:ext cx="4956048" cy="640080"/>
-          </a:xfrm>
-          <a:prstGeom prst="rect">
-            <a:avLst/>
-          </a:prstGeom>
-          <a:noFill/>
-          <a:ln/>
-        </p:spPr>
-        <p:txBody>
-          <a:bodyPr wrap="square" lIns="0" tIns="0" rIns="0" bIns="0" rtlCol="0" anchor="ctr"/>
-          <a:lstStyle/>
-          <a:p>
-            <a:pPr indent="0" marL="0">
-              <a:lnSpc>
-                <a:spcPts val="1800"/>
-              </a:lnSpc>
-              <a:buNone/>
-            </a:pPr>
-            <a:r>
-              <a:rPr lang="en-US" sz="1500" dirty="0">
-                <a:solidFill>
-                  <a:srgbClr val="1A1A1A"/>
-                </a:solidFill>
-                <a:latin typeface="Arial" pitchFamily="34" charset="0"/>
-                <a:ea typeface="Arial" pitchFamily="34" charset="-122"/>
-                <a:cs typeface="Arial" pitchFamily="34" charset="-120"/>
-              </a:rPr>
-              <a:t>Analysis scripts now refuse a results directory missing an expected arm, instead of silently dropping it.</a:t>
-            </a:r>
-            <a:endParaRPr lang="en-US" sz="1500" dirty="0"/>
-          </a:p>
-        </p:txBody>
-      </p:sp>
-      <p:sp>
-        <p:nvSpPr>
-          <p:cNvPr id="17" name="Shape 15"/>
-          <p:cNvSpPr/>
-          <p:nvPr/>
-        </p:nvSpPr>
-        <p:spPr>
-          <a:xfrm>
-            <a:off x="502920" y="3584448"/>
-            <a:ext cx="5440680" cy="1700784"/>
-          </a:xfrm>
-          <a:prstGeom prst="roundRect">
-            <a:avLst>
-              <a:gd name="adj" fmla="val 4301"/>
-            </a:avLst>
-          </a:prstGeom>
-          <a:solidFill>
-            <a:srgbClr val="EEF3F7"/>
-          </a:solidFill>
-          <a:ln/>
-        </p:spPr>
-      </p:sp>
-      <p:sp>
-        <p:nvSpPr>
-          <p:cNvPr id="18" name="Text 16"/>
-          <p:cNvSpPr/>
-          <p:nvPr/>
-        </p:nvSpPr>
-        <p:spPr>
-          <a:xfrm>
-            <a:off x="777240" y="3712464"/>
-            <a:ext cx="4937760" cy="310896"/>
-          </a:xfrm>
-          <a:prstGeom prst="rect">
-            <a:avLst/>
-          </a:prstGeom>
-          <a:noFill/>
-          <a:ln/>
-        </p:spPr>
-        <p:txBody>
-          <a:bodyPr wrap="square" lIns="0" tIns="0" rIns="0" bIns="0" rtlCol="0" anchor="ctr"/>
-          <a:lstStyle/>
-          <a:p>
-            <a:pPr indent="0" marL="0">
-              <a:buNone/>
-            </a:pPr>
-            <a:r>
-              <a:rPr lang="en-US" sz="1700" b="1" dirty="0">
-                <a:solidFill>
-                  <a:srgbClr val="065A82"/>
-                </a:solidFill>
-                <a:latin typeface="Arial" pitchFamily="34" charset="0"/>
-                <a:ea typeface="Arial" pitchFamily="34" charset="-122"/>
-                <a:cs typeface="Arial" pitchFamily="34" charset="-120"/>
-              </a:rPr>
-              <a:t>Also worth knowing</a:t>
-            </a:r>
-            <a:endParaRPr lang="en-US" sz="1700" dirty="0"/>
-          </a:p>
-        </p:txBody>
-      </p:sp>
-      <p:sp>
-        <p:nvSpPr>
-          <p:cNvPr id="19" name="Text 17"/>
-          <p:cNvSpPr/>
-          <p:nvPr/>
-        </p:nvSpPr>
-        <p:spPr>
-          <a:xfrm>
-            <a:off x="777240" y="4041648"/>
-            <a:ext cx="4937760" cy="1170432"/>
-          </a:xfrm>
-          <a:prstGeom prst="rect">
-            <a:avLst/>
-          </a:prstGeom>
-          <a:noFill/>
-          <a:ln/>
-        </p:spPr>
-        <p:txBody>
-          <a:bodyPr wrap="square" lIns="0" tIns="0" rIns="0" bIns="0" rtlCol="0" anchor="ctr"/>
-          <a:lstStyle/>
-          <a:p>
-            <a:pPr indent="0" marL="0">
-              <a:lnSpc>
-                <a:spcPts val="1900"/>
-              </a:lnSpc>
-              <a:buNone/>
-            </a:pPr>
-            <a:r>
-              <a:rPr lang="en-US" sz="1550" dirty="0">
-                <a:solidFill>
-                  <a:srgbClr val="1A1A1A"/>
-                </a:solidFill>
-                <a:latin typeface="Arial" pitchFamily="34" charset="0"/>
-                <a:ea typeface="Arial" pitchFamily="34" charset="-122"/>
-                <a:cs typeface="Arial" pitchFamily="34" charset="-120"/>
-              </a:rPr>
-              <a:t>--seed DOES make training reproducible — two same-seed runs are byte-identical, max|ΔW| = 0. That earlier claim is retracted. Reproducibility was never the problem; run-to-run variance across DIFFERENT seeds was.</a:t>
-            </a:r>
-            <a:endParaRPr lang="en-US" sz="1550" dirty="0"/>
-          </a:p>
-        </p:txBody>
-      </p:sp>
-      <p:sp>
-        <p:nvSpPr>
-          <p:cNvPr id="20" name="Text 18"/>
-          <p:cNvSpPr/>
-          <p:nvPr/>
-        </p:nvSpPr>
-        <p:spPr>
-          <a:xfrm>
-            <a:off x="502920" y="5486400"/>
-            <a:ext cx="11155680" cy="640080"/>
-          </a:xfrm>
-          <a:prstGeom prst="rect">
-            <a:avLst/>
-          </a:prstGeom>
-          <a:noFill/>
-          <a:ln/>
-        </p:spPr>
-        <p:txBody>
-          <a:bodyPr wrap="square" lIns="0" tIns="0" rIns="0" bIns="0" rtlCol="0" anchor="ctr"/>
-          <a:lstStyle/>
-          <a:p>
-            <a:pPr algn="ctr" indent="0" marL="0">
-              <a:lnSpc>
-                <a:spcPts val="2100"/>
-              </a:lnSpc>
-              <a:buNone/>
-            </a:pPr>
-            <a:r>
-              <a:rPr lang="en-US" sz="1700" b="1" dirty="0">
-                <a:solidFill>
-                  <a:srgbClr val="21295C"/>
-                </a:solidFill>
-                <a:latin typeface="Arial" pitchFamily="34" charset="0"/>
-                <a:ea typeface="Arial" pitchFamily="34" charset="-122"/>
-                <a:cs typeface="Arial" pitchFamily="34" charset="-120"/>
-              </a:rPr>
-              <a:t>Every retraction in this project traces to one of two habits: comparing separately-trained networks, or trusting a checkpoint we had not verified was finished.</a:t>
-            </a:r>
-            <a:endParaRPr lang="en-US" sz="1700" dirty="0"/>
+              <a:t>Spectral regions holding NO metabolites classify it at 0.726, p &lt; 0.005. There is no biological route to that.</a:t>
+            </a:r>
+            <a:endParaRPr lang="en-US" sz="1450" dirty="0"/>
           </a:p>
         </p:txBody>
       </p:sp>
@@ -18430,6 +18155,712 @@
 <file path=ppt/slides/slide24.xml><?xml version="1.0" encoding="utf-8"?>
 <p:sld xmlns:a="http://schemas.openxmlformats.org/drawingml/2006/main" xmlns:r="http://schemas.openxmlformats.org/officeDocument/2006/relationships" xmlns:p="http://schemas.openxmlformats.org/presentationml/2006/main">
   <p:cSld name="Slide 24">
+    <p:bg>
+      <p:bgPr>
+        <a:solidFill>
+          <a:srgbClr val="FFFFFF"/>
+        </a:solidFill>
+      </p:bgPr>
+    </p:bg>
+    <p:spTree>
+      <p:nvGrpSpPr>
+        <p:cNvPr id="1" name=""/>
+        <p:cNvGrpSpPr/>
+        <p:nvPr/>
+      </p:nvGrpSpPr>
+      <p:grpSpPr>
+        <a:xfrm>
+          <a:off x="0" y="0"/>
+          <a:ext cx="0" cy="0"/>
+          <a:chOff x="0" y="0"/>
+          <a:chExt cx="0" cy="0"/>
+        </a:xfrm>
+      </p:grpSpPr>
+      <p:sp>
+        <p:nvSpPr>
+          <p:cNvPr id="2" name="Text 0"/>
+          <p:cNvSpPr/>
+          <p:nvPr/>
+        </p:nvSpPr>
+        <p:spPr>
+          <a:xfrm>
+            <a:off x="502920" y="274320"/>
+            <a:ext cx="11155680" cy="658368"/>
+          </a:xfrm>
+          <a:prstGeom prst="rect">
+            <a:avLst/>
+          </a:prstGeom>
+          <a:noFill/>
+          <a:ln/>
+        </p:spPr>
+        <p:txBody>
+          <a:bodyPr wrap="square" lIns="0" tIns="0" rIns="0" bIns="0" rtlCol="0" anchor="ctr"/>
+          <a:lstStyle/>
+          <a:p>
+            <a:pPr algn="l" indent="0" marL="0">
+              <a:buNone/>
+            </a:pPr>
+            <a:r>
+              <a:rPr lang="en-US" sz="3000" b="1" dirty="0">
+                <a:solidFill>
+                  <a:srgbClr val="21295C"/>
+                </a:solidFill>
+                <a:latin typeface="Arial" pitchFamily="34" charset="0"/>
+                <a:ea typeface="Arial" pitchFamily="34" charset="-122"/>
+                <a:cs typeface="Arial" pitchFamily="34" charset="-120"/>
+              </a:rPr>
+              <a:t>A fourth, more mundane failure — and the guardrails</a:t>
+            </a:r>
+            <a:endParaRPr lang="en-US" sz="3000" dirty="0"/>
+          </a:p>
+        </p:txBody>
+      </p:sp>
+      <p:sp>
+        <p:nvSpPr>
+          <p:cNvPr id="3" name="Text 1"/>
+          <p:cNvSpPr/>
+          <p:nvPr/>
+        </p:nvSpPr>
+        <p:spPr>
+          <a:xfrm>
+            <a:off x="502920" y="941832"/>
+            <a:ext cx="11155680" cy="384048"/>
+          </a:xfrm>
+          <a:prstGeom prst="rect">
+            <a:avLst/>
+          </a:prstGeom>
+          <a:noFill/>
+          <a:ln/>
+        </p:spPr>
+        <p:txBody>
+          <a:bodyPr wrap="square" lIns="0" tIns="0" rIns="0" bIns="0" rtlCol="0" anchor="ctr"/>
+          <a:lstStyle/>
+          <a:p>
+            <a:pPr algn="l" indent="0" marL="0">
+              <a:buNone/>
+            </a:pPr>
+            <a:r>
+              <a:rPr lang="en-US" sz="1700" dirty="0">
+                <a:solidFill>
+                  <a:srgbClr val="5A6068"/>
+                </a:solidFill>
+                <a:latin typeface="Arial" pitchFamily="34" charset="0"/>
+                <a:ea typeface="Arial" pitchFamily="34" charset="-122"/>
+                <a:cs typeface="Arial" pitchFamily="34" charset="-120"/>
+              </a:rPr>
+              <a:t>Three wrong numbers in this project came from the same cause</a:t>
+            </a:r>
+            <a:endParaRPr lang="en-US" sz="1700" dirty="0"/>
+          </a:p>
+        </p:txBody>
+      </p:sp>
+      <p:sp>
+        <p:nvSpPr>
+          <p:cNvPr id="4" name="Text 2"/>
+          <p:cNvSpPr/>
+          <p:nvPr/>
+        </p:nvSpPr>
+        <p:spPr>
+          <a:xfrm>
+            <a:off x="11631168" y="6355080"/>
+            <a:ext cx="411480" cy="274320"/>
+          </a:xfrm>
+          <a:prstGeom prst="rect">
+            <a:avLst/>
+          </a:prstGeom>
+          <a:noFill/>
+          <a:ln/>
+        </p:spPr>
+        <p:txBody>
+          <a:bodyPr wrap="square" lIns="0" tIns="0" rIns="0" bIns="0" rtlCol="0" anchor="ctr"/>
+          <a:lstStyle/>
+          <a:p>
+            <a:pPr algn="r" indent="0" marL="0">
+              <a:buNone/>
+            </a:pPr>
+            <a:r>
+              <a:rPr lang="en-US" sz="1200" dirty="0">
+                <a:solidFill>
+                  <a:srgbClr val="AAB0B8"/>
+                </a:solidFill>
+                <a:latin typeface="Arial" pitchFamily="34" charset="0"/>
+                <a:ea typeface="Arial" pitchFamily="34" charset="-122"/>
+                <a:cs typeface="Arial" pitchFamily="34" charset="-120"/>
+              </a:rPr>
+              <a:t>24</a:t>
+            </a:r>
+            <a:endParaRPr lang="en-US" sz="1200" dirty="0"/>
+          </a:p>
+        </p:txBody>
+      </p:sp>
+      <p:sp>
+        <p:nvSpPr>
+          <p:cNvPr id="5" name="Shape 3"/>
+          <p:cNvSpPr/>
+          <p:nvPr/>
+        </p:nvSpPr>
+        <p:spPr>
+          <a:xfrm>
+            <a:off x="502920" y="1481328"/>
+            <a:ext cx="5440680" cy="1920240"/>
+          </a:xfrm>
+          <a:prstGeom prst="roundRect">
+            <a:avLst>
+              <a:gd name="adj" fmla="val 3810"/>
+            </a:avLst>
+          </a:prstGeom>
+          <a:solidFill>
+            <a:srgbClr val="FBEEF1"/>
+          </a:solidFill>
+          <a:ln/>
+        </p:spPr>
+      </p:sp>
+      <p:sp>
+        <p:nvSpPr>
+          <p:cNvPr id="6" name="Text 4"/>
+          <p:cNvSpPr/>
+          <p:nvPr/>
+        </p:nvSpPr>
+        <p:spPr>
+          <a:xfrm>
+            <a:off x="777240" y="1627632"/>
+            <a:ext cx="4937760" cy="329184"/>
+          </a:xfrm>
+          <a:prstGeom prst="rect">
+            <a:avLst/>
+          </a:prstGeom>
+          <a:noFill/>
+          <a:ln/>
+        </p:spPr>
+        <p:txBody>
+          <a:bodyPr wrap="square" lIns="0" tIns="0" rIns="0" bIns="0" rtlCol="0" anchor="ctr"/>
+          <a:lstStyle/>
+          <a:p>
+            <a:pPr indent="0" marL="0">
+              <a:buNone/>
+            </a:pPr>
+            <a:r>
+              <a:rPr lang="en-US" sz="1850" b="1" dirty="0">
+                <a:solidFill>
+                  <a:srgbClr val="C1435B"/>
+                </a:solidFill>
+                <a:latin typeface="Arial" pitchFamily="34" charset="0"/>
+                <a:ea typeface="Arial" pitchFamily="34" charset="-122"/>
+                <a:cs typeface="Arial" pitchFamily="34" charset="-120"/>
+              </a:rPr>
+              <a:t>Scoring unfinished checkpoints</a:t>
+            </a:r>
+            <a:endParaRPr lang="en-US" sz="1850" dirty="0"/>
+          </a:p>
+        </p:txBody>
+      </p:sp>
+      <p:sp>
+        <p:nvSpPr>
+          <p:cNvPr id="7" name="Text 5"/>
+          <p:cNvSpPr/>
+          <p:nvPr/>
+        </p:nvSpPr>
+        <p:spPr>
+          <a:xfrm>
+            <a:off x="777240" y="1956816"/>
+            <a:ext cx="4937760" cy="1371600"/>
+          </a:xfrm>
+          <a:prstGeom prst="rect">
+            <a:avLst/>
+          </a:prstGeom>
+          <a:noFill/>
+          <a:ln/>
+        </p:spPr>
+        <p:txBody>
+          <a:bodyPr wrap="square" lIns="0" tIns="0" rIns="0" bIns="0" rtlCol="0" anchor="ctr"/>
+          <a:lstStyle/>
+          <a:p>
+            <a:pPr indent="0" marL="0">
+              <a:lnSpc>
+                <a:spcPts val="1800"/>
+              </a:lnSpc>
+              <a:buNone/>
+            </a:pPr>
+            <a:r>
+              <a:rPr lang="en-US" sz="1500" dirty="0">
+                <a:solidFill>
+                  <a:srgbClr val="1A1A1A"/>
+                </a:solidFill>
+                <a:latin typeface="Arial" pitchFamily="34" charset="0"/>
+                <a:ea typeface="Arial" pitchFamily="34" charset="-122"/>
+                <a:cs typeface="Arial" pitchFamily="34" charset="-120"/>
+              </a:rPr>
+              <a:t>Training writes a "best so far" checkpoint continuously. Evaluate one mid-run and you get a real-looking number for a model that was still training. It happened three times — including once when I claimed --seed was broken on GPU, because I compared a mid-training checkpoint against a finished one.</a:t>
+            </a:r>
+            <a:endParaRPr lang="en-US" sz="1500" dirty="0"/>
+          </a:p>
+        </p:txBody>
+      </p:sp>
+      <p:sp>
+        <p:nvSpPr>
+          <p:cNvPr id="8" name="Shape 6"/>
+          <p:cNvSpPr/>
+          <p:nvPr/>
+        </p:nvSpPr>
+        <p:spPr>
+          <a:xfrm>
+            <a:off x="6217920" y="1481328"/>
+            <a:ext cx="5440680" cy="1152144"/>
+          </a:xfrm>
+          <a:prstGeom prst="roundRect">
+            <a:avLst>
+              <a:gd name="adj" fmla="val 6349"/>
+            </a:avLst>
+          </a:prstGeom>
+          <a:solidFill>
+            <a:srgbClr val="EBF5EE"/>
+          </a:solidFill>
+          <a:ln/>
+        </p:spPr>
+      </p:sp>
+      <p:sp>
+        <p:nvSpPr>
+          <p:cNvPr id="9" name="Text 7"/>
+          <p:cNvSpPr/>
+          <p:nvPr/>
+        </p:nvSpPr>
+        <p:spPr>
+          <a:xfrm>
+            <a:off x="6473952" y="1591056"/>
+            <a:ext cx="4937760" cy="310896"/>
+          </a:xfrm>
+          <a:prstGeom prst="rect">
+            <a:avLst/>
+          </a:prstGeom>
+          <a:noFill/>
+          <a:ln/>
+        </p:spPr>
+        <p:txBody>
+          <a:bodyPr wrap="square" lIns="0" tIns="0" rIns="0" bIns="0" rtlCol="0" anchor="ctr"/>
+          <a:lstStyle/>
+          <a:p>
+            <a:pPr indent="0" marL="0">
+              <a:buNone/>
+            </a:pPr>
+            <a:r>
+              <a:rPr lang="en-US" sz="1700" b="1" dirty="0">
+                <a:solidFill>
+                  <a:srgbClr val="1A7A3C"/>
+                </a:solidFill>
+                <a:latin typeface="Arial" pitchFamily="34" charset="0"/>
+                <a:ea typeface="Arial" pitchFamily="34" charset="-122"/>
+                <a:cs typeface="Arial" pitchFamily="34" charset="-120"/>
+              </a:rPr>
+              <a:t>Provenance stamp</a:t>
+            </a:r>
+            <a:endParaRPr lang="en-US" sz="1700" dirty="0"/>
+          </a:p>
+        </p:txBody>
+      </p:sp>
+      <p:sp>
+        <p:nvSpPr>
+          <p:cNvPr id="10" name="Text 8"/>
+          <p:cNvSpPr/>
+          <p:nvPr/>
+        </p:nvSpPr>
+        <p:spPr>
+          <a:xfrm>
+            <a:off x="6473952" y="1920240"/>
+            <a:ext cx="4956048" cy="640080"/>
+          </a:xfrm>
+          <a:prstGeom prst="rect">
+            <a:avLst/>
+          </a:prstGeom>
+          <a:noFill/>
+          <a:ln/>
+        </p:spPr>
+        <p:txBody>
+          <a:bodyPr wrap="square" lIns="0" tIns="0" rIns="0" bIns="0" rtlCol="0" anchor="ctr"/>
+          <a:lstStyle/>
+          <a:p>
+            <a:pPr indent="0" marL="0">
+              <a:lnSpc>
+                <a:spcPts val="1800"/>
+              </a:lnSpc>
+              <a:buNone/>
+            </a:pPr>
+            <a:r>
+              <a:rPr lang="en-US" sz="1500" dirty="0">
+                <a:solidFill>
+                  <a:srgbClr val="1A1A1A"/>
+                </a:solidFill>
+                <a:latin typeface="Arial" pitchFamily="34" charset="0"/>
+                <a:ea typeface="Arial" pitchFamily="34" charset="-122"/>
+                <a:cs typeface="Arial" pitchFamily="34" charset="-120"/>
+              </a:rPr>
+              <a:t>Checkpoints are written with finished: false and only flipped to true after the training loop exits cleanly.</a:t>
+            </a:r>
+            <a:endParaRPr lang="en-US" sz="1500" dirty="0"/>
+          </a:p>
+        </p:txBody>
+      </p:sp>
+      <p:sp>
+        <p:nvSpPr>
+          <p:cNvPr id="11" name="Shape 9"/>
+          <p:cNvSpPr/>
+          <p:nvPr/>
+        </p:nvSpPr>
+        <p:spPr>
+          <a:xfrm>
+            <a:off x="6217920" y="2779776"/>
+            <a:ext cx="5440680" cy="1152144"/>
+          </a:xfrm>
+          <a:prstGeom prst="roundRect">
+            <a:avLst>
+              <a:gd name="adj" fmla="val 6349"/>
+            </a:avLst>
+          </a:prstGeom>
+          <a:solidFill>
+            <a:srgbClr val="EBF5EE"/>
+          </a:solidFill>
+          <a:ln/>
+        </p:spPr>
+      </p:sp>
+      <p:sp>
+        <p:nvSpPr>
+          <p:cNvPr id="12" name="Text 10"/>
+          <p:cNvSpPr/>
+          <p:nvPr/>
+        </p:nvSpPr>
+        <p:spPr>
+          <a:xfrm>
+            <a:off x="6473952" y="2889504"/>
+            <a:ext cx="4937760" cy="310896"/>
+          </a:xfrm>
+          <a:prstGeom prst="rect">
+            <a:avLst/>
+          </a:prstGeom>
+          <a:noFill/>
+          <a:ln/>
+        </p:spPr>
+        <p:txBody>
+          <a:bodyPr wrap="square" lIns="0" tIns="0" rIns="0" bIns="0" rtlCol="0" anchor="ctr"/>
+          <a:lstStyle/>
+          <a:p>
+            <a:pPr indent="0" marL="0">
+              <a:buNone/>
+            </a:pPr>
+            <a:r>
+              <a:rPr lang="en-US" sz="1700" b="1" dirty="0">
+                <a:solidFill>
+                  <a:srgbClr val="1A7A3C"/>
+                </a:solidFill>
+                <a:latin typeface="Arial" pitchFamily="34" charset="0"/>
+                <a:ea typeface="Arial" pitchFamily="34" charset="-122"/>
+                <a:cs typeface="Arial" pitchFamily="34" charset="-120"/>
+              </a:rPr>
+              <a:t>Evaluator refuses</a:t>
+            </a:r>
+            <a:endParaRPr lang="en-US" sz="1700" dirty="0"/>
+          </a:p>
+        </p:txBody>
+      </p:sp>
+      <p:sp>
+        <p:nvSpPr>
+          <p:cNvPr id="13" name="Text 11"/>
+          <p:cNvSpPr/>
+          <p:nvPr/>
+        </p:nvSpPr>
+        <p:spPr>
+          <a:xfrm>
+            <a:off x="6473952" y="3218688"/>
+            <a:ext cx="4956048" cy="640080"/>
+          </a:xfrm>
+          <a:prstGeom prst="rect">
+            <a:avLst/>
+          </a:prstGeom>
+          <a:noFill/>
+          <a:ln/>
+        </p:spPr>
+        <p:txBody>
+          <a:bodyPr wrap="square" lIns="0" tIns="0" rIns="0" bIns="0" rtlCol="0" anchor="ctr"/>
+          <a:lstStyle/>
+          <a:p>
+            <a:pPr indent="0" marL="0">
+              <a:lnSpc>
+                <a:spcPts val="1800"/>
+              </a:lnSpc>
+              <a:buNone/>
+            </a:pPr>
+            <a:r>
+              <a:rPr lang="en-US" sz="1500" dirty="0">
+                <a:solidFill>
+                  <a:srgbClr val="1A1A1A"/>
+                </a:solidFill>
+                <a:latin typeface="Arial" pitchFamily="34" charset="0"/>
+                <a:ea typeface="Arial" pitchFamily="34" charset="-122"/>
+                <a:cs typeface="Arial" pitchFamily="34" charset="-120"/>
+              </a:rPr>
+              <a:t>The probe evaluator hard-errors on an unfinished checkpoint and warns on legacy ones with no flag.</a:t>
+            </a:r>
+            <a:endParaRPr lang="en-US" sz="1500" dirty="0"/>
+          </a:p>
+        </p:txBody>
+      </p:sp>
+      <p:sp>
+        <p:nvSpPr>
+          <p:cNvPr id="14" name="Shape 12"/>
+          <p:cNvSpPr/>
+          <p:nvPr/>
+        </p:nvSpPr>
+        <p:spPr>
+          <a:xfrm>
+            <a:off x="6217920" y="4078224"/>
+            <a:ext cx="5440680" cy="1152144"/>
+          </a:xfrm>
+          <a:prstGeom prst="roundRect">
+            <a:avLst>
+              <a:gd name="adj" fmla="val 6349"/>
+            </a:avLst>
+          </a:prstGeom>
+          <a:solidFill>
+            <a:srgbClr val="EBF5EE"/>
+          </a:solidFill>
+          <a:ln/>
+        </p:spPr>
+      </p:sp>
+      <p:sp>
+        <p:nvSpPr>
+          <p:cNvPr id="15" name="Text 13"/>
+          <p:cNvSpPr/>
+          <p:nvPr/>
+        </p:nvSpPr>
+        <p:spPr>
+          <a:xfrm>
+            <a:off x="6473952" y="4187952"/>
+            <a:ext cx="4937760" cy="310896"/>
+          </a:xfrm>
+          <a:prstGeom prst="rect">
+            <a:avLst/>
+          </a:prstGeom>
+          <a:noFill/>
+          <a:ln/>
+        </p:spPr>
+        <p:txBody>
+          <a:bodyPr wrap="square" lIns="0" tIns="0" rIns="0" bIns="0" rtlCol="0" anchor="ctr"/>
+          <a:lstStyle/>
+          <a:p>
+            <a:pPr indent="0" marL="0">
+              <a:buNone/>
+            </a:pPr>
+            <a:r>
+              <a:rPr lang="en-US" sz="1700" b="1" dirty="0">
+                <a:solidFill>
+                  <a:srgbClr val="1A7A3C"/>
+                </a:solidFill>
+                <a:latin typeface="Arial" pitchFamily="34" charset="0"/>
+                <a:ea typeface="Arial" pitchFamily="34" charset="-122"/>
+                <a:cs typeface="Arial" pitchFamily="34" charset="-120"/>
+              </a:rPr>
+              <a:t>Loud failure on missing data</a:t>
+            </a:r>
+            <a:endParaRPr lang="en-US" sz="1700" dirty="0"/>
+          </a:p>
+        </p:txBody>
+      </p:sp>
+      <p:sp>
+        <p:nvSpPr>
+          <p:cNvPr id="16" name="Text 14"/>
+          <p:cNvSpPr/>
+          <p:nvPr/>
+        </p:nvSpPr>
+        <p:spPr>
+          <a:xfrm>
+            <a:off x="6473952" y="4517136"/>
+            <a:ext cx="4956048" cy="640080"/>
+          </a:xfrm>
+          <a:prstGeom prst="rect">
+            <a:avLst/>
+          </a:prstGeom>
+          <a:noFill/>
+          <a:ln/>
+        </p:spPr>
+        <p:txBody>
+          <a:bodyPr wrap="square" lIns="0" tIns="0" rIns="0" bIns="0" rtlCol="0" anchor="ctr"/>
+          <a:lstStyle/>
+          <a:p>
+            <a:pPr indent="0" marL="0">
+              <a:lnSpc>
+                <a:spcPts val="1800"/>
+              </a:lnSpc>
+              <a:buNone/>
+            </a:pPr>
+            <a:r>
+              <a:rPr lang="en-US" sz="1500" dirty="0">
+                <a:solidFill>
+                  <a:srgbClr val="1A1A1A"/>
+                </a:solidFill>
+                <a:latin typeface="Arial" pitchFamily="34" charset="0"/>
+                <a:ea typeface="Arial" pitchFamily="34" charset="-122"/>
+                <a:cs typeface="Arial" pitchFamily="34" charset="-120"/>
+              </a:rPr>
+              <a:t>Analysis scripts now refuse a results directory missing an expected arm, instead of silently dropping it.</a:t>
+            </a:r>
+            <a:endParaRPr lang="en-US" sz="1500" dirty="0"/>
+          </a:p>
+        </p:txBody>
+      </p:sp>
+      <p:sp>
+        <p:nvSpPr>
+          <p:cNvPr id="17" name="Shape 15"/>
+          <p:cNvSpPr/>
+          <p:nvPr/>
+        </p:nvSpPr>
+        <p:spPr>
+          <a:xfrm>
+            <a:off x="502920" y="3584448"/>
+            <a:ext cx="5440680" cy="1700784"/>
+          </a:xfrm>
+          <a:prstGeom prst="roundRect">
+            <a:avLst>
+              <a:gd name="adj" fmla="val 4301"/>
+            </a:avLst>
+          </a:prstGeom>
+          <a:solidFill>
+            <a:srgbClr val="EEF3F7"/>
+          </a:solidFill>
+          <a:ln/>
+        </p:spPr>
+      </p:sp>
+      <p:sp>
+        <p:nvSpPr>
+          <p:cNvPr id="18" name="Text 16"/>
+          <p:cNvSpPr/>
+          <p:nvPr/>
+        </p:nvSpPr>
+        <p:spPr>
+          <a:xfrm>
+            <a:off x="777240" y="3712464"/>
+            <a:ext cx="4937760" cy="310896"/>
+          </a:xfrm>
+          <a:prstGeom prst="rect">
+            <a:avLst/>
+          </a:prstGeom>
+          <a:noFill/>
+          <a:ln/>
+        </p:spPr>
+        <p:txBody>
+          <a:bodyPr wrap="square" lIns="0" tIns="0" rIns="0" bIns="0" rtlCol="0" anchor="ctr"/>
+          <a:lstStyle/>
+          <a:p>
+            <a:pPr indent="0" marL="0">
+              <a:buNone/>
+            </a:pPr>
+            <a:r>
+              <a:rPr lang="en-US" sz="1700" b="1" dirty="0">
+                <a:solidFill>
+                  <a:srgbClr val="065A82"/>
+                </a:solidFill>
+                <a:latin typeface="Arial" pitchFamily="34" charset="0"/>
+                <a:ea typeface="Arial" pitchFamily="34" charset="-122"/>
+                <a:cs typeface="Arial" pitchFamily="34" charset="-120"/>
+              </a:rPr>
+              <a:t>Also worth knowing</a:t>
+            </a:r>
+            <a:endParaRPr lang="en-US" sz="1700" dirty="0"/>
+          </a:p>
+        </p:txBody>
+      </p:sp>
+      <p:sp>
+        <p:nvSpPr>
+          <p:cNvPr id="19" name="Text 17"/>
+          <p:cNvSpPr/>
+          <p:nvPr/>
+        </p:nvSpPr>
+        <p:spPr>
+          <a:xfrm>
+            <a:off x="777240" y="4041648"/>
+            <a:ext cx="4937760" cy="1170432"/>
+          </a:xfrm>
+          <a:prstGeom prst="rect">
+            <a:avLst/>
+          </a:prstGeom>
+          <a:noFill/>
+          <a:ln/>
+        </p:spPr>
+        <p:txBody>
+          <a:bodyPr wrap="square" lIns="0" tIns="0" rIns="0" bIns="0" rtlCol="0" anchor="ctr"/>
+          <a:lstStyle/>
+          <a:p>
+            <a:pPr indent="0" marL="0">
+              <a:lnSpc>
+                <a:spcPts val="1900"/>
+              </a:lnSpc>
+              <a:buNone/>
+            </a:pPr>
+            <a:r>
+              <a:rPr lang="en-US" sz="1550" dirty="0">
+                <a:solidFill>
+                  <a:srgbClr val="1A1A1A"/>
+                </a:solidFill>
+                <a:latin typeface="Arial" pitchFamily="34" charset="0"/>
+                <a:ea typeface="Arial" pitchFamily="34" charset="-122"/>
+                <a:cs typeface="Arial" pitchFamily="34" charset="-120"/>
+              </a:rPr>
+              <a:t>--seed DOES make training reproducible — two same-seed runs are byte-identical, max|ΔW| = 0. That earlier claim is retracted. Reproducibility was never the problem; run-to-run variance across DIFFERENT seeds was.</a:t>
+            </a:r>
+            <a:endParaRPr lang="en-US" sz="1550" dirty="0"/>
+          </a:p>
+        </p:txBody>
+      </p:sp>
+      <p:sp>
+        <p:nvSpPr>
+          <p:cNvPr id="20" name="Text 18"/>
+          <p:cNvSpPr/>
+          <p:nvPr/>
+        </p:nvSpPr>
+        <p:spPr>
+          <a:xfrm>
+            <a:off x="502920" y="5486400"/>
+            <a:ext cx="11155680" cy="640080"/>
+          </a:xfrm>
+          <a:prstGeom prst="rect">
+            <a:avLst/>
+          </a:prstGeom>
+          <a:noFill/>
+          <a:ln/>
+        </p:spPr>
+        <p:txBody>
+          <a:bodyPr wrap="square" lIns="0" tIns="0" rIns="0" bIns="0" rtlCol="0" anchor="ctr"/>
+          <a:lstStyle/>
+          <a:p>
+            <a:pPr algn="ctr" indent="0" marL="0">
+              <a:lnSpc>
+                <a:spcPts val="2100"/>
+              </a:lnSpc>
+              <a:buNone/>
+            </a:pPr>
+            <a:r>
+              <a:rPr lang="en-US" sz="1700" b="1" dirty="0">
+                <a:solidFill>
+                  <a:srgbClr val="21295C"/>
+                </a:solidFill>
+                <a:latin typeface="Arial" pitchFamily="34" charset="0"/>
+                <a:ea typeface="Arial" pitchFamily="34" charset="-122"/>
+                <a:cs typeface="Arial" pitchFamily="34" charset="-120"/>
+              </a:rPr>
+              <a:t>Every retraction in this project traces to one of two habits: comparing separately-trained networks, or trusting a checkpoint we had not verified was finished.</a:t>
+            </a:r>
+            <a:endParaRPr lang="en-US" sz="1700" dirty="0"/>
+          </a:p>
+        </p:txBody>
+      </p:sp>
+    </p:spTree>
+  </p:cSld>
+  <p:clrMapOvr>
+    <a:masterClrMapping/>
+  </p:clrMapOvr>
+</p:sld>
+</file>
+
+<file path=ppt/slides/slide25.xml><?xml version="1.0" encoding="utf-8"?>
+<p:sld xmlns:a="http://schemas.openxmlformats.org/drawingml/2006/main" xmlns:r="http://schemas.openxmlformats.org/officeDocument/2006/relationships" xmlns:p="http://schemas.openxmlformats.org/presentationml/2006/main">
+  <p:cSld name="Slide 25">
     <p:bg>
       <p:bgPr>
         <a:solidFill>
@@ -18668,243 +19099,6 @@
               <a:t>Everything so far used the FULL dataset. At n=37–113 that is already close to the ceiling of what is learnable — the worst possible regime to look for a transfer advantage. Transfer is supposed to pay off with few labels. So: sweep the label budget from 2 per class upwards, and find where the SSL curve is above the classical one.</a:t>
             </a:r>
             <a:endParaRPr lang="en-US" sz="1700" dirty="0"/>
-          </a:p>
-        </p:txBody>
-      </p:sp>
-    </p:spTree>
-  </p:cSld>
-  <p:clrMapOvr>
-    <a:masterClrMapping/>
-  </p:clrMapOvr>
-</p:sld>
-</file>
-
-<file path=ppt/slides/slide25.xml><?xml version="1.0" encoding="utf-8"?>
-<p:sld xmlns:a="http://schemas.openxmlformats.org/drawingml/2006/main" xmlns:r="http://schemas.openxmlformats.org/officeDocument/2006/relationships" xmlns:p="http://schemas.openxmlformats.org/presentationml/2006/main">
-  <p:cSld name="Slide 25">
-    <p:bg>
-      <p:bgPr>
-        <a:solidFill>
-          <a:srgbClr val="FFFFFF"/>
-        </a:solidFill>
-      </p:bgPr>
-    </p:bg>
-    <p:spTree>
-      <p:nvGrpSpPr>
-        <p:cNvPr id="1" name=""/>
-        <p:cNvGrpSpPr/>
-        <p:nvPr/>
-      </p:nvGrpSpPr>
-      <p:grpSpPr>
-        <a:xfrm>
-          <a:off x="0" y="0"/>
-          <a:ext cx="0" cy="0"/>
-          <a:chOff x="0" y="0"/>
-          <a:chExt cx="0" cy="0"/>
-        </a:xfrm>
-      </p:grpSpPr>
-      <p:sp>
-        <p:nvSpPr>
-          <p:cNvPr id="2" name="Text 0"/>
-          <p:cNvSpPr/>
-          <p:nvPr/>
-        </p:nvSpPr>
-        <p:spPr>
-          <a:xfrm>
-            <a:off x="502920" y="274320"/>
-            <a:ext cx="11155680" cy="658368"/>
-          </a:xfrm>
-          <a:prstGeom prst="rect">
-            <a:avLst/>
-          </a:prstGeom>
-          <a:noFill/>
-          <a:ln/>
-        </p:spPr>
-        <p:txBody>
-          <a:bodyPr wrap="square" lIns="0" tIns="0" rIns="0" bIns="0" rtlCol="0" anchor="ctr"/>
-          <a:lstStyle/>
-          <a:p>
-            <a:pPr algn="l" indent="0" marL="0">
-              <a:buNone/>
-            </a:pPr>
-            <a:r>
-              <a:rPr lang="en-US" sz="3000" b="1" dirty="0">
-                <a:solidFill>
-                  <a:srgbClr val="21295C"/>
-                </a:solidFill>
-                <a:latin typeface="Arial" pitchFamily="34" charset="0"/>
-                <a:ea typeface="Arial" pitchFamily="34" charset="-122"/>
-                <a:cs typeface="Arial" pitchFamily="34" charset="-120"/>
-              </a:rPr>
-              <a:t>Experiment #6 — few-shot benchmark, all 5 targets</a:t>
-            </a:r>
-            <a:endParaRPr lang="en-US" sz="3000" dirty="0"/>
-          </a:p>
-        </p:txBody>
-      </p:sp>
-      <p:sp>
-        <p:nvSpPr>
-          <p:cNvPr id="3" name="Text 1"/>
-          <p:cNvSpPr/>
-          <p:nvPr/>
-        </p:nvSpPr>
-        <p:spPr>
-          <a:xfrm>
-            <a:off x="502920" y="941832"/>
-            <a:ext cx="11155680" cy="384048"/>
-          </a:xfrm>
-          <a:prstGeom prst="rect">
-            <a:avLst/>
-          </a:prstGeom>
-          <a:noFill/>
-          <a:ln/>
-        </p:spPr>
-        <p:txBody>
-          <a:bodyPr wrap="square" lIns="0" tIns="0" rIns="0" bIns="0" rtlCol="0" anchor="ctr"/>
-          <a:lstStyle/>
-          <a:p>
-            <a:pPr algn="l" indent="0" marL="0">
-              <a:buNone/>
-            </a:pPr>
-            <a:r>
-              <a:rPr lang="en-US" sz="1700" dirty="0">
-                <a:solidFill>
-                  <a:srgbClr val="5A6068"/>
-                </a:solidFill>
-                <a:latin typeface="Arial" pitchFamily="34" charset="0"/>
-                <a:ea typeface="Arial" pitchFamily="34" charset="-122"/>
-                <a:cs typeface="Arial" pitchFamily="34" charset="-120"/>
-              </a:rPr>
-              <a:t>Every model sees the IDENTICAL support/query draws — 10 episodes per label budget</a:t>
-            </a:r>
-            <a:endParaRPr lang="en-US" sz="1700" dirty="0"/>
-          </a:p>
-        </p:txBody>
-      </p:sp>
-      <p:sp>
-        <p:nvSpPr>
-          <p:cNvPr id="4" name="Text 2"/>
-          <p:cNvSpPr/>
-          <p:nvPr/>
-        </p:nvSpPr>
-        <p:spPr>
-          <a:xfrm>
-            <a:off x="11631168" y="6355080"/>
-            <a:ext cx="411480" cy="274320"/>
-          </a:xfrm>
-          <a:prstGeom prst="rect">
-            <a:avLst/>
-          </a:prstGeom>
-          <a:noFill/>
-          <a:ln/>
-        </p:spPr>
-        <p:txBody>
-          <a:bodyPr wrap="square" lIns="0" tIns="0" rIns="0" bIns="0" rtlCol="0" anchor="ctr"/>
-          <a:lstStyle/>
-          <a:p>
-            <a:pPr algn="r" indent="0" marL="0">
-              <a:buNone/>
-            </a:pPr>
-            <a:r>
-              <a:rPr lang="en-US" sz="1200" dirty="0">
-                <a:solidFill>
-                  <a:srgbClr val="AAB0B8"/>
-                </a:solidFill>
-                <a:latin typeface="Arial" pitchFamily="34" charset="0"/>
-                <a:ea typeface="Arial" pitchFamily="34" charset="-122"/>
-                <a:cs typeface="Arial" pitchFamily="34" charset="-120"/>
-              </a:rPr>
-              <a:t>25</a:t>
-            </a:r>
-            <a:endParaRPr lang="en-US" sz="1200" dirty="0"/>
-          </a:p>
-        </p:txBody>
-      </p:sp>
-      <p:pic>
-        <p:nvPicPr>
-          <p:cNvPr id="5" name="Image 0" descr="/home/nmrbox/0012/shasharma/Desktop/NMR_Metabolomics/docs/gm_figures/gm06_fewshot_curves.png">    </p:cNvPr>
-          <p:cNvPicPr>
-            <a:picLocks noChangeAspect="1"/>
-          </p:cNvPicPr>
-          <p:nvPr/>
-        </p:nvPicPr>
-        <p:blipFill>
-          <a:blip r:embed="rId1"/>
-          <a:stretch>
-            <a:fillRect/>
-          </a:stretch>
-        </p:blipFill>
-        <p:spPr>
-          <a:xfrm>
-            <a:off x="1051459" y="1371600"/>
-            <a:ext cx="10058601" cy="4224528"/>
-          </a:xfrm>
-          <a:prstGeom prst="rect">
-            <a:avLst/>
-          </a:prstGeom>
-        </p:spPr>
-      </p:pic>
-      <p:sp>
-        <p:nvSpPr>
-          <p:cNvPr id="6" name="Shape 3"/>
-          <p:cNvSpPr/>
-          <p:nvPr/>
-        </p:nvSpPr>
-        <p:spPr>
-          <a:xfrm>
-            <a:off x="502920" y="5696712"/>
-            <a:ext cx="11155680" cy="704088"/>
-          </a:xfrm>
-          <a:prstGeom prst="roundRect">
-            <a:avLst>
-              <a:gd name="adj" fmla="val 10390"/>
-            </a:avLst>
-          </a:prstGeom>
-          <a:solidFill>
-            <a:srgbClr val="FBEEF1"/>
-          </a:solidFill>
-          <a:ln/>
-        </p:spPr>
-      </p:sp>
-      <p:sp>
-        <p:nvSpPr>
-          <p:cNvPr id="7" name="Text 4"/>
-          <p:cNvSpPr/>
-          <p:nvPr/>
-        </p:nvSpPr>
-        <p:spPr>
-          <a:xfrm>
-            <a:off x="777240" y="5760720"/>
-            <a:ext cx="10607040" cy="585216"/>
-          </a:xfrm>
-          <a:prstGeom prst="rect">
-            <a:avLst/>
-          </a:prstGeom>
-          <a:noFill/>
-          <a:ln/>
-        </p:spPr>
-        <p:txBody>
-          <a:bodyPr wrap="square" lIns="0" tIns="0" rIns="0" bIns="0" rtlCol="0" anchor="ctr"/>
-          <a:lstStyle/>
-          <a:p>
-            <a:pPr indent="0" marL="0">
-              <a:lnSpc>
-                <a:spcPts val="1900"/>
-              </a:lnSpc>
-              <a:buNone/>
-            </a:pPr>
-            <a:r>
-              <a:rPr lang="en-US" sz="1550" dirty="0">
-                <a:solidFill>
-                  <a:srgbClr val="1A1A1A"/>
-                </a:solidFill>
-                <a:latin typeface="Arial" pitchFamily="34" charset="0"/>
-                <a:ea typeface="Arial" pitchFamily="34" charset="-122"/>
-                <a:cs typeface="Arial" pitchFamily="34" charset="-120"/>
-              </a:rPr>
-              <a:t>Masked SSL sits at or below classical in every panel, at every label budget. The premise was that SSL wins on the LEFT of these plots — there is no regime where the pretrained backbone wins.</a:t>
-            </a:r>
-            <a:endParaRPr lang="en-US" sz="1550" dirty="0"/>
           </a:p>
         </p:txBody>
       </p:sp>
@@ -18973,7 +19167,7 @@
                 <a:ea typeface="Arial" pitchFamily="34" charset="-122"/>
                 <a:cs typeface="Arial" pitchFamily="34" charset="-120"/>
               </a:rPr>
-              <a:t>The same data, analysed as a PAIRED comparison</a:t>
+              <a:t>Experiment #6 — few-shot benchmark, all 5 targets</a:t>
             </a:r>
             <a:endParaRPr lang="en-US" sz="3000" dirty="0"/>
           </a:p>
@@ -19012,7 +19206,7 @@
                 <a:ea typeface="Arial" pitchFamily="34" charset="-122"/>
                 <a:cs typeface="Arial" pitchFamily="34" charset="-120"/>
               </a:rPr>
-              <a:t>Shared episodes mean the episode-draw variance cancels — far more power than comparing two error bars</a:t>
+              <a:t>Every model sees the IDENTICAL support/query draws — 10 episodes per label budget</a:t>
             </a:r>
             <a:endParaRPr lang="en-US" sz="1700" dirty="0"/>
           </a:p>
@@ -19059,7 +19253,7 @@
       </p:sp>
       <p:pic>
         <p:nvPicPr>
-          <p:cNvPr id="5" name="Image 0" descr="/home/nmrbox/0012/shasharma/Desktop/NMR_Metabolomics/docs/gm_figures/gm07_fewshot_paired.png">    </p:cNvPr>
+          <p:cNvPr id="5" name="Image 0" descr="/home/nmrbox/0012/shasharma/Desktop/NMR_Metabolomics/docs/gm_figures/gm06_fewshot_curves.png">    </p:cNvPr>
           <p:cNvPicPr>
             <a:picLocks noChangeAspect="1"/>
           </p:cNvPicPr>
@@ -19073,8 +19267,8 @@
         </p:blipFill>
         <p:spPr>
           <a:xfrm>
-            <a:off x="1057046" y="1371600"/>
-            <a:ext cx="10047428" cy="4197096"/>
+            <a:off x="1051459" y="1371600"/>
+            <a:ext cx="10058601" cy="4224528"/>
           </a:xfrm>
           <a:prstGeom prst="rect">
             <a:avLst/>
@@ -19089,12 +19283,12 @@
         </p:nvSpPr>
         <p:spPr>
           <a:xfrm>
-            <a:off x="502920" y="5669280"/>
-            <a:ext cx="5532120" cy="731520"/>
+            <a:off x="502920" y="5696712"/>
+            <a:ext cx="11155680" cy="704088"/>
           </a:xfrm>
           <a:prstGeom prst="roundRect">
             <a:avLst>
-              <a:gd name="adj" fmla="val 10000"/>
+              <a:gd name="adj" fmla="val 10390"/>
             </a:avLst>
           </a:prstGeom>
           <a:solidFill>
@@ -19111,8 +19305,8 @@
         </p:nvSpPr>
         <p:spPr>
           <a:xfrm>
-            <a:off x="731520" y="5724144"/>
-            <a:ext cx="5074920" cy="621792"/>
+            <a:off x="777240" y="5760720"/>
+            <a:ext cx="10607040" cy="585216"/>
           </a:xfrm>
           <a:prstGeom prst="rect">
             <a:avLst/>
@@ -19126,12 +19320,12 @@
           <a:p>
             <a:pPr indent="0" marL="0">
               <a:lnSpc>
-                <a:spcPts val="1700"/>
+                <a:spcPts val="1900"/>
               </a:lnSpc>
               <a:buNone/>
             </a:pPr>
             <a:r>
-              <a:rPr lang="en-US" sz="1450" dirty="0">
+              <a:rPr lang="en-US" sz="1550" dirty="0">
                 <a:solidFill>
                   <a:srgbClr val="1A1A1A"/>
                 </a:solidFill>
@@ -19139,73 +19333,9 @@
                 <a:ea typeface="Arial" pitchFamily="34" charset="-122"/>
                 <a:cs typeface="Arial" pitchFamily="34" charset="-120"/>
               </a:rPr>
-              <a:t>Pooled across all five targets at 2 labels/class: +0.0012 ± 0.0162, p = 0.74. Dead even. What looked like a low-shot edge is just both methods sitting near chance.</a:t>
-            </a:r>
-            <a:endParaRPr lang="en-US" sz="1450" dirty="0"/>
-          </a:p>
-        </p:txBody>
-      </p:sp>
-      <p:sp>
-        <p:nvSpPr>
-          <p:cNvPr id="8" name="Shape 5"/>
-          <p:cNvSpPr/>
-          <p:nvPr/>
-        </p:nvSpPr>
-        <p:spPr>
-          <a:xfrm>
-            <a:off x="6309360" y="5669280"/>
-            <a:ext cx="5349240" cy="731520"/>
-          </a:xfrm>
-          <a:prstGeom prst="roundRect">
-            <a:avLst>
-              <a:gd name="adj" fmla="val 10000"/>
-            </a:avLst>
-          </a:prstGeom>
-          <a:solidFill>
-            <a:srgbClr val="EEF3F7"/>
-          </a:solidFill>
-          <a:ln/>
-        </p:spPr>
-      </p:sp>
-      <p:sp>
-        <p:nvSpPr>
-          <p:cNvPr id="9" name="Text 6"/>
-          <p:cNvSpPr/>
-          <p:nvPr/>
-        </p:nvSpPr>
-        <p:spPr>
-          <a:xfrm>
-            <a:off x="6537960" y="5724144"/>
-            <a:ext cx="4892040" cy="621792"/>
-          </a:xfrm>
-          <a:prstGeom prst="rect">
-            <a:avLst/>
-          </a:prstGeom>
-          <a:noFill/>
-          <a:ln/>
-        </p:spPr>
-        <p:txBody>
-          <a:bodyPr wrap="square" lIns="0" tIns="0" rIns="0" bIns="0" rtlCol="0" anchor="ctr"/>
-          <a:lstStyle/>
-          <a:p>
-            <a:pPr indent="0" marL="0">
-              <a:lnSpc>
-                <a:spcPts val="1600"/>
-              </a:lnSpc>
-              <a:buNone/>
-            </a:pPr>
-            <a:r>
-              <a:rPr lang="en-US" sz="1450" dirty="0">
-                <a:solidFill>
-                  <a:srgbClr val="1A1A1A"/>
-                </a:solidFill>
-                <a:latin typeface="Arial" pitchFamily="34" charset="0"/>
-                <a:ea typeface="Arial" pitchFamily="34" charset="-122"/>
-                <a:cs typeface="Arial" pitchFamily="34" charset="-120"/>
-              </a:rPr>
-              <a:t>And the deficit WIDENS with more labels (negative trend on 4 of 5) — the opposite of what transfer learning predicts.</a:t>
-            </a:r>
-            <a:endParaRPr lang="en-US" sz="1450" dirty="0"/>
+              <a:t>Masked SSL sits at or below classical in every panel, at every label budget. The premise was that SSL wins on the LEFT of these plots — there is no regime where the pretrained backbone wins.</a:t>
+            </a:r>
+            <a:endParaRPr lang="en-US" sz="1550" dirty="0"/>
           </a:p>
         </p:txBody>
       </p:sp>
@@ -19274,7 +19404,7 @@
                 <a:ea typeface="Arial" pitchFamily="34" charset="-122"/>
                 <a:cs typeface="Arial" pitchFamily="34" charset="-120"/>
               </a:rPr>
-              <a:t>Before believing a negative result, we tried to break it</a:t>
+              <a:t>The same data, analysed as a PAIRED comparison</a:t>
             </a:r>
             <a:endParaRPr lang="en-US" sz="3000" dirty="0"/>
           </a:p>
@@ -19313,7 +19443,7 @@
                 <a:ea typeface="Arial" pitchFamily="34" charset="-122"/>
                 <a:cs typeface="Arial" pitchFamily="34" charset="-120"/>
               </a:rPr>
-              <a:t>The obvious objection, and what happened when we tested it</a:t>
+              <a:t>Shared episodes mean the episode-draw variance cancels — far more power than comparing two error bars</a:t>
             </a:r>
             <a:endParaRPr lang="en-US" sz="1700" dirty="0"/>
           </a:p>
@@ -19353,6 +19483,307 @@
                 <a:cs typeface="Arial" pitchFamily="34" charset="-120"/>
               </a:rPr>
               <a:t>27</a:t>
+            </a:r>
+            <a:endParaRPr lang="en-US" sz="1200" dirty="0"/>
+          </a:p>
+        </p:txBody>
+      </p:sp>
+      <p:pic>
+        <p:nvPicPr>
+          <p:cNvPr id="5" name="Image 0" descr="/home/nmrbox/0012/shasharma/Desktop/NMR_Metabolomics/docs/gm_figures/gm07_fewshot_paired.png">    </p:cNvPr>
+          <p:cNvPicPr>
+            <a:picLocks noChangeAspect="1"/>
+          </p:cNvPicPr>
+          <p:nvPr/>
+        </p:nvPicPr>
+        <p:blipFill>
+          <a:blip r:embed="rId1"/>
+          <a:stretch>
+            <a:fillRect/>
+          </a:stretch>
+        </p:blipFill>
+        <p:spPr>
+          <a:xfrm>
+            <a:off x="1057046" y="1371600"/>
+            <a:ext cx="10047428" cy="4197096"/>
+          </a:xfrm>
+          <a:prstGeom prst="rect">
+            <a:avLst/>
+          </a:prstGeom>
+        </p:spPr>
+      </p:pic>
+      <p:sp>
+        <p:nvSpPr>
+          <p:cNvPr id="6" name="Shape 3"/>
+          <p:cNvSpPr/>
+          <p:nvPr/>
+        </p:nvSpPr>
+        <p:spPr>
+          <a:xfrm>
+            <a:off x="502920" y="5669280"/>
+            <a:ext cx="5532120" cy="731520"/>
+          </a:xfrm>
+          <a:prstGeom prst="roundRect">
+            <a:avLst>
+              <a:gd name="adj" fmla="val 10000"/>
+            </a:avLst>
+          </a:prstGeom>
+          <a:solidFill>
+            <a:srgbClr val="FBEEF1"/>
+          </a:solidFill>
+          <a:ln/>
+        </p:spPr>
+      </p:sp>
+      <p:sp>
+        <p:nvSpPr>
+          <p:cNvPr id="7" name="Text 4"/>
+          <p:cNvSpPr/>
+          <p:nvPr/>
+        </p:nvSpPr>
+        <p:spPr>
+          <a:xfrm>
+            <a:off x="731520" y="5724144"/>
+            <a:ext cx="5074920" cy="621792"/>
+          </a:xfrm>
+          <a:prstGeom prst="rect">
+            <a:avLst/>
+          </a:prstGeom>
+          <a:noFill/>
+          <a:ln/>
+        </p:spPr>
+        <p:txBody>
+          <a:bodyPr wrap="square" lIns="0" tIns="0" rIns="0" bIns="0" rtlCol="0" anchor="ctr"/>
+          <a:lstStyle/>
+          <a:p>
+            <a:pPr indent="0" marL="0">
+              <a:lnSpc>
+                <a:spcPts val="1700"/>
+              </a:lnSpc>
+              <a:buNone/>
+            </a:pPr>
+            <a:r>
+              <a:rPr lang="en-US" sz="1450" dirty="0">
+                <a:solidFill>
+                  <a:srgbClr val="1A1A1A"/>
+                </a:solidFill>
+                <a:latin typeface="Arial" pitchFamily="34" charset="0"/>
+                <a:ea typeface="Arial" pitchFamily="34" charset="-122"/>
+                <a:cs typeface="Arial" pitchFamily="34" charset="-120"/>
+              </a:rPr>
+              <a:t>Pooled across all five targets at 2 labels/class: +0.0012 ± 0.0162, p = 0.74. Dead even. What looked like a low-shot edge is just both methods sitting near chance.</a:t>
+            </a:r>
+            <a:endParaRPr lang="en-US" sz="1450" dirty="0"/>
+          </a:p>
+        </p:txBody>
+      </p:sp>
+      <p:sp>
+        <p:nvSpPr>
+          <p:cNvPr id="8" name="Shape 5"/>
+          <p:cNvSpPr/>
+          <p:nvPr/>
+        </p:nvSpPr>
+        <p:spPr>
+          <a:xfrm>
+            <a:off x="6309360" y="5669280"/>
+            <a:ext cx="5349240" cy="731520"/>
+          </a:xfrm>
+          <a:prstGeom prst="roundRect">
+            <a:avLst>
+              <a:gd name="adj" fmla="val 10000"/>
+            </a:avLst>
+          </a:prstGeom>
+          <a:solidFill>
+            <a:srgbClr val="EEF3F7"/>
+          </a:solidFill>
+          <a:ln/>
+        </p:spPr>
+      </p:sp>
+      <p:sp>
+        <p:nvSpPr>
+          <p:cNvPr id="9" name="Text 6"/>
+          <p:cNvSpPr/>
+          <p:nvPr/>
+        </p:nvSpPr>
+        <p:spPr>
+          <a:xfrm>
+            <a:off x="6537960" y="5724144"/>
+            <a:ext cx="4892040" cy="621792"/>
+          </a:xfrm>
+          <a:prstGeom prst="rect">
+            <a:avLst/>
+          </a:prstGeom>
+          <a:noFill/>
+          <a:ln/>
+        </p:spPr>
+        <p:txBody>
+          <a:bodyPr wrap="square" lIns="0" tIns="0" rIns="0" bIns="0" rtlCol="0" anchor="ctr"/>
+          <a:lstStyle/>
+          <a:p>
+            <a:pPr indent="0" marL="0">
+              <a:lnSpc>
+                <a:spcPts val="1600"/>
+              </a:lnSpc>
+              <a:buNone/>
+            </a:pPr>
+            <a:r>
+              <a:rPr lang="en-US" sz="1450" dirty="0">
+                <a:solidFill>
+                  <a:srgbClr val="1A1A1A"/>
+                </a:solidFill>
+                <a:latin typeface="Arial" pitchFamily="34" charset="0"/>
+                <a:ea typeface="Arial" pitchFamily="34" charset="-122"/>
+                <a:cs typeface="Arial" pitchFamily="34" charset="-120"/>
+              </a:rPr>
+              <a:t>And the deficit WIDENS with more labels (negative trend on 4 of 5) — the opposite of what transfer learning predicts.</a:t>
+            </a:r>
+            <a:endParaRPr lang="en-US" sz="1450" dirty="0"/>
+          </a:p>
+        </p:txBody>
+      </p:sp>
+    </p:spTree>
+  </p:cSld>
+  <p:clrMapOvr>
+    <a:masterClrMapping/>
+  </p:clrMapOvr>
+</p:sld>
+</file>
+
+<file path=ppt/slides/slide28.xml><?xml version="1.0" encoding="utf-8"?>
+<p:sld xmlns:a="http://schemas.openxmlformats.org/drawingml/2006/main" xmlns:r="http://schemas.openxmlformats.org/officeDocument/2006/relationships" xmlns:p="http://schemas.openxmlformats.org/presentationml/2006/main">
+  <p:cSld name="Slide 28">
+    <p:bg>
+      <p:bgPr>
+        <a:solidFill>
+          <a:srgbClr val="FFFFFF"/>
+        </a:solidFill>
+      </p:bgPr>
+    </p:bg>
+    <p:spTree>
+      <p:nvGrpSpPr>
+        <p:cNvPr id="1" name=""/>
+        <p:cNvGrpSpPr/>
+        <p:nvPr/>
+      </p:nvGrpSpPr>
+      <p:grpSpPr>
+        <a:xfrm>
+          <a:off x="0" y="0"/>
+          <a:ext cx="0" cy="0"/>
+          <a:chOff x="0" y="0"/>
+          <a:chExt cx="0" cy="0"/>
+        </a:xfrm>
+      </p:grpSpPr>
+      <p:sp>
+        <p:nvSpPr>
+          <p:cNvPr id="2" name="Text 0"/>
+          <p:cNvSpPr/>
+          <p:nvPr/>
+        </p:nvSpPr>
+        <p:spPr>
+          <a:xfrm>
+            <a:off x="502920" y="274320"/>
+            <a:ext cx="11155680" cy="658368"/>
+          </a:xfrm>
+          <a:prstGeom prst="rect">
+            <a:avLst/>
+          </a:prstGeom>
+          <a:noFill/>
+          <a:ln/>
+        </p:spPr>
+        <p:txBody>
+          <a:bodyPr wrap="square" lIns="0" tIns="0" rIns="0" bIns="0" rtlCol="0" anchor="ctr"/>
+          <a:lstStyle/>
+          <a:p>
+            <a:pPr algn="l" indent="0" marL="0">
+              <a:buNone/>
+            </a:pPr>
+            <a:r>
+              <a:rPr lang="en-US" sz="3000" b="1" dirty="0">
+                <a:solidFill>
+                  <a:srgbClr val="21295C"/>
+                </a:solidFill>
+                <a:latin typeface="Arial" pitchFamily="34" charset="0"/>
+                <a:ea typeface="Arial" pitchFamily="34" charset="-122"/>
+                <a:cs typeface="Arial" pitchFamily="34" charset="-120"/>
+              </a:rPr>
+              <a:t>Before believing a negative result, we tried to break it</a:t>
+            </a:r>
+            <a:endParaRPr lang="en-US" sz="3000" dirty="0"/>
+          </a:p>
+        </p:txBody>
+      </p:sp>
+      <p:sp>
+        <p:nvSpPr>
+          <p:cNvPr id="3" name="Text 1"/>
+          <p:cNvSpPr/>
+          <p:nvPr/>
+        </p:nvSpPr>
+        <p:spPr>
+          <a:xfrm>
+            <a:off x="502920" y="941832"/>
+            <a:ext cx="11155680" cy="384048"/>
+          </a:xfrm>
+          <a:prstGeom prst="rect">
+            <a:avLst/>
+          </a:prstGeom>
+          <a:noFill/>
+          <a:ln/>
+        </p:spPr>
+        <p:txBody>
+          <a:bodyPr wrap="square" lIns="0" tIns="0" rIns="0" bIns="0" rtlCol="0" anchor="ctr"/>
+          <a:lstStyle/>
+          <a:p>
+            <a:pPr algn="l" indent="0" marL="0">
+              <a:buNone/>
+            </a:pPr>
+            <a:r>
+              <a:rPr lang="en-US" sz="1700" dirty="0">
+                <a:solidFill>
+                  <a:srgbClr val="5A6068"/>
+                </a:solidFill>
+                <a:latin typeface="Arial" pitchFamily="34" charset="0"/>
+                <a:ea typeface="Arial" pitchFamily="34" charset="-122"/>
+                <a:cs typeface="Arial" pitchFamily="34" charset="-120"/>
+              </a:rPr>
+              <a:t>The obvious objection, and what happened when we tested it</a:t>
+            </a:r>
+            <a:endParaRPr lang="en-US" sz="1700" dirty="0"/>
+          </a:p>
+        </p:txBody>
+      </p:sp>
+      <p:sp>
+        <p:nvSpPr>
+          <p:cNvPr id="4" name="Text 2"/>
+          <p:cNvSpPr/>
+          <p:nvPr/>
+        </p:nvSpPr>
+        <p:spPr>
+          <a:xfrm>
+            <a:off x="11631168" y="6355080"/>
+            <a:ext cx="411480" cy="274320"/>
+          </a:xfrm>
+          <a:prstGeom prst="rect">
+            <a:avLst/>
+          </a:prstGeom>
+          <a:noFill/>
+          <a:ln/>
+        </p:spPr>
+        <p:txBody>
+          <a:bodyPr wrap="square" lIns="0" tIns="0" rIns="0" bIns="0" rtlCol="0" anchor="ctr"/>
+          <a:lstStyle/>
+          <a:p>
+            <a:pPr algn="r" indent="0" marL="0">
+              <a:buNone/>
+            </a:pPr>
+            <a:r>
+              <a:rPr lang="en-US" sz="1200" dirty="0">
+                <a:solidFill>
+                  <a:srgbClr val="AAB0B8"/>
+                </a:solidFill>
+                <a:latin typeface="Arial" pitchFamily="34" charset="0"/>
+                <a:ea typeface="Arial" pitchFamily="34" charset="-122"/>
+                <a:cs typeface="Arial" pitchFamily="34" charset="-120"/>
+              </a:rPr>
+              <a:t>28</a:t>
             </a:r>
             <a:endParaRPr lang="en-US" sz="1200" dirty="0"/>
           </a:p>
@@ -19463,7 +19894,7 @@
       </p:sp>
       <p:graphicFrame>
         <p:nvGraphicFramePr>
-          <p:cNvPr id="28" name="Table 0"/>
+          <p:cNvPr id="29" name="Table 0"/>
           <p:cNvGraphicFramePr>
             <a:graphicFrameLocks noGrp="1"/>
           </p:cNvGraphicFramePr>
@@ -22147,1901 +22578,6 @@
 </p:sld>
 </file>
 
-<file path=ppt/slides/slide28.xml><?xml version="1.0" encoding="utf-8"?>
-<p:sld xmlns:a="http://schemas.openxmlformats.org/drawingml/2006/main" xmlns:r="http://schemas.openxmlformats.org/officeDocument/2006/relationships" xmlns:p="http://schemas.openxmlformats.org/presentationml/2006/main">
-  <p:cSld name="Slide 28">
-    <p:bg>
-      <p:bgPr>
-        <a:solidFill>
-          <a:srgbClr val="FFFFFF"/>
-        </a:solidFill>
-      </p:bgPr>
-    </p:bg>
-    <p:spTree>
-      <p:nvGrpSpPr>
-        <p:cNvPr id="1" name=""/>
-        <p:cNvGrpSpPr/>
-        <p:nvPr/>
-      </p:nvGrpSpPr>
-      <p:grpSpPr>
-        <a:xfrm>
-          <a:off x="0" y="0"/>
-          <a:ext cx="0" cy="0"/>
-          <a:chOff x="0" y="0"/>
-          <a:chExt cx="0" cy="0"/>
-        </a:xfrm>
-      </p:grpSpPr>
-      <p:sp>
-        <p:nvSpPr>
-          <p:cNvPr id="2" name="Text 0"/>
-          <p:cNvSpPr/>
-          <p:nvPr/>
-        </p:nvSpPr>
-        <p:spPr>
-          <a:xfrm>
-            <a:off x="502920" y="274320"/>
-            <a:ext cx="11155680" cy="658368"/>
-          </a:xfrm>
-          <a:prstGeom prst="rect">
-            <a:avLst/>
-          </a:prstGeom>
-          <a:noFill/>
-          <a:ln/>
-        </p:spPr>
-        <p:txBody>
-          <a:bodyPr wrap="square" lIns="0" tIns="0" rIns="0" bIns="0" rtlCol="0" anchor="ctr"/>
-          <a:lstStyle/>
-          <a:p>
-            <a:pPr algn="l" indent="0" marL="0">
-              <a:buNone/>
-            </a:pPr>
-            <a:r>
-              <a:rPr lang="en-US" sz="3000" b="1" dirty="0">
-                <a:solidFill>
-                  <a:srgbClr val="21295C"/>
-                </a:solidFill>
-                <a:latin typeface="Arial" pitchFamily="34" charset="0"/>
-                <a:ea typeface="Arial" pitchFamily="34" charset="-122"/>
-                <a:cs typeface="Arial" pitchFamily="34" charset="-120"/>
-              </a:rPr>
-              <a:t>Where the project stands today</a:t>
-            </a:r>
-            <a:endParaRPr lang="en-US" sz="3000" dirty="0"/>
-          </a:p>
-        </p:txBody>
-      </p:sp>
-      <p:sp>
-        <p:nvSpPr>
-          <p:cNvPr id="3" name="Text 1"/>
-          <p:cNvSpPr/>
-          <p:nvPr/>
-        </p:nvSpPr>
-        <p:spPr>
-          <a:xfrm>
-            <a:off x="502920" y="941832"/>
-            <a:ext cx="11155680" cy="384048"/>
-          </a:xfrm>
-          <a:prstGeom prst="rect">
-            <a:avLst/>
-          </a:prstGeom>
-          <a:noFill/>
-          <a:ln/>
-        </p:spPr>
-        <p:txBody>
-          <a:bodyPr wrap="square" lIns="0" tIns="0" rIns="0" bIns="0" rtlCol="0" anchor="ctr"/>
-          <a:lstStyle/>
-          <a:p>
-            <a:pPr algn="l" indent="0" marL="0">
-              <a:buNone/>
-            </a:pPr>
-            <a:r>
-              <a:rPr lang="en-US" sz="1700" dirty="0">
-                <a:solidFill>
-                  <a:srgbClr val="5A6068"/>
-                </a:solidFill>
-                <a:latin typeface="Arial" pitchFamily="34" charset="0"/>
-                <a:ea typeface="Arial" pitchFamily="34" charset="-122"/>
-                <a:cs typeface="Arial" pitchFamily="34" charset="-120"/>
-              </a:rPr>
-              <a:t>Everything that survived, and everything that did not</a:t>
-            </a:r>
-            <a:endParaRPr lang="en-US" sz="1700" dirty="0"/>
-          </a:p>
-        </p:txBody>
-      </p:sp>
-      <p:sp>
-        <p:nvSpPr>
-          <p:cNvPr id="4" name="Text 2"/>
-          <p:cNvSpPr/>
-          <p:nvPr/>
-        </p:nvSpPr>
-        <p:spPr>
-          <a:xfrm>
-            <a:off x="11631168" y="6355080"/>
-            <a:ext cx="411480" cy="274320"/>
-          </a:xfrm>
-          <a:prstGeom prst="rect">
-            <a:avLst/>
-          </a:prstGeom>
-          <a:noFill/>
-          <a:ln/>
-        </p:spPr>
-        <p:txBody>
-          <a:bodyPr wrap="square" lIns="0" tIns="0" rIns="0" bIns="0" rtlCol="0" anchor="ctr"/>
-          <a:lstStyle/>
-          <a:p>
-            <a:pPr algn="r" indent="0" marL="0">
-              <a:buNone/>
-            </a:pPr>
-            <a:r>
-              <a:rPr lang="en-US" sz="1200" dirty="0">
-                <a:solidFill>
-                  <a:srgbClr val="AAB0B8"/>
-                </a:solidFill>
-                <a:latin typeface="Arial" pitchFamily="34" charset="0"/>
-                <a:ea typeface="Arial" pitchFamily="34" charset="-122"/>
-                <a:cs typeface="Arial" pitchFamily="34" charset="-120"/>
-              </a:rPr>
-              <a:t>28</a:t>
-            </a:r>
-            <a:endParaRPr lang="en-US" sz="1200" dirty="0"/>
-          </a:p>
-        </p:txBody>
-      </p:sp>
-      <p:sp>
-        <p:nvSpPr>
-          <p:cNvPr id="5" name="Text 3"/>
-          <p:cNvSpPr/>
-          <p:nvPr/>
-        </p:nvSpPr>
-        <p:spPr>
-          <a:xfrm>
-            <a:off x="502920" y="1481328"/>
-            <a:ext cx="5440680" cy="365760"/>
-          </a:xfrm>
-          <a:prstGeom prst="rect">
-            <a:avLst/>
-          </a:prstGeom>
-          <a:noFill/>
-          <a:ln/>
-        </p:spPr>
-        <p:txBody>
-          <a:bodyPr wrap="square" lIns="0" tIns="0" rIns="0" bIns="0" rtlCol="0" anchor="ctr"/>
-          <a:lstStyle/>
-          <a:p>
-            <a:pPr indent="0" marL="0">
-              <a:buNone/>
-            </a:pPr>
-            <a:r>
-              <a:rPr lang="en-US" sz="2000" b="1" dirty="0">
-                <a:solidFill>
-                  <a:srgbClr val="1A7A3C"/>
-                </a:solidFill>
-                <a:latin typeface="Arial" pitchFamily="34" charset="0"/>
-                <a:ea typeface="Arial" pitchFamily="34" charset="-122"/>
-                <a:cs typeface="Arial" pitchFamily="34" charset="-120"/>
-              </a:rPr>
-              <a:t>STILL STANDING</a:t>
-            </a:r>
-            <a:endParaRPr lang="en-US" sz="2000" dirty="0"/>
-          </a:p>
-        </p:txBody>
-      </p:sp>
-      <p:sp>
-        <p:nvSpPr>
-          <p:cNvPr id="6" name="Text 4"/>
-          <p:cNvSpPr/>
-          <p:nvPr/>
-        </p:nvSpPr>
-        <p:spPr>
-          <a:xfrm>
-            <a:off x="502920" y="1828800"/>
-            <a:ext cx="5440680" cy="274320"/>
-          </a:xfrm>
-          <a:prstGeom prst="rect">
-            <a:avLst/>
-          </a:prstGeom>
-          <a:noFill/>
-          <a:ln/>
-        </p:spPr>
-        <p:txBody>
-          <a:bodyPr wrap="square" lIns="0" tIns="0" rIns="0" bIns="0" rtlCol="0" anchor="ctr"/>
-          <a:lstStyle/>
-          <a:p>
-            <a:pPr indent="0" marL="0">
-              <a:buNone/>
-            </a:pPr>
-            <a:r>
-              <a:rPr lang="en-US" sz="1500" i="1" dirty="0">
-                <a:solidFill>
-                  <a:srgbClr val="5A6068"/>
-                </a:solidFill>
-                <a:latin typeface="Arial" pitchFamily="34" charset="0"/>
-                <a:ea typeface="Arial" pitchFamily="34" charset="-122"/>
-                <a:cs typeface="Arial" pitchFamily="34" charset="-120"/>
-              </a:rPr>
-              <a:t>paired comparisons, plus the one 2 sd result</a:t>
-            </a:r>
-            <a:endParaRPr lang="en-US" sz="1500" dirty="0"/>
-          </a:p>
-        </p:txBody>
-      </p:sp>
-      <p:sp>
-        <p:nvSpPr>
-          <p:cNvPr id="7" name="Shape 5"/>
-          <p:cNvSpPr/>
-          <p:nvPr/>
-        </p:nvSpPr>
-        <p:spPr>
-          <a:xfrm>
-            <a:off x="502920" y="2194560"/>
-            <a:ext cx="5440680" cy="749808"/>
-          </a:xfrm>
-          <a:prstGeom prst="roundRect">
-            <a:avLst>
-              <a:gd name="adj" fmla="val 9756"/>
-            </a:avLst>
-          </a:prstGeom>
-          <a:solidFill>
-            <a:srgbClr val="EBF5EE"/>
-          </a:solidFill>
-          <a:ln/>
-        </p:spPr>
-      </p:sp>
-      <p:sp>
-        <p:nvSpPr>
-          <p:cNvPr id="8" name="Text 6"/>
-          <p:cNvSpPr/>
-          <p:nvPr/>
-        </p:nvSpPr>
-        <p:spPr>
-          <a:xfrm>
-            <a:off x="731520" y="2267712"/>
-            <a:ext cx="3566160" cy="329184"/>
-          </a:xfrm>
-          <a:prstGeom prst="rect">
-            <a:avLst/>
-          </a:prstGeom>
-          <a:noFill/>
-          <a:ln/>
-        </p:spPr>
-        <p:txBody>
-          <a:bodyPr wrap="square" lIns="0" tIns="0" rIns="0" bIns="0" rtlCol="0" anchor="ctr"/>
-          <a:lstStyle/>
-          <a:p>
-            <a:pPr indent="0" marL="0">
-              <a:buNone/>
-            </a:pPr>
-            <a:r>
-              <a:rPr lang="en-US" sz="1550" dirty="0">
-                <a:solidFill>
-                  <a:srgbClr val="1A1A1A"/>
-                </a:solidFill>
-                <a:latin typeface="Arial" pitchFamily="34" charset="0"/>
-                <a:ea typeface="Arial" pitchFamily="34" charset="-122"/>
-                <a:cs typeface="Arial" pitchFamily="34" charset="-120"/>
-              </a:rPr>
-              <a:t>Masked pretraining &gt; random init</a:t>
-            </a:r>
-            <a:endParaRPr lang="en-US" sz="1550" dirty="0"/>
-          </a:p>
-        </p:txBody>
-      </p:sp>
-      <p:sp>
-        <p:nvSpPr>
-          <p:cNvPr id="9" name="Text 7"/>
-          <p:cNvSpPr/>
-          <p:nvPr/>
-        </p:nvSpPr>
-        <p:spPr>
-          <a:xfrm>
-            <a:off x="4297680" y="2267712"/>
-            <a:ext cx="1463040" cy="329184"/>
-          </a:xfrm>
-          <a:prstGeom prst="rect">
-            <a:avLst/>
-          </a:prstGeom>
-          <a:noFill/>
-          <a:ln/>
-        </p:spPr>
-        <p:txBody>
-          <a:bodyPr wrap="square" lIns="0" tIns="0" rIns="0" bIns="0" rtlCol="0" anchor="ctr"/>
-          <a:lstStyle/>
-          <a:p>
-            <a:pPr algn="r" indent="0" marL="0">
-              <a:buNone/>
-            </a:pPr>
-            <a:r>
-              <a:rPr lang="en-US" sz="1550" b="1" dirty="0">
-                <a:solidFill>
-                  <a:srgbClr val="1A7A3C"/>
-                </a:solidFill>
-                <a:latin typeface="Arial" pitchFamily="34" charset="0"/>
-                <a:ea typeface="Arial" pitchFamily="34" charset="-122"/>
-                <a:cs typeface="Arial" pitchFamily="34" charset="-120"/>
-              </a:rPr>
-              <a:t>+0.117</a:t>
-            </a:r>
-            <a:endParaRPr lang="en-US" sz="1550" dirty="0"/>
-          </a:p>
-        </p:txBody>
-      </p:sp>
-      <p:sp>
-        <p:nvSpPr>
-          <p:cNvPr id="10" name="Text 8"/>
-          <p:cNvSpPr/>
-          <p:nvPr/>
-        </p:nvSpPr>
-        <p:spPr>
-          <a:xfrm>
-            <a:off x="731520" y="2596896"/>
-            <a:ext cx="5029200" cy="274320"/>
-          </a:xfrm>
-          <a:prstGeom prst="rect">
-            <a:avLst/>
-          </a:prstGeom>
-          <a:noFill/>
-          <a:ln/>
-        </p:spPr>
-        <p:txBody>
-          <a:bodyPr wrap="square" lIns="0" tIns="0" rIns="0" bIns="0" rtlCol="0" anchor="ctr"/>
-          <a:lstStyle/>
-          <a:p>
-            <a:pPr indent="0" marL="0">
-              <a:buNone/>
-            </a:pPr>
-            <a:r>
-              <a:rPr lang="en-US" sz="1350" dirty="0">
-                <a:solidFill>
-                  <a:srgbClr val="5A6068"/>
-                </a:solidFill>
-                <a:latin typeface="Arial" pitchFamily="34" charset="0"/>
-                <a:ea typeface="Arial" pitchFamily="34" charset="-122"/>
-                <a:cs typeface="Arial" pitchFamily="34" charset="-120"/>
-              </a:rPr>
-              <a:t>2.6 sd, 5/5 targets</a:t>
-            </a:r>
-            <a:endParaRPr lang="en-US" sz="1350" dirty="0"/>
-          </a:p>
-        </p:txBody>
-      </p:sp>
-      <p:sp>
-        <p:nvSpPr>
-          <p:cNvPr id="11" name="Shape 9"/>
-          <p:cNvSpPr/>
-          <p:nvPr/>
-        </p:nvSpPr>
-        <p:spPr>
-          <a:xfrm>
-            <a:off x="502920" y="3054096"/>
-            <a:ext cx="5440680" cy="749808"/>
-          </a:xfrm>
-          <a:prstGeom prst="roundRect">
-            <a:avLst>
-              <a:gd name="adj" fmla="val 9756"/>
-            </a:avLst>
-          </a:prstGeom>
-          <a:solidFill>
-            <a:srgbClr val="EBF5EE"/>
-          </a:solidFill>
-          <a:ln/>
-        </p:spPr>
-      </p:sp>
-      <p:sp>
-        <p:nvSpPr>
-          <p:cNvPr id="12" name="Text 10"/>
-          <p:cNvSpPr/>
-          <p:nvPr/>
-        </p:nvSpPr>
-        <p:spPr>
-          <a:xfrm>
-            <a:off x="731520" y="3127248"/>
-            <a:ext cx="3566160" cy="329184"/>
-          </a:xfrm>
-          <a:prstGeom prst="rect">
-            <a:avLst/>
-          </a:prstGeom>
-          <a:noFill/>
-          <a:ln/>
-        </p:spPr>
-        <p:txBody>
-          <a:bodyPr wrap="square" lIns="0" tIns="0" rIns="0" bIns="0" rtlCol="0" anchor="ctr"/>
-          <a:lstStyle/>
-          <a:p>
-            <a:pPr indent="0" marL="0">
-              <a:buNone/>
-            </a:pPr>
-            <a:r>
-              <a:rPr lang="en-US" sz="1550" dirty="0">
-                <a:solidFill>
-                  <a:srgbClr val="1A1A1A"/>
-                </a:solidFill>
-                <a:latin typeface="Arial" pitchFamily="34" charset="0"/>
-                <a:ea typeface="Arial" pitchFamily="34" charset="-122"/>
-                <a:cs typeface="Arial" pitchFamily="34" charset="-120"/>
-              </a:rPr>
-              <a:t>LogReg probe &gt; trained DNN head</a:t>
-            </a:r>
-            <a:endParaRPr lang="en-US" sz="1550" dirty="0"/>
-          </a:p>
-        </p:txBody>
-      </p:sp>
-      <p:sp>
-        <p:nvSpPr>
-          <p:cNvPr id="13" name="Text 11"/>
-          <p:cNvSpPr/>
-          <p:nvPr/>
-        </p:nvSpPr>
-        <p:spPr>
-          <a:xfrm>
-            <a:off x="4297680" y="3127248"/>
-            <a:ext cx="1463040" cy="329184"/>
-          </a:xfrm>
-          <a:prstGeom prst="rect">
-            <a:avLst/>
-          </a:prstGeom>
-          <a:noFill/>
-          <a:ln/>
-        </p:spPr>
-        <p:txBody>
-          <a:bodyPr wrap="square" lIns="0" tIns="0" rIns="0" bIns="0" rtlCol="0" anchor="ctr"/>
-          <a:lstStyle/>
-          <a:p>
-            <a:pPr algn="r" indent="0" marL="0">
-              <a:buNone/>
-            </a:pPr>
-            <a:r>
-              <a:rPr lang="en-US" sz="1550" b="1" dirty="0">
-                <a:solidFill>
-                  <a:srgbClr val="1A7A3C"/>
-                </a:solidFill>
-                <a:latin typeface="Arial" pitchFamily="34" charset="0"/>
-                <a:ea typeface="Arial" pitchFamily="34" charset="-122"/>
-                <a:cs typeface="Arial" pitchFamily="34" charset="-120"/>
-              </a:rPr>
-              <a:t>+0.120</a:t>
-            </a:r>
-            <a:endParaRPr lang="en-US" sz="1550" dirty="0"/>
-          </a:p>
-        </p:txBody>
-      </p:sp>
-      <p:sp>
-        <p:nvSpPr>
-          <p:cNvPr id="14" name="Text 12"/>
-          <p:cNvSpPr/>
-          <p:nvPr/>
-        </p:nvSpPr>
-        <p:spPr>
-          <a:xfrm>
-            <a:off x="731520" y="3456432"/>
-            <a:ext cx="5029200" cy="274320"/>
-          </a:xfrm>
-          <a:prstGeom prst="rect">
-            <a:avLst/>
-          </a:prstGeom>
-          <a:noFill/>
-          <a:ln/>
-        </p:spPr>
-        <p:txBody>
-          <a:bodyPr wrap="square" lIns="0" tIns="0" rIns="0" bIns="0" rtlCol="0" anchor="ctr"/>
-          <a:lstStyle/>
-          <a:p>
-            <a:pPr indent="0" marL="0">
-              <a:buNone/>
-            </a:pPr>
-            <a:r>
-              <a:rPr lang="en-US" sz="1350" dirty="0">
-                <a:solidFill>
-                  <a:srgbClr val="5A6068"/>
-                </a:solidFill>
-                <a:latin typeface="Arial" pitchFamily="34" charset="0"/>
-                <a:ea typeface="Arial" pitchFamily="34" charset="-122"/>
-                <a:cs typeface="Arial" pitchFamily="34" charset="-120"/>
-              </a:rPr>
-              <a:t>paired, 5/5</a:t>
-            </a:r>
-            <a:endParaRPr lang="en-US" sz="1350" dirty="0"/>
-          </a:p>
-        </p:txBody>
-      </p:sp>
-      <p:sp>
-        <p:nvSpPr>
-          <p:cNvPr id="15" name="Shape 13"/>
-          <p:cNvSpPr/>
-          <p:nvPr/>
-        </p:nvSpPr>
-        <p:spPr>
-          <a:xfrm>
-            <a:off x="502920" y="3913632"/>
-            <a:ext cx="5440680" cy="749808"/>
-          </a:xfrm>
-          <a:prstGeom prst="roundRect">
-            <a:avLst>
-              <a:gd name="adj" fmla="val 9756"/>
-            </a:avLst>
-          </a:prstGeom>
-          <a:solidFill>
-            <a:srgbClr val="EBF5EE"/>
-          </a:solidFill>
-          <a:ln/>
-        </p:spPr>
-      </p:sp>
-      <p:sp>
-        <p:nvSpPr>
-          <p:cNvPr id="16" name="Text 14"/>
-          <p:cNvSpPr/>
-          <p:nvPr/>
-        </p:nvSpPr>
-        <p:spPr>
-          <a:xfrm>
-            <a:off x="731520" y="3986784"/>
-            <a:ext cx="3566160" cy="329184"/>
-          </a:xfrm>
-          <a:prstGeom prst="rect">
-            <a:avLst/>
-          </a:prstGeom>
-          <a:noFill/>
-          <a:ln/>
-        </p:spPr>
-        <p:txBody>
-          <a:bodyPr wrap="square" lIns="0" tIns="0" rIns="0" bIns="0" rtlCol="0" anchor="ctr"/>
-          <a:lstStyle/>
-          <a:p>
-            <a:pPr indent="0" marL="0">
-              <a:buNone/>
-            </a:pPr>
-            <a:r>
-              <a:rPr lang="en-US" sz="1550" dirty="0">
-                <a:solidFill>
-                  <a:srgbClr val="1A1A1A"/>
-                </a:solidFill>
-                <a:latin typeface="Arial" pitchFamily="34" charset="0"/>
-                <a:ea typeface="Arial" pitchFamily="34" charset="-122"/>
-                <a:cs typeface="Arial" pitchFamily="34" charset="-120"/>
-              </a:rPr>
-              <a:t>Position-preserving pooling</a:t>
-            </a:r>
-            <a:endParaRPr lang="en-US" sz="1550" dirty="0"/>
-          </a:p>
-        </p:txBody>
-      </p:sp>
-      <p:sp>
-        <p:nvSpPr>
-          <p:cNvPr id="17" name="Text 15"/>
-          <p:cNvSpPr/>
-          <p:nvPr/>
-        </p:nvSpPr>
-        <p:spPr>
-          <a:xfrm>
-            <a:off x="4297680" y="3986784"/>
-            <a:ext cx="1463040" cy="329184"/>
-          </a:xfrm>
-          <a:prstGeom prst="rect">
-            <a:avLst/>
-          </a:prstGeom>
-          <a:noFill/>
-          <a:ln/>
-        </p:spPr>
-        <p:txBody>
-          <a:bodyPr wrap="square" lIns="0" tIns="0" rIns="0" bIns="0" rtlCol="0" anchor="ctr"/>
-          <a:lstStyle/>
-          <a:p>
-            <a:pPr algn="r" indent="0" marL="0">
-              <a:buNone/>
-            </a:pPr>
-            <a:r>
-              <a:rPr lang="en-US" sz="1550" b="1" dirty="0">
-                <a:solidFill>
-                  <a:srgbClr val="1A7A3C"/>
-                </a:solidFill>
-                <a:latin typeface="Arial" pitchFamily="34" charset="0"/>
-                <a:ea typeface="Arial" pitchFamily="34" charset="-122"/>
-                <a:cs typeface="Arial" pitchFamily="34" charset="-120"/>
-              </a:rPr>
-              <a:t>+0.03…+0.13</a:t>
-            </a:r>
-            <a:endParaRPr lang="en-US" sz="1550" dirty="0"/>
-          </a:p>
-        </p:txBody>
-      </p:sp>
-      <p:sp>
-        <p:nvSpPr>
-          <p:cNvPr id="18" name="Text 16"/>
-          <p:cNvSpPr/>
-          <p:nvPr/>
-        </p:nvSpPr>
-        <p:spPr>
-          <a:xfrm>
-            <a:off x="731520" y="4315968"/>
-            <a:ext cx="5029200" cy="274320"/>
-          </a:xfrm>
-          <a:prstGeom prst="rect">
-            <a:avLst/>
-          </a:prstGeom>
-          <a:noFill/>
-          <a:ln/>
-        </p:spPr>
-        <p:txBody>
-          <a:bodyPr wrap="square" lIns="0" tIns="0" rIns="0" bIns="0" rtlCol="0" anchor="ctr"/>
-          <a:lstStyle/>
-          <a:p>
-            <a:pPr indent="0" marL="0">
-              <a:buNone/>
-            </a:pPr>
-            <a:r>
-              <a:rPr lang="en-US" sz="1350" dirty="0">
-                <a:solidFill>
-                  <a:srgbClr val="5A6068"/>
-                </a:solidFill>
-                <a:latin typeface="Arial" pitchFamily="34" charset="0"/>
-                <a:ea typeface="Arial" pitchFamily="34" charset="-122"/>
-                <a:cs typeface="Arial" pitchFamily="34" charset="-120"/>
-              </a:rPr>
-              <a:t>paired, 5/5</a:t>
-            </a:r>
-            <a:endParaRPr lang="en-US" sz="1350" dirty="0"/>
-          </a:p>
-        </p:txBody>
-      </p:sp>
-      <p:sp>
-        <p:nvSpPr>
-          <p:cNvPr id="19" name="Shape 17"/>
-          <p:cNvSpPr/>
-          <p:nvPr/>
-        </p:nvSpPr>
-        <p:spPr>
-          <a:xfrm>
-            <a:off x="502920" y="4773168"/>
-            <a:ext cx="5440680" cy="749808"/>
-          </a:xfrm>
-          <a:prstGeom prst="roundRect">
-            <a:avLst>
-              <a:gd name="adj" fmla="val 9756"/>
-            </a:avLst>
-          </a:prstGeom>
-          <a:solidFill>
-            <a:srgbClr val="EBF5EE"/>
-          </a:solidFill>
-          <a:ln/>
-        </p:spPr>
-      </p:sp>
-      <p:sp>
-        <p:nvSpPr>
-          <p:cNvPr id="20" name="Text 18"/>
-          <p:cNvSpPr/>
-          <p:nvPr/>
-        </p:nvSpPr>
-        <p:spPr>
-          <a:xfrm>
-            <a:off x="731520" y="4846320"/>
-            <a:ext cx="3566160" cy="329184"/>
-          </a:xfrm>
-          <a:prstGeom prst="rect">
-            <a:avLst/>
-          </a:prstGeom>
-          <a:noFill/>
-          <a:ln/>
-        </p:spPr>
-        <p:txBody>
-          <a:bodyPr wrap="square" lIns="0" tIns="0" rIns="0" bIns="0" rtlCol="0" anchor="ctr"/>
-          <a:lstStyle/>
-          <a:p>
-            <a:pPr indent="0" marL="0">
-              <a:buNone/>
-            </a:pPr>
-            <a:r>
-              <a:rPr lang="en-US" sz="1550" dirty="0">
-                <a:solidFill>
-                  <a:srgbClr val="1A1A1A"/>
-                </a:solidFill>
-                <a:latin typeface="Arial" pitchFamily="34" charset="0"/>
-                <a:ea typeface="Arial" pitchFamily="34" charset="-122"/>
-                <a:cs typeface="Arial" pitchFamily="34" charset="-120"/>
-              </a:rPr>
-              <a:t>Same pooling on jigsaw / joint</a:t>
-            </a:r>
-            <a:endParaRPr lang="en-US" sz="1550" dirty="0"/>
-          </a:p>
-        </p:txBody>
-      </p:sp>
-      <p:sp>
-        <p:nvSpPr>
-          <p:cNvPr id="21" name="Text 19"/>
-          <p:cNvSpPr/>
-          <p:nvPr/>
-        </p:nvSpPr>
-        <p:spPr>
-          <a:xfrm>
-            <a:off x="4297680" y="4846320"/>
-            <a:ext cx="1463040" cy="329184"/>
-          </a:xfrm>
-          <a:prstGeom prst="rect">
-            <a:avLst/>
-          </a:prstGeom>
-          <a:noFill/>
-          <a:ln/>
-        </p:spPr>
-        <p:txBody>
-          <a:bodyPr wrap="square" lIns="0" tIns="0" rIns="0" bIns="0" rtlCol="0" anchor="ctr"/>
-          <a:lstStyle/>
-          <a:p>
-            <a:pPr algn="r" indent="0" marL="0">
-              <a:buNone/>
-            </a:pPr>
-            <a:r>
-              <a:rPr lang="en-US" sz="1550" b="1" dirty="0">
-                <a:solidFill>
-                  <a:srgbClr val="1A7A3C"/>
-                </a:solidFill>
-                <a:latin typeface="Arial" pitchFamily="34" charset="0"/>
-                <a:ea typeface="Arial" pitchFamily="34" charset="-122"/>
-                <a:cs typeface="Arial" pitchFamily="34" charset="-120"/>
-              </a:rPr>
-              <a:t>+0.079 / +0.049</a:t>
-            </a:r>
-            <a:endParaRPr lang="en-US" sz="1550" dirty="0"/>
-          </a:p>
-        </p:txBody>
-      </p:sp>
-      <p:sp>
-        <p:nvSpPr>
-          <p:cNvPr id="22" name="Text 20"/>
-          <p:cNvSpPr/>
-          <p:nvPr/>
-        </p:nvSpPr>
-        <p:spPr>
-          <a:xfrm>
-            <a:off x="731520" y="5175504"/>
-            <a:ext cx="5029200" cy="274320"/>
-          </a:xfrm>
-          <a:prstGeom prst="rect">
-            <a:avLst/>
-          </a:prstGeom>
-          <a:noFill/>
-          <a:ln/>
-        </p:spPr>
-        <p:txBody>
-          <a:bodyPr wrap="square" lIns="0" tIns="0" rIns="0" bIns="0" rtlCol="0" anchor="ctr"/>
-          <a:lstStyle/>
-          <a:p>
-            <a:pPr indent="0" marL="0">
-              <a:buNone/>
-            </a:pPr>
-            <a:r>
-              <a:rPr lang="en-US" sz="1350" dirty="0">
-                <a:solidFill>
-                  <a:srgbClr val="5A6068"/>
-                </a:solidFill>
-                <a:latin typeface="Arial" pitchFamily="34" charset="0"/>
-                <a:ea typeface="Arial" pitchFamily="34" charset="-122"/>
-                <a:cs typeface="Arial" pitchFamily="34" charset="-120"/>
-              </a:rPr>
-              <a:t>paired</a:t>
-            </a:r>
-            <a:endParaRPr lang="en-US" sz="1350" dirty="0"/>
-          </a:p>
-        </p:txBody>
-      </p:sp>
-      <p:sp>
-        <p:nvSpPr>
-          <p:cNvPr id="23" name="Text 21"/>
-          <p:cNvSpPr/>
-          <p:nvPr/>
-        </p:nvSpPr>
-        <p:spPr>
-          <a:xfrm>
-            <a:off x="6217920" y="1481328"/>
-            <a:ext cx="5440680" cy="365760"/>
-          </a:xfrm>
-          <a:prstGeom prst="rect">
-            <a:avLst/>
-          </a:prstGeom>
-          <a:noFill/>
-          <a:ln/>
-        </p:spPr>
-        <p:txBody>
-          <a:bodyPr wrap="square" lIns="0" tIns="0" rIns="0" bIns="0" rtlCol="0" anchor="ctr"/>
-          <a:lstStyle/>
-          <a:p>
-            <a:pPr indent="0" marL="0">
-              <a:buNone/>
-            </a:pPr>
-            <a:r>
-              <a:rPr lang="en-US" sz="2000" b="1" dirty="0">
-                <a:solidFill>
-                  <a:srgbClr val="C1435B"/>
-                </a:solidFill>
-                <a:latin typeface="Arial" pitchFamily="34" charset="0"/>
-                <a:ea typeface="Arial" pitchFamily="34" charset="-122"/>
-                <a:cs typeface="Arial" pitchFamily="34" charset="-120"/>
-              </a:rPr>
-              <a:t>RETRACTED or WITHIN NOISE</a:t>
-            </a:r>
-            <a:endParaRPr lang="en-US" sz="2000" dirty="0"/>
-          </a:p>
-        </p:txBody>
-      </p:sp>
-      <p:sp>
-        <p:nvSpPr>
-          <p:cNvPr id="24" name="Text 22"/>
-          <p:cNvSpPr/>
-          <p:nvPr/>
-        </p:nvSpPr>
-        <p:spPr>
-          <a:xfrm>
-            <a:off x="6217920" y="1828800"/>
-            <a:ext cx="5440680" cy="274320"/>
-          </a:xfrm>
-          <a:prstGeom prst="rect">
-            <a:avLst/>
-          </a:prstGeom>
-          <a:noFill/>
-          <a:ln/>
-        </p:spPr>
-        <p:txBody>
-          <a:bodyPr wrap="square" lIns="0" tIns="0" rIns="0" bIns="0" rtlCol="0" anchor="ctr"/>
-          <a:lstStyle/>
-          <a:p>
-            <a:pPr indent="0" marL="0">
-              <a:buNone/>
-            </a:pPr>
-            <a:r>
-              <a:rPr lang="en-US" sz="1500" i="1" dirty="0">
-                <a:solidFill>
-                  <a:srgbClr val="5A6068"/>
-                </a:solidFill>
-                <a:latin typeface="Arial" pitchFamily="34" charset="0"/>
-                <a:ea typeface="Arial" pitchFamily="34" charset="-122"/>
-                <a:cs typeface="Arial" pitchFamily="34" charset="-120"/>
-              </a:rPr>
-              <a:t>everything that rested on a single training run</a:t>
-            </a:r>
-            <a:endParaRPr lang="en-US" sz="1500" dirty="0"/>
-          </a:p>
-        </p:txBody>
-      </p:sp>
-      <p:sp>
-        <p:nvSpPr>
-          <p:cNvPr id="25" name="Shape 23"/>
-          <p:cNvSpPr/>
-          <p:nvPr/>
-        </p:nvSpPr>
-        <p:spPr>
-          <a:xfrm>
-            <a:off x="6217920" y="2194560"/>
-            <a:ext cx="5440680" cy="438912"/>
-          </a:xfrm>
-          <a:prstGeom prst="roundRect">
-            <a:avLst>
-              <a:gd name="adj" fmla="val 16667"/>
-            </a:avLst>
-          </a:prstGeom>
-          <a:solidFill>
-            <a:srgbClr val="FBEEF1"/>
-          </a:solidFill>
-          <a:ln/>
-        </p:spPr>
-      </p:sp>
-      <p:sp>
-        <p:nvSpPr>
-          <p:cNvPr id="26" name="Text 24"/>
-          <p:cNvSpPr/>
-          <p:nvPr/>
-        </p:nvSpPr>
-        <p:spPr>
-          <a:xfrm>
-            <a:off x="6446520" y="2203704"/>
-            <a:ext cx="3657600" cy="246888"/>
-          </a:xfrm>
-          <a:prstGeom prst="rect">
-            <a:avLst/>
-          </a:prstGeom>
-          <a:noFill/>
-          <a:ln/>
-        </p:spPr>
-        <p:txBody>
-          <a:bodyPr wrap="square" lIns="0" tIns="0" rIns="0" bIns="0" rtlCol="0" anchor="ctr"/>
-          <a:lstStyle/>
-          <a:p>
-            <a:pPr indent="0" marL="0">
-              <a:buNone/>
-            </a:pPr>
-            <a:r>
-              <a:rPr lang="en-US" sz="1350" dirty="0">
-                <a:solidFill>
-                  <a:srgbClr val="1A1A1A"/>
-                </a:solidFill>
-                <a:latin typeface="Arial" pitchFamily="34" charset="0"/>
-                <a:ea typeface="Arial" pitchFamily="34" charset="-122"/>
-                <a:cs typeface="Arial" pitchFamily="34" charset="-120"/>
-              </a:rPr>
-              <a:t>v3 corpus better than v4</a:t>
-            </a:r>
-            <a:endParaRPr lang="en-US" sz="1350" dirty="0"/>
-          </a:p>
-        </p:txBody>
-      </p:sp>
-      <p:sp>
-        <p:nvSpPr>
-          <p:cNvPr id="27" name="Text 25"/>
-          <p:cNvSpPr/>
-          <p:nvPr/>
-        </p:nvSpPr>
-        <p:spPr>
-          <a:xfrm>
-            <a:off x="10104120" y="2203704"/>
-            <a:ext cx="1371600" cy="246888"/>
-          </a:xfrm>
-          <a:prstGeom prst="rect">
-            <a:avLst/>
-          </a:prstGeom>
-          <a:noFill/>
-          <a:ln/>
-        </p:spPr>
-        <p:txBody>
-          <a:bodyPr wrap="square" lIns="0" tIns="0" rIns="0" bIns="0" rtlCol="0" anchor="ctr"/>
-          <a:lstStyle/>
-          <a:p>
-            <a:pPr algn="r" indent="0" marL="0">
-              <a:buNone/>
-            </a:pPr>
-            <a:r>
-              <a:rPr lang="en-US" sz="1350" b="1" dirty="0">
-                <a:solidFill>
-                  <a:srgbClr val="C1435B"/>
-                </a:solidFill>
-                <a:latin typeface="Arial" pitchFamily="34" charset="0"/>
-                <a:ea typeface="Arial" pitchFamily="34" charset="-122"/>
-                <a:cs typeface="Arial" pitchFamily="34" charset="-120"/>
-              </a:rPr>
-              <a:t>+0.069</a:t>
-            </a:r>
-            <a:endParaRPr lang="en-US" sz="1350" dirty="0"/>
-          </a:p>
-        </p:txBody>
-      </p:sp>
-      <p:sp>
-        <p:nvSpPr>
-          <p:cNvPr id="28" name="Text 26"/>
-          <p:cNvSpPr/>
-          <p:nvPr/>
-        </p:nvSpPr>
-        <p:spPr>
-          <a:xfrm>
-            <a:off x="6446520" y="2423160"/>
-            <a:ext cx="5029200" cy="219456"/>
-          </a:xfrm>
-          <a:prstGeom prst="rect">
-            <a:avLst/>
-          </a:prstGeom>
-          <a:noFill/>
-          <a:ln/>
-        </p:spPr>
-        <p:txBody>
-          <a:bodyPr wrap="square" lIns="0" tIns="0" rIns="0" bIns="0" rtlCol="0" anchor="ctr"/>
-          <a:lstStyle/>
-          <a:p>
-            <a:pPr indent="0" marL="0">
-              <a:buNone/>
-            </a:pPr>
-            <a:r>
-              <a:rPr lang="en-US" sz="1200" dirty="0">
-                <a:solidFill>
-                  <a:srgbClr val="5A6068"/>
-                </a:solidFill>
-                <a:latin typeface="Arial" pitchFamily="34" charset="0"/>
-                <a:ea typeface="Arial" pitchFamily="34" charset="-122"/>
-                <a:cs typeface="Arial" pitchFamily="34" charset="-120"/>
-              </a:rPr>
-              <a:t>n=5 → −0.014 (0.6 se)</a:t>
-            </a:r>
-            <a:endParaRPr lang="en-US" sz="1200" dirty="0"/>
-          </a:p>
-        </p:txBody>
-      </p:sp>
-      <p:sp>
-        <p:nvSpPr>
-          <p:cNvPr id="29" name="Shape 27"/>
-          <p:cNvSpPr/>
-          <p:nvPr/>
-        </p:nvSpPr>
-        <p:spPr>
-          <a:xfrm>
-            <a:off x="6217920" y="2692908"/>
-            <a:ext cx="5440680" cy="438912"/>
-          </a:xfrm>
-          <a:prstGeom prst="roundRect">
-            <a:avLst>
-              <a:gd name="adj" fmla="val 16667"/>
-            </a:avLst>
-          </a:prstGeom>
-          <a:solidFill>
-            <a:srgbClr val="FBEEF1"/>
-          </a:solidFill>
-          <a:ln/>
-        </p:spPr>
-      </p:sp>
-      <p:sp>
-        <p:nvSpPr>
-          <p:cNvPr id="30" name="Text 28"/>
-          <p:cNvSpPr/>
-          <p:nvPr/>
-        </p:nvSpPr>
-        <p:spPr>
-          <a:xfrm>
-            <a:off x="6446520" y="2702052"/>
-            <a:ext cx="3657600" cy="246888"/>
-          </a:xfrm>
-          <a:prstGeom prst="rect">
-            <a:avLst/>
-          </a:prstGeom>
-          <a:noFill/>
-          <a:ln/>
-        </p:spPr>
-        <p:txBody>
-          <a:bodyPr wrap="square" lIns="0" tIns="0" rIns="0" bIns="0" rtlCol="0" anchor="ctr"/>
-          <a:lstStyle/>
-          <a:p>
-            <a:pPr indent="0" marL="0">
-              <a:buNone/>
-            </a:pPr>
-            <a:r>
-              <a:rPr lang="en-US" sz="1350" dirty="0">
-                <a:solidFill>
-                  <a:srgbClr val="1A1A1A"/>
-                </a:solidFill>
-                <a:latin typeface="Arial" pitchFamily="34" charset="0"/>
-                <a:ea typeface="Arial" pitchFamily="34" charset="-122"/>
-                <a:cs typeface="Arial" pitchFamily="34" charset="-120"/>
-              </a:rPr>
-              <a:t>"Backbone scaling exhausted"</a:t>
-            </a:r>
-            <a:endParaRPr lang="en-US" sz="1350" dirty="0"/>
-          </a:p>
-        </p:txBody>
-      </p:sp>
-      <p:sp>
-        <p:nvSpPr>
-          <p:cNvPr id="31" name="Text 29"/>
-          <p:cNvSpPr/>
-          <p:nvPr/>
-        </p:nvSpPr>
-        <p:spPr>
-          <a:xfrm>
-            <a:off x="10104120" y="2702052"/>
-            <a:ext cx="1371600" cy="246888"/>
-          </a:xfrm>
-          <a:prstGeom prst="rect">
-            <a:avLst/>
-          </a:prstGeom>
-          <a:noFill/>
-          <a:ln/>
-        </p:spPr>
-        <p:txBody>
-          <a:bodyPr wrap="square" lIns="0" tIns="0" rIns="0" bIns="0" rtlCol="0" anchor="ctr"/>
-          <a:lstStyle/>
-          <a:p>
-            <a:pPr algn="r" indent="0" marL="0">
-              <a:buNone/>
-            </a:pPr>
-            <a:r>
-              <a:rPr lang="en-US" sz="1350" b="1" dirty="0">
-                <a:solidFill>
-                  <a:srgbClr val="C1435B"/>
-                </a:solidFill>
-                <a:latin typeface="Arial" pitchFamily="34" charset="0"/>
-                <a:ea typeface="Arial" pitchFamily="34" charset="-122"/>
-                <a:cs typeface="Arial" pitchFamily="34" charset="-120"/>
-              </a:rPr>
-              <a:t>±0.02</a:t>
-            </a:r>
-            <a:endParaRPr lang="en-US" sz="1350" dirty="0"/>
-          </a:p>
-        </p:txBody>
-      </p:sp>
-      <p:sp>
-        <p:nvSpPr>
-          <p:cNvPr id="32" name="Text 30"/>
-          <p:cNvSpPr/>
-          <p:nvPr/>
-        </p:nvSpPr>
-        <p:spPr>
-          <a:xfrm>
-            <a:off x="6446520" y="2921508"/>
-            <a:ext cx="5029200" cy="219456"/>
-          </a:xfrm>
-          <a:prstGeom prst="rect">
-            <a:avLst/>
-          </a:prstGeom>
-          <a:noFill/>
-          <a:ln/>
-        </p:spPr>
-        <p:txBody>
-          <a:bodyPr wrap="square" lIns="0" tIns="0" rIns="0" bIns="0" rtlCol="0" anchor="ctr"/>
-          <a:lstStyle/>
-          <a:p>
-            <a:pPr indent="0" marL="0">
-              <a:buNone/>
-            </a:pPr>
-            <a:r>
-              <a:rPr lang="en-US" sz="1200" dirty="0">
-                <a:solidFill>
-                  <a:srgbClr val="5A6068"/>
-                </a:solidFill>
-                <a:latin typeface="Arial" pitchFamily="34" charset="0"/>
-                <a:ea typeface="Arial" pitchFamily="34" charset="-122"/>
-                <a:cs typeface="Arial" pitchFamily="34" charset="-120"/>
-              </a:rPr>
-              <a:t>within noise</a:t>
-            </a:r>
-            <a:endParaRPr lang="en-US" sz="1200" dirty="0"/>
-          </a:p>
-        </p:txBody>
-      </p:sp>
-      <p:sp>
-        <p:nvSpPr>
-          <p:cNvPr id="33" name="Shape 31"/>
-          <p:cNvSpPr/>
-          <p:nvPr/>
-        </p:nvSpPr>
-        <p:spPr>
-          <a:xfrm>
-            <a:off x="6217920" y="3191256"/>
-            <a:ext cx="5440680" cy="438912"/>
-          </a:xfrm>
-          <a:prstGeom prst="roundRect">
-            <a:avLst>
-              <a:gd name="adj" fmla="val 16667"/>
-            </a:avLst>
-          </a:prstGeom>
-          <a:solidFill>
-            <a:srgbClr val="FBEEF1"/>
-          </a:solidFill>
-          <a:ln/>
-        </p:spPr>
-      </p:sp>
-      <p:sp>
-        <p:nvSpPr>
-          <p:cNvPr id="34" name="Text 32"/>
-          <p:cNvSpPr/>
-          <p:nvPr/>
-        </p:nvSpPr>
-        <p:spPr>
-          <a:xfrm>
-            <a:off x="6446520" y="3200400"/>
-            <a:ext cx="3657600" cy="246888"/>
-          </a:xfrm>
-          <a:prstGeom prst="rect">
-            <a:avLst/>
-          </a:prstGeom>
-          <a:noFill/>
-          <a:ln/>
-        </p:spPr>
-        <p:txBody>
-          <a:bodyPr wrap="square" lIns="0" tIns="0" rIns="0" bIns="0" rtlCol="0" anchor="ctr"/>
-          <a:lstStyle/>
-          <a:p>
-            <a:pPr indent="0" marL="0">
-              <a:buNone/>
-            </a:pPr>
-            <a:r>
-              <a:rPr lang="en-US" sz="1350" dirty="0">
-                <a:solidFill>
-                  <a:srgbClr val="1A1A1A"/>
-                </a:solidFill>
-                <a:latin typeface="Arial" pitchFamily="34" charset="0"/>
-                <a:ea typeface="Arial" pitchFamily="34" charset="-122"/>
-                <a:cs typeface="Arial" pitchFamily="34" charset="-120"/>
-              </a:rPr>
-              <a:t>Patch size 128 / 256 hurt</a:t>
-            </a:r>
-            <a:endParaRPr lang="en-US" sz="1350" dirty="0"/>
-          </a:p>
-        </p:txBody>
-      </p:sp>
-      <p:sp>
-        <p:nvSpPr>
-          <p:cNvPr id="35" name="Text 33"/>
-          <p:cNvSpPr/>
-          <p:nvPr/>
-        </p:nvSpPr>
-        <p:spPr>
-          <a:xfrm>
-            <a:off x="10104120" y="3200400"/>
-            <a:ext cx="1371600" cy="246888"/>
-          </a:xfrm>
-          <a:prstGeom prst="rect">
-            <a:avLst/>
-          </a:prstGeom>
-          <a:noFill/>
-          <a:ln/>
-        </p:spPr>
-        <p:txBody>
-          <a:bodyPr wrap="square" lIns="0" tIns="0" rIns="0" bIns="0" rtlCol="0" anchor="ctr"/>
-          <a:lstStyle/>
-          <a:p>
-            <a:pPr algn="r" indent="0" marL="0">
-              <a:buNone/>
-            </a:pPr>
-            <a:r>
-              <a:rPr lang="en-US" sz="1350" b="1" dirty="0">
-                <a:solidFill>
-                  <a:srgbClr val="C1435B"/>
-                </a:solidFill>
-                <a:latin typeface="Arial" pitchFamily="34" charset="0"/>
-                <a:ea typeface="Arial" pitchFamily="34" charset="-122"/>
-                <a:cs typeface="Arial" pitchFamily="34" charset="-120"/>
-              </a:rPr>
-              <a:t>−0.04</a:t>
-            </a:r>
-            <a:endParaRPr lang="en-US" sz="1350" dirty="0"/>
-          </a:p>
-        </p:txBody>
-      </p:sp>
-      <p:sp>
-        <p:nvSpPr>
-          <p:cNvPr id="36" name="Text 34"/>
-          <p:cNvSpPr/>
-          <p:nvPr/>
-        </p:nvSpPr>
-        <p:spPr>
-          <a:xfrm>
-            <a:off x="6446520" y="3419856"/>
-            <a:ext cx="5029200" cy="219456"/>
-          </a:xfrm>
-          <a:prstGeom prst="rect">
-            <a:avLst/>
-          </a:prstGeom>
-          <a:noFill/>
-          <a:ln/>
-        </p:spPr>
-        <p:txBody>
-          <a:bodyPr wrap="square" lIns="0" tIns="0" rIns="0" bIns="0" rtlCol="0" anchor="ctr"/>
-          <a:lstStyle/>
-          <a:p>
-            <a:pPr indent="0" marL="0">
-              <a:buNone/>
-            </a:pPr>
-            <a:r>
-              <a:rPr lang="en-US" sz="1200" dirty="0">
-                <a:solidFill>
-                  <a:srgbClr val="5A6068"/>
-                </a:solidFill>
-                <a:latin typeface="Arial" pitchFamily="34" charset="0"/>
-                <a:ea typeface="Arial" pitchFamily="34" charset="-122"/>
-                <a:cs typeface="Arial" pitchFamily="34" charset="-120"/>
-              </a:rPr>
-              <a:t>within noise</a:t>
-            </a:r>
-            <a:endParaRPr lang="en-US" sz="1200" dirty="0"/>
-          </a:p>
-        </p:txBody>
-      </p:sp>
-      <p:sp>
-        <p:nvSpPr>
-          <p:cNvPr id="37" name="Shape 35"/>
-          <p:cNvSpPr/>
-          <p:nvPr/>
-        </p:nvSpPr>
-        <p:spPr>
-          <a:xfrm>
-            <a:off x="6217920" y="3689604"/>
-            <a:ext cx="5440680" cy="438912"/>
-          </a:xfrm>
-          <a:prstGeom prst="roundRect">
-            <a:avLst>
-              <a:gd name="adj" fmla="val 16667"/>
-            </a:avLst>
-          </a:prstGeom>
-          <a:solidFill>
-            <a:srgbClr val="FBEEF1"/>
-          </a:solidFill>
-          <a:ln/>
-        </p:spPr>
-      </p:sp>
-      <p:sp>
-        <p:nvSpPr>
-          <p:cNvPr id="38" name="Text 36"/>
-          <p:cNvSpPr/>
-          <p:nvPr/>
-        </p:nvSpPr>
-        <p:spPr>
-          <a:xfrm>
-            <a:off x="6446520" y="3698748"/>
-            <a:ext cx="3657600" cy="246888"/>
-          </a:xfrm>
-          <a:prstGeom prst="rect">
-            <a:avLst/>
-          </a:prstGeom>
-          <a:noFill/>
-          <a:ln/>
-        </p:spPr>
-        <p:txBody>
-          <a:bodyPr wrap="square" lIns="0" tIns="0" rIns="0" bIns="0" rtlCol="0" anchor="ctr"/>
-          <a:lstStyle/>
-          <a:p>
-            <a:pPr indent="0" marL="0">
-              <a:buNone/>
-            </a:pPr>
-            <a:r>
-              <a:rPr lang="en-US" sz="1350" dirty="0">
-                <a:solidFill>
-                  <a:srgbClr val="1A1A1A"/>
-                </a:solidFill>
-                <a:latin typeface="Arial" pitchFamily="34" charset="0"/>
-                <a:ea typeface="Arial" pitchFamily="34" charset="-122"/>
-                <a:cs typeface="Arial" pitchFamily="34" charset="-120"/>
-              </a:rPr>
-              <a:t>Block masking / peak weighting</a:t>
-            </a:r>
-            <a:endParaRPr lang="en-US" sz="1350" dirty="0"/>
-          </a:p>
-        </p:txBody>
-      </p:sp>
-      <p:sp>
-        <p:nvSpPr>
-          <p:cNvPr id="39" name="Text 37"/>
-          <p:cNvSpPr/>
-          <p:nvPr/>
-        </p:nvSpPr>
-        <p:spPr>
-          <a:xfrm>
-            <a:off x="10104120" y="3698748"/>
-            <a:ext cx="1371600" cy="246888"/>
-          </a:xfrm>
-          <a:prstGeom prst="rect">
-            <a:avLst/>
-          </a:prstGeom>
-          <a:noFill/>
-          <a:ln/>
-        </p:spPr>
-        <p:txBody>
-          <a:bodyPr wrap="square" lIns="0" tIns="0" rIns="0" bIns="0" rtlCol="0" anchor="ctr"/>
-          <a:lstStyle/>
-          <a:p>
-            <a:pPr algn="r" indent="0" marL="0">
-              <a:buNone/>
-            </a:pPr>
-            <a:r>
-              <a:rPr lang="en-US" sz="1350" b="1" dirty="0">
-                <a:solidFill>
-                  <a:srgbClr val="C1435B"/>
-                </a:solidFill>
-                <a:latin typeface="Arial" pitchFamily="34" charset="0"/>
-                <a:ea typeface="Arial" pitchFamily="34" charset="-122"/>
-                <a:cs typeface="Arial" pitchFamily="34" charset="-120"/>
-              </a:rPr>
-              <a:t>−0.03 / +0.01</a:t>
-            </a:r>
-            <a:endParaRPr lang="en-US" sz="1350" dirty="0"/>
-          </a:p>
-        </p:txBody>
-      </p:sp>
-      <p:sp>
-        <p:nvSpPr>
-          <p:cNvPr id="40" name="Text 38"/>
-          <p:cNvSpPr/>
-          <p:nvPr/>
-        </p:nvSpPr>
-        <p:spPr>
-          <a:xfrm>
-            <a:off x="6446520" y="3918204"/>
-            <a:ext cx="5029200" cy="219456"/>
-          </a:xfrm>
-          <a:prstGeom prst="rect">
-            <a:avLst/>
-          </a:prstGeom>
-          <a:noFill/>
-          <a:ln/>
-        </p:spPr>
-        <p:txBody>
-          <a:bodyPr wrap="square" lIns="0" tIns="0" rIns="0" bIns="0" rtlCol="0" anchor="ctr"/>
-          <a:lstStyle/>
-          <a:p>
-            <a:pPr indent="0" marL="0">
-              <a:buNone/>
-            </a:pPr>
-            <a:r>
-              <a:rPr lang="en-US" sz="1200" dirty="0">
-                <a:solidFill>
-                  <a:srgbClr val="5A6068"/>
-                </a:solidFill>
-                <a:latin typeface="Arial" pitchFamily="34" charset="0"/>
-                <a:ea typeface="Arial" pitchFamily="34" charset="-122"/>
-                <a:cs typeface="Arial" pitchFamily="34" charset="-120"/>
-              </a:rPr>
-              <a:t>within noise</a:t>
-            </a:r>
-            <a:endParaRPr lang="en-US" sz="1200" dirty="0"/>
-          </a:p>
-        </p:txBody>
-      </p:sp>
-      <p:sp>
-        <p:nvSpPr>
-          <p:cNvPr id="41" name="Shape 39"/>
-          <p:cNvSpPr/>
-          <p:nvPr/>
-        </p:nvSpPr>
-        <p:spPr>
-          <a:xfrm>
-            <a:off x="6217920" y="4187952"/>
-            <a:ext cx="5440680" cy="438912"/>
-          </a:xfrm>
-          <a:prstGeom prst="roundRect">
-            <a:avLst>
-              <a:gd name="adj" fmla="val 16667"/>
-            </a:avLst>
-          </a:prstGeom>
-          <a:solidFill>
-            <a:srgbClr val="FBEEF1"/>
-          </a:solidFill>
-          <a:ln/>
-        </p:spPr>
-      </p:sp>
-      <p:sp>
-        <p:nvSpPr>
-          <p:cNvPr id="42" name="Text 40"/>
-          <p:cNvSpPr/>
-          <p:nvPr/>
-        </p:nvSpPr>
-        <p:spPr>
-          <a:xfrm>
-            <a:off x="6446520" y="4197096"/>
-            <a:ext cx="3657600" cy="246888"/>
-          </a:xfrm>
-          <a:prstGeom prst="rect">
-            <a:avLst/>
-          </a:prstGeom>
-          <a:noFill/>
-          <a:ln/>
-        </p:spPr>
-        <p:txBody>
-          <a:bodyPr wrap="square" lIns="0" tIns="0" rIns="0" bIns="0" rtlCol="0" anchor="ctr"/>
-          <a:lstStyle/>
-          <a:p>
-            <a:pPr indent="0" marL="0">
-              <a:buNone/>
-            </a:pPr>
-            <a:r>
-              <a:rPr lang="en-US" sz="1350" dirty="0">
-                <a:solidFill>
-                  <a:srgbClr val="1A1A1A"/>
-                </a:solidFill>
-                <a:latin typeface="Arial" pitchFamily="34" charset="0"/>
-                <a:ea typeface="Arial" pitchFamily="34" charset="-122"/>
-                <a:cs typeface="Arial" pitchFamily="34" charset="-120"/>
-              </a:rPr>
-              <a:t>"SSL wins in few-shot"</a:t>
-            </a:r>
-            <a:endParaRPr lang="en-US" sz="1350" dirty="0"/>
-          </a:p>
-        </p:txBody>
-      </p:sp>
-      <p:sp>
-        <p:nvSpPr>
-          <p:cNvPr id="43" name="Text 41"/>
-          <p:cNvSpPr/>
-          <p:nvPr/>
-        </p:nvSpPr>
-        <p:spPr>
-          <a:xfrm>
-            <a:off x="10104120" y="4197096"/>
-            <a:ext cx="1371600" cy="246888"/>
-          </a:xfrm>
-          <a:prstGeom prst="rect">
-            <a:avLst/>
-          </a:prstGeom>
-          <a:noFill/>
-          <a:ln/>
-        </p:spPr>
-        <p:txBody>
-          <a:bodyPr wrap="square" lIns="0" tIns="0" rIns="0" bIns="0" rtlCol="0" anchor="ctr"/>
-          <a:lstStyle/>
-          <a:p>
-            <a:pPr algn="r" indent="0" marL="0">
-              <a:buNone/>
-            </a:pPr>
-            <a:r>
-              <a:rPr lang="en-US" sz="1350" b="1" dirty="0">
-                <a:solidFill>
-                  <a:srgbClr val="C1435B"/>
-                </a:solidFill>
-                <a:latin typeface="Arial" pitchFamily="34" charset="0"/>
-                <a:ea typeface="Arial" pitchFamily="34" charset="-122"/>
-                <a:cs typeface="Arial" pitchFamily="34" charset="-120"/>
-              </a:rPr>
-              <a:t>+0.001</a:t>
-            </a:r>
-            <a:endParaRPr lang="en-US" sz="1350" dirty="0"/>
-          </a:p>
-        </p:txBody>
-      </p:sp>
-      <p:sp>
-        <p:nvSpPr>
-          <p:cNvPr id="44" name="Text 42"/>
-          <p:cNvSpPr/>
-          <p:nvPr/>
-        </p:nvSpPr>
-        <p:spPr>
-          <a:xfrm>
-            <a:off x="6446520" y="4416552"/>
-            <a:ext cx="5029200" cy="219456"/>
-          </a:xfrm>
-          <a:prstGeom prst="rect">
-            <a:avLst/>
-          </a:prstGeom>
-          <a:noFill/>
-          <a:ln/>
-        </p:spPr>
-        <p:txBody>
-          <a:bodyPr wrap="square" lIns="0" tIns="0" rIns="0" bIns="0" rtlCol="0" anchor="ctr"/>
-          <a:lstStyle/>
-          <a:p>
-            <a:pPr indent="0" marL="0">
-              <a:buNone/>
-            </a:pPr>
-            <a:r>
-              <a:rPr lang="en-US" sz="1200" dirty="0">
-                <a:solidFill>
-                  <a:srgbClr val="5A6068"/>
-                </a:solidFill>
-                <a:latin typeface="Arial" pitchFamily="34" charset="0"/>
-                <a:ea typeface="Arial" pitchFamily="34" charset="-122"/>
-                <a:cs typeface="Arial" pitchFamily="34" charset="-120"/>
-              </a:rPr>
-              <a:t>p = 0.74 — refuted</a:t>
-            </a:r>
-            <a:endParaRPr lang="en-US" sz="1200" dirty="0"/>
-          </a:p>
-        </p:txBody>
-      </p:sp>
-      <p:sp>
-        <p:nvSpPr>
-          <p:cNvPr id="45" name="Shape 43"/>
-          <p:cNvSpPr/>
-          <p:nvPr/>
-        </p:nvSpPr>
-        <p:spPr>
-          <a:xfrm>
-            <a:off x="6217920" y="4686300"/>
-            <a:ext cx="5440680" cy="438912"/>
-          </a:xfrm>
-          <a:prstGeom prst="roundRect">
-            <a:avLst>
-              <a:gd name="adj" fmla="val 16667"/>
-            </a:avLst>
-          </a:prstGeom>
-          <a:solidFill>
-            <a:srgbClr val="FBEEF1"/>
-          </a:solidFill>
-          <a:ln/>
-        </p:spPr>
-      </p:sp>
-      <p:sp>
-        <p:nvSpPr>
-          <p:cNvPr id="46" name="Text 44"/>
-          <p:cNvSpPr/>
-          <p:nvPr/>
-        </p:nvSpPr>
-        <p:spPr>
-          <a:xfrm>
-            <a:off x="6446520" y="4695444"/>
-            <a:ext cx="3657600" cy="246888"/>
-          </a:xfrm>
-          <a:prstGeom prst="rect">
-            <a:avLst/>
-          </a:prstGeom>
-          <a:noFill/>
-          <a:ln/>
-        </p:spPr>
-        <p:txBody>
-          <a:bodyPr wrap="square" lIns="0" tIns="0" rIns="0" bIns="0" rtlCol="0" anchor="ctr"/>
-          <a:lstStyle/>
-          <a:p>
-            <a:pPr indent="0" marL="0">
-              <a:buNone/>
-            </a:pPr>
-            <a:r>
-              <a:rPr lang="en-US" sz="1350" dirty="0">
-                <a:solidFill>
-                  <a:srgbClr val="1A1A1A"/>
-                </a:solidFill>
-                <a:latin typeface="Arial" pitchFamily="34" charset="0"/>
-                <a:ea typeface="Arial" pitchFamily="34" charset="-122"/>
-                <a:cs typeface="Arial" pitchFamily="34" charset="-120"/>
-              </a:rPr>
-              <a:t>"SSL beats classical on Barth"</a:t>
-            </a:r>
-            <a:endParaRPr lang="en-US" sz="1350" dirty="0"/>
-          </a:p>
-        </p:txBody>
-      </p:sp>
-      <p:sp>
-        <p:nvSpPr>
-          <p:cNvPr id="47" name="Text 45"/>
-          <p:cNvSpPr/>
-          <p:nvPr/>
-        </p:nvSpPr>
-        <p:spPr>
-          <a:xfrm>
-            <a:off x="10104120" y="4695444"/>
-            <a:ext cx="1371600" cy="246888"/>
-          </a:xfrm>
-          <a:prstGeom prst="rect">
-            <a:avLst/>
-          </a:prstGeom>
-          <a:noFill/>
-          <a:ln/>
-        </p:spPr>
-        <p:txBody>
-          <a:bodyPr wrap="square" lIns="0" tIns="0" rIns="0" bIns="0" rtlCol="0" anchor="ctr"/>
-          <a:lstStyle/>
-          <a:p>
-            <a:pPr algn="r" indent="0" marL="0">
-              <a:buNone/>
-            </a:pPr>
-            <a:r>
-              <a:rPr lang="en-US" sz="1350" b="1" dirty="0">
-                <a:solidFill>
-                  <a:srgbClr val="C1435B"/>
-                </a:solidFill>
-                <a:latin typeface="Arial" pitchFamily="34" charset="0"/>
-                <a:ea typeface="Arial" pitchFamily="34" charset="-122"/>
-                <a:cs typeface="Arial" pitchFamily="34" charset="-120"/>
-              </a:rPr>
-              <a:t>+0.101</a:t>
-            </a:r>
-            <a:endParaRPr lang="en-US" sz="1350" dirty="0"/>
-          </a:p>
-        </p:txBody>
-      </p:sp>
-      <p:sp>
-        <p:nvSpPr>
-          <p:cNvPr id="48" name="Text 46"/>
-          <p:cNvSpPr/>
-          <p:nvPr/>
-        </p:nvSpPr>
-        <p:spPr>
-          <a:xfrm>
-            <a:off x="6446520" y="4914900"/>
-            <a:ext cx="5029200" cy="219456"/>
-          </a:xfrm>
-          <a:prstGeom prst="rect">
-            <a:avLst/>
-          </a:prstGeom>
-          <a:noFill/>
-          <a:ln/>
-        </p:spPr>
-        <p:txBody>
-          <a:bodyPr wrap="square" lIns="0" tIns="0" rIns="0" bIns="0" rtlCol="0" anchor="ctr"/>
-          <a:lstStyle/>
-          <a:p>
-            <a:pPr indent="0" marL="0">
-              <a:buNone/>
-            </a:pPr>
-            <a:r>
-              <a:rPr lang="en-US" sz="1200" dirty="0">
-                <a:solidFill>
-                  <a:srgbClr val="5A6068"/>
-                </a:solidFill>
-                <a:latin typeface="Arial" pitchFamily="34" charset="0"/>
-                <a:ea typeface="Arial" pitchFamily="34" charset="-122"/>
-                <a:cs typeface="Arial" pitchFamily="34" charset="-120"/>
-              </a:rPr>
-              <a:t>n=5 → +0.021 (0.9 se)</a:t>
-            </a:r>
-            <a:endParaRPr lang="en-US" sz="1200" dirty="0"/>
-          </a:p>
-        </p:txBody>
-      </p:sp>
-      <p:sp>
-        <p:nvSpPr>
-          <p:cNvPr id="49" name="Shape 47"/>
-          <p:cNvSpPr/>
-          <p:nvPr/>
-        </p:nvSpPr>
-        <p:spPr>
-          <a:xfrm>
-            <a:off x="6217920" y="5184648"/>
-            <a:ext cx="5440680" cy="438912"/>
-          </a:xfrm>
-          <a:prstGeom prst="roundRect">
-            <a:avLst>
-              <a:gd name="adj" fmla="val 16667"/>
-            </a:avLst>
-          </a:prstGeom>
-          <a:solidFill>
-            <a:srgbClr val="FBEEF1"/>
-          </a:solidFill>
-          <a:ln/>
-        </p:spPr>
-      </p:sp>
-      <p:sp>
-        <p:nvSpPr>
-          <p:cNvPr id="50" name="Text 48"/>
-          <p:cNvSpPr/>
-          <p:nvPr/>
-        </p:nvSpPr>
-        <p:spPr>
-          <a:xfrm>
-            <a:off x="6446520" y="5193792"/>
-            <a:ext cx="3657600" cy="246888"/>
-          </a:xfrm>
-          <a:prstGeom prst="rect">
-            <a:avLst/>
-          </a:prstGeom>
-          <a:noFill/>
-          <a:ln/>
-        </p:spPr>
-        <p:txBody>
-          <a:bodyPr wrap="square" lIns="0" tIns="0" rIns="0" bIns="0" rtlCol="0" anchor="ctr"/>
-          <a:lstStyle/>
-          <a:p>
-            <a:pPr indent="0" marL="0">
-              <a:buNone/>
-            </a:pPr>
-            <a:r>
-              <a:rPr lang="en-US" sz="1350" dirty="0">
-                <a:solidFill>
-                  <a:srgbClr val="1A1A1A"/>
-                </a:solidFill>
-                <a:latin typeface="Arial" pitchFamily="34" charset="0"/>
-                <a:ea typeface="Arial" pitchFamily="34" charset="-122"/>
-                <a:cs typeface="Arial" pitchFamily="34" charset="-120"/>
-              </a:rPr>
-              <a:t>"Reconstruction proves it learned"</a:t>
-            </a:r>
-            <a:endParaRPr lang="en-US" sz="1350" dirty="0"/>
-          </a:p>
-        </p:txBody>
-      </p:sp>
-      <p:sp>
-        <p:nvSpPr>
-          <p:cNvPr id="51" name="Text 49"/>
-          <p:cNvSpPr/>
-          <p:nvPr/>
-        </p:nvSpPr>
-        <p:spPr>
-          <a:xfrm>
-            <a:off x="10104120" y="5193792"/>
-            <a:ext cx="1371600" cy="246888"/>
-          </a:xfrm>
-          <a:prstGeom prst="rect">
-            <a:avLst/>
-          </a:prstGeom>
-          <a:noFill/>
-          <a:ln/>
-        </p:spPr>
-        <p:txBody>
-          <a:bodyPr wrap="square" lIns="0" tIns="0" rIns="0" bIns="0" rtlCol="0" anchor="ctr"/>
-          <a:lstStyle/>
-          <a:p>
-            <a:pPr algn="r" indent="0" marL="0">
-              <a:buNone/>
-            </a:pPr>
-            <a:r>
-              <a:rPr lang="en-US" sz="1350" b="1" dirty="0">
-                <a:solidFill>
-                  <a:srgbClr val="C1435B"/>
-                </a:solidFill>
-                <a:latin typeface="Arial" pitchFamily="34" charset="0"/>
-                <a:ea typeface="Arial" pitchFamily="34" charset="-122"/>
-                <a:cs typeface="Arial" pitchFamily="34" charset="-120"/>
-              </a:rPr>
-              <a:t>r = 0.92</a:t>
-            </a:r>
-            <a:endParaRPr lang="en-US" sz="1350" dirty="0"/>
-          </a:p>
-        </p:txBody>
-      </p:sp>
-      <p:sp>
-        <p:nvSpPr>
-          <p:cNvPr id="52" name="Text 50"/>
-          <p:cNvSpPr/>
-          <p:nvPr/>
-        </p:nvSpPr>
-        <p:spPr>
-          <a:xfrm>
-            <a:off x="6446520" y="5413248"/>
-            <a:ext cx="5029200" cy="219456"/>
-          </a:xfrm>
-          <a:prstGeom prst="rect">
-            <a:avLst/>
-          </a:prstGeom>
-          <a:noFill/>
-          <a:ln/>
-        </p:spPr>
-        <p:txBody>
-          <a:bodyPr wrap="square" lIns="0" tIns="0" rIns="0" bIns="0" rtlCol="0" anchor="ctr"/>
-          <a:lstStyle/>
-          <a:p>
-            <a:pPr indent="0" marL="0">
-              <a:buNone/>
-            </a:pPr>
-            <a:r>
-              <a:rPr lang="en-US" sz="1200" dirty="0">
-                <a:solidFill>
-                  <a:srgbClr val="5A6068"/>
-                </a:solidFill>
-                <a:latin typeface="Arial" pitchFamily="34" charset="0"/>
-                <a:ea typeface="Arial" pitchFamily="34" charset="-122"/>
-                <a:cs typeface="Arial" pitchFamily="34" charset="-120"/>
-              </a:rPr>
-              <a:t>copy-a-neighbour: 0.90</a:t>
-            </a:r>
-            <a:endParaRPr lang="en-US" sz="1200" dirty="0"/>
-          </a:p>
-        </p:txBody>
-      </p:sp>
-      <p:sp>
-        <p:nvSpPr>
-          <p:cNvPr id="53" name="Shape 51"/>
-          <p:cNvSpPr/>
-          <p:nvPr/>
-        </p:nvSpPr>
-        <p:spPr>
-          <a:xfrm>
-            <a:off x="502920" y="5760720"/>
-            <a:ext cx="11155680" cy="658368"/>
-          </a:xfrm>
-          <a:prstGeom prst="roundRect">
-            <a:avLst>
-              <a:gd name="adj" fmla="val 11111"/>
-            </a:avLst>
-          </a:prstGeom>
-          <a:solidFill>
-            <a:srgbClr val="21295C"/>
-          </a:solidFill>
-          <a:ln/>
-        </p:spPr>
-      </p:sp>
-      <p:sp>
-        <p:nvSpPr>
-          <p:cNvPr id="54" name="Text 52"/>
-          <p:cNvSpPr/>
-          <p:nvPr/>
-        </p:nvSpPr>
-        <p:spPr>
-          <a:xfrm>
-            <a:off x="777240" y="5760720"/>
-            <a:ext cx="10607040" cy="658368"/>
-          </a:xfrm>
-          <a:prstGeom prst="rect">
-            <a:avLst/>
-          </a:prstGeom>
-          <a:noFill/>
-          <a:ln/>
-        </p:spPr>
-        <p:txBody>
-          <a:bodyPr wrap="square" lIns="0" tIns="0" rIns="0" bIns="0" rtlCol="0" anchor="ctr"/>
-          <a:lstStyle/>
-          <a:p>
-            <a:pPr indent="0" marL="0">
-              <a:buNone/>
-            </a:pPr>
-            <a:r>
-              <a:rPr lang="en-US" sz="1600" b="1" dirty="0">
-                <a:solidFill>
-                  <a:srgbClr val="FFFFFF"/>
-                </a:solidFill>
-                <a:latin typeface="Arial" pitchFamily="34" charset="0"/>
-                <a:ea typeface="Arial" pitchFamily="34" charset="-122"/>
-                <a:cs typeface="Arial" pitchFamily="34" charset="-120"/>
-              </a:rPr>
-              <a:t>The pattern: every surviving result is PAIRED — one fixed checkpoint, one thing varied. Every retracted result compared two separately-trained networks.</a:t>
-            </a:r>
-            <a:endParaRPr lang="en-US" sz="1600" dirty="0"/>
-          </a:p>
-        </p:txBody>
-      </p:sp>
-    </p:spTree>
-  </p:cSld>
-  <p:clrMapOvr>
-    <a:masterClrMapping/>
-  </p:clrMapOvr>
-</p:sld>
-</file>
-
 <file path=ppt/slides/slide29.xml><?xml version="1.0" encoding="utf-8"?>
 <p:sld xmlns:a="http://schemas.openxmlformats.org/drawingml/2006/main" xmlns:r="http://schemas.openxmlformats.org/officeDocument/2006/relationships" xmlns:p="http://schemas.openxmlformats.org/presentationml/2006/main">
   <p:cSld name="Slide 29">
@@ -24099,7 +22635,7 @@
                 <a:ea typeface="Arial" pitchFamily="34" charset="-122"/>
                 <a:cs typeface="Arial" pitchFamily="34" charset="-120"/>
               </a:rPr>
-              <a:t>What I think this means</a:t>
+              <a:t>Where the project stands today</a:t>
             </a:r>
             <a:endParaRPr lang="en-US" sz="3000" dirty="0"/>
           </a:p>
@@ -24138,7 +22674,7 @@
                 <a:ea typeface="Arial" pitchFamily="34" charset="-122"/>
                 <a:cs typeface="Arial" pitchFamily="34" charset="-120"/>
               </a:rPr>
-              <a:t>Reading the whole picture honestly</a:t>
+              <a:t>Everything that survived, and everything that did not</a:t>
             </a:r>
             <a:endParaRPr lang="en-US" sz="1700" dirty="0"/>
           </a:p>
@@ -24185,36 +22721,114 @@
       </p:sp>
       <p:sp>
         <p:nvSpPr>
-          <p:cNvPr id="5" name="Shape 3"/>
-          <p:cNvSpPr/>
-          <p:nvPr/>
-        </p:nvSpPr>
-        <p:spPr>
-          <a:xfrm>
-            <a:off x="502920" y="1417320"/>
-            <a:ext cx="11155680" cy="1298448"/>
+          <p:cNvPr id="5" name="Text 3"/>
+          <p:cNvSpPr/>
+          <p:nvPr/>
+        </p:nvSpPr>
+        <p:spPr>
+          <a:xfrm>
+            <a:off x="502920" y="1481328"/>
+            <a:ext cx="5440680" cy="365760"/>
+          </a:xfrm>
+          <a:prstGeom prst="rect">
+            <a:avLst/>
+          </a:prstGeom>
+          <a:noFill/>
+          <a:ln/>
+        </p:spPr>
+        <p:txBody>
+          <a:bodyPr wrap="square" lIns="0" tIns="0" rIns="0" bIns="0" rtlCol="0" anchor="ctr"/>
+          <a:lstStyle/>
+          <a:p>
+            <a:pPr indent="0" marL="0">
+              <a:buNone/>
+            </a:pPr>
+            <a:r>
+              <a:rPr lang="en-US" sz="2000" b="1" dirty="0">
+                <a:solidFill>
+                  <a:srgbClr val="1A7A3C"/>
+                </a:solidFill>
+                <a:latin typeface="Arial" pitchFamily="34" charset="0"/>
+                <a:ea typeface="Arial" pitchFamily="34" charset="-122"/>
+                <a:cs typeface="Arial" pitchFamily="34" charset="-120"/>
+              </a:rPr>
+              <a:t>STILL STANDING</a:t>
+            </a:r>
+            <a:endParaRPr lang="en-US" sz="2000" dirty="0"/>
+          </a:p>
+        </p:txBody>
+      </p:sp>
+      <p:sp>
+        <p:nvSpPr>
+          <p:cNvPr id="6" name="Text 4"/>
+          <p:cNvSpPr/>
+          <p:nvPr/>
+        </p:nvSpPr>
+        <p:spPr>
+          <a:xfrm>
+            <a:off x="502920" y="1828800"/>
+            <a:ext cx="5440680" cy="274320"/>
+          </a:xfrm>
+          <a:prstGeom prst="rect">
+            <a:avLst/>
+          </a:prstGeom>
+          <a:noFill/>
+          <a:ln/>
+        </p:spPr>
+        <p:txBody>
+          <a:bodyPr wrap="square" lIns="0" tIns="0" rIns="0" bIns="0" rtlCol="0" anchor="ctr"/>
+          <a:lstStyle/>
+          <a:p>
+            <a:pPr indent="0" marL="0">
+              <a:buNone/>
+            </a:pPr>
+            <a:r>
+              <a:rPr lang="en-US" sz="1500" i="1" dirty="0">
+                <a:solidFill>
+                  <a:srgbClr val="5A6068"/>
+                </a:solidFill>
+                <a:latin typeface="Arial" pitchFamily="34" charset="0"/>
+                <a:ea typeface="Arial" pitchFamily="34" charset="-122"/>
+                <a:cs typeface="Arial" pitchFamily="34" charset="-120"/>
+              </a:rPr>
+              <a:t>paired comparisons, plus the one 2 sd result</a:t>
+            </a:r>
+            <a:endParaRPr lang="en-US" sz="1500" dirty="0"/>
+          </a:p>
+        </p:txBody>
+      </p:sp>
+      <p:sp>
+        <p:nvSpPr>
+          <p:cNvPr id="7" name="Shape 5"/>
+          <p:cNvSpPr/>
+          <p:nvPr/>
+        </p:nvSpPr>
+        <p:spPr>
+          <a:xfrm>
+            <a:off x="502920" y="2194560"/>
+            <a:ext cx="5440680" cy="749808"/>
           </a:xfrm>
           <a:prstGeom prst="roundRect">
             <a:avLst>
-              <a:gd name="adj" fmla="val 5634"/>
+              <a:gd name="adj" fmla="val 9756"/>
             </a:avLst>
           </a:prstGeom>
           <a:solidFill>
-            <a:srgbClr val="EEF3F7"/>
+            <a:srgbClr val="EBF5EE"/>
           </a:solidFill>
           <a:ln/>
         </p:spPr>
       </p:sp>
       <p:sp>
         <p:nvSpPr>
-          <p:cNvPr id="6" name="Text 4"/>
-          <p:cNvSpPr/>
-          <p:nvPr/>
-        </p:nvSpPr>
-        <p:spPr>
-          <a:xfrm>
-            <a:off x="777240" y="1517904"/>
-            <a:ext cx="10607040" cy="310896"/>
+          <p:cNvPr id="8" name="Text 6"/>
+          <p:cNvSpPr/>
+          <p:nvPr/>
+        </p:nvSpPr>
+        <p:spPr>
+          <a:xfrm>
+            <a:off x="731520" y="2267712"/>
+            <a:ext cx="3566160" cy="329184"/>
           </a:xfrm>
           <a:prstGeom prst="rect">
             <a:avLst/>
@@ -24230,30 +22844,30 @@
               <a:buNone/>
             </a:pPr>
             <a:r>
-              <a:rPr lang="en-US" sz="1800" b="1" dirty="0">
-                <a:solidFill>
-                  <a:srgbClr val="065A82"/>
-                </a:solidFill>
-                <a:latin typeface="Arial" pitchFamily="34" charset="0"/>
-                <a:ea typeface="Arial" pitchFamily="34" charset="-122"/>
-                <a:cs typeface="Arial" pitchFamily="34" charset="-120"/>
-              </a:rPr>
-              <a:t>The findings are coherent, not contradictory</a:t>
-            </a:r>
-            <a:endParaRPr lang="en-US" sz="1800" dirty="0"/>
-          </a:p>
-        </p:txBody>
-      </p:sp>
-      <p:sp>
-        <p:nvSpPr>
-          <p:cNvPr id="7" name="Text 5"/>
-          <p:cNvSpPr/>
-          <p:nvPr/>
-        </p:nvSpPr>
-        <p:spPr>
-          <a:xfrm>
-            <a:off x="777240" y="1847088"/>
-            <a:ext cx="10607040" cy="841248"/>
+              <a:rPr lang="en-US" sz="1550" dirty="0">
+                <a:solidFill>
+                  <a:srgbClr val="1A1A1A"/>
+                </a:solidFill>
+                <a:latin typeface="Arial" pitchFamily="34" charset="0"/>
+                <a:ea typeface="Arial" pitchFamily="34" charset="-122"/>
+                <a:cs typeface="Arial" pitchFamily="34" charset="-120"/>
+              </a:rPr>
+              <a:t>Masked pretraining &gt; random init</a:t>
+            </a:r>
+            <a:endParaRPr lang="en-US" sz="1550" dirty="0"/>
+          </a:p>
+        </p:txBody>
+      </p:sp>
+      <p:sp>
+        <p:nvSpPr>
+          <p:cNvPr id="9" name="Text 7"/>
+          <p:cNvSpPr/>
+          <p:nvPr/>
+        </p:nvSpPr>
+        <p:spPr>
+          <a:xfrm>
+            <a:off x="4297680" y="2267712"/>
+            <a:ext cx="1463040" cy="329184"/>
           </a:xfrm>
           <a:prstGeom prst="rect">
             <a:avLst/>
@@ -24265,41 +22879,572 @@
           <a:bodyPr wrap="square" lIns="0" tIns="0" rIns="0" bIns="0" rtlCol="0" anchor="ctr"/>
           <a:lstStyle/>
           <a:p>
+            <a:pPr algn="r" indent="0" marL="0">
+              <a:buNone/>
+            </a:pPr>
+            <a:r>
+              <a:rPr lang="en-US" sz="1550" b="1" dirty="0">
+                <a:solidFill>
+                  <a:srgbClr val="1A7A3C"/>
+                </a:solidFill>
+                <a:latin typeface="Arial" pitchFamily="34" charset="0"/>
+                <a:ea typeface="Arial" pitchFamily="34" charset="-122"/>
+                <a:cs typeface="Arial" pitchFamily="34" charset="-120"/>
+              </a:rPr>
+              <a:t>+0.117</a:t>
+            </a:r>
+            <a:endParaRPr lang="en-US" sz="1550" dirty="0"/>
+          </a:p>
+        </p:txBody>
+      </p:sp>
+      <p:sp>
+        <p:nvSpPr>
+          <p:cNvPr id="10" name="Text 8"/>
+          <p:cNvSpPr/>
+          <p:nvPr/>
+        </p:nvSpPr>
+        <p:spPr>
+          <a:xfrm>
+            <a:off x="731520" y="2596896"/>
+            <a:ext cx="5029200" cy="274320"/>
+          </a:xfrm>
+          <a:prstGeom prst="rect">
+            <a:avLst/>
+          </a:prstGeom>
+          <a:noFill/>
+          <a:ln/>
+        </p:spPr>
+        <p:txBody>
+          <a:bodyPr wrap="square" lIns="0" tIns="0" rIns="0" bIns="0" rtlCol="0" anchor="ctr"/>
+          <a:lstStyle/>
+          <a:p>
             <a:pPr indent="0" marL="0">
-              <a:lnSpc>
-                <a:spcPts val="1900"/>
-              </a:lnSpc>
-              <a:buNone/>
-            </a:pPr>
-            <a:r>
-              <a:rPr lang="en-US" sz="1550" dirty="0">
-                <a:solidFill>
-                  <a:srgbClr val="1A1A1A"/>
-                </a:solidFill>
-                <a:latin typeface="Arial" pitchFamily="34" charset="0"/>
-                <a:ea typeface="Arial" pitchFamily="34" charset="-122"/>
-                <a:cs typeface="Arial" pitchFamily="34" charset="-120"/>
-              </a:rPr>
-              <a:t>Masked pretraining DOES learn something real (+0.117 over random init). But it learns less discriminative signal than 1,024-bin integrated areas already carry — and reconstruction quality anti-correlates with transfer. Meanwhile every axis we pushed on the backbone (patch size, capacity, objective, corpus version) came back flat.</a:t>
-            </a:r>
-            <a:endParaRPr lang="en-US" sz="1550" dirty="0"/>
-          </a:p>
-        </p:txBody>
-      </p:sp>
-      <p:sp>
-        <p:nvSpPr>
-          <p:cNvPr id="8" name="Shape 6"/>
-          <p:cNvSpPr/>
-          <p:nvPr/>
-        </p:nvSpPr>
-        <p:spPr>
-          <a:xfrm>
-            <a:off x="502920" y="2834640"/>
-            <a:ext cx="5440680" cy="1883664"/>
+              <a:buNone/>
+            </a:pPr>
+            <a:r>
+              <a:rPr lang="en-US" sz="1350" dirty="0">
+                <a:solidFill>
+                  <a:srgbClr val="5A6068"/>
+                </a:solidFill>
+                <a:latin typeface="Arial" pitchFamily="34" charset="0"/>
+                <a:ea typeface="Arial" pitchFamily="34" charset="-122"/>
+                <a:cs typeface="Arial" pitchFamily="34" charset="-120"/>
+              </a:rPr>
+              <a:t>2.6 sd, 5/5 targets</a:t>
+            </a:r>
+            <a:endParaRPr lang="en-US" sz="1350" dirty="0"/>
+          </a:p>
+        </p:txBody>
+      </p:sp>
+      <p:sp>
+        <p:nvSpPr>
+          <p:cNvPr id="11" name="Shape 9"/>
+          <p:cNvSpPr/>
+          <p:nvPr/>
+        </p:nvSpPr>
+        <p:spPr>
+          <a:xfrm>
+            <a:off x="502920" y="3054096"/>
+            <a:ext cx="5440680" cy="749808"/>
           </a:xfrm>
           <a:prstGeom prst="roundRect">
             <a:avLst>
-              <a:gd name="adj" fmla="val 3883"/>
+              <a:gd name="adj" fmla="val 9756"/>
+            </a:avLst>
+          </a:prstGeom>
+          <a:solidFill>
+            <a:srgbClr val="EBF5EE"/>
+          </a:solidFill>
+          <a:ln/>
+        </p:spPr>
+      </p:sp>
+      <p:sp>
+        <p:nvSpPr>
+          <p:cNvPr id="12" name="Text 10"/>
+          <p:cNvSpPr/>
+          <p:nvPr/>
+        </p:nvSpPr>
+        <p:spPr>
+          <a:xfrm>
+            <a:off x="731520" y="3127248"/>
+            <a:ext cx="3566160" cy="329184"/>
+          </a:xfrm>
+          <a:prstGeom prst="rect">
+            <a:avLst/>
+          </a:prstGeom>
+          <a:noFill/>
+          <a:ln/>
+        </p:spPr>
+        <p:txBody>
+          <a:bodyPr wrap="square" lIns="0" tIns="0" rIns="0" bIns="0" rtlCol="0" anchor="ctr"/>
+          <a:lstStyle/>
+          <a:p>
+            <a:pPr indent="0" marL="0">
+              <a:buNone/>
+            </a:pPr>
+            <a:r>
+              <a:rPr lang="en-US" sz="1550" dirty="0">
+                <a:solidFill>
+                  <a:srgbClr val="1A1A1A"/>
+                </a:solidFill>
+                <a:latin typeface="Arial" pitchFamily="34" charset="0"/>
+                <a:ea typeface="Arial" pitchFamily="34" charset="-122"/>
+                <a:cs typeface="Arial" pitchFamily="34" charset="-120"/>
+              </a:rPr>
+              <a:t>LogReg probe &gt; trained DNN head</a:t>
+            </a:r>
+            <a:endParaRPr lang="en-US" sz="1550" dirty="0"/>
+          </a:p>
+        </p:txBody>
+      </p:sp>
+      <p:sp>
+        <p:nvSpPr>
+          <p:cNvPr id="13" name="Text 11"/>
+          <p:cNvSpPr/>
+          <p:nvPr/>
+        </p:nvSpPr>
+        <p:spPr>
+          <a:xfrm>
+            <a:off x="4297680" y="3127248"/>
+            <a:ext cx="1463040" cy="329184"/>
+          </a:xfrm>
+          <a:prstGeom prst="rect">
+            <a:avLst/>
+          </a:prstGeom>
+          <a:noFill/>
+          <a:ln/>
+        </p:spPr>
+        <p:txBody>
+          <a:bodyPr wrap="square" lIns="0" tIns="0" rIns="0" bIns="0" rtlCol="0" anchor="ctr"/>
+          <a:lstStyle/>
+          <a:p>
+            <a:pPr algn="r" indent="0" marL="0">
+              <a:buNone/>
+            </a:pPr>
+            <a:r>
+              <a:rPr lang="en-US" sz="1550" b="1" dirty="0">
+                <a:solidFill>
+                  <a:srgbClr val="1A7A3C"/>
+                </a:solidFill>
+                <a:latin typeface="Arial" pitchFamily="34" charset="0"/>
+                <a:ea typeface="Arial" pitchFamily="34" charset="-122"/>
+                <a:cs typeface="Arial" pitchFamily="34" charset="-120"/>
+              </a:rPr>
+              <a:t>+0.120</a:t>
+            </a:r>
+            <a:endParaRPr lang="en-US" sz="1550" dirty="0"/>
+          </a:p>
+        </p:txBody>
+      </p:sp>
+      <p:sp>
+        <p:nvSpPr>
+          <p:cNvPr id="14" name="Text 12"/>
+          <p:cNvSpPr/>
+          <p:nvPr/>
+        </p:nvSpPr>
+        <p:spPr>
+          <a:xfrm>
+            <a:off x="731520" y="3456432"/>
+            <a:ext cx="5029200" cy="274320"/>
+          </a:xfrm>
+          <a:prstGeom prst="rect">
+            <a:avLst/>
+          </a:prstGeom>
+          <a:noFill/>
+          <a:ln/>
+        </p:spPr>
+        <p:txBody>
+          <a:bodyPr wrap="square" lIns="0" tIns="0" rIns="0" bIns="0" rtlCol="0" anchor="ctr"/>
+          <a:lstStyle/>
+          <a:p>
+            <a:pPr indent="0" marL="0">
+              <a:buNone/>
+            </a:pPr>
+            <a:r>
+              <a:rPr lang="en-US" sz="1350" dirty="0">
+                <a:solidFill>
+                  <a:srgbClr val="5A6068"/>
+                </a:solidFill>
+                <a:latin typeface="Arial" pitchFamily="34" charset="0"/>
+                <a:ea typeface="Arial" pitchFamily="34" charset="-122"/>
+                <a:cs typeface="Arial" pitchFamily="34" charset="-120"/>
+              </a:rPr>
+              <a:t>paired, 5/5</a:t>
+            </a:r>
+            <a:endParaRPr lang="en-US" sz="1350" dirty="0"/>
+          </a:p>
+        </p:txBody>
+      </p:sp>
+      <p:sp>
+        <p:nvSpPr>
+          <p:cNvPr id="15" name="Shape 13"/>
+          <p:cNvSpPr/>
+          <p:nvPr/>
+        </p:nvSpPr>
+        <p:spPr>
+          <a:xfrm>
+            <a:off x="502920" y="3913632"/>
+            <a:ext cx="5440680" cy="749808"/>
+          </a:xfrm>
+          <a:prstGeom prst="roundRect">
+            <a:avLst>
+              <a:gd name="adj" fmla="val 9756"/>
+            </a:avLst>
+          </a:prstGeom>
+          <a:solidFill>
+            <a:srgbClr val="EBF5EE"/>
+          </a:solidFill>
+          <a:ln/>
+        </p:spPr>
+      </p:sp>
+      <p:sp>
+        <p:nvSpPr>
+          <p:cNvPr id="16" name="Text 14"/>
+          <p:cNvSpPr/>
+          <p:nvPr/>
+        </p:nvSpPr>
+        <p:spPr>
+          <a:xfrm>
+            <a:off x="731520" y="3986784"/>
+            <a:ext cx="3566160" cy="329184"/>
+          </a:xfrm>
+          <a:prstGeom prst="rect">
+            <a:avLst/>
+          </a:prstGeom>
+          <a:noFill/>
+          <a:ln/>
+        </p:spPr>
+        <p:txBody>
+          <a:bodyPr wrap="square" lIns="0" tIns="0" rIns="0" bIns="0" rtlCol="0" anchor="ctr"/>
+          <a:lstStyle/>
+          <a:p>
+            <a:pPr indent="0" marL="0">
+              <a:buNone/>
+            </a:pPr>
+            <a:r>
+              <a:rPr lang="en-US" sz="1550" dirty="0">
+                <a:solidFill>
+                  <a:srgbClr val="1A1A1A"/>
+                </a:solidFill>
+                <a:latin typeface="Arial" pitchFamily="34" charset="0"/>
+                <a:ea typeface="Arial" pitchFamily="34" charset="-122"/>
+                <a:cs typeface="Arial" pitchFamily="34" charset="-120"/>
+              </a:rPr>
+              <a:t>Position-preserving pooling</a:t>
+            </a:r>
+            <a:endParaRPr lang="en-US" sz="1550" dirty="0"/>
+          </a:p>
+        </p:txBody>
+      </p:sp>
+      <p:sp>
+        <p:nvSpPr>
+          <p:cNvPr id="17" name="Text 15"/>
+          <p:cNvSpPr/>
+          <p:nvPr/>
+        </p:nvSpPr>
+        <p:spPr>
+          <a:xfrm>
+            <a:off x="4297680" y="3986784"/>
+            <a:ext cx="1463040" cy="329184"/>
+          </a:xfrm>
+          <a:prstGeom prst="rect">
+            <a:avLst/>
+          </a:prstGeom>
+          <a:noFill/>
+          <a:ln/>
+        </p:spPr>
+        <p:txBody>
+          <a:bodyPr wrap="square" lIns="0" tIns="0" rIns="0" bIns="0" rtlCol="0" anchor="ctr"/>
+          <a:lstStyle/>
+          <a:p>
+            <a:pPr algn="r" indent="0" marL="0">
+              <a:buNone/>
+            </a:pPr>
+            <a:r>
+              <a:rPr lang="en-US" sz="1550" b="1" dirty="0">
+                <a:solidFill>
+                  <a:srgbClr val="1A7A3C"/>
+                </a:solidFill>
+                <a:latin typeface="Arial" pitchFamily="34" charset="0"/>
+                <a:ea typeface="Arial" pitchFamily="34" charset="-122"/>
+                <a:cs typeface="Arial" pitchFamily="34" charset="-120"/>
+              </a:rPr>
+              <a:t>+0.03…+0.13</a:t>
+            </a:r>
+            <a:endParaRPr lang="en-US" sz="1550" dirty="0"/>
+          </a:p>
+        </p:txBody>
+      </p:sp>
+      <p:sp>
+        <p:nvSpPr>
+          <p:cNvPr id="18" name="Text 16"/>
+          <p:cNvSpPr/>
+          <p:nvPr/>
+        </p:nvSpPr>
+        <p:spPr>
+          <a:xfrm>
+            <a:off x="731520" y="4315968"/>
+            <a:ext cx="5029200" cy="274320"/>
+          </a:xfrm>
+          <a:prstGeom prst="rect">
+            <a:avLst/>
+          </a:prstGeom>
+          <a:noFill/>
+          <a:ln/>
+        </p:spPr>
+        <p:txBody>
+          <a:bodyPr wrap="square" lIns="0" tIns="0" rIns="0" bIns="0" rtlCol="0" anchor="ctr"/>
+          <a:lstStyle/>
+          <a:p>
+            <a:pPr indent="0" marL="0">
+              <a:buNone/>
+            </a:pPr>
+            <a:r>
+              <a:rPr lang="en-US" sz="1350" dirty="0">
+                <a:solidFill>
+                  <a:srgbClr val="5A6068"/>
+                </a:solidFill>
+                <a:latin typeface="Arial" pitchFamily="34" charset="0"/>
+                <a:ea typeface="Arial" pitchFamily="34" charset="-122"/>
+                <a:cs typeface="Arial" pitchFamily="34" charset="-120"/>
+              </a:rPr>
+              <a:t>paired, 5/5</a:t>
+            </a:r>
+            <a:endParaRPr lang="en-US" sz="1350" dirty="0"/>
+          </a:p>
+        </p:txBody>
+      </p:sp>
+      <p:sp>
+        <p:nvSpPr>
+          <p:cNvPr id="19" name="Shape 17"/>
+          <p:cNvSpPr/>
+          <p:nvPr/>
+        </p:nvSpPr>
+        <p:spPr>
+          <a:xfrm>
+            <a:off x="502920" y="4773168"/>
+            <a:ext cx="5440680" cy="749808"/>
+          </a:xfrm>
+          <a:prstGeom prst="roundRect">
+            <a:avLst>
+              <a:gd name="adj" fmla="val 9756"/>
+            </a:avLst>
+          </a:prstGeom>
+          <a:solidFill>
+            <a:srgbClr val="EBF5EE"/>
+          </a:solidFill>
+          <a:ln/>
+        </p:spPr>
+      </p:sp>
+      <p:sp>
+        <p:nvSpPr>
+          <p:cNvPr id="20" name="Text 18"/>
+          <p:cNvSpPr/>
+          <p:nvPr/>
+        </p:nvSpPr>
+        <p:spPr>
+          <a:xfrm>
+            <a:off x="731520" y="4846320"/>
+            <a:ext cx="3566160" cy="329184"/>
+          </a:xfrm>
+          <a:prstGeom prst="rect">
+            <a:avLst/>
+          </a:prstGeom>
+          <a:noFill/>
+          <a:ln/>
+        </p:spPr>
+        <p:txBody>
+          <a:bodyPr wrap="square" lIns="0" tIns="0" rIns="0" bIns="0" rtlCol="0" anchor="ctr"/>
+          <a:lstStyle/>
+          <a:p>
+            <a:pPr indent="0" marL="0">
+              <a:buNone/>
+            </a:pPr>
+            <a:r>
+              <a:rPr lang="en-US" sz="1550" dirty="0">
+                <a:solidFill>
+                  <a:srgbClr val="1A1A1A"/>
+                </a:solidFill>
+                <a:latin typeface="Arial" pitchFamily="34" charset="0"/>
+                <a:ea typeface="Arial" pitchFamily="34" charset="-122"/>
+                <a:cs typeface="Arial" pitchFamily="34" charset="-120"/>
+              </a:rPr>
+              <a:t>Same pooling on jigsaw / joint</a:t>
+            </a:r>
+            <a:endParaRPr lang="en-US" sz="1550" dirty="0"/>
+          </a:p>
+        </p:txBody>
+      </p:sp>
+      <p:sp>
+        <p:nvSpPr>
+          <p:cNvPr id="21" name="Text 19"/>
+          <p:cNvSpPr/>
+          <p:nvPr/>
+        </p:nvSpPr>
+        <p:spPr>
+          <a:xfrm>
+            <a:off x="4297680" y="4846320"/>
+            <a:ext cx="1463040" cy="329184"/>
+          </a:xfrm>
+          <a:prstGeom prst="rect">
+            <a:avLst/>
+          </a:prstGeom>
+          <a:noFill/>
+          <a:ln/>
+        </p:spPr>
+        <p:txBody>
+          <a:bodyPr wrap="square" lIns="0" tIns="0" rIns="0" bIns="0" rtlCol="0" anchor="ctr"/>
+          <a:lstStyle/>
+          <a:p>
+            <a:pPr algn="r" indent="0" marL="0">
+              <a:buNone/>
+            </a:pPr>
+            <a:r>
+              <a:rPr lang="en-US" sz="1550" b="1" dirty="0">
+                <a:solidFill>
+                  <a:srgbClr val="1A7A3C"/>
+                </a:solidFill>
+                <a:latin typeface="Arial" pitchFamily="34" charset="0"/>
+                <a:ea typeface="Arial" pitchFamily="34" charset="-122"/>
+                <a:cs typeface="Arial" pitchFamily="34" charset="-120"/>
+              </a:rPr>
+              <a:t>+0.079 / +0.049</a:t>
+            </a:r>
+            <a:endParaRPr lang="en-US" sz="1550" dirty="0"/>
+          </a:p>
+        </p:txBody>
+      </p:sp>
+      <p:sp>
+        <p:nvSpPr>
+          <p:cNvPr id="22" name="Text 20"/>
+          <p:cNvSpPr/>
+          <p:nvPr/>
+        </p:nvSpPr>
+        <p:spPr>
+          <a:xfrm>
+            <a:off x="731520" y="5175504"/>
+            <a:ext cx="5029200" cy="274320"/>
+          </a:xfrm>
+          <a:prstGeom prst="rect">
+            <a:avLst/>
+          </a:prstGeom>
+          <a:noFill/>
+          <a:ln/>
+        </p:spPr>
+        <p:txBody>
+          <a:bodyPr wrap="square" lIns="0" tIns="0" rIns="0" bIns="0" rtlCol="0" anchor="ctr"/>
+          <a:lstStyle/>
+          <a:p>
+            <a:pPr indent="0" marL="0">
+              <a:buNone/>
+            </a:pPr>
+            <a:r>
+              <a:rPr lang="en-US" sz="1350" dirty="0">
+                <a:solidFill>
+                  <a:srgbClr val="5A6068"/>
+                </a:solidFill>
+                <a:latin typeface="Arial" pitchFamily="34" charset="0"/>
+                <a:ea typeface="Arial" pitchFamily="34" charset="-122"/>
+                <a:cs typeface="Arial" pitchFamily="34" charset="-120"/>
+              </a:rPr>
+              <a:t>paired</a:t>
+            </a:r>
+            <a:endParaRPr lang="en-US" sz="1350" dirty="0"/>
+          </a:p>
+        </p:txBody>
+      </p:sp>
+      <p:sp>
+        <p:nvSpPr>
+          <p:cNvPr id="23" name="Text 21"/>
+          <p:cNvSpPr/>
+          <p:nvPr/>
+        </p:nvSpPr>
+        <p:spPr>
+          <a:xfrm>
+            <a:off x="6217920" y="1481328"/>
+            <a:ext cx="5440680" cy="365760"/>
+          </a:xfrm>
+          <a:prstGeom prst="rect">
+            <a:avLst/>
+          </a:prstGeom>
+          <a:noFill/>
+          <a:ln/>
+        </p:spPr>
+        <p:txBody>
+          <a:bodyPr wrap="square" lIns="0" tIns="0" rIns="0" bIns="0" rtlCol="0" anchor="ctr"/>
+          <a:lstStyle/>
+          <a:p>
+            <a:pPr indent="0" marL="0">
+              <a:buNone/>
+            </a:pPr>
+            <a:r>
+              <a:rPr lang="en-US" sz="2000" b="1" dirty="0">
+                <a:solidFill>
+                  <a:srgbClr val="C1435B"/>
+                </a:solidFill>
+                <a:latin typeface="Arial" pitchFamily="34" charset="0"/>
+                <a:ea typeface="Arial" pitchFamily="34" charset="-122"/>
+                <a:cs typeface="Arial" pitchFamily="34" charset="-120"/>
+              </a:rPr>
+              <a:t>RETRACTED or WITHIN NOISE</a:t>
+            </a:r>
+            <a:endParaRPr lang="en-US" sz="2000" dirty="0"/>
+          </a:p>
+        </p:txBody>
+      </p:sp>
+      <p:sp>
+        <p:nvSpPr>
+          <p:cNvPr id="24" name="Text 22"/>
+          <p:cNvSpPr/>
+          <p:nvPr/>
+        </p:nvSpPr>
+        <p:spPr>
+          <a:xfrm>
+            <a:off x="6217920" y="1828800"/>
+            <a:ext cx="5440680" cy="274320"/>
+          </a:xfrm>
+          <a:prstGeom prst="rect">
+            <a:avLst/>
+          </a:prstGeom>
+          <a:noFill/>
+          <a:ln/>
+        </p:spPr>
+        <p:txBody>
+          <a:bodyPr wrap="square" lIns="0" tIns="0" rIns="0" bIns="0" rtlCol="0" anchor="ctr"/>
+          <a:lstStyle/>
+          <a:p>
+            <a:pPr indent="0" marL="0">
+              <a:buNone/>
+            </a:pPr>
+            <a:r>
+              <a:rPr lang="en-US" sz="1500" i="1" dirty="0">
+                <a:solidFill>
+                  <a:srgbClr val="5A6068"/>
+                </a:solidFill>
+                <a:latin typeface="Arial" pitchFamily="34" charset="0"/>
+                <a:ea typeface="Arial" pitchFamily="34" charset="-122"/>
+                <a:cs typeface="Arial" pitchFamily="34" charset="-120"/>
+              </a:rPr>
+              <a:t>everything that rested on a single training run</a:t>
+            </a:r>
+            <a:endParaRPr lang="en-US" sz="1500" dirty="0"/>
+          </a:p>
+        </p:txBody>
+      </p:sp>
+      <p:sp>
+        <p:nvSpPr>
+          <p:cNvPr id="25" name="Shape 23"/>
+          <p:cNvSpPr/>
+          <p:nvPr/>
+        </p:nvSpPr>
+        <p:spPr>
+          <a:xfrm>
+            <a:off x="6217920" y="2194560"/>
+            <a:ext cx="5440680" cy="402336"/>
+          </a:xfrm>
+          <a:prstGeom prst="roundRect">
+            <a:avLst>
+              <a:gd name="adj" fmla="val 18182"/>
             </a:avLst>
           </a:prstGeom>
           <a:solidFill>
@@ -24310,14 +23455,14 @@
       </p:sp>
       <p:sp>
         <p:nvSpPr>
-          <p:cNvPr id="9" name="Text 7"/>
-          <p:cNvSpPr/>
-          <p:nvPr/>
-        </p:nvSpPr>
-        <p:spPr>
-          <a:xfrm>
-            <a:off x="777240" y="2944368"/>
-            <a:ext cx="4937760" cy="530352"/>
+          <p:cNvPr id="26" name="Text 24"/>
+          <p:cNvSpPr/>
+          <p:nvPr/>
+        </p:nvSpPr>
+        <p:spPr>
+          <a:xfrm>
+            <a:off x="6446520" y="2203704"/>
+            <a:ext cx="3657600" cy="246888"/>
           </a:xfrm>
           <a:prstGeom prst="rect">
             <a:avLst/>
@@ -24326,17 +23471,53 @@
           <a:ln/>
         </p:spPr>
         <p:txBody>
-          <a:bodyPr wrap="square" lIns="0" tIns="0" rIns="0" bIns="0" rtlCol="0" anchor="t"/>
+          <a:bodyPr wrap="square" lIns="0" tIns="0" rIns="0" bIns="0" rtlCol="0" anchor="ctr"/>
           <a:lstStyle/>
           <a:p>
             <a:pPr indent="0" marL="0">
-              <a:lnSpc>
-                <a:spcPts val="2000"/>
-              </a:lnSpc>
-              <a:buNone/>
-            </a:pPr>
-            <a:r>
-              <a:rPr lang="en-US" sz="1700" b="1" dirty="0">
+              <a:buNone/>
+            </a:pPr>
+            <a:r>
+              <a:rPr lang="en-US" sz="1350" dirty="0">
+                <a:solidFill>
+                  <a:srgbClr val="1A1A1A"/>
+                </a:solidFill>
+                <a:latin typeface="Arial" pitchFamily="34" charset="0"/>
+                <a:ea typeface="Arial" pitchFamily="34" charset="-122"/>
+                <a:cs typeface="Arial" pitchFamily="34" charset="-120"/>
+              </a:rPr>
+              <a:t>v3 corpus better than v4</a:t>
+            </a:r>
+            <a:endParaRPr lang="en-US" sz="1350" dirty="0"/>
+          </a:p>
+        </p:txBody>
+      </p:sp>
+      <p:sp>
+        <p:nvSpPr>
+          <p:cNvPr id="27" name="Text 25"/>
+          <p:cNvSpPr/>
+          <p:nvPr/>
+        </p:nvSpPr>
+        <p:spPr>
+          <a:xfrm>
+            <a:off x="10104120" y="2203704"/>
+            <a:ext cx="1371600" cy="246888"/>
+          </a:xfrm>
+          <a:prstGeom prst="rect">
+            <a:avLst/>
+          </a:prstGeom>
+          <a:noFill/>
+          <a:ln/>
+        </p:spPr>
+        <p:txBody>
+          <a:bodyPr wrap="square" lIns="0" tIns="0" rIns="0" bIns="0" rtlCol="0" anchor="ctr"/>
+          <a:lstStyle/>
+          <a:p>
+            <a:pPr algn="r" indent="0" marL="0">
+              <a:buNone/>
+            </a:pPr>
+            <a:r>
+              <a:rPr lang="en-US" sz="1350" b="1" dirty="0">
                 <a:solidFill>
                   <a:srgbClr val="C1435B"/>
                 </a:solidFill>
@@ -24344,22 +23525,22 @@
                 <a:ea typeface="Arial" pitchFamily="34" charset="-122"/>
                 <a:cs typeface="Arial" pitchFamily="34" charset="-120"/>
               </a:rPr>
-              <a:t>The most likely cause we have NOT tested</a:t>
-            </a:r>
-            <a:endParaRPr lang="en-US" sz="1700" dirty="0"/>
-          </a:p>
-        </p:txBody>
-      </p:sp>
-      <p:sp>
-        <p:nvSpPr>
-          <p:cNvPr id="10" name="Text 8"/>
-          <p:cNvSpPr/>
-          <p:nvPr/>
-        </p:nvSpPr>
-        <p:spPr>
-          <a:xfrm>
-            <a:off x="777240" y="3511296"/>
-            <a:ext cx="4937760" cy="1133856"/>
+              <a:t>+0.069</a:t>
+            </a:r>
+            <a:endParaRPr lang="en-US" sz="1350" dirty="0"/>
+          </a:p>
+        </p:txBody>
+      </p:sp>
+      <p:sp>
+        <p:nvSpPr>
+          <p:cNvPr id="28" name="Text 26"/>
+          <p:cNvSpPr/>
+          <p:nvPr/>
+        </p:nvSpPr>
+        <p:spPr>
+          <a:xfrm>
+            <a:off x="6446520" y="2404872"/>
+            <a:ext cx="5029200" cy="201168"/>
           </a:xfrm>
           <a:prstGeom prst="rect">
             <a:avLst/>
@@ -24372,58 +23553,55 @@
           <a:lstStyle/>
           <a:p>
             <a:pPr indent="0" marL="0">
-              <a:lnSpc>
-                <a:spcPts val="1800"/>
-              </a:lnSpc>
-              <a:buNone/>
-            </a:pPr>
-            <a:r>
-              <a:rPr lang="en-US" sz="1500" dirty="0">
-                <a:solidFill>
-                  <a:srgbClr val="1A1A1A"/>
-                </a:solidFill>
-                <a:latin typeface="Arial" pitchFamily="34" charset="0"/>
-                <a:ea typeface="Arial" pitchFamily="34" charset="-122"/>
-                <a:cs typeface="Arial" pitchFamily="34" charset="-120"/>
-              </a:rPr>
-              <a:t>The corpus is 9,670 spectra. That is very small for a foundation model — orders of magnitude below where masked pretraining usually starts paying off. Experiment #13 only probed corpus size DOWNWARD, which cannot detect an under-training regime.</a:t>
-            </a:r>
-            <a:endParaRPr lang="en-US" sz="1500" dirty="0"/>
-          </a:p>
-        </p:txBody>
-      </p:sp>
-      <p:sp>
-        <p:nvSpPr>
-          <p:cNvPr id="11" name="Shape 9"/>
-          <p:cNvSpPr/>
-          <p:nvPr/>
-        </p:nvSpPr>
-        <p:spPr>
-          <a:xfrm>
-            <a:off x="6217920" y="2834640"/>
-            <a:ext cx="5440680" cy="1883664"/>
+              <a:buNone/>
+            </a:pPr>
+            <a:r>
+              <a:rPr lang="en-US" sz="1150" dirty="0">
+                <a:solidFill>
+                  <a:srgbClr val="5A6068"/>
+                </a:solidFill>
+                <a:latin typeface="Arial" pitchFamily="34" charset="0"/>
+                <a:ea typeface="Arial" pitchFamily="34" charset="-122"/>
+                <a:cs typeface="Arial" pitchFamily="34" charset="-120"/>
+              </a:rPr>
+              <a:t>n=5 → −0.014 (0.6 se)</a:t>
+            </a:r>
+            <a:endParaRPr lang="en-US" sz="1150" dirty="0"/>
+          </a:p>
+        </p:txBody>
+      </p:sp>
+      <p:sp>
+        <p:nvSpPr>
+          <p:cNvPr id="29" name="Shape 27"/>
+          <p:cNvSpPr/>
+          <p:nvPr/>
+        </p:nvSpPr>
+        <p:spPr>
+          <a:xfrm>
+            <a:off x="6217920" y="2647188"/>
+            <a:ext cx="5440680" cy="402336"/>
           </a:xfrm>
           <a:prstGeom prst="roundRect">
             <a:avLst>
-              <a:gd name="adj" fmla="val 3883"/>
+              <a:gd name="adj" fmla="val 18182"/>
             </a:avLst>
           </a:prstGeom>
           <a:solidFill>
-            <a:srgbClr val="EBF5EE"/>
+            <a:srgbClr val="FBEEF1"/>
           </a:solidFill>
           <a:ln/>
         </p:spPr>
       </p:sp>
       <p:sp>
         <p:nvSpPr>
-          <p:cNvPr id="12" name="Text 10"/>
-          <p:cNvSpPr/>
-          <p:nvPr/>
-        </p:nvSpPr>
-        <p:spPr>
-          <a:xfrm>
-            <a:off x="6492240" y="2944368"/>
-            <a:ext cx="4937760" cy="329184"/>
+          <p:cNvPr id="30" name="Text 28"/>
+          <p:cNvSpPr/>
+          <p:nvPr/>
+        </p:nvSpPr>
+        <p:spPr>
+          <a:xfrm>
+            <a:off x="6446520" y="2656332"/>
+            <a:ext cx="3657600" cy="246888"/>
           </a:xfrm>
           <a:prstGeom prst="rect">
             <a:avLst/>
@@ -24439,30 +23617,30 @@
               <a:buNone/>
             </a:pPr>
             <a:r>
-              <a:rPr lang="en-US" sz="1700" b="1" dirty="0">
-                <a:solidFill>
-                  <a:srgbClr val="1A7A3C"/>
-                </a:solidFill>
-                <a:latin typeface="Arial" pitchFamily="34" charset="0"/>
-                <a:ea typeface="Arial" pitchFamily="34" charset="-122"/>
-                <a:cs typeface="Arial" pitchFamily="34" charset="-120"/>
-              </a:rPr>
-              <a:t>The contribution, reframed</a:t>
-            </a:r>
-            <a:endParaRPr lang="en-US" sz="1700" dirty="0"/>
-          </a:p>
-        </p:txBody>
-      </p:sp>
-      <p:sp>
-        <p:nvSpPr>
-          <p:cNvPr id="13" name="Text 11"/>
-          <p:cNvSpPr/>
-          <p:nvPr/>
-        </p:nvSpPr>
-        <p:spPr>
-          <a:xfrm>
-            <a:off x="6492240" y="3328416"/>
-            <a:ext cx="4937760" cy="1316736"/>
+              <a:rPr lang="en-US" sz="1350" dirty="0">
+                <a:solidFill>
+                  <a:srgbClr val="1A1A1A"/>
+                </a:solidFill>
+                <a:latin typeface="Arial" pitchFamily="34" charset="0"/>
+                <a:ea typeface="Arial" pitchFamily="34" charset="-122"/>
+                <a:cs typeface="Arial" pitchFamily="34" charset="-120"/>
+              </a:rPr>
+              <a:t>"Backbone scaling exhausted"</a:t>
+            </a:r>
+            <a:endParaRPr lang="en-US" sz="1350" dirty="0"/>
+          </a:p>
+        </p:txBody>
+      </p:sp>
+      <p:sp>
+        <p:nvSpPr>
+          <p:cNvPr id="31" name="Text 29"/>
+          <p:cNvSpPr/>
+          <p:nvPr/>
+        </p:nvSpPr>
+        <p:spPr>
+          <a:xfrm>
+            <a:off x="10104120" y="2656332"/>
+            <a:ext cx="1371600" cy="246888"/>
           </a:xfrm>
           <a:prstGeom prst="rect">
             <a:avLst/>
@@ -24474,59 +23652,95 @@
           <a:bodyPr wrap="square" lIns="0" tIns="0" rIns="0" bIns="0" rtlCol="0" anchor="ctr"/>
           <a:lstStyle/>
           <a:p>
+            <a:pPr algn="r" indent="0" marL="0">
+              <a:buNone/>
+            </a:pPr>
+            <a:r>
+              <a:rPr lang="en-US" sz="1350" b="1" dirty="0">
+                <a:solidFill>
+                  <a:srgbClr val="C1435B"/>
+                </a:solidFill>
+                <a:latin typeface="Arial" pitchFamily="34" charset="0"/>
+                <a:ea typeface="Arial" pitchFamily="34" charset="-122"/>
+                <a:cs typeface="Arial" pitchFamily="34" charset="-120"/>
+              </a:rPr>
+              <a:t>±0.02</a:t>
+            </a:r>
+            <a:endParaRPr lang="en-US" sz="1350" dirty="0"/>
+          </a:p>
+        </p:txBody>
+      </p:sp>
+      <p:sp>
+        <p:nvSpPr>
+          <p:cNvPr id="32" name="Text 30"/>
+          <p:cNvSpPr/>
+          <p:nvPr/>
+        </p:nvSpPr>
+        <p:spPr>
+          <a:xfrm>
+            <a:off x="6446520" y="2857500"/>
+            <a:ext cx="5029200" cy="201168"/>
+          </a:xfrm>
+          <a:prstGeom prst="rect">
+            <a:avLst/>
+          </a:prstGeom>
+          <a:noFill/>
+          <a:ln/>
+        </p:spPr>
+        <p:txBody>
+          <a:bodyPr wrap="square" lIns="0" tIns="0" rIns="0" bIns="0" rtlCol="0" anchor="ctr"/>
+          <a:lstStyle/>
+          <a:p>
             <a:pPr indent="0" marL="0">
-              <a:lnSpc>
-                <a:spcPts val="1800"/>
-              </a:lnSpc>
-              <a:buNone/>
-            </a:pPr>
-            <a:r>
-              <a:rPr lang="en-US" sz="1500" dirty="0">
-                <a:solidFill>
-                  <a:srgbClr val="1A1A1A"/>
-                </a:solidFill>
-                <a:latin typeface="Arial" pitchFamily="34" charset="0"/>
-                <a:ea typeface="Arial" pitchFamily="34" charset="-122"/>
-                <a:cs typeface="Arial" pitchFamily="34" charset="-120"/>
-              </a:rPr>
-              <a:t>This is now a rigorous negative result on 1D NMR SSL: five targets, paired tests, a measured noise floor, replicated. The methodology — the 0.045 floor, the paired protocol, the guardrails — is arguably a stronger contribution than a backbone that didn't beat logistic regression.</a:t>
-            </a:r>
-            <a:endParaRPr lang="en-US" sz="1500" dirty="0"/>
-          </a:p>
-        </p:txBody>
-      </p:sp>
-      <p:sp>
-        <p:nvSpPr>
-          <p:cNvPr id="14" name="Shape 12"/>
-          <p:cNvSpPr/>
-          <p:nvPr/>
-        </p:nvSpPr>
-        <p:spPr>
-          <a:xfrm>
-            <a:off x="502920" y="4864608"/>
-            <a:ext cx="11155680" cy="1335024"/>
+              <a:buNone/>
+            </a:pPr>
+            <a:r>
+              <a:rPr lang="en-US" sz="1150" dirty="0">
+                <a:solidFill>
+                  <a:srgbClr val="5A6068"/>
+                </a:solidFill>
+                <a:latin typeface="Arial" pitchFamily="34" charset="0"/>
+                <a:ea typeface="Arial" pitchFamily="34" charset="-122"/>
+                <a:cs typeface="Arial" pitchFamily="34" charset="-120"/>
+              </a:rPr>
+              <a:t>within noise</a:t>
+            </a:r>
+            <a:endParaRPr lang="en-US" sz="1150" dirty="0"/>
+          </a:p>
+        </p:txBody>
+      </p:sp>
+      <p:sp>
+        <p:nvSpPr>
+          <p:cNvPr id="33" name="Shape 31"/>
+          <p:cNvSpPr/>
+          <p:nvPr/>
+        </p:nvSpPr>
+        <p:spPr>
+          <a:xfrm>
+            <a:off x="6217920" y="3099816"/>
+            <a:ext cx="5440680" cy="402336"/>
           </a:xfrm>
           <a:prstGeom prst="roundRect">
             <a:avLst>
-              <a:gd name="adj" fmla="val 5479"/>
+              <a:gd name="adj" fmla="val 18182"/>
             </a:avLst>
           </a:prstGeom>
           <a:solidFill>
-            <a:srgbClr val="EEF3F7"/>
+            <a:srgbClr val="FBEEF1"/>
           </a:solidFill>
           <a:ln/>
         </p:spPr>
       </p:sp>
       <p:sp>
         <p:nvSpPr>
-          <p:cNvPr id="15" name="Text 13"/>
-          <p:cNvSpPr/>
-          <p:nvPr/>
-        </p:nvSpPr>
-        <p:spPr>
-          <a:xfrm>
-            <a:off x="777240" y="4974336"/>
-            <a:ext cx="10607040" cy="310896"/>
+          <p:cNvPr id="34" name="Text 32"/>
+          <p:cNvSpPr/>
+          <p:nvPr/>
+        </p:nvSpPr>
+        <p:spPr>
+          <a:xfrm>
+            <a:off x="6446520" y="3108960"/>
+            <a:ext cx="3657600" cy="246888"/>
           </a:xfrm>
           <a:prstGeom prst="rect">
             <a:avLst/>
@@ -24542,30 +23756,30 @@
               <a:buNone/>
             </a:pPr>
             <a:r>
-              <a:rPr lang="en-US" sz="1700" b="1" dirty="0">
-                <a:solidFill>
-                  <a:srgbClr val="21295C"/>
-                </a:solidFill>
-                <a:latin typeface="Arial" pitchFamily="34" charset="0"/>
-                <a:ea typeface="Arial" pitchFamily="34" charset="-122"/>
-                <a:cs typeface="Arial" pitchFamily="34" charset="-120"/>
-              </a:rPr>
-              <a:t>What I would NOT recommend</a:t>
-            </a:r>
-            <a:endParaRPr lang="en-US" sz="1700" dirty="0"/>
-          </a:p>
-        </p:txBody>
-      </p:sp>
-      <p:sp>
-        <p:nvSpPr>
-          <p:cNvPr id="16" name="Text 14"/>
-          <p:cNvSpPr/>
-          <p:nvPr/>
-        </p:nvSpPr>
-        <p:spPr>
-          <a:xfrm>
-            <a:off x="777240" y="5303520"/>
-            <a:ext cx="10607040" cy="841248"/>
+              <a:rPr lang="en-US" sz="1350" dirty="0">
+                <a:solidFill>
+                  <a:srgbClr val="1A1A1A"/>
+                </a:solidFill>
+                <a:latin typeface="Arial" pitchFamily="34" charset="0"/>
+                <a:ea typeface="Arial" pitchFamily="34" charset="-122"/>
+                <a:cs typeface="Arial" pitchFamily="34" charset="-120"/>
+              </a:rPr>
+              <a:t>Patch size 128 / 256 hurt</a:t>
+            </a:r>
+            <a:endParaRPr lang="en-US" sz="1350" dirty="0"/>
+          </a:p>
+        </p:txBody>
+      </p:sp>
+      <p:sp>
+        <p:nvSpPr>
+          <p:cNvPr id="35" name="Text 33"/>
+          <p:cNvSpPr/>
+          <p:nvPr/>
+        </p:nvSpPr>
+        <p:spPr>
+          <a:xfrm>
+            <a:off x="10104120" y="3108960"/>
+            <a:ext cx="1371600" cy="246888"/>
           </a:xfrm>
           <a:prstGeom prst="rect">
             <a:avLst/>
@@ -24577,14 +23791,111 @@
           <a:bodyPr wrap="square" lIns="0" tIns="0" rIns="0" bIns="0" rtlCol="0" anchor="ctr"/>
           <a:lstStyle/>
           <a:p>
+            <a:pPr algn="r" indent="0" marL="0">
+              <a:buNone/>
+            </a:pPr>
+            <a:r>
+              <a:rPr lang="en-US" sz="1350" b="1" dirty="0">
+                <a:solidFill>
+                  <a:srgbClr val="C1435B"/>
+                </a:solidFill>
+                <a:latin typeface="Arial" pitchFamily="34" charset="0"/>
+                <a:ea typeface="Arial" pitchFamily="34" charset="-122"/>
+                <a:cs typeface="Arial" pitchFamily="34" charset="-120"/>
+              </a:rPr>
+              <a:t>−0.04</a:t>
+            </a:r>
+            <a:endParaRPr lang="en-US" sz="1350" dirty="0"/>
+          </a:p>
+        </p:txBody>
+      </p:sp>
+      <p:sp>
+        <p:nvSpPr>
+          <p:cNvPr id="36" name="Text 34"/>
+          <p:cNvSpPr/>
+          <p:nvPr/>
+        </p:nvSpPr>
+        <p:spPr>
+          <a:xfrm>
+            <a:off x="6446520" y="3310128"/>
+            <a:ext cx="5029200" cy="201168"/>
+          </a:xfrm>
+          <a:prstGeom prst="rect">
+            <a:avLst/>
+          </a:prstGeom>
+          <a:noFill/>
+          <a:ln/>
+        </p:spPr>
+        <p:txBody>
+          <a:bodyPr wrap="square" lIns="0" tIns="0" rIns="0" bIns="0" rtlCol="0" anchor="ctr"/>
+          <a:lstStyle/>
+          <a:p>
             <a:pPr indent="0" marL="0">
-              <a:lnSpc>
-                <a:spcPts val="1900"/>
-              </a:lnSpc>
-              <a:buNone/>
-            </a:pPr>
-            <a:r>
-              <a:rPr lang="en-US" sz="1550" dirty="0">
+              <a:buNone/>
+            </a:pPr>
+            <a:r>
+              <a:rPr lang="en-US" sz="1150" dirty="0">
+                <a:solidFill>
+                  <a:srgbClr val="5A6068"/>
+                </a:solidFill>
+                <a:latin typeface="Arial" pitchFamily="34" charset="0"/>
+                <a:ea typeface="Arial" pitchFamily="34" charset="-122"/>
+                <a:cs typeface="Arial" pitchFamily="34" charset="-120"/>
+              </a:rPr>
+              <a:t>within noise</a:t>
+            </a:r>
+            <a:endParaRPr lang="en-US" sz="1150" dirty="0"/>
+          </a:p>
+        </p:txBody>
+      </p:sp>
+      <p:sp>
+        <p:nvSpPr>
+          <p:cNvPr id="37" name="Shape 35"/>
+          <p:cNvSpPr/>
+          <p:nvPr/>
+        </p:nvSpPr>
+        <p:spPr>
+          <a:xfrm>
+            <a:off x="6217920" y="3552444"/>
+            <a:ext cx="5440680" cy="402336"/>
+          </a:xfrm>
+          <a:prstGeom prst="roundRect">
+            <a:avLst>
+              <a:gd name="adj" fmla="val 18182"/>
+            </a:avLst>
+          </a:prstGeom>
+          <a:solidFill>
+            <a:srgbClr val="FBEEF1"/>
+          </a:solidFill>
+          <a:ln/>
+        </p:spPr>
+      </p:sp>
+      <p:sp>
+        <p:nvSpPr>
+          <p:cNvPr id="38" name="Text 36"/>
+          <p:cNvSpPr/>
+          <p:nvPr/>
+        </p:nvSpPr>
+        <p:spPr>
+          <a:xfrm>
+            <a:off x="6446520" y="3561588"/>
+            <a:ext cx="3657600" cy="246888"/>
+          </a:xfrm>
+          <a:prstGeom prst="rect">
+            <a:avLst/>
+          </a:prstGeom>
+          <a:noFill/>
+          <a:ln/>
+        </p:spPr>
+        <p:txBody>
+          <a:bodyPr wrap="square" lIns="0" tIns="0" rIns="0" bIns="0" rtlCol="0" anchor="ctr"/>
+          <a:lstStyle/>
+          <a:p>
+            <a:pPr indent="0" marL="0">
+              <a:buNone/>
+            </a:pPr>
+            <a:r>
+              <a:rPr lang="en-US" sz="1350" dirty="0">
                 <a:solidFill>
                   <a:srgbClr val="1A1A1A"/>
                 </a:solidFill>
@@ -24592,9 +23903,704 @@
                 <a:ea typeface="Arial" pitchFamily="34" charset="-122"/>
                 <a:cs typeface="Arial" pitchFamily="34" charset="-120"/>
               </a:rPr>
-              <a:t>More architecture variants. We have tried four patch sizes, two capacities, three objectives and two corpora; with the noise floor now known, none of those experiments could have detected an effect smaller than 0.09 anyway. Any further single-run backbone tweak is not worth the GPU time.</a:t>
-            </a:r>
-            <a:endParaRPr lang="en-US" sz="1550" dirty="0"/>
+              <a:t>Block masking / peak weighting</a:t>
+            </a:r>
+            <a:endParaRPr lang="en-US" sz="1350" dirty="0"/>
+          </a:p>
+        </p:txBody>
+      </p:sp>
+      <p:sp>
+        <p:nvSpPr>
+          <p:cNvPr id="39" name="Text 37"/>
+          <p:cNvSpPr/>
+          <p:nvPr/>
+        </p:nvSpPr>
+        <p:spPr>
+          <a:xfrm>
+            <a:off x="10104120" y="3561588"/>
+            <a:ext cx="1371600" cy="246888"/>
+          </a:xfrm>
+          <a:prstGeom prst="rect">
+            <a:avLst/>
+          </a:prstGeom>
+          <a:noFill/>
+          <a:ln/>
+        </p:spPr>
+        <p:txBody>
+          <a:bodyPr wrap="square" lIns="0" tIns="0" rIns="0" bIns="0" rtlCol="0" anchor="ctr"/>
+          <a:lstStyle/>
+          <a:p>
+            <a:pPr algn="r" indent="0" marL="0">
+              <a:buNone/>
+            </a:pPr>
+            <a:r>
+              <a:rPr lang="en-US" sz="1350" b="1" dirty="0">
+                <a:solidFill>
+                  <a:srgbClr val="C1435B"/>
+                </a:solidFill>
+                <a:latin typeface="Arial" pitchFamily="34" charset="0"/>
+                <a:ea typeface="Arial" pitchFamily="34" charset="-122"/>
+                <a:cs typeface="Arial" pitchFamily="34" charset="-120"/>
+              </a:rPr>
+              <a:t>−0.03 / +0.01</a:t>
+            </a:r>
+            <a:endParaRPr lang="en-US" sz="1350" dirty="0"/>
+          </a:p>
+        </p:txBody>
+      </p:sp>
+      <p:sp>
+        <p:nvSpPr>
+          <p:cNvPr id="40" name="Text 38"/>
+          <p:cNvSpPr/>
+          <p:nvPr/>
+        </p:nvSpPr>
+        <p:spPr>
+          <a:xfrm>
+            <a:off x="6446520" y="3762756"/>
+            <a:ext cx="5029200" cy="201168"/>
+          </a:xfrm>
+          <a:prstGeom prst="rect">
+            <a:avLst/>
+          </a:prstGeom>
+          <a:noFill/>
+          <a:ln/>
+        </p:spPr>
+        <p:txBody>
+          <a:bodyPr wrap="square" lIns="0" tIns="0" rIns="0" bIns="0" rtlCol="0" anchor="ctr"/>
+          <a:lstStyle/>
+          <a:p>
+            <a:pPr indent="0" marL="0">
+              <a:buNone/>
+            </a:pPr>
+            <a:r>
+              <a:rPr lang="en-US" sz="1150" dirty="0">
+                <a:solidFill>
+                  <a:srgbClr val="5A6068"/>
+                </a:solidFill>
+                <a:latin typeface="Arial" pitchFamily="34" charset="0"/>
+                <a:ea typeface="Arial" pitchFamily="34" charset="-122"/>
+                <a:cs typeface="Arial" pitchFamily="34" charset="-120"/>
+              </a:rPr>
+              <a:t>within noise</a:t>
+            </a:r>
+            <a:endParaRPr lang="en-US" sz="1150" dirty="0"/>
+          </a:p>
+        </p:txBody>
+      </p:sp>
+      <p:sp>
+        <p:nvSpPr>
+          <p:cNvPr id="41" name="Shape 39"/>
+          <p:cNvSpPr/>
+          <p:nvPr/>
+        </p:nvSpPr>
+        <p:spPr>
+          <a:xfrm>
+            <a:off x="6217920" y="4005072"/>
+            <a:ext cx="5440680" cy="402336"/>
+          </a:xfrm>
+          <a:prstGeom prst="roundRect">
+            <a:avLst>
+              <a:gd name="adj" fmla="val 18182"/>
+            </a:avLst>
+          </a:prstGeom>
+          <a:solidFill>
+            <a:srgbClr val="FBEEF1"/>
+          </a:solidFill>
+          <a:ln/>
+        </p:spPr>
+      </p:sp>
+      <p:sp>
+        <p:nvSpPr>
+          <p:cNvPr id="42" name="Text 40"/>
+          <p:cNvSpPr/>
+          <p:nvPr/>
+        </p:nvSpPr>
+        <p:spPr>
+          <a:xfrm>
+            <a:off x="6446520" y="4014216"/>
+            <a:ext cx="3657600" cy="246888"/>
+          </a:xfrm>
+          <a:prstGeom prst="rect">
+            <a:avLst/>
+          </a:prstGeom>
+          <a:noFill/>
+          <a:ln/>
+        </p:spPr>
+        <p:txBody>
+          <a:bodyPr wrap="square" lIns="0" tIns="0" rIns="0" bIns="0" rtlCol="0" anchor="ctr"/>
+          <a:lstStyle/>
+          <a:p>
+            <a:pPr indent="0" marL="0">
+              <a:buNone/>
+            </a:pPr>
+            <a:r>
+              <a:rPr lang="en-US" sz="1350" dirty="0">
+                <a:solidFill>
+                  <a:srgbClr val="1A1A1A"/>
+                </a:solidFill>
+                <a:latin typeface="Arial" pitchFamily="34" charset="0"/>
+                <a:ea typeface="Arial" pitchFamily="34" charset="-122"/>
+                <a:cs typeface="Arial" pitchFamily="34" charset="-120"/>
+              </a:rPr>
+              <a:t>"SSL wins in few-shot"</a:t>
+            </a:r>
+            <a:endParaRPr lang="en-US" sz="1350" dirty="0"/>
+          </a:p>
+        </p:txBody>
+      </p:sp>
+      <p:sp>
+        <p:nvSpPr>
+          <p:cNvPr id="43" name="Text 41"/>
+          <p:cNvSpPr/>
+          <p:nvPr/>
+        </p:nvSpPr>
+        <p:spPr>
+          <a:xfrm>
+            <a:off x="10104120" y="4014216"/>
+            <a:ext cx="1371600" cy="246888"/>
+          </a:xfrm>
+          <a:prstGeom prst="rect">
+            <a:avLst/>
+          </a:prstGeom>
+          <a:noFill/>
+          <a:ln/>
+        </p:spPr>
+        <p:txBody>
+          <a:bodyPr wrap="square" lIns="0" tIns="0" rIns="0" bIns="0" rtlCol="0" anchor="ctr"/>
+          <a:lstStyle/>
+          <a:p>
+            <a:pPr algn="r" indent="0" marL="0">
+              <a:buNone/>
+            </a:pPr>
+            <a:r>
+              <a:rPr lang="en-US" sz="1350" b="1" dirty="0">
+                <a:solidFill>
+                  <a:srgbClr val="C1435B"/>
+                </a:solidFill>
+                <a:latin typeface="Arial" pitchFamily="34" charset="0"/>
+                <a:ea typeface="Arial" pitchFamily="34" charset="-122"/>
+                <a:cs typeface="Arial" pitchFamily="34" charset="-120"/>
+              </a:rPr>
+              <a:t>+0.001</a:t>
+            </a:r>
+            <a:endParaRPr lang="en-US" sz="1350" dirty="0"/>
+          </a:p>
+        </p:txBody>
+      </p:sp>
+      <p:sp>
+        <p:nvSpPr>
+          <p:cNvPr id="44" name="Text 42"/>
+          <p:cNvSpPr/>
+          <p:nvPr/>
+        </p:nvSpPr>
+        <p:spPr>
+          <a:xfrm>
+            <a:off x="6446520" y="4215384"/>
+            <a:ext cx="5029200" cy="201168"/>
+          </a:xfrm>
+          <a:prstGeom prst="rect">
+            <a:avLst/>
+          </a:prstGeom>
+          <a:noFill/>
+          <a:ln/>
+        </p:spPr>
+        <p:txBody>
+          <a:bodyPr wrap="square" lIns="0" tIns="0" rIns="0" bIns="0" rtlCol="0" anchor="ctr"/>
+          <a:lstStyle/>
+          <a:p>
+            <a:pPr indent="0" marL="0">
+              <a:buNone/>
+            </a:pPr>
+            <a:r>
+              <a:rPr lang="en-US" sz="1150" dirty="0">
+                <a:solidFill>
+                  <a:srgbClr val="5A6068"/>
+                </a:solidFill>
+                <a:latin typeface="Arial" pitchFamily="34" charset="0"/>
+                <a:ea typeface="Arial" pitchFamily="34" charset="-122"/>
+                <a:cs typeface="Arial" pitchFamily="34" charset="-120"/>
+              </a:rPr>
+              <a:t>p = 0.74 — refuted</a:t>
+            </a:r>
+            <a:endParaRPr lang="en-US" sz="1150" dirty="0"/>
+          </a:p>
+        </p:txBody>
+      </p:sp>
+      <p:sp>
+        <p:nvSpPr>
+          <p:cNvPr id="45" name="Shape 43"/>
+          <p:cNvSpPr/>
+          <p:nvPr/>
+        </p:nvSpPr>
+        <p:spPr>
+          <a:xfrm>
+            <a:off x="6217920" y="4457700"/>
+            <a:ext cx="5440680" cy="402336"/>
+          </a:xfrm>
+          <a:prstGeom prst="roundRect">
+            <a:avLst>
+              <a:gd name="adj" fmla="val 18182"/>
+            </a:avLst>
+          </a:prstGeom>
+          <a:solidFill>
+            <a:srgbClr val="FBEEF1"/>
+          </a:solidFill>
+          <a:ln/>
+        </p:spPr>
+      </p:sp>
+      <p:sp>
+        <p:nvSpPr>
+          <p:cNvPr id="46" name="Text 44"/>
+          <p:cNvSpPr/>
+          <p:nvPr/>
+        </p:nvSpPr>
+        <p:spPr>
+          <a:xfrm>
+            <a:off x="6446520" y="4466844"/>
+            <a:ext cx="3657600" cy="246888"/>
+          </a:xfrm>
+          <a:prstGeom prst="rect">
+            <a:avLst/>
+          </a:prstGeom>
+          <a:noFill/>
+          <a:ln/>
+        </p:spPr>
+        <p:txBody>
+          <a:bodyPr wrap="square" lIns="0" tIns="0" rIns="0" bIns="0" rtlCol="0" anchor="ctr"/>
+          <a:lstStyle/>
+          <a:p>
+            <a:pPr indent="0" marL="0">
+              <a:buNone/>
+            </a:pPr>
+            <a:r>
+              <a:rPr lang="en-US" sz="1350" dirty="0">
+                <a:solidFill>
+                  <a:srgbClr val="1A1A1A"/>
+                </a:solidFill>
+                <a:latin typeface="Arial" pitchFamily="34" charset="0"/>
+                <a:ea typeface="Arial" pitchFamily="34" charset="-122"/>
+                <a:cs typeface="Arial" pitchFamily="34" charset="-120"/>
+              </a:rPr>
+              <a:t>"SSL beats classical on Barth"</a:t>
+            </a:r>
+            <a:endParaRPr lang="en-US" sz="1350" dirty="0"/>
+          </a:p>
+        </p:txBody>
+      </p:sp>
+      <p:sp>
+        <p:nvSpPr>
+          <p:cNvPr id="47" name="Text 45"/>
+          <p:cNvSpPr/>
+          <p:nvPr/>
+        </p:nvSpPr>
+        <p:spPr>
+          <a:xfrm>
+            <a:off x="10104120" y="4466844"/>
+            <a:ext cx="1371600" cy="246888"/>
+          </a:xfrm>
+          <a:prstGeom prst="rect">
+            <a:avLst/>
+          </a:prstGeom>
+          <a:noFill/>
+          <a:ln/>
+        </p:spPr>
+        <p:txBody>
+          <a:bodyPr wrap="square" lIns="0" tIns="0" rIns="0" bIns="0" rtlCol="0" anchor="ctr"/>
+          <a:lstStyle/>
+          <a:p>
+            <a:pPr algn="r" indent="0" marL="0">
+              <a:buNone/>
+            </a:pPr>
+            <a:r>
+              <a:rPr lang="en-US" sz="1350" b="1" dirty="0">
+                <a:solidFill>
+                  <a:srgbClr val="C1435B"/>
+                </a:solidFill>
+                <a:latin typeface="Arial" pitchFamily="34" charset="0"/>
+                <a:ea typeface="Arial" pitchFamily="34" charset="-122"/>
+                <a:cs typeface="Arial" pitchFamily="34" charset="-120"/>
+              </a:rPr>
+              <a:t>+0.101</a:t>
+            </a:r>
+            <a:endParaRPr lang="en-US" sz="1350" dirty="0"/>
+          </a:p>
+        </p:txBody>
+      </p:sp>
+      <p:sp>
+        <p:nvSpPr>
+          <p:cNvPr id="48" name="Text 46"/>
+          <p:cNvSpPr/>
+          <p:nvPr/>
+        </p:nvSpPr>
+        <p:spPr>
+          <a:xfrm>
+            <a:off x="6446520" y="4668012"/>
+            <a:ext cx="5029200" cy="201168"/>
+          </a:xfrm>
+          <a:prstGeom prst="rect">
+            <a:avLst/>
+          </a:prstGeom>
+          <a:noFill/>
+          <a:ln/>
+        </p:spPr>
+        <p:txBody>
+          <a:bodyPr wrap="square" lIns="0" tIns="0" rIns="0" bIns="0" rtlCol="0" anchor="ctr"/>
+          <a:lstStyle/>
+          <a:p>
+            <a:pPr indent="0" marL="0">
+              <a:buNone/>
+            </a:pPr>
+            <a:r>
+              <a:rPr lang="en-US" sz="1150" dirty="0">
+                <a:solidFill>
+                  <a:srgbClr val="5A6068"/>
+                </a:solidFill>
+                <a:latin typeface="Arial" pitchFamily="34" charset="0"/>
+                <a:ea typeface="Arial" pitchFamily="34" charset="-122"/>
+                <a:cs typeface="Arial" pitchFamily="34" charset="-120"/>
+              </a:rPr>
+              <a:t>n=5 → +0.021 (0.9 se)</a:t>
+            </a:r>
+            <a:endParaRPr lang="en-US" sz="1150" dirty="0"/>
+          </a:p>
+        </p:txBody>
+      </p:sp>
+      <p:sp>
+        <p:nvSpPr>
+          <p:cNvPr id="49" name="Shape 47"/>
+          <p:cNvSpPr/>
+          <p:nvPr/>
+        </p:nvSpPr>
+        <p:spPr>
+          <a:xfrm>
+            <a:off x="6217920" y="4910328"/>
+            <a:ext cx="5440680" cy="402336"/>
+          </a:xfrm>
+          <a:prstGeom prst="roundRect">
+            <a:avLst>
+              <a:gd name="adj" fmla="val 18182"/>
+            </a:avLst>
+          </a:prstGeom>
+          <a:solidFill>
+            <a:srgbClr val="FBEEF1"/>
+          </a:solidFill>
+          <a:ln/>
+        </p:spPr>
+      </p:sp>
+      <p:sp>
+        <p:nvSpPr>
+          <p:cNvPr id="50" name="Text 48"/>
+          <p:cNvSpPr/>
+          <p:nvPr/>
+        </p:nvSpPr>
+        <p:spPr>
+          <a:xfrm>
+            <a:off x="6446520" y="4919472"/>
+            <a:ext cx="3657600" cy="246888"/>
+          </a:xfrm>
+          <a:prstGeom prst="rect">
+            <a:avLst/>
+          </a:prstGeom>
+          <a:noFill/>
+          <a:ln/>
+        </p:spPr>
+        <p:txBody>
+          <a:bodyPr wrap="square" lIns="0" tIns="0" rIns="0" bIns="0" rtlCol="0" anchor="ctr"/>
+          <a:lstStyle/>
+          <a:p>
+            <a:pPr indent="0" marL="0">
+              <a:buNone/>
+            </a:pPr>
+            <a:r>
+              <a:rPr lang="en-US" sz="1350" dirty="0">
+                <a:solidFill>
+                  <a:srgbClr val="1A1A1A"/>
+                </a:solidFill>
+                <a:latin typeface="Arial" pitchFamily="34" charset="0"/>
+                <a:ea typeface="Arial" pitchFamily="34" charset="-122"/>
+                <a:cs typeface="Arial" pitchFamily="34" charset="-120"/>
+              </a:rPr>
+              <a:t>"Reconstruction proves it learned"</a:t>
+            </a:r>
+            <a:endParaRPr lang="en-US" sz="1350" dirty="0"/>
+          </a:p>
+        </p:txBody>
+      </p:sp>
+      <p:sp>
+        <p:nvSpPr>
+          <p:cNvPr id="51" name="Text 49"/>
+          <p:cNvSpPr/>
+          <p:nvPr/>
+        </p:nvSpPr>
+        <p:spPr>
+          <a:xfrm>
+            <a:off x="10104120" y="4919472"/>
+            <a:ext cx="1371600" cy="246888"/>
+          </a:xfrm>
+          <a:prstGeom prst="rect">
+            <a:avLst/>
+          </a:prstGeom>
+          <a:noFill/>
+          <a:ln/>
+        </p:spPr>
+        <p:txBody>
+          <a:bodyPr wrap="square" lIns="0" tIns="0" rIns="0" bIns="0" rtlCol="0" anchor="ctr"/>
+          <a:lstStyle/>
+          <a:p>
+            <a:pPr algn="r" indent="0" marL="0">
+              <a:buNone/>
+            </a:pPr>
+            <a:r>
+              <a:rPr lang="en-US" sz="1350" b="1" dirty="0">
+                <a:solidFill>
+                  <a:srgbClr val="C1435B"/>
+                </a:solidFill>
+                <a:latin typeface="Arial" pitchFamily="34" charset="0"/>
+                <a:ea typeface="Arial" pitchFamily="34" charset="-122"/>
+                <a:cs typeface="Arial" pitchFamily="34" charset="-120"/>
+              </a:rPr>
+              <a:t>r = 0.92</a:t>
+            </a:r>
+            <a:endParaRPr lang="en-US" sz="1350" dirty="0"/>
+          </a:p>
+        </p:txBody>
+      </p:sp>
+      <p:sp>
+        <p:nvSpPr>
+          <p:cNvPr id="52" name="Text 50"/>
+          <p:cNvSpPr/>
+          <p:nvPr/>
+        </p:nvSpPr>
+        <p:spPr>
+          <a:xfrm>
+            <a:off x="6446520" y="5120640"/>
+            <a:ext cx="5029200" cy="201168"/>
+          </a:xfrm>
+          <a:prstGeom prst="rect">
+            <a:avLst/>
+          </a:prstGeom>
+          <a:noFill/>
+          <a:ln/>
+        </p:spPr>
+        <p:txBody>
+          <a:bodyPr wrap="square" lIns="0" tIns="0" rIns="0" bIns="0" rtlCol="0" anchor="ctr"/>
+          <a:lstStyle/>
+          <a:p>
+            <a:pPr indent="0" marL="0">
+              <a:buNone/>
+            </a:pPr>
+            <a:r>
+              <a:rPr lang="en-US" sz="1150" dirty="0">
+                <a:solidFill>
+                  <a:srgbClr val="5A6068"/>
+                </a:solidFill>
+                <a:latin typeface="Arial" pitchFamily="34" charset="0"/>
+                <a:ea typeface="Arial" pitchFamily="34" charset="-122"/>
+                <a:cs typeface="Arial" pitchFamily="34" charset="-120"/>
+              </a:rPr>
+              <a:t>copy-a-neighbour: 0.90</a:t>
+            </a:r>
+            <a:endParaRPr lang="en-US" sz="1150" dirty="0"/>
+          </a:p>
+        </p:txBody>
+      </p:sp>
+      <p:sp>
+        <p:nvSpPr>
+          <p:cNvPr id="53" name="Shape 51"/>
+          <p:cNvSpPr/>
+          <p:nvPr/>
+        </p:nvSpPr>
+        <p:spPr>
+          <a:xfrm>
+            <a:off x="6217920" y="5362956"/>
+            <a:ext cx="5440680" cy="402336"/>
+          </a:xfrm>
+          <a:prstGeom prst="roundRect">
+            <a:avLst>
+              <a:gd name="adj" fmla="val 18182"/>
+            </a:avLst>
+          </a:prstGeom>
+          <a:solidFill>
+            <a:srgbClr val="FBEEF1"/>
+          </a:solidFill>
+          <a:ln/>
+        </p:spPr>
+      </p:sp>
+      <p:sp>
+        <p:nvSpPr>
+          <p:cNvPr id="54" name="Text 52"/>
+          <p:cNvSpPr/>
+          <p:nvPr/>
+        </p:nvSpPr>
+        <p:spPr>
+          <a:xfrm>
+            <a:off x="6446520" y="5372100"/>
+            <a:ext cx="3657600" cy="246888"/>
+          </a:xfrm>
+          <a:prstGeom prst="rect">
+            <a:avLst/>
+          </a:prstGeom>
+          <a:noFill/>
+          <a:ln/>
+        </p:spPr>
+        <p:txBody>
+          <a:bodyPr wrap="square" lIns="0" tIns="0" rIns="0" bIns="0" rtlCol="0" anchor="ctr"/>
+          <a:lstStyle/>
+          <a:p>
+            <a:pPr indent="0" marL="0">
+              <a:buNone/>
+            </a:pPr>
+            <a:r>
+              <a:rPr lang="en-US" sz="1350" dirty="0">
+                <a:solidFill>
+                  <a:srgbClr val="1A1A1A"/>
+                </a:solidFill>
+                <a:latin typeface="Arial" pitchFamily="34" charset="0"/>
+                <a:ea typeface="Arial" pitchFamily="34" charset="-122"/>
+                <a:cs typeface="Arial" pitchFamily="34" charset="-120"/>
+              </a:rPr>
+              <a:t>MTBLS326's perfect 1.000</a:t>
+            </a:r>
+            <a:endParaRPr lang="en-US" sz="1350" dirty="0"/>
+          </a:p>
+        </p:txBody>
+      </p:sp>
+      <p:sp>
+        <p:nvSpPr>
+          <p:cNvPr id="55" name="Text 53"/>
+          <p:cNvSpPr/>
+          <p:nvPr/>
+        </p:nvSpPr>
+        <p:spPr>
+          <a:xfrm>
+            <a:off x="10104120" y="5372100"/>
+            <a:ext cx="1371600" cy="246888"/>
+          </a:xfrm>
+          <a:prstGeom prst="rect">
+            <a:avLst/>
+          </a:prstGeom>
+          <a:noFill/>
+          <a:ln/>
+        </p:spPr>
+        <p:txBody>
+          <a:bodyPr wrap="square" lIns="0" tIns="0" rIns="0" bIns="0" rtlCol="0" anchor="ctr"/>
+          <a:lstStyle/>
+          <a:p>
+            <a:pPr algn="r" indent="0" marL="0">
+              <a:buNone/>
+            </a:pPr>
+            <a:r>
+              <a:rPr lang="en-US" sz="1350" b="1" dirty="0">
+                <a:solidFill>
+                  <a:srgbClr val="C1435B"/>
+                </a:solidFill>
+                <a:latin typeface="Arial" pitchFamily="34" charset="0"/>
+                <a:ea typeface="Arial" pitchFamily="34" charset="-122"/>
+                <a:cs typeface="Arial" pitchFamily="34" charset="-120"/>
+              </a:rPr>
+              <a:t>1.000</a:t>
+            </a:r>
+            <a:endParaRPr lang="en-US" sz="1350" dirty="0"/>
+          </a:p>
+        </p:txBody>
+      </p:sp>
+      <p:sp>
+        <p:nvSpPr>
+          <p:cNvPr id="56" name="Text 54"/>
+          <p:cNvSpPr/>
+          <p:nvPr/>
+        </p:nvSpPr>
+        <p:spPr>
+          <a:xfrm>
+            <a:off x="6446520" y="5573268"/>
+            <a:ext cx="5029200" cy="201168"/>
+          </a:xfrm>
+          <a:prstGeom prst="rect">
+            <a:avLst/>
+          </a:prstGeom>
+          <a:noFill/>
+          <a:ln/>
+        </p:spPr>
+        <p:txBody>
+          <a:bodyPr wrap="square" lIns="0" tIns="0" rIns="0" bIns="0" rtlCol="0" anchor="ctr"/>
+          <a:lstStyle/>
+          <a:p>
+            <a:pPr indent="0" marL="0">
+              <a:buNone/>
+            </a:pPr>
+            <a:r>
+              <a:rPr lang="en-US" sz="1150" dirty="0">
+                <a:solidFill>
+                  <a:srgbClr val="5A6068"/>
+                </a:solidFill>
+                <a:latin typeface="Arial" pitchFamily="34" charset="0"/>
+                <a:ea typeface="Arial" pitchFamily="34" charset="-122"/>
+                <a:cs typeface="Arial" pitchFamily="34" charset="-120"/>
+              </a:rPr>
+              <a:t>confounded by batch</a:t>
+            </a:r>
+            <a:endParaRPr lang="en-US" sz="1150" dirty="0"/>
+          </a:p>
+        </p:txBody>
+      </p:sp>
+      <p:sp>
+        <p:nvSpPr>
+          <p:cNvPr id="57" name="Shape 55"/>
+          <p:cNvSpPr/>
+          <p:nvPr/>
+        </p:nvSpPr>
+        <p:spPr>
+          <a:xfrm>
+            <a:off x="502920" y="5760720"/>
+            <a:ext cx="11155680" cy="658368"/>
+          </a:xfrm>
+          <a:prstGeom prst="roundRect">
+            <a:avLst>
+              <a:gd name="adj" fmla="val 11111"/>
+            </a:avLst>
+          </a:prstGeom>
+          <a:solidFill>
+            <a:srgbClr val="21295C"/>
+          </a:solidFill>
+          <a:ln/>
+        </p:spPr>
+      </p:sp>
+      <p:sp>
+        <p:nvSpPr>
+          <p:cNvPr id="58" name="Text 56"/>
+          <p:cNvSpPr/>
+          <p:nvPr/>
+        </p:nvSpPr>
+        <p:spPr>
+          <a:xfrm>
+            <a:off x="777240" y="5760720"/>
+            <a:ext cx="10607040" cy="658368"/>
+          </a:xfrm>
+          <a:prstGeom prst="rect">
+            <a:avLst/>
+          </a:prstGeom>
+          <a:noFill/>
+          <a:ln/>
+        </p:spPr>
+        <p:txBody>
+          <a:bodyPr wrap="square" lIns="0" tIns="0" rIns="0" bIns="0" rtlCol="0" anchor="ctr"/>
+          <a:lstStyle/>
+          <a:p>
+            <a:pPr indent="0" marL="0">
+              <a:buNone/>
+            </a:pPr>
+            <a:r>
+              <a:rPr lang="en-US" sz="1600" b="1" dirty="0">
+                <a:solidFill>
+                  <a:srgbClr val="FFFFFF"/>
+                </a:solidFill>
+                <a:latin typeface="Arial" pitchFamily="34" charset="0"/>
+                <a:ea typeface="Arial" pitchFamily="34" charset="-122"/>
+                <a:cs typeface="Arial" pitchFamily="34" charset="-120"/>
+              </a:rPr>
+              <a:t>The pattern: every surviving result is PAIRED — one fixed checkpoint, one thing varied. Every retracted result compared two separately-trained networks.</a:t>
+            </a:r>
+            <a:endParaRPr lang="en-US" sz="1600" dirty="0"/>
           </a:p>
         </p:txBody>
       </p:sp>
@@ -25257,7 +25263,7 @@
                 <a:ea typeface="Arial" pitchFamily="34" charset="-122"/>
                 <a:cs typeface="Arial" pitchFamily="34" charset="-120"/>
               </a:rPr>
-              <a:t>Proposed next steps</a:t>
+              <a:t>What I think this means</a:t>
             </a:r>
             <a:endParaRPr lang="en-US" sz="3000" dirty="0"/>
           </a:p>
@@ -25296,7 +25302,7 @@
                 <a:ea typeface="Arial" pitchFamily="34" charset="-122"/>
                 <a:cs typeface="Arial" pitchFamily="34" charset="-120"/>
               </a:rPr>
-              <a:t>Re-ranked by what §18–§20 actually leave open</a:t>
+              <a:t>Reading the whole picture honestly</a:t>
             </a:r>
             <a:endParaRPr lang="en-US" sz="1700" dirty="0"/>
           </a:p>
@@ -25349,12 +25355,221 @@
         </p:nvSpPr>
         <p:spPr>
           <a:xfrm>
-            <a:off x="502920" y="1371600"/>
-            <a:ext cx="11155680" cy="969264"/>
+            <a:off x="502920" y="1417320"/>
+            <a:ext cx="11155680" cy="1298448"/>
           </a:xfrm>
           <a:prstGeom prst="roundRect">
             <a:avLst>
-              <a:gd name="adj" fmla="val 7547"/>
+              <a:gd name="adj" fmla="val 5634"/>
+            </a:avLst>
+          </a:prstGeom>
+          <a:solidFill>
+            <a:srgbClr val="EEF3F7"/>
+          </a:solidFill>
+          <a:ln/>
+        </p:spPr>
+      </p:sp>
+      <p:sp>
+        <p:nvSpPr>
+          <p:cNvPr id="6" name="Text 4"/>
+          <p:cNvSpPr/>
+          <p:nvPr/>
+        </p:nvSpPr>
+        <p:spPr>
+          <a:xfrm>
+            <a:off x="777240" y="1517904"/>
+            <a:ext cx="10607040" cy="310896"/>
+          </a:xfrm>
+          <a:prstGeom prst="rect">
+            <a:avLst/>
+          </a:prstGeom>
+          <a:noFill/>
+          <a:ln/>
+        </p:spPr>
+        <p:txBody>
+          <a:bodyPr wrap="square" lIns="0" tIns="0" rIns="0" bIns="0" rtlCol="0" anchor="ctr"/>
+          <a:lstStyle/>
+          <a:p>
+            <a:pPr indent="0" marL="0">
+              <a:buNone/>
+            </a:pPr>
+            <a:r>
+              <a:rPr lang="en-US" sz="1800" b="1" dirty="0">
+                <a:solidFill>
+                  <a:srgbClr val="065A82"/>
+                </a:solidFill>
+                <a:latin typeface="Arial" pitchFamily="34" charset="0"/>
+                <a:ea typeface="Arial" pitchFamily="34" charset="-122"/>
+                <a:cs typeface="Arial" pitchFamily="34" charset="-120"/>
+              </a:rPr>
+              <a:t>The findings are coherent, not contradictory</a:t>
+            </a:r>
+            <a:endParaRPr lang="en-US" sz="1800" dirty="0"/>
+          </a:p>
+        </p:txBody>
+      </p:sp>
+      <p:sp>
+        <p:nvSpPr>
+          <p:cNvPr id="7" name="Text 5"/>
+          <p:cNvSpPr/>
+          <p:nvPr/>
+        </p:nvSpPr>
+        <p:spPr>
+          <a:xfrm>
+            <a:off x="777240" y="1847088"/>
+            <a:ext cx="10607040" cy="841248"/>
+          </a:xfrm>
+          <a:prstGeom prst="rect">
+            <a:avLst/>
+          </a:prstGeom>
+          <a:noFill/>
+          <a:ln/>
+        </p:spPr>
+        <p:txBody>
+          <a:bodyPr wrap="square" lIns="0" tIns="0" rIns="0" bIns="0" rtlCol="0" anchor="ctr"/>
+          <a:lstStyle/>
+          <a:p>
+            <a:pPr indent="0" marL="0">
+              <a:lnSpc>
+                <a:spcPts val="1900"/>
+              </a:lnSpc>
+              <a:buNone/>
+            </a:pPr>
+            <a:r>
+              <a:rPr lang="en-US" sz="1550" dirty="0">
+                <a:solidFill>
+                  <a:srgbClr val="1A1A1A"/>
+                </a:solidFill>
+                <a:latin typeface="Arial" pitchFamily="34" charset="0"/>
+                <a:ea typeface="Arial" pitchFamily="34" charset="-122"/>
+                <a:cs typeface="Arial" pitchFamily="34" charset="-120"/>
+              </a:rPr>
+              <a:t>Masked pretraining DOES learn something real (+0.117 over random init). But it learns less discriminative signal than 1,024-bin integrated areas already carry — and reconstruction quality anti-correlates with transfer. Meanwhile every axis we pushed on the backbone (patch size, capacity, objective, corpus version) came back flat.</a:t>
+            </a:r>
+            <a:endParaRPr lang="en-US" sz="1550" dirty="0"/>
+          </a:p>
+        </p:txBody>
+      </p:sp>
+      <p:sp>
+        <p:nvSpPr>
+          <p:cNvPr id="8" name="Shape 6"/>
+          <p:cNvSpPr/>
+          <p:nvPr/>
+        </p:nvSpPr>
+        <p:spPr>
+          <a:xfrm>
+            <a:off x="502920" y="2834640"/>
+            <a:ext cx="5440680" cy="1883664"/>
+          </a:xfrm>
+          <a:prstGeom prst="roundRect">
+            <a:avLst>
+              <a:gd name="adj" fmla="val 3883"/>
+            </a:avLst>
+          </a:prstGeom>
+          <a:solidFill>
+            <a:srgbClr val="FBEEF1"/>
+          </a:solidFill>
+          <a:ln/>
+        </p:spPr>
+      </p:sp>
+      <p:sp>
+        <p:nvSpPr>
+          <p:cNvPr id="9" name="Text 7"/>
+          <p:cNvSpPr/>
+          <p:nvPr/>
+        </p:nvSpPr>
+        <p:spPr>
+          <a:xfrm>
+            <a:off x="777240" y="2944368"/>
+            <a:ext cx="4937760" cy="530352"/>
+          </a:xfrm>
+          <a:prstGeom prst="rect">
+            <a:avLst/>
+          </a:prstGeom>
+          <a:noFill/>
+          <a:ln/>
+        </p:spPr>
+        <p:txBody>
+          <a:bodyPr wrap="square" lIns="0" tIns="0" rIns="0" bIns="0" rtlCol="0" anchor="t"/>
+          <a:lstStyle/>
+          <a:p>
+            <a:pPr indent="0" marL="0">
+              <a:lnSpc>
+                <a:spcPts val="2000"/>
+              </a:lnSpc>
+              <a:buNone/>
+            </a:pPr>
+            <a:r>
+              <a:rPr lang="en-US" sz="1700" b="1" dirty="0">
+                <a:solidFill>
+                  <a:srgbClr val="C1435B"/>
+                </a:solidFill>
+                <a:latin typeface="Arial" pitchFamily="34" charset="0"/>
+                <a:ea typeface="Arial" pitchFamily="34" charset="-122"/>
+                <a:cs typeface="Arial" pitchFamily="34" charset="-120"/>
+              </a:rPr>
+              <a:t>The most likely cause we have NOT tested</a:t>
+            </a:r>
+            <a:endParaRPr lang="en-US" sz="1700" dirty="0"/>
+          </a:p>
+        </p:txBody>
+      </p:sp>
+      <p:sp>
+        <p:nvSpPr>
+          <p:cNvPr id="10" name="Text 8"/>
+          <p:cNvSpPr/>
+          <p:nvPr/>
+        </p:nvSpPr>
+        <p:spPr>
+          <a:xfrm>
+            <a:off x="777240" y="3511296"/>
+            <a:ext cx="4937760" cy="1133856"/>
+          </a:xfrm>
+          <a:prstGeom prst="rect">
+            <a:avLst/>
+          </a:prstGeom>
+          <a:noFill/>
+          <a:ln/>
+        </p:spPr>
+        <p:txBody>
+          <a:bodyPr wrap="square" lIns="0" tIns="0" rIns="0" bIns="0" rtlCol="0" anchor="ctr"/>
+          <a:lstStyle/>
+          <a:p>
+            <a:pPr indent="0" marL="0">
+              <a:lnSpc>
+                <a:spcPts val="1800"/>
+              </a:lnSpc>
+              <a:buNone/>
+            </a:pPr>
+            <a:r>
+              <a:rPr lang="en-US" sz="1500" dirty="0">
+                <a:solidFill>
+                  <a:srgbClr val="1A1A1A"/>
+                </a:solidFill>
+                <a:latin typeface="Arial" pitchFamily="34" charset="0"/>
+                <a:ea typeface="Arial" pitchFamily="34" charset="-122"/>
+                <a:cs typeface="Arial" pitchFamily="34" charset="-120"/>
+              </a:rPr>
+              <a:t>The corpus is 9,670 spectra. That is very small for a foundation model — orders of magnitude below where masked pretraining usually starts paying off. Experiment #13 only probed corpus size DOWNWARD, which cannot detect an under-training regime.</a:t>
+            </a:r>
+            <a:endParaRPr lang="en-US" sz="1500" dirty="0"/>
+          </a:p>
+        </p:txBody>
+      </p:sp>
+      <p:sp>
+        <p:nvSpPr>
+          <p:cNvPr id="11" name="Shape 9"/>
+          <p:cNvSpPr/>
+          <p:nvPr/>
+        </p:nvSpPr>
+        <p:spPr>
+          <a:xfrm>
+            <a:off x="6217920" y="2834640"/>
+            <a:ext cx="5440680" cy="1883664"/>
+          </a:xfrm>
+          <a:prstGeom prst="roundRect">
+            <a:avLst>
+              <a:gd name="adj" fmla="val 3883"/>
             </a:avLst>
           </a:prstGeom>
           <a:solidFill>
@@ -25365,34 +25580,14 @@
       </p:sp>
       <p:sp>
         <p:nvSpPr>
-          <p:cNvPr id="6" name="Shape 4"/>
-          <p:cNvSpPr/>
-          <p:nvPr/>
-        </p:nvSpPr>
-        <p:spPr>
-          <a:xfrm>
-            <a:off x="713232" y="1627632"/>
-            <a:ext cx="475488" cy="475488"/>
-          </a:xfrm>
-          <a:prstGeom prst="ellipse">
-            <a:avLst/>
-          </a:prstGeom>
-          <a:solidFill>
-            <a:srgbClr val="1A7A3C"/>
-          </a:solidFill>
-          <a:ln/>
-        </p:spPr>
-      </p:sp>
-      <p:sp>
-        <p:nvSpPr>
-          <p:cNvPr id="7" name="Text 5"/>
-          <p:cNvSpPr/>
-          <p:nvPr/>
-        </p:nvSpPr>
-        <p:spPr>
-          <a:xfrm>
-            <a:off x="713232" y="1627632"/>
-            <a:ext cx="475488" cy="475488"/>
+          <p:cNvPr id="12" name="Text 10"/>
+          <p:cNvSpPr/>
+          <p:nvPr/>
+        </p:nvSpPr>
+        <p:spPr>
+          <a:xfrm>
+            <a:off x="6492240" y="2944368"/>
+            <a:ext cx="4937760" cy="329184"/>
           </a:xfrm>
           <a:prstGeom prst="rect">
             <a:avLst/>
@@ -25404,19 +25599,19 @@
           <a:bodyPr wrap="square" lIns="0" tIns="0" rIns="0" bIns="0" rtlCol="0" anchor="ctr"/>
           <a:lstStyle/>
           <a:p>
-            <a:pPr algn="ctr" indent="0" marL="0">
+            <a:pPr indent="0" marL="0">
               <a:buNone/>
             </a:pPr>
             <a:r>
               <a:rPr lang="en-US" sz="1700" b="1" dirty="0">
                 <a:solidFill>
-                  <a:srgbClr val="FFFFFF"/>
-                </a:solidFill>
-                <a:latin typeface="Arial" pitchFamily="34" charset="0"/>
-                <a:ea typeface="Arial" pitchFamily="34" charset="-122"/>
-                <a:cs typeface="Arial" pitchFamily="34" charset="-120"/>
-              </a:rPr>
-              <a:t>1</a:t>
+                  <a:srgbClr val="1A7A3C"/>
+                </a:solidFill>
+                <a:latin typeface="Arial" pitchFamily="34" charset="0"/>
+                <a:ea typeface="Arial" pitchFamily="34" charset="-122"/>
+                <a:cs typeface="Arial" pitchFamily="34" charset="-120"/>
+              </a:rPr>
+              <a:t>The contribution, reframed</a:t>
             </a:r>
             <a:endParaRPr lang="en-US" sz="1700" dirty="0"/>
           </a:p>
@@ -25424,14 +25619,14 @@
       </p:sp>
       <p:sp>
         <p:nvSpPr>
-          <p:cNvPr id="8" name="Text 6"/>
-          <p:cNvSpPr/>
-          <p:nvPr/>
-        </p:nvSpPr>
-        <p:spPr>
-          <a:xfrm>
-            <a:off x="1353312" y="1426464"/>
-            <a:ext cx="10058400" cy="292608"/>
+          <p:cNvPr id="13" name="Text 11"/>
+          <p:cNvSpPr/>
+          <p:nvPr/>
+        </p:nvSpPr>
+        <p:spPr>
+          <a:xfrm>
+            <a:off x="6492240" y="3328416"/>
+            <a:ext cx="4937760" cy="1316736"/>
           </a:xfrm>
           <a:prstGeom prst="rect">
             <a:avLst/>
@@ -25441,55 +25636,16 @@
         </p:spPr>
         <p:txBody>
           <a:bodyPr wrap="square" lIns="0" tIns="0" rIns="0" bIns="0" rtlCol="0" anchor="ctr"/>
-          <a:lstStyle/>
-          <a:p>
-            <a:pPr indent="0" marL="0">
-              <a:buNone/>
-            </a:pPr>
-            <a:r>
-              <a:rPr lang="en-US" sz="1650" b="1" dirty="0">
-                <a:solidFill>
-                  <a:srgbClr val="1A7A3C"/>
-                </a:solidFill>
-                <a:latin typeface="Arial" pitchFamily="34" charset="0"/>
-                <a:ea typeface="Arial" pitchFamily="34" charset="-122"/>
-                <a:cs typeface="Arial" pitchFamily="34" charset="-120"/>
-              </a:rPr>
-              <a:t>Widen the pretraining corpus — it does not cover our cohorts</a:t>
-            </a:r>
-            <a:endParaRPr lang="en-US" sz="1650" dirty="0"/>
-          </a:p>
-        </p:txBody>
-      </p:sp>
-      <p:sp>
-        <p:nvSpPr>
-          <p:cNvPr id="9" name="Text 7"/>
-          <p:cNvSpPr/>
-          <p:nvPr/>
-        </p:nvSpPr>
-        <p:spPr>
-          <a:xfrm>
-            <a:off x="1353312" y="1700784"/>
-            <a:ext cx="10058400" cy="603504"/>
-          </a:xfrm>
-          <a:prstGeom prst="rect">
-            <a:avLst/>
-          </a:prstGeom>
-          <a:noFill/>
-          <a:ln/>
-        </p:spPr>
-        <p:txBody>
-          <a:bodyPr wrap="square" lIns="0" tIns="0" rIns="0" bIns="0" rtlCol="0" anchor="t"/>
           <a:lstStyle/>
           <a:p>
             <a:pPr indent="0" marL="0">
               <a:lnSpc>
-                <a:spcPts val="1550"/>
+                <a:spcPts val="1800"/>
               </a:lnSpc>
               <a:buNone/>
             </a:pPr>
             <a:r>
-              <a:rPr lang="en-US" sz="1300" dirty="0">
+              <a:rPr lang="en-US" sz="1500" dirty="0">
                 <a:solidFill>
                   <a:srgbClr val="1A1A1A"/>
                 </a:solidFill>
@@ -25497,26 +25653,26 @@
                 <a:ea typeface="Arial" pitchFamily="34" charset="-122"/>
                 <a:cs typeface="Arial" pitchFamily="34" charset="-120"/>
               </a:rPr>
-              <a:t>Not "more data" — DIFFERENT data. Within the corpus a spectrum's nearest neighbour sits at r = 0.99; for our evaluation cohorts the nearest corpus match is only r = 0.37–0.78. We pretrain on a narrow, 55%-redundant distribution and then test far outside it. Fold the eval-like cohorts (incl. the unused TBI Tirupati set) into pretraining, dedup near-duplicates, re-measure. Also confirms no leakage today — there is none.</a:t>
-            </a:r>
-            <a:endParaRPr lang="en-US" sz="1300" dirty="0"/>
-          </a:p>
-        </p:txBody>
-      </p:sp>
-      <p:sp>
-        <p:nvSpPr>
-          <p:cNvPr id="10" name="Shape 8"/>
-          <p:cNvSpPr/>
-          <p:nvPr/>
-        </p:nvSpPr>
-        <p:spPr>
-          <a:xfrm>
-            <a:off x="502920" y="2505456"/>
-            <a:ext cx="11155680" cy="969264"/>
+              <a:t>This is now a rigorous negative result on 1D NMR SSL: five targets, paired tests, a measured noise floor, replicated. The methodology — the 0.045 floor, the paired protocol, the guardrails — is arguably a stronger contribution than a backbone that didn't beat logistic regression.</a:t>
+            </a:r>
+            <a:endParaRPr lang="en-US" sz="1500" dirty="0"/>
+          </a:p>
+        </p:txBody>
+      </p:sp>
+      <p:sp>
+        <p:nvSpPr>
+          <p:cNvPr id="14" name="Shape 12"/>
+          <p:cNvSpPr/>
+          <p:nvPr/>
+        </p:nvSpPr>
+        <p:spPr>
+          <a:xfrm>
+            <a:off x="502920" y="4864608"/>
+            <a:ext cx="11155680" cy="1335024"/>
           </a:xfrm>
           <a:prstGeom prst="roundRect">
             <a:avLst>
-              <a:gd name="adj" fmla="val 7547"/>
+              <a:gd name="adj" fmla="val 5479"/>
             </a:avLst>
           </a:prstGeom>
           <a:solidFill>
@@ -25527,34 +25683,14 @@
       </p:sp>
       <p:sp>
         <p:nvSpPr>
-          <p:cNvPr id="11" name="Shape 9"/>
-          <p:cNvSpPr/>
-          <p:nvPr/>
-        </p:nvSpPr>
-        <p:spPr>
-          <a:xfrm>
-            <a:off x="713232" y="2761488"/>
-            <a:ext cx="475488" cy="475488"/>
-          </a:xfrm>
-          <a:prstGeom prst="ellipse">
-            <a:avLst/>
-          </a:prstGeom>
-          <a:solidFill>
-            <a:srgbClr val="065A82"/>
-          </a:solidFill>
-          <a:ln/>
-        </p:spPr>
-      </p:sp>
-      <p:sp>
-        <p:nvSpPr>
-          <p:cNvPr id="12" name="Text 10"/>
-          <p:cNvSpPr/>
-          <p:nvPr/>
-        </p:nvSpPr>
-        <p:spPr>
-          <a:xfrm>
-            <a:off x="713232" y="2761488"/>
-            <a:ext cx="475488" cy="475488"/>
+          <p:cNvPr id="15" name="Text 13"/>
+          <p:cNvSpPr/>
+          <p:nvPr/>
+        </p:nvSpPr>
+        <p:spPr>
+          <a:xfrm>
+            <a:off x="777240" y="4974336"/>
+            <a:ext cx="10607040" cy="310896"/>
           </a:xfrm>
           <a:prstGeom prst="rect">
             <a:avLst/>
@@ -25566,19 +25702,19 @@
           <a:bodyPr wrap="square" lIns="0" tIns="0" rIns="0" bIns="0" rtlCol="0" anchor="ctr"/>
           <a:lstStyle/>
           <a:p>
-            <a:pPr algn="ctr" indent="0" marL="0">
+            <a:pPr indent="0" marL="0">
               <a:buNone/>
             </a:pPr>
             <a:r>
               <a:rPr lang="en-US" sz="1700" b="1" dirty="0">
                 <a:solidFill>
-                  <a:srgbClr val="FFFFFF"/>
-                </a:solidFill>
-                <a:latin typeface="Arial" pitchFamily="34" charset="0"/>
-                <a:ea typeface="Arial" pitchFamily="34" charset="-122"/>
-                <a:cs typeface="Arial" pitchFamily="34" charset="-120"/>
-              </a:rPr>
-              <a:t>2</a:t>
+                  <a:srgbClr val="21295C"/>
+                </a:solidFill>
+                <a:latin typeface="Arial" pitchFamily="34" charset="0"/>
+                <a:ea typeface="Arial" pitchFamily="34" charset="-122"/>
+                <a:cs typeface="Arial" pitchFamily="34" charset="-120"/>
+              </a:rPr>
+              <a:t>What I would NOT recommend</a:t>
             </a:r>
             <a:endParaRPr lang="en-US" sz="1700" dirty="0"/>
           </a:p>
@@ -25586,14 +25722,14 @@
       </p:sp>
       <p:sp>
         <p:nvSpPr>
-          <p:cNvPr id="13" name="Text 11"/>
-          <p:cNvSpPr/>
-          <p:nvPr/>
-        </p:nvSpPr>
-        <p:spPr>
-          <a:xfrm>
-            <a:off x="1353312" y="2560320"/>
-            <a:ext cx="10058400" cy="292608"/>
+          <p:cNvPr id="16" name="Text 14"/>
+          <p:cNvSpPr/>
+          <p:nvPr/>
+        </p:nvSpPr>
+        <p:spPr>
+          <a:xfrm>
+            <a:off x="777240" y="5303520"/>
+            <a:ext cx="10607040" cy="841248"/>
           </a:xfrm>
           <a:prstGeom prst="rect">
             <a:avLst/>
@@ -25603,55 +25739,16 @@
         </p:spPr>
         <p:txBody>
           <a:bodyPr wrap="square" lIns="0" tIns="0" rIns="0" bIns="0" rtlCol="0" anchor="ctr"/>
-          <a:lstStyle/>
-          <a:p>
-            <a:pPr indent="0" marL="0">
-              <a:buNone/>
-            </a:pPr>
-            <a:r>
-              <a:rPr lang="en-US" sz="1650" b="1" dirty="0">
-                <a:solidFill>
-                  <a:srgbClr val="065A82"/>
-                </a:solidFill>
-                <a:latin typeface="Arial" pitchFamily="34" charset="0"/>
-                <a:ea typeface="Arial" pitchFamily="34" charset="-122"/>
-                <a:cs typeface="Arial" pitchFamily="34" charset="-120"/>
-              </a:rPr>
-              <a:t>Change the objective — reconstruction is nearly free</a:t>
-            </a:r>
-            <a:endParaRPr lang="en-US" sz="1650" dirty="0"/>
-          </a:p>
-        </p:txBody>
-      </p:sp>
-      <p:sp>
-        <p:nvSpPr>
-          <p:cNvPr id="14" name="Text 12"/>
-          <p:cNvSpPr/>
-          <p:nvPr/>
-        </p:nvSpPr>
-        <p:spPr>
-          <a:xfrm>
-            <a:off x="1353312" y="2834640"/>
-            <a:ext cx="10058400" cy="603504"/>
-          </a:xfrm>
-          <a:prstGeom prst="rect">
-            <a:avLst/>
-          </a:prstGeom>
-          <a:noFill/>
-          <a:ln/>
-        </p:spPr>
-        <p:txBody>
-          <a:bodyPr wrap="square" lIns="0" tIns="0" rIns="0" bIns="0" rtlCol="0" anchor="t"/>
           <a:lstStyle/>
           <a:p>
             <a:pPr indent="0" marL="0">
               <a:lnSpc>
-                <a:spcPts val="1550"/>
+                <a:spcPts val="1900"/>
               </a:lnSpc>
               <a:buNone/>
             </a:pPr>
             <a:r>
-              <a:rPr lang="en-US" sz="1300" dirty="0">
+              <a:rPr lang="en-US" sz="1550" dirty="0">
                 <a:solidFill>
                   <a:srgbClr val="1A1A1A"/>
                 </a:solidFill>
@@ -25659,414 +25756,9 @@
                 <a:ea typeface="Arial" pitchFamily="34" charset="-122"/>
                 <a:cs typeface="Arial" pitchFamily="34" charset="-120"/>
               </a:rPr>
-              <a:t>Slide 9: copy-a-neighbour already scores 0.90 on hidden bins. A loss dominated by the 5 components holding 86% of variance cannot be forced to encode disease. Try variance-normalised or peak-weighted reconstruction, or a contrastive objective, and judge it by whether the pretext task is actually HARD (baseline-relative), not by r.</a:t>
-            </a:r>
-            <a:endParaRPr lang="en-US" sz="1300" dirty="0"/>
-          </a:p>
-        </p:txBody>
-      </p:sp>
-      <p:sp>
-        <p:nvSpPr>
-          <p:cNvPr id="15" name="Shape 13"/>
-          <p:cNvSpPr/>
-          <p:nvPr/>
-        </p:nvSpPr>
-        <p:spPr>
-          <a:xfrm>
-            <a:off x="502920" y="3639312"/>
-            <a:ext cx="11155680" cy="969264"/>
-          </a:xfrm>
-          <a:prstGeom prst="roundRect">
-            <a:avLst>
-              <a:gd name="adj" fmla="val 7547"/>
-            </a:avLst>
-          </a:prstGeom>
-          <a:solidFill>
-            <a:srgbClr val="EEF3F7"/>
-          </a:solidFill>
-          <a:ln/>
-        </p:spPr>
-      </p:sp>
-      <p:sp>
-        <p:nvSpPr>
-          <p:cNvPr id="16" name="Shape 14"/>
-          <p:cNvSpPr/>
-          <p:nvPr/>
-        </p:nvSpPr>
-        <p:spPr>
-          <a:xfrm>
-            <a:off x="713232" y="3895344"/>
-            <a:ext cx="475488" cy="475488"/>
-          </a:xfrm>
-          <a:prstGeom prst="ellipse">
-            <a:avLst/>
-          </a:prstGeom>
-          <a:solidFill>
-            <a:srgbClr val="B8860B"/>
-          </a:solidFill>
-          <a:ln/>
-        </p:spPr>
-      </p:sp>
-      <p:sp>
-        <p:nvSpPr>
-          <p:cNvPr id="17" name="Text 15"/>
-          <p:cNvSpPr/>
-          <p:nvPr/>
-        </p:nvSpPr>
-        <p:spPr>
-          <a:xfrm>
-            <a:off x="713232" y="3895344"/>
-            <a:ext cx="475488" cy="475488"/>
-          </a:xfrm>
-          <a:prstGeom prst="rect">
-            <a:avLst/>
-          </a:prstGeom>
-          <a:noFill/>
-          <a:ln/>
-        </p:spPr>
-        <p:txBody>
-          <a:bodyPr wrap="square" lIns="0" tIns="0" rIns="0" bIns="0" rtlCol="0" anchor="ctr"/>
-          <a:lstStyle/>
-          <a:p>
-            <a:pPr algn="ctr" indent="0" marL="0">
-              <a:buNone/>
-            </a:pPr>
-            <a:r>
-              <a:rPr lang="en-US" sz="1700" b="1" dirty="0">
-                <a:solidFill>
-                  <a:srgbClr val="FFFFFF"/>
-                </a:solidFill>
-                <a:latin typeface="Arial" pitchFamily="34" charset="0"/>
-                <a:ea typeface="Arial" pitchFamily="34" charset="-122"/>
-                <a:cs typeface="Arial" pitchFamily="34" charset="-120"/>
-              </a:rPr>
-              <a:t>3</a:t>
-            </a:r>
-            <a:endParaRPr lang="en-US" sz="1700" dirty="0"/>
-          </a:p>
-        </p:txBody>
-      </p:sp>
-      <p:sp>
-        <p:nvSpPr>
-          <p:cNvPr id="18" name="Text 16"/>
-          <p:cNvSpPr/>
-          <p:nvPr/>
-        </p:nvSpPr>
-        <p:spPr>
-          <a:xfrm>
-            <a:off x="1353312" y="3694176"/>
-            <a:ext cx="10058400" cy="292608"/>
-          </a:xfrm>
-          <a:prstGeom prst="rect">
-            <a:avLst/>
-          </a:prstGeom>
-          <a:noFill/>
-          <a:ln/>
-        </p:spPr>
-        <p:txBody>
-          <a:bodyPr wrap="square" lIns="0" tIns="0" rIns="0" bIns="0" rtlCol="0" anchor="ctr"/>
-          <a:lstStyle/>
-          <a:p>
-            <a:pPr indent="0" marL="0">
-              <a:buNone/>
-            </a:pPr>
-            <a:r>
-              <a:rPr lang="en-US" sz="1650" b="1" dirty="0">
-                <a:solidFill>
-                  <a:srgbClr val="B8860B"/>
-                </a:solidFill>
-                <a:latin typeface="Arial" pitchFamily="34" charset="0"/>
-                <a:ea typeface="Arial" pitchFamily="34" charset="-122"/>
-                <a:cs typeface="Arial" pitchFamily="34" charset="-120"/>
-              </a:rPr>
-              <a:t>MTBLS326 batch-confound audit</a:t>
-            </a:r>
-            <a:endParaRPr lang="en-US" sz="1650" dirty="0"/>
-          </a:p>
-        </p:txBody>
-      </p:sp>
-      <p:sp>
-        <p:nvSpPr>
-          <p:cNvPr id="19" name="Text 17"/>
-          <p:cNvSpPr/>
-          <p:nvPr/>
-        </p:nvSpPr>
-        <p:spPr>
-          <a:xfrm>
-            <a:off x="1353312" y="3968496"/>
-            <a:ext cx="10058400" cy="603504"/>
-          </a:xfrm>
-          <a:prstGeom prst="rect">
-            <a:avLst/>
-          </a:prstGeom>
-          <a:noFill/>
-          <a:ln/>
-        </p:spPr>
-        <p:txBody>
-          <a:bodyPr wrap="square" lIns="0" tIns="0" rIns="0" bIns="0" rtlCol="0" anchor="t"/>
-          <a:lstStyle/>
-          <a:p>
-            <a:pPr indent="0" marL="0">
-              <a:lnSpc>
-                <a:spcPts val="1550"/>
-              </a:lnSpc>
-              <a:buNone/>
-            </a:pPr>
-            <a:r>
-              <a:rPr lang="en-US" sz="1300" dirty="0">
-                <a:solidFill>
-                  <a:srgbClr val="1A1A1A"/>
-                </a:solidFill>
-                <a:latin typeface="Arial" pitchFamily="34" charset="0"/>
-                <a:ea typeface="Arial" pitchFamily="34" charset="-122"/>
-                <a:cs typeface="Arial" pitchFamily="34" charset="-120"/>
-              </a:rPr>
-              <a:t>Still outstanding, still cheap, and MTBLS326 is now one of only two targets where SSL is even competitive. Its perfect 1.000 on n=42 remains unverified as biology rather than a run-order artifact.</a:t>
-            </a:r>
-            <a:endParaRPr lang="en-US" sz="1300" dirty="0"/>
-          </a:p>
-        </p:txBody>
-      </p:sp>
-      <p:sp>
-        <p:nvSpPr>
-          <p:cNvPr id="20" name="Shape 18"/>
-          <p:cNvSpPr/>
-          <p:nvPr/>
-        </p:nvSpPr>
-        <p:spPr>
-          <a:xfrm>
-            <a:off x="502920" y="4773168"/>
-            <a:ext cx="11155680" cy="969264"/>
-          </a:xfrm>
-          <a:prstGeom prst="roundRect">
-            <a:avLst>
-              <a:gd name="adj" fmla="val 7547"/>
-            </a:avLst>
-          </a:prstGeom>
-          <a:solidFill>
-            <a:srgbClr val="EEF3F7"/>
-          </a:solidFill>
-          <a:ln/>
-        </p:spPr>
-      </p:sp>
-      <p:sp>
-        <p:nvSpPr>
-          <p:cNvPr id="21" name="Shape 19"/>
-          <p:cNvSpPr/>
-          <p:nvPr/>
-        </p:nvSpPr>
-        <p:spPr>
-          <a:xfrm>
-            <a:off x="713232" y="5029200"/>
-            <a:ext cx="475488" cy="475488"/>
-          </a:xfrm>
-          <a:prstGeom prst="ellipse">
-            <a:avLst/>
-          </a:prstGeom>
-          <a:solidFill>
-            <a:srgbClr val="1C7293"/>
-          </a:solidFill>
-          <a:ln/>
-        </p:spPr>
-      </p:sp>
-      <p:sp>
-        <p:nvSpPr>
-          <p:cNvPr id="22" name="Text 20"/>
-          <p:cNvSpPr/>
-          <p:nvPr/>
-        </p:nvSpPr>
-        <p:spPr>
-          <a:xfrm>
-            <a:off x="713232" y="5029200"/>
-            <a:ext cx="475488" cy="475488"/>
-          </a:xfrm>
-          <a:prstGeom prst="rect">
-            <a:avLst/>
-          </a:prstGeom>
-          <a:noFill/>
-          <a:ln/>
-        </p:spPr>
-        <p:txBody>
-          <a:bodyPr wrap="square" lIns="0" tIns="0" rIns="0" bIns="0" rtlCol="0" anchor="ctr"/>
-          <a:lstStyle/>
-          <a:p>
-            <a:pPr algn="ctr" indent="0" marL="0">
-              <a:buNone/>
-            </a:pPr>
-            <a:r>
-              <a:rPr lang="en-US" sz="1700" b="1" dirty="0">
-                <a:solidFill>
-                  <a:srgbClr val="FFFFFF"/>
-                </a:solidFill>
-                <a:latin typeface="Arial" pitchFamily="34" charset="0"/>
-                <a:ea typeface="Arial" pitchFamily="34" charset="-122"/>
-                <a:cs typeface="Arial" pitchFamily="34" charset="-120"/>
-              </a:rPr>
-              <a:t>4</a:t>
-            </a:r>
-            <a:endParaRPr lang="en-US" sz="1700" dirty="0"/>
-          </a:p>
-        </p:txBody>
-      </p:sp>
-      <p:sp>
-        <p:nvSpPr>
-          <p:cNvPr id="23" name="Text 21"/>
-          <p:cNvSpPr/>
-          <p:nvPr/>
-        </p:nvSpPr>
-        <p:spPr>
-          <a:xfrm>
-            <a:off x="1353312" y="4828032"/>
-            <a:ext cx="10058400" cy="292608"/>
-          </a:xfrm>
-          <a:prstGeom prst="rect">
-            <a:avLst/>
-          </a:prstGeom>
-          <a:noFill/>
-          <a:ln/>
-        </p:spPr>
-        <p:txBody>
-          <a:bodyPr wrap="square" lIns="0" tIns="0" rIns="0" bIns="0" rtlCol="0" anchor="ctr"/>
-          <a:lstStyle/>
-          <a:p>
-            <a:pPr indent="0" marL="0">
-              <a:buNone/>
-            </a:pPr>
-            <a:r>
-              <a:rPr lang="en-US" sz="1650" b="1" dirty="0">
-                <a:solidFill>
-                  <a:srgbClr val="1C7293"/>
-                </a:solidFill>
-                <a:latin typeface="Arial" pitchFamily="34" charset="0"/>
-                <a:ea typeface="Arial" pitchFamily="34" charset="-122"/>
-                <a:cs typeface="Arial" pitchFamily="34" charset="-120"/>
-              </a:rPr>
-              <a:t>Corpus scaling curve — only after near-duplicate dedup</a:t>
-            </a:r>
-            <a:endParaRPr lang="en-US" sz="1650" dirty="0"/>
-          </a:p>
-        </p:txBody>
-      </p:sp>
-      <p:sp>
-        <p:nvSpPr>
-          <p:cNvPr id="24" name="Text 22"/>
-          <p:cNvSpPr/>
-          <p:nvPr/>
-        </p:nvSpPr>
-        <p:spPr>
-          <a:xfrm>
-            <a:off x="1353312" y="5102352"/>
-            <a:ext cx="10058400" cy="603504"/>
-          </a:xfrm>
-          <a:prstGeom prst="rect">
-            <a:avLst/>
-          </a:prstGeom>
-          <a:noFill/>
-          <a:ln/>
-        </p:spPr>
-        <p:txBody>
-          <a:bodyPr wrap="square" lIns="0" tIns="0" rIns="0" bIns="0" rtlCol="0" anchor="t"/>
-          <a:lstStyle/>
-          <a:p>
-            <a:pPr indent="0" marL="0">
-              <a:lnSpc>
-                <a:spcPts val="1550"/>
-              </a:lnSpc>
-              <a:buNone/>
-            </a:pPr>
-            <a:r>
-              <a:rPr lang="en-US" sz="1300" dirty="0">
-                <a:solidFill>
-                  <a:srgbClr val="1A1A1A"/>
-                </a:solidFill>
-                <a:latin typeface="Arial" pitchFamily="34" charset="0"/>
-                <a:ea typeface="Arial" pitchFamily="34" charset="-122"/>
-                <a:cs typeface="Arial" pitchFamily="34" charset="-120"/>
-              </a:rPr>
-              <a:t>Demoted. 55% of rows have a neighbour at r &gt; 0.99, so subsampling by row count does not subsample information: the curve would flatten for the wrong reason. Needs ≥5 seeds per point (~23 GPU-h each).</a:t>
-            </a:r>
-            <a:endParaRPr lang="en-US" sz="1300" dirty="0"/>
-          </a:p>
-        </p:txBody>
-      </p:sp>
-      <p:sp>
-        <p:nvSpPr>
-          <p:cNvPr id="25" name="Shape 23"/>
-          <p:cNvSpPr/>
-          <p:nvPr/>
-        </p:nvSpPr>
-        <p:spPr>
-          <a:xfrm>
-            <a:off x="502920" y="5925312"/>
-            <a:ext cx="11155680" cy="566928"/>
-          </a:xfrm>
-          <a:prstGeom prst="roundRect">
-            <a:avLst>
-              <a:gd name="adj" fmla="val 12903"/>
-            </a:avLst>
-          </a:prstGeom>
-          <a:solidFill>
-            <a:srgbClr val="FBEEF1"/>
-          </a:solidFill>
-          <a:ln/>
-        </p:spPr>
-      </p:sp>
-      <p:sp>
-        <p:nvSpPr>
-          <p:cNvPr id="26" name="Text 24"/>
-          <p:cNvSpPr/>
-          <p:nvPr/>
-        </p:nvSpPr>
-        <p:spPr>
-          <a:xfrm>
-            <a:off x="777240" y="5952744"/>
-            <a:ext cx="10607040" cy="512064"/>
-          </a:xfrm>
-          <a:prstGeom prst="rect">
-            <a:avLst/>
-          </a:prstGeom>
-          <a:noFill/>
-          <a:ln/>
-        </p:spPr>
-        <p:txBody>
-          <a:bodyPr wrap="square" lIns="0" tIns="0" rIns="0" bIns="0" rtlCol="0" anchor="ctr"/>
-          <a:lstStyle/>
-          <a:p>
-            <a:pPr indent="0" marL="0">
-              <a:lnSpc>
-                <a:spcPts val="1600"/>
-              </a:lnSpc>
-              <a:buNone/>
-            </a:pPr>
-            <a:r>
-              <a:rPr lang="en-US" sz="1350" b="1" dirty="0">
-                <a:solidFill>
-                  <a:srgbClr val="C1435B"/>
-                </a:solidFill>
-                <a:latin typeface="Arial" pitchFamily="34" charset="0"/>
-                <a:ea typeface="Arial" pitchFamily="34" charset="-122"/>
-                <a:cs typeface="Arial" pitchFamily="34" charset="-120"/>
-              </a:rPr>
-              <a:t>Dropped from this list:  </a:t>
-            </a:r>
-            <a:pPr indent="0" marL="0">
-              <a:lnSpc>
-                <a:spcPts val="1600"/>
-              </a:lnSpc>
-              <a:buNone/>
-            </a:pPr>
-            <a:r>
-              <a:rPr lang="en-US" sz="1350" dirty="0">
-                <a:solidFill>
-                  <a:srgbClr val="1A1A1A"/>
-                </a:solidFill>
-                <a:latin typeface="Arial" pitchFamily="34" charset="0"/>
-                <a:ea typeface="Arial" pitchFamily="34" charset="-122"/>
-                <a:cs typeface="Arial" pitchFamily="34" charset="-120"/>
-              </a:rPr>
-              <a:t>supervised cross-cohort transfer (train the probe on one cohort, test on another). All five targets are different diseases with no shared label space — it is not executable on the data we have, at any sample size.</a:t>
-            </a:r>
-            <a:endParaRPr lang="en-US" sz="1350" dirty="0"/>
+              <a:t>More architecture variants. We have tried four patch sizes, two capacities, three objectives and two corpora; with the noise floor now known, none of those experiments could have detected an effect smaller than 0.09 anyway. Any further single-run backbone tweak is not worth the GPU time.</a:t>
+            </a:r>
+            <a:endParaRPr lang="en-US" sz="1550" dirty="0"/>
           </a:p>
         </p:txBody>
       </p:sp>
@@ -26081,6 +25773,884 @@
 <file path=ppt/slides/slide31.xml><?xml version="1.0" encoding="utf-8"?>
 <p:sld xmlns:a="http://schemas.openxmlformats.org/drawingml/2006/main" xmlns:r="http://schemas.openxmlformats.org/officeDocument/2006/relationships" xmlns:p="http://schemas.openxmlformats.org/presentationml/2006/main">
   <p:cSld name="Slide 31">
+    <p:bg>
+      <p:bgPr>
+        <a:solidFill>
+          <a:srgbClr val="FFFFFF"/>
+        </a:solidFill>
+      </p:bgPr>
+    </p:bg>
+    <p:spTree>
+      <p:nvGrpSpPr>
+        <p:cNvPr id="1" name=""/>
+        <p:cNvGrpSpPr/>
+        <p:nvPr/>
+      </p:nvGrpSpPr>
+      <p:grpSpPr>
+        <a:xfrm>
+          <a:off x="0" y="0"/>
+          <a:ext cx="0" cy="0"/>
+          <a:chOff x="0" y="0"/>
+          <a:chExt cx="0" cy="0"/>
+        </a:xfrm>
+      </p:grpSpPr>
+      <p:sp>
+        <p:nvSpPr>
+          <p:cNvPr id="2" name="Text 0"/>
+          <p:cNvSpPr/>
+          <p:nvPr/>
+        </p:nvSpPr>
+        <p:spPr>
+          <a:xfrm>
+            <a:off x="502920" y="274320"/>
+            <a:ext cx="11155680" cy="658368"/>
+          </a:xfrm>
+          <a:prstGeom prst="rect">
+            <a:avLst/>
+          </a:prstGeom>
+          <a:noFill/>
+          <a:ln/>
+        </p:spPr>
+        <p:txBody>
+          <a:bodyPr wrap="square" lIns="0" tIns="0" rIns="0" bIns="0" rtlCol="0" anchor="ctr"/>
+          <a:lstStyle/>
+          <a:p>
+            <a:pPr algn="l" indent="0" marL="0">
+              <a:buNone/>
+            </a:pPr>
+            <a:r>
+              <a:rPr lang="en-US" sz="3000" b="1" dirty="0">
+                <a:solidFill>
+                  <a:srgbClr val="21295C"/>
+                </a:solidFill>
+                <a:latin typeface="Arial" pitchFamily="34" charset="0"/>
+                <a:ea typeface="Arial" pitchFamily="34" charset="-122"/>
+                <a:cs typeface="Arial" pitchFamily="34" charset="-120"/>
+              </a:rPr>
+              <a:t>Proposed next steps</a:t>
+            </a:r>
+            <a:endParaRPr lang="en-US" sz="3000" dirty="0"/>
+          </a:p>
+        </p:txBody>
+      </p:sp>
+      <p:sp>
+        <p:nvSpPr>
+          <p:cNvPr id="3" name="Text 1"/>
+          <p:cNvSpPr/>
+          <p:nvPr/>
+        </p:nvSpPr>
+        <p:spPr>
+          <a:xfrm>
+            <a:off x="502920" y="941832"/>
+            <a:ext cx="11155680" cy="384048"/>
+          </a:xfrm>
+          <a:prstGeom prst="rect">
+            <a:avLst/>
+          </a:prstGeom>
+          <a:noFill/>
+          <a:ln/>
+        </p:spPr>
+        <p:txBody>
+          <a:bodyPr wrap="square" lIns="0" tIns="0" rIns="0" bIns="0" rtlCol="0" anchor="ctr"/>
+          <a:lstStyle/>
+          <a:p>
+            <a:pPr algn="l" indent="0" marL="0">
+              <a:buNone/>
+            </a:pPr>
+            <a:r>
+              <a:rPr lang="en-US" sz="1700" dirty="0">
+                <a:solidFill>
+                  <a:srgbClr val="5A6068"/>
+                </a:solidFill>
+                <a:latin typeface="Arial" pitchFamily="34" charset="0"/>
+                <a:ea typeface="Arial" pitchFamily="34" charset="-122"/>
+                <a:cs typeface="Arial" pitchFamily="34" charset="-120"/>
+              </a:rPr>
+              <a:t>Re-ranked by what §18–§20 actually leave open</a:t>
+            </a:r>
+            <a:endParaRPr lang="en-US" sz="1700" dirty="0"/>
+          </a:p>
+        </p:txBody>
+      </p:sp>
+      <p:sp>
+        <p:nvSpPr>
+          <p:cNvPr id="4" name="Text 2"/>
+          <p:cNvSpPr/>
+          <p:nvPr/>
+        </p:nvSpPr>
+        <p:spPr>
+          <a:xfrm>
+            <a:off x="11631168" y="6355080"/>
+            <a:ext cx="411480" cy="274320"/>
+          </a:xfrm>
+          <a:prstGeom prst="rect">
+            <a:avLst/>
+          </a:prstGeom>
+          <a:noFill/>
+          <a:ln/>
+        </p:spPr>
+        <p:txBody>
+          <a:bodyPr wrap="square" lIns="0" tIns="0" rIns="0" bIns="0" rtlCol="0" anchor="ctr"/>
+          <a:lstStyle/>
+          <a:p>
+            <a:pPr algn="r" indent="0" marL="0">
+              <a:buNone/>
+            </a:pPr>
+            <a:r>
+              <a:rPr lang="en-US" sz="1200" dirty="0">
+                <a:solidFill>
+                  <a:srgbClr val="AAB0B8"/>
+                </a:solidFill>
+                <a:latin typeface="Arial" pitchFamily="34" charset="0"/>
+                <a:ea typeface="Arial" pitchFamily="34" charset="-122"/>
+                <a:cs typeface="Arial" pitchFamily="34" charset="-120"/>
+              </a:rPr>
+              <a:t>31</a:t>
+            </a:r>
+            <a:endParaRPr lang="en-US" sz="1200" dirty="0"/>
+          </a:p>
+        </p:txBody>
+      </p:sp>
+      <p:sp>
+        <p:nvSpPr>
+          <p:cNvPr id="5" name="Shape 3"/>
+          <p:cNvSpPr/>
+          <p:nvPr/>
+        </p:nvSpPr>
+        <p:spPr>
+          <a:xfrm>
+            <a:off x="502920" y="1371600"/>
+            <a:ext cx="11155680" cy="969264"/>
+          </a:xfrm>
+          <a:prstGeom prst="roundRect">
+            <a:avLst>
+              <a:gd name="adj" fmla="val 7547"/>
+            </a:avLst>
+          </a:prstGeom>
+          <a:solidFill>
+            <a:srgbClr val="EBF5EE"/>
+          </a:solidFill>
+          <a:ln/>
+        </p:spPr>
+      </p:sp>
+      <p:sp>
+        <p:nvSpPr>
+          <p:cNvPr id="6" name="Shape 4"/>
+          <p:cNvSpPr/>
+          <p:nvPr/>
+        </p:nvSpPr>
+        <p:spPr>
+          <a:xfrm>
+            <a:off x="713232" y="1627632"/>
+            <a:ext cx="475488" cy="475488"/>
+          </a:xfrm>
+          <a:prstGeom prst="ellipse">
+            <a:avLst/>
+          </a:prstGeom>
+          <a:solidFill>
+            <a:srgbClr val="1A7A3C"/>
+          </a:solidFill>
+          <a:ln/>
+        </p:spPr>
+      </p:sp>
+      <p:sp>
+        <p:nvSpPr>
+          <p:cNvPr id="7" name="Text 5"/>
+          <p:cNvSpPr/>
+          <p:nvPr/>
+        </p:nvSpPr>
+        <p:spPr>
+          <a:xfrm>
+            <a:off x="713232" y="1627632"/>
+            <a:ext cx="475488" cy="475488"/>
+          </a:xfrm>
+          <a:prstGeom prst="rect">
+            <a:avLst/>
+          </a:prstGeom>
+          <a:noFill/>
+          <a:ln/>
+        </p:spPr>
+        <p:txBody>
+          <a:bodyPr wrap="square" lIns="0" tIns="0" rIns="0" bIns="0" rtlCol="0" anchor="ctr"/>
+          <a:lstStyle/>
+          <a:p>
+            <a:pPr algn="ctr" indent="0" marL="0">
+              <a:buNone/>
+            </a:pPr>
+            <a:r>
+              <a:rPr lang="en-US" sz="1700" b="1" dirty="0">
+                <a:solidFill>
+                  <a:srgbClr val="FFFFFF"/>
+                </a:solidFill>
+                <a:latin typeface="Arial" pitchFamily="34" charset="0"/>
+                <a:ea typeface="Arial" pitchFamily="34" charset="-122"/>
+                <a:cs typeface="Arial" pitchFamily="34" charset="-120"/>
+              </a:rPr>
+              <a:t>1</a:t>
+            </a:r>
+            <a:endParaRPr lang="en-US" sz="1700" dirty="0"/>
+          </a:p>
+        </p:txBody>
+      </p:sp>
+      <p:sp>
+        <p:nvSpPr>
+          <p:cNvPr id="8" name="Text 6"/>
+          <p:cNvSpPr/>
+          <p:nvPr/>
+        </p:nvSpPr>
+        <p:spPr>
+          <a:xfrm>
+            <a:off x="1353312" y="1426464"/>
+            <a:ext cx="10058400" cy="292608"/>
+          </a:xfrm>
+          <a:prstGeom prst="rect">
+            <a:avLst/>
+          </a:prstGeom>
+          <a:noFill/>
+          <a:ln/>
+        </p:spPr>
+        <p:txBody>
+          <a:bodyPr wrap="square" lIns="0" tIns="0" rIns="0" bIns="0" rtlCol="0" anchor="ctr"/>
+          <a:lstStyle/>
+          <a:p>
+            <a:pPr indent="0" marL="0">
+              <a:buNone/>
+            </a:pPr>
+            <a:r>
+              <a:rPr lang="en-US" sz="1650" b="1" dirty="0">
+                <a:solidFill>
+                  <a:srgbClr val="1A7A3C"/>
+                </a:solidFill>
+                <a:latin typeface="Arial" pitchFamily="34" charset="0"/>
+                <a:ea typeface="Arial" pitchFamily="34" charset="-122"/>
+                <a:cs typeface="Arial" pitchFamily="34" charset="-120"/>
+              </a:rPr>
+              <a:t>Widen the pretraining corpus — it does not cover our cohorts</a:t>
+            </a:r>
+            <a:endParaRPr lang="en-US" sz="1650" dirty="0"/>
+          </a:p>
+        </p:txBody>
+      </p:sp>
+      <p:sp>
+        <p:nvSpPr>
+          <p:cNvPr id="9" name="Text 7"/>
+          <p:cNvSpPr/>
+          <p:nvPr/>
+        </p:nvSpPr>
+        <p:spPr>
+          <a:xfrm>
+            <a:off x="1353312" y="1700784"/>
+            <a:ext cx="10058400" cy="603504"/>
+          </a:xfrm>
+          <a:prstGeom prst="rect">
+            <a:avLst/>
+          </a:prstGeom>
+          <a:noFill/>
+          <a:ln/>
+        </p:spPr>
+        <p:txBody>
+          <a:bodyPr wrap="square" lIns="0" tIns="0" rIns="0" bIns="0" rtlCol="0" anchor="t"/>
+          <a:lstStyle/>
+          <a:p>
+            <a:pPr indent="0" marL="0">
+              <a:lnSpc>
+                <a:spcPts val="1550"/>
+              </a:lnSpc>
+              <a:buNone/>
+            </a:pPr>
+            <a:r>
+              <a:rPr lang="en-US" sz="1300" dirty="0">
+                <a:solidFill>
+                  <a:srgbClr val="1A1A1A"/>
+                </a:solidFill>
+                <a:latin typeface="Arial" pitchFamily="34" charset="0"/>
+                <a:ea typeface="Arial" pitchFamily="34" charset="-122"/>
+                <a:cs typeface="Arial" pitchFamily="34" charset="-120"/>
+              </a:rPr>
+              <a:t>Not "more data" — DIFFERENT data. Within the corpus a spectrum's nearest neighbour sits at r = 0.99; for our evaluation cohorts the nearest corpus match is only r = 0.37–0.78. We pretrain on a narrow, 55%-redundant distribution and then test far outside it. Fold the eval-like cohorts (incl. the unused TBI Tirupati set) into pretraining, dedup near-duplicates, re-measure. Also confirms no leakage today — there is none.</a:t>
+            </a:r>
+            <a:endParaRPr lang="en-US" sz="1300" dirty="0"/>
+          </a:p>
+        </p:txBody>
+      </p:sp>
+      <p:sp>
+        <p:nvSpPr>
+          <p:cNvPr id="10" name="Shape 8"/>
+          <p:cNvSpPr/>
+          <p:nvPr/>
+        </p:nvSpPr>
+        <p:spPr>
+          <a:xfrm>
+            <a:off x="502920" y="2505456"/>
+            <a:ext cx="11155680" cy="969264"/>
+          </a:xfrm>
+          <a:prstGeom prst="roundRect">
+            <a:avLst>
+              <a:gd name="adj" fmla="val 7547"/>
+            </a:avLst>
+          </a:prstGeom>
+          <a:solidFill>
+            <a:srgbClr val="EEF3F7"/>
+          </a:solidFill>
+          <a:ln/>
+        </p:spPr>
+      </p:sp>
+      <p:sp>
+        <p:nvSpPr>
+          <p:cNvPr id="11" name="Shape 9"/>
+          <p:cNvSpPr/>
+          <p:nvPr/>
+        </p:nvSpPr>
+        <p:spPr>
+          <a:xfrm>
+            <a:off x="713232" y="2761488"/>
+            <a:ext cx="475488" cy="475488"/>
+          </a:xfrm>
+          <a:prstGeom prst="ellipse">
+            <a:avLst/>
+          </a:prstGeom>
+          <a:solidFill>
+            <a:srgbClr val="065A82"/>
+          </a:solidFill>
+          <a:ln/>
+        </p:spPr>
+      </p:sp>
+      <p:sp>
+        <p:nvSpPr>
+          <p:cNvPr id="12" name="Text 10"/>
+          <p:cNvSpPr/>
+          <p:nvPr/>
+        </p:nvSpPr>
+        <p:spPr>
+          <a:xfrm>
+            <a:off x="713232" y="2761488"/>
+            <a:ext cx="475488" cy="475488"/>
+          </a:xfrm>
+          <a:prstGeom prst="rect">
+            <a:avLst/>
+          </a:prstGeom>
+          <a:noFill/>
+          <a:ln/>
+        </p:spPr>
+        <p:txBody>
+          <a:bodyPr wrap="square" lIns="0" tIns="0" rIns="0" bIns="0" rtlCol="0" anchor="ctr"/>
+          <a:lstStyle/>
+          <a:p>
+            <a:pPr algn="ctr" indent="0" marL="0">
+              <a:buNone/>
+            </a:pPr>
+            <a:r>
+              <a:rPr lang="en-US" sz="1700" b="1" dirty="0">
+                <a:solidFill>
+                  <a:srgbClr val="FFFFFF"/>
+                </a:solidFill>
+                <a:latin typeface="Arial" pitchFamily="34" charset="0"/>
+                <a:ea typeface="Arial" pitchFamily="34" charset="-122"/>
+                <a:cs typeface="Arial" pitchFamily="34" charset="-120"/>
+              </a:rPr>
+              <a:t>2</a:t>
+            </a:r>
+            <a:endParaRPr lang="en-US" sz="1700" dirty="0"/>
+          </a:p>
+        </p:txBody>
+      </p:sp>
+      <p:sp>
+        <p:nvSpPr>
+          <p:cNvPr id="13" name="Text 11"/>
+          <p:cNvSpPr/>
+          <p:nvPr/>
+        </p:nvSpPr>
+        <p:spPr>
+          <a:xfrm>
+            <a:off x="1353312" y="2560320"/>
+            <a:ext cx="10058400" cy="292608"/>
+          </a:xfrm>
+          <a:prstGeom prst="rect">
+            <a:avLst/>
+          </a:prstGeom>
+          <a:noFill/>
+          <a:ln/>
+        </p:spPr>
+        <p:txBody>
+          <a:bodyPr wrap="square" lIns="0" tIns="0" rIns="0" bIns="0" rtlCol="0" anchor="ctr"/>
+          <a:lstStyle/>
+          <a:p>
+            <a:pPr indent="0" marL="0">
+              <a:buNone/>
+            </a:pPr>
+            <a:r>
+              <a:rPr lang="en-US" sz="1650" b="1" dirty="0">
+                <a:solidFill>
+                  <a:srgbClr val="065A82"/>
+                </a:solidFill>
+                <a:latin typeface="Arial" pitchFamily="34" charset="0"/>
+                <a:ea typeface="Arial" pitchFamily="34" charset="-122"/>
+                <a:cs typeface="Arial" pitchFamily="34" charset="-120"/>
+              </a:rPr>
+              <a:t>Change the objective — reconstruction is nearly free</a:t>
+            </a:r>
+            <a:endParaRPr lang="en-US" sz="1650" dirty="0"/>
+          </a:p>
+        </p:txBody>
+      </p:sp>
+      <p:sp>
+        <p:nvSpPr>
+          <p:cNvPr id="14" name="Text 12"/>
+          <p:cNvSpPr/>
+          <p:nvPr/>
+        </p:nvSpPr>
+        <p:spPr>
+          <a:xfrm>
+            <a:off x="1353312" y="2834640"/>
+            <a:ext cx="10058400" cy="603504"/>
+          </a:xfrm>
+          <a:prstGeom prst="rect">
+            <a:avLst/>
+          </a:prstGeom>
+          <a:noFill/>
+          <a:ln/>
+        </p:spPr>
+        <p:txBody>
+          <a:bodyPr wrap="square" lIns="0" tIns="0" rIns="0" bIns="0" rtlCol="0" anchor="t"/>
+          <a:lstStyle/>
+          <a:p>
+            <a:pPr indent="0" marL="0">
+              <a:lnSpc>
+                <a:spcPts val="1550"/>
+              </a:lnSpc>
+              <a:buNone/>
+            </a:pPr>
+            <a:r>
+              <a:rPr lang="en-US" sz="1300" dirty="0">
+                <a:solidFill>
+                  <a:srgbClr val="1A1A1A"/>
+                </a:solidFill>
+                <a:latin typeface="Arial" pitchFamily="34" charset="0"/>
+                <a:ea typeface="Arial" pitchFamily="34" charset="-122"/>
+                <a:cs typeface="Arial" pitchFamily="34" charset="-120"/>
+              </a:rPr>
+              <a:t>Slide 9: copy-a-neighbour already scores 0.90 on hidden bins. A loss dominated by the 5 components holding 86% of variance cannot be forced to encode disease. Try variance-normalised or peak-weighted reconstruction, or a contrastive objective, and judge it by whether the pretext task is actually HARD (baseline-relative), not by r.</a:t>
+            </a:r>
+            <a:endParaRPr lang="en-US" sz="1300" dirty="0"/>
+          </a:p>
+        </p:txBody>
+      </p:sp>
+      <p:sp>
+        <p:nvSpPr>
+          <p:cNvPr id="15" name="Shape 13"/>
+          <p:cNvSpPr/>
+          <p:nvPr/>
+        </p:nvSpPr>
+        <p:spPr>
+          <a:xfrm>
+            <a:off x="502920" y="3639312"/>
+            <a:ext cx="11155680" cy="969264"/>
+          </a:xfrm>
+          <a:prstGeom prst="roundRect">
+            <a:avLst>
+              <a:gd name="adj" fmla="val 7547"/>
+            </a:avLst>
+          </a:prstGeom>
+          <a:solidFill>
+            <a:srgbClr val="EEF3F7"/>
+          </a:solidFill>
+          <a:ln/>
+        </p:spPr>
+      </p:sp>
+      <p:sp>
+        <p:nvSpPr>
+          <p:cNvPr id="16" name="Shape 14"/>
+          <p:cNvSpPr/>
+          <p:nvPr/>
+        </p:nvSpPr>
+        <p:spPr>
+          <a:xfrm>
+            <a:off x="713232" y="3895344"/>
+            <a:ext cx="475488" cy="475488"/>
+          </a:xfrm>
+          <a:prstGeom prst="ellipse">
+            <a:avLst/>
+          </a:prstGeom>
+          <a:solidFill>
+            <a:srgbClr val="B8860B"/>
+          </a:solidFill>
+          <a:ln/>
+        </p:spPr>
+      </p:sp>
+      <p:sp>
+        <p:nvSpPr>
+          <p:cNvPr id="17" name="Text 15"/>
+          <p:cNvSpPr/>
+          <p:nvPr/>
+        </p:nvSpPr>
+        <p:spPr>
+          <a:xfrm>
+            <a:off x="713232" y="3895344"/>
+            <a:ext cx="475488" cy="475488"/>
+          </a:xfrm>
+          <a:prstGeom prst="rect">
+            <a:avLst/>
+          </a:prstGeom>
+          <a:noFill/>
+          <a:ln/>
+        </p:spPr>
+        <p:txBody>
+          <a:bodyPr wrap="square" lIns="0" tIns="0" rIns="0" bIns="0" rtlCol="0" anchor="ctr"/>
+          <a:lstStyle/>
+          <a:p>
+            <a:pPr algn="ctr" indent="0" marL="0">
+              <a:buNone/>
+            </a:pPr>
+            <a:r>
+              <a:rPr lang="en-US" sz="1700" b="1" dirty="0">
+                <a:solidFill>
+                  <a:srgbClr val="FFFFFF"/>
+                </a:solidFill>
+                <a:latin typeface="Arial" pitchFamily="34" charset="0"/>
+                <a:ea typeface="Arial" pitchFamily="34" charset="-122"/>
+                <a:cs typeface="Arial" pitchFamily="34" charset="-120"/>
+              </a:rPr>
+              <a:t>3</a:t>
+            </a:r>
+            <a:endParaRPr lang="en-US" sz="1700" dirty="0"/>
+          </a:p>
+        </p:txBody>
+      </p:sp>
+      <p:sp>
+        <p:nvSpPr>
+          <p:cNvPr id="18" name="Text 16"/>
+          <p:cNvSpPr/>
+          <p:nvPr/>
+        </p:nvSpPr>
+        <p:spPr>
+          <a:xfrm>
+            <a:off x="1353312" y="3694176"/>
+            <a:ext cx="10058400" cy="292608"/>
+          </a:xfrm>
+          <a:prstGeom prst="rect">
+            <a:avLst/>
+          </a:prstGeom>
+          <a:noFill/>
+          <a:ln/>
+        </p:spPr>
+        <p:txBody>
+          <a:bodyPr wrap="square" lIns="0" tIns="0" rIns="0" bIns="0" rtlCol="0" anchor="ctr"/>
+          <a:lstStyle/>
+          <a:p>
+            <a:pPr indent="0" marL="0">
+              <a:buNone/>
+            </a:pPr>
+            <a:r>
+              <a:rPr lang="en-US" sz="1650" b="1" dirty="0">
+                <a:solidFill>
+                  <a:srgbClr val="B8860B"/>
+                </a:solidFill>
+                <a:latin typeface="Arial" pitchFamily="34" charset="0"/>
+                <a:ea typeface="Arial" pitchFamily="34" charset="-122"/>
+                <a:cs typeface="Arial" pitchFamily="34" charset="-120"/>
+              </a:rPr>
+              <a:t>Audit the OTHER three cohorts the same way</a:t>
+            </a:r>
+            <a:endParaRPr lang="en-US" sz="1650" dirty="0"/>
+          </a:p>
+        </p:txBody>
+      </p:sp>
+      <p:sp>
+        <p:nvSpPr>
+          <p:cNvPr id="19" name="Text 17"/>
+          <p:cNvSpPr/>
+          <p:nvPr/>
+        </p:nvSpPr>
+        <p:spPr>
+          <a:xfrm>
+            <a:off x="1353312" y="3968496"/>
+            <a:ext cx="10058400" cy="603504"/>
+          </a:xfrm>
+          <a:prstGeom prst="rect">
+            <a:avLst/>
+          </a:prstGeom>
+          <a:noFill/>
+          <a:ln/>
+        </p:spPr>
+        <p:txBody>
+          <a:bodyPr wrap="square" lIns="0" tIns="0" rIns="0" bIns="0" rtlCol="0" anchor="t"/>
+          <a:lstStyle/>
+          <a:p>
+            <a:pPr indent="0" marL="0">
+              <a:lnSpc>
+                <a:spcPts val="1550"/>
+              </a:lnSpc>
+              <a:buNone/>
+            </a:pPr>
+            <a:r>
+              <a:rPr lang="en-US" sz="1300" dirty="0">
+                <a:solidFill>
+                  <a:srgbClr val="1A1A1A"/>
+                </a:solidFill>
+                <a:latin typeface="Arial" pitchFamily="34" charset="0"/>
+                <a:ea typeface="Arial" pitchFamily="34" charset="-122"/>
+                <a:cs typeface="Arial" pitchFamily="34" charset="-120"/>
+              </a:rPr>
+              <a:t>MTBLS326 is done and it failed (slide 23) — cases and controls sat in separate acquisition blocks, and signal-free spectral regions classify the label at 0.726, p &lt; 0.005. Barth, MTBLS563 and BrC-T2D have never been checked. Cheap, and it decides which targets are admissible evidence at all.</a:t>
+            </a:r>
+            <a:endParaRPr lang="en-US" sz="1300" dirty="0"/>
+          </a:p>
+        </p:txBody>
+      </p:sp>
+      <p:sp>
+        <p:nvSpPr>
+          <p:cNvPr id="20" name="Shape 18"/>
+          <p:cNvSpPr/>
+          <p:nvPr/>
+        </p:nvSpPr>
+        <p:spPr>
+          <a:xfrm>
+            <a:off x="502920" y="4773168"/>
+            <a:ext cx="11155680" cy="969264"/>
+          </a:xfrm>
+          <a:prstGeom prst="roundRect">
+            <a:avLst>
+              <a:gd name="adj" fmla="val 7547"/>
+            </a:avLst>
+          </a:prstGeom>
+          <a:solidFill>
+            <a:srgbClr val="EEF3F7"/>
+          </a:solidFill>
+          <a:ln/>
+        </p:spPr>
+      </p:sp>
+      <p:sp>
+        <p:nvSpPr>
+          <p:cNvPr id="21" name="Shape 19"/>
+          <p:cNvSpPr/>
+          <p:nvPr/>
+        </p:nvSpPr>
+        <p:spPr>
+          <a:xfrm>
+            <a:off x="713232" y="5029200"/>
+            <a:ext cx="475488" cy="475488"/>
+          </a:xfrm>
+          <a:prstGeom prst="ellipse">
+            <a:avLst/>
+          </a:prstGeom>
+          <a:solidFill>
+            <a:srgbClr val="1C7293"/>
+          </a:solidFill>
+          <a:ln/>
+        </p:spPr>
+      </p:sp>
+      <p:sp>
+        <p:nvSpPr>
+          <p:cNvPr id="22" name="Text 20"/>
+          <p:cNvSpPr/>
+          <p:nvPr/>
+        </p:nvSpPr>
+        <p:spPr>
+          <a:xfrm>
+            <a:off x="713232" y="5029200"/>
+            <a:ext cx="475488" cy="475488"/>
+          </a:xfrm>
+          <a:prstGeom prst="rect">
+            <a:avLst/>
+          </a:prstGeom>
+          <a:noFill/>
+          <a:ln/>
+        </p:spPr>
+        <p:txBody>
+          <a:bodyPr wrap="square" lIns="0" tIns="0" rIns="0" bIns="0" rtlCol="0" anchor="ctr"/>
+          <a:lstStyle/>
+          <a:p>
+            <a:pPr algn="ctr" indent="0" marL="0">
+              <a:buNone/>
+            </a:pPr>
+            <a:r>
+              <a:rPr lang="en-US" sz="1700" b="1" dirty="0">
+                <a:solidFill>
+                  <a:srgbClr val="FFFFFF"/>
+                </a:solidFill>
+                <a:latin typeface="Arial" pitchFamily="34" charset="0"/>
+                <a:ea typeface="Arial" pitchFamily="34" charset="-122"/>
+                <a:cs typeface="Arial" pitchFamily="34" charset="-120"/>
+              </a:rPr>
+              <a:t>4</a:t>
+            </a:r>
+            <a:endParaRPr lang="en-US" sz="1700" dirty="0"/>
+          </a:p>
+        </p:txBody>
+      </p:sp>
+      <p:sp>
+        <p:nvSpPr>
+          <p:cNvPr id="23" name="Text 21"/>
+          <p:cNvSpPr/>
+          <p:nvPr/>
+        </p:nvSpPr>
+        <p:spPr>
+          <a:xfrm>
+            <a:off x="1353312" y="4828032"/>
+            <a:ext cx="10058400" cy="292608"/>
+          </a:xfrm>
+          <a:prstGeom prst="rect">
+            <a:avLst/>
+          </a:prstGeom>
+          <a:noFill/>
+          <a:ln/>
+        </p:spPr>
+        <p:txBody>
+          <a:bodyPr wrap="square" lIns="0" tIns="0" rIns="0" bIns="0" rtlCol="0" anchor="ctr"/>
+          <a:lstStyle/>
+          <a:p>
+            <a:pPr indent="0" marL="0">
+              <a:buNone/>
+            </a:pPr>
+            <a:r>
+              <a:rPr lang="en-US" sz="1650" b="1" dirty="0">
+                <a:solidFill>
+                  <a:srgbClr val="1C7293"/>
+                </a:solidFill>
+                <a:latin typeface="Arial" pitchFamily="34" charset="0"/>
+                <a:ea typeface="Arial" pitchFamily="34" charset="-122"/>
+                <a:cs typeface="Arial" pitchFamily="34" charset="-120"/>
+              </a:rPr>
+              <a:t>Corpus scaling curve — only after near-duplicate dedup</a:t>
+            </a:r>
+            <a:endParaRPr lang="en-US" sz="1650" dirty="0"/>
+          </a:p>
+        </p:txBody>
+      </p:sp>
+      <p:sp>
+        <p:nvSpPr>
+          <p:cNvPr id="24" name="Text 22"/>
+          <p:cNvSpPr/>
+          <p:nvPr/>
+        </p:nvSpPr>
+        <p:spPr>
+          <a:xfrm>
+            <a:off x="1353312" y="5102352"/>
+            <a:ext cx="10058400" cy="603504"/>
+          </a:xfrm>
+          <a:prstGeom prst="rect">
+            <a:avLst/>
+          </a:prstGeom>
+          <a:noFill/>
+          <a:ln/>
+        </p:spPr>
+        <p:txBody>
+          <a:bodyPr wrap="square" lIns="0" tIns="0" rIns="0" bIns="0" rtlCol="0" anchor="t"/>
+          <a:lstStyle/>
+          <a:p>
+            <a:pPr indent="0" marL="0">
+              <a:lnSpc>
+                <a:spcPts val="1550"/>
+              </a:lnSpc>
+              <a:buNone/>
+            </a:pPr>
+            <a:r>
+              <a:rPr lang="en-US" sz="1300" dirty="0">
+                <a:solidFill>
+                  <a:srgbClr val="1A1A1A"/>
+                </a:solidFill>
+                <a:latin typeface="Arial" pitchFamily="34" charset="0"/>
+                <a:ea typeface="Arial" pitchFamily="34" charset="-122"/>
+                <a:cs typeface="Arial" pitchFamily="34" charset="-120"/>
+              </a:rPr>
+              <a:t>Demoted. 55% of rows have a neighbour at r &gt; 0.99, so subsampling by row count does not subsample information: the curve would flatten for the wrong reason. Needs ≥5 seeds per point (~23 GPU-h each).</a:t>
+            </a:r>
+            <a:endParaRPr lang="en-US" sz="1300" dirty="0"/>
+          </a:p>
+        </p:txBody>
+      </p:sp>
+      <p:sp>
+        <p:nvSpPr>
+          <p:cNvPr id="25" name="Shape 23"/>
+          <p:cNvSpPr/>
+          <p:nvPr/>
+        </p:nvSpPr>
+        <p:spPr>
+          <a:xfrm>
+            <a:off x="502920" y="5925312"/>
+            <a:ext cx="11155680" cy="566928"/>
+          </a:xfrm>
+          <a:prstGeom prst="roundRect">
+            <a:avLst>
+              <a:gd name="adj" fmla="val 12903"/>
+            </a:avLst>
+          </a:prstGeom>
+          <a:solidFill>
+            <a:srgbClr val="FBEEF1"/>
+          </a:solidFill>
+          <a:ln/>
+        </p:spPr>
+      </p:sp>
+      <p:sp>
+        <p:nvSpPr>
+          <p:cNvPr id="26" name="Text 24"/>
+          <p:cNvSpPr/>
+          <p:nvPr/>
+        </p:nvSpPr>
+        <p:spPr>
+          <a:xfrm>
+            <a:off x="777240" y="5952744"/>
+            <a:ext cx="10607040" cy="512064"/>
+          </a:xfrm>
+          <a:prstGeom prst="rect">
+            <a:avLst/>
+          </a:prstGeom>
+          <a:noFill/>
+          <a:ln/>
+        </p:spPr>
+        <p:txBody>
+          <a:bodyPr wrap="square" lIns="0" tIns="0" rIns="0" bIns="0" rtlCol="0" anchor="ctr"/>
+          <a:lstStyle/>
+          <a:p>
+            <a:pPr indent="0" marL="0">
+              <a:lnSpc>
+                <a:spcPts val="1600"/>
+              </a:lnSpc>
+              <a:buNone/>
+            </a:pPr>
+            <a:r>
+              <a:rPr lang="en-US" sz="1350" b="1" dirty="0">
+                <a:solidFill>
+                  <a:srgbClr val="C1435B"/>
+                </a:solidFill>
+                <a:latin typeface="Arial" pitchFamily="34" charset="0"/>
+                <a:ea typeface="Arial" pitchFamily="34" charset="-122"/>
+                <a:cs typeface="Arial" pitchFamily="34" charset="-120"/>
+              </a:rPr>
+              <a:t>Dropped from this list:  </a:t>
+            </a:r>
+            <a:pPr indent="0" marL="0">
+              <a:lnSpc>
+                <a:spcPts val="1600"/>
+              </a:lnSpc>
+              <a:buNone/>
+            </a:pPr>
+            <a:r>
+              <a:rPr lang="en-US" sz="1350" dirty="0">
+                <a:solidFill>
+                  <a:srgbClr val="1A1A1A"/>
+                </a:solidFill>
+                <a:latin typeface="Arial" pitchFamily="34" charset="0"/>
+                <a:ea typeface="Arial" pitchFamily="34" charset="-122"/>
+                <a:cs typeface="Arial" pitchFamily="34" charset="-120"/>
+              </a:rPr>
+              <a:t>supervised cross-cohort transfer (train the probe on one cohort, test on another). All five targets are different diseases with no shared label space — it is not executable on the data we have, at any sample size.</a:t>
+            </a:r>
+            <a:endParaRPr lang="en-US" sz="1350" dirty="0"/>
+          </a:p>
+        </p:txBody>
+      </p:sp>
+    </p:spTree>
+  </p:cSld>
+  <p:clrMapOvr>
+    <a:masterClrMapping/>
+  </p:clrMapOvr>
+</p:sld>
+</file>
+
+<file path=ppt/slides/slide32.xml><?xml version="1.0" encoding="utf-8"?>
+<p:sld xmlns:a="http://schemas.openxmlformats.org/drawingml/2006/main" xmlns:r="http://schemas.openxmlformats.org/officeDocument/2006/relationships" xmlns:p="http://schemas.openxmlformats.org/presentationml/2006/main">
+  <p:cSld name="Slide 32">
     <p:bg>
       <p:bgPr>
         <a:solidFill>
@@ -30427,7 +30997,7 @@
                 <a:ea typeface="Arial" pitchFamily="34" charset="-122"/>
                 <a:cs typeface="Arial" pitchFamily="34" charset="-120"/>
               </a:rPr>
-              <a:t>MTBLS326's classical score is a perfect 1.000 on n=42. It clears a permutation null, but we have not yet checked run-order / batch confounding. Until we do, it should not count as evidence.</a:t>
+              <a:t>MTBLS326's classical score is a perfect 1.000 on n=42. It clears a permutation null — but we have now run the batch audit and it is CONFOUNDED BY DESIGN. Cases are samples 1–27, controls 101–130: separate acquisition blocks. Slide 23.</a:t>
             </a:r>
             <a:endParaRPr lang="en-US" sz="1550" dirty="0"/>
           </a:p>

--- a/docs/Group_Meeting_2026-08-10.pptx
+++ b/docs/Group_Meeting_2026-08-10.pptx
@@ -1877,6 +1877,12 @@
 THE CONTROL IS THE CLEVER BIT. The same noise features CANNOT predict early-versus-late acquisition within the cancer block (0.555, p = 0.28). So this is not smooth instrument drift — the noise separates the two BLOCKS specifically. Signature of two distinct acquisition sessions.
 One uncomfortable detail worth admitting: rowMinMax normalisation makes it WORSE. 0.726 normalised vs 0.641 un-normalised. Per-row min-max turns an absolute intensity offset into a noise-to-peak ratio, i.e. an SNR feature, which is exactly a technical quantity. Our own preprocessing made the confound more learnable.
 WHAT I DID NOT HAVE: the Bruker acqus DATE stamps, which would be definitive. The raw MTBLS326 folders are not on this machine. But test 1's verdict cannot change — the sample numbering is already disjoint.
+THE OTHER FOUR COHORTS, audited the same way:
+- Barth is CLEAN. Order AUC 0.58, and metabolite-free regions score exactly chance (0.497). The one target that passes both tests outright. Its metadata does show an anticoagulant imbalance (Fisher p = 0.14, OR 6) — underpowered rather than clean, worth noting since EDTA gives large NMR peaks.
+- MTBLS563 and BrC-T2D cancer: order caveat only. Order AUC 0.76 and 0.78, so classes are partly blocked in acquisition, but no signal-free effect survives Holm correction. BrC-T2D cancer's 0.605 has raw p = 0.045 and Holm p = 0.36 — one marginal hit out of ten tests is what chance looks like. Say 'not balanced', not 'confounded'.
+- BrC-T2D diabetes: ambiguous, and be honest about it. Design is fine, but noise regions predict diabetes at 0.640 — ONLY after rowMinMax (un-normalised: 0.551, p = 0.22). That pattern says SNR effect, not technical offset: per-row min-max makes noise bins encode noise-to-peak ratio, which tracks overall metabolite concentration, which can be real biology. Needs a normalisation-invariant re-check before calling it either way.
+MULTIPLE COMPARISONS. Ten signal-free tests (5 targets x 2 arrays), so one raw p &lt; 0.05 is expected by chance. Everything above is Holm-corrected over that family. Do not let anyone catch you quoting the uncorrected number.
+A DEFECT IN OUR OWN PIPELINE. rowMinMax amplified a spurious signal on two of five targets (MTBLS326 0.641 to 0.726; diabetes 0.551 to 0.640). Per-row min-max converts absolute intensity into SNR, exactly the feature that leaks batch. Worth reconsidering.
 BOTTOM LINE, combining with the previous slide: Barth's win was a seed, MTBLS326 is confounded. On the three targets that remain admissible — MTBLS563 and the two BrC-T2D labels — the record is 0 wins, 3 losses, and those are the biggest cohorts with real error bars. This does NOT weaken the few-shot result; it removes a target that was making SSL look better than it is.</a:t>
             </a:r>
             <a:endParaRPr lang="en-US" dirty="0"/>
@@ -17874,7 +17880,7 @@
                 <a:ea typeface="Arial" pitchFamily="34" charset="-122"/>
                 <a:cs typeface="Arial" pitchFamily="34" charset="-120"/>
               </a:rPr>
-              <a:t>And the other "good" target is confounded</a:t>
+              <a:t>We audited all five targets for batch confounds</a:t>
             </a:r>
             <a:endParaRPr lang="en-US" sz="3000" dirty="0"/>
           </a:p>
@@ -17913,7 +17919,7 @@
                 <a:ea typeface="Arial" pitchFamily="34" charset="-122"/>
                 <a:cs typeface="Arial" pitchFamily="34" charset="-120"/>
               </a:rPr>
-              <a:t>The batch audit we had been deferring since February — MTBLS326's perfect 1.000</a:t>
+              <a:t>The check we had been deferring since February — one target fails outright</a:t>
             </a:r>
             <a:endParaRPr lang="en-US" sz="1700" dirty="0"/>
           </a:p>
@@ -17990,12 +17996,12 @@
         </p:nvSpPr>
         <p:spPr>
           <a:xfrm>
-            <a:off x="502920" y="5687568"/>
-            <a:ext cx="5440680" cy="749808"/>
+            <a:off x="502920" y="5669280"/>
+            <a:ext cx="2670048" cy="768096"/>
           </a:xfrm>
           <a:prstGeom prst="roundRect">
             <a:avLst>
-              <a:gd name="adj" fmla="val 9756"/>
+              <a:gd name="adj" fmla="val 9524"/>
             </a:avLst>
           </a:prstGeom>
           <a:solidFill>
@@ -18012,8 +18018,8 @@
         </p:nvSpPr>
         <p:spPr>
           <a:xfrm>
-            <a:off x="731520" y="5724144"/>
-            <a:ext cx="4992624" cy="676656"/>
+            <a:off x="621792" y="5696712"/>
+            <a:ext cx="2432304" cy="219456"/>
           </a:xfrm>
           <a:prstGeom prst="rect">
             <a:avLst/>
@@ -18023,78 +18029,281 @@
         </p:spPr>
         <p:txBody>
           <a:bodyPr wrap="square" lIns="0" tIns="0" rIns="0" bIns="0" rtlCol="0" anchor="ctr"/>
+          <a:lstStyle/>
+          <a:p>
+            <a:pPr indent="0" marL="0">
+              <a:buNone/>
+            </a:pPr>
+            <a:r>
+              <a:rPr lang="en-US" sz="1300" b="1" dirty="0">
+                <a:solidFill>
+                  <a:srgbClr val="1A1A1A"/>
+                </a:solidFill>
+                <a:latin typeface="Arial" pitchFamily="34" charset="0"/>
+                <a:ea typeface="Arial" pitchFamily="34" charset="-122"/>
+                <a:cs typeface="Arial" pitchFamily="34" charset="-120"/>
+              </a:rPr>
+              <a:t>MTBLS326</a:t>
+            </a:r>
+            <a:endParaRPr lang="en-US" sz="1300" dirty="0"/>
+          </a:p>
+        </p:txBody>
+      </p:sp>
+      <p:sp>
+        <p:nvSpPr>
+          <p:cNvPr id="8" name="Text 5"/>
+          <p:cNvSpPr/>
+          <p:nvPr/>
+        </p:nvSpPr>
+        <p:spPr>
+          <a:xfrm>
+            <a:off x="621792" y="5897880"/>
+            <a:ext cx="2432304" cy="201168"/>
+          </a:xfrm>
+          <a:prstGeom prst="rect">
+            <a:avLst/>
+          </a:prstGeom>
+          <a:noFill/>
+          <a:ln/>
+        </p:spPr>
+        <p:txBody>
+          <a:bodyPr wrap="square" lIns="0" tIns="0" rIns="0" bIns="0" rtlCol="0" anchor="ctr"/>
+          <a:lstStyle/>
+          <a:p>
+            <a:pPr indent="0" marL="0">
+              <a:buNone/>
+            </a:pPr>
+            <a:r>
+              <a:rPr lang="en-US" sz="1350" b="1" dirty="0">
+                <a:solidFill>
+                  <a:srgbClr val="C1435B"/>
+                </a:solidFill>
+                <a:latin typeface="Arial" pitchFamily="34" charset="0"/>
+                <a:ea typeface="Arial" pitchFamily="34" charset="-122"/>
+                <a:cs typeface="Arial" pitchFamily="34" charset="-120"/>
+              </a:rPr>
+              <a:t>UNUSABLE</a:t>
+            </a:r>
+            <a:endParaRPr lang="en-US" sz="1350" dirty="0"/>
+          </a:p>
+        </p:txBody>
+      </p:sp>
+      <p:sp>
+        <p:nvSpPr>
+          <p:cNvPr id="9" name="Text 6"/>
+          <p:cNvSpPr/>
+          <p:nvPr/>
+        </p:nvSpPr>
+        <p:spPr>
+          <a:xfrm>
+            <a:off x="621792" y="6089904"/>
+            <a:ext cx="2432304" cy="310896"/>
+          </a:xfrm>
+          <a:prstGeom prst="rect">
+            <a:avLst/>
+          </a:prstGeom>
+          <a:noFill/>
+          <a:ln/>
+        </p:spPr>
+        <p:txBody>
+          <a:bodyPr wrap="square" lIns="0" tIns="0" rIns="0" bIns="0" rtlCol="0" anchor="t"/>
           <a:lstStyle/>
           <a:p>
             <a:pPr indent="0" marL="0">
               <a:lnSpc>
-                <a:spcPts val="1700"/>
+                <a:spcPts val="1200"/>
               </a:lnSpc>
               <a:buNone/>
             </a:pPr>
             <a:r>
-              <a:rPr lang="en-US" sz="1450" b="1" dirty="0">
-                <a:solidFill>
-                  <a:srgbClr val="C1435B"/>
-                </a:solidFill>
-                <a:latin typeface="Arial" pitchFamily="34" charset="0"/>
-                <a:ea typeface="Arial" pitchFamily="34" charset="-122"/>
-                <a:cs typeface="Arial" pitchFamily="34" charset="-120"/>
-              </a:rPr>
-              <a:t>Confounded by design.  </a:t>
-            </a:r>
+              <a:rPr lang="en-US" sz="1050" dirty="0">
+                <a:solidFill>
+                  <a:srgbClr val="5A6068"/>
+                </a:solidFill>
+                <a:latin typeface="Arial" pitchFamily="34" charset="0"/>
+                <a:ea typeface="Arial" pitchFamily="34" charset="-122"/>
+                <a:cs typeface="Arial" pitchFamily="34" charset="-120"/>
+              </a:rPr>
+              <a:t>cases = samples 1–27, controls = 101–130</a:t>
+            </a:r>
+            <a:endParaRPr lang="en-US" sz="1050" dirty="0"/>
+          </a:p>
+        </p:txBody>
+      </p:sp>
+      <p:sp>
+        <p:nvSpPr>
+          <p:cNvPr id="10" name="Shape 7"/>
+          <p:cNvSpPr/>
+          <p:nvPr/>
+        </p:nvSpPr>
+        <p:spPr>
+          <a:xfrm>
+            <a:off x="3328416" y="5669280"/>
+            <a:ext cx="2670048" cy="768096"/>
+          </a:xfrm>
+          <a:prstGeom prst="roundRect">
+            <a:avLst>
+              <a:gd name="adj" fmla="val 9524"/>
+            </a:avLst>
+          </a:prstGeom>
+          <a:solidFill>
+            <a:srgbClr val="EBF5EE"/>
+          </a:solidFill>
+          <a:ln/>
+        </p:spPr>
+      </p:sp>
+      <p:sp>
+        <p:nvSpPr>
+          <p:cNvPr id="11" name="Text 8"/>
+          <p:cNvSpPr/>
+          <p:nvPr/>
+        </p:nvSpPr>
+        <p:spPr>
+          <a:xfrm>
+            <a:off x="3447288" y="5696712"/>
+            <a:ext cx="2432304" cy="219456"/>
+          </a:xfrm>
+          <a:prstGeom prst="rect">
+            <a:avLst/>
+          </a:prstGeom>
+          <a:noFill/>
+          <a:ln/>
+        </p:spPr>
+        <p:txBody>
+          <a:bodyPr wrap="square" lIns="0" tIns="0" rIns="0" bIns="0" rtlCol="0" anchor="ctr"/>
+          <a:lstStyle/>
+          <a:p>
+            <a:pPr indent="0" marL="0">
+              <a:buNone/>
+            </a:pPr>
+            <a:r>
+              <a:rPr lang="en-US" sz="1300" b="1" dirty="0">
+                <a:solidFill>
+                  <a:srgbClr val="1A1A1A"/>
+                </a:solidFill>
+                <a:latin typeface="Arial" pitchFamily="34" charset="0"/>
+                <a:ea typeface="Arial" pitchFamily="34" charset="-122"/>
+                <a:cs typeface="Arial" pitchFamily="34" charset="-120"/>
+              </a:rPr>
+              <a:t>Barth</a:t>
+            </a:r>
+            <a:endParaRPr lang="en-US" sz="1300" dirty="0"/>
+          </a:p>
+        </p:txBody>
+      </p:sp>
+      <p:sp>
+        <p:nvSpPr>
+          <p:cNvPr id="12" name="Text 9"/>
+          <p:cNvSpPr/>
+          <p:nvPr/>
+        </p:nvSpPr>
+        <p:spPr>
+          <a:xfrm>
+            <a:off x="3447288" y="5897880"/>
+            <a:ext cx="2432304" cy="201168"/>
+          </a:xfrm>
+          <a:prstGeom prst="rect">
+            <a:avLst/>
+          </a:prstGeom>
+          <a:noFill/>
+          <a:ln/>
+        </p:spPr>
+        <p:txBody>
+          <a:bodyPr wrap="square" lIns="0" tIns="0" rIns="0" bIns="0" rtlCol="0" anchor="ctr"/>
+          <a:lstStyle/>
+          <a:p>
+            <a:pPr indent="0" marL="0">
+              <a:buNone/>
+            </a:pPr>
+            <a:r>
+              <a:rPr lang="en-US" sz="1350" b="1" dirty="0">
+                <a:solidFill>
+                  <a:srgbClr val="1A7A3C"/>
+                </a:solidFill>
+                <a:latin typeface="Arial" pitchFamily="34" charset="0"/>
+                <a:ea typeface="Arial" pitchFamily="34" charset="-122"/>
+                <a:cs typeface="Arial" pitchFamily="34" charset="-120"/>
+              </a:rPr>
+              <a:t>clean</a:t>
+            </a:r>
+            <a:endParaRPr lang="en-US" sz="1350" dirty="0"/>
+          </a:p>
+        </p:txBody>
+      </p:sp>
+      <p:sp>
+        <p:nvSpPr>
+          <p:cNvPr id="13" name="Text 10"/>
+          <p:cNvSpPr/>
+          <p:nvPr/>
+        </p:nvSpPr>
+        <p:spPr>
+          <a:xfrm>
+            <a:off x="3447288" y="6089904"/>
+            <a:ext cx="2432304" cy="310896"/>
+          </a:xfrm>
+          <a:prstGeom prst="rect">
+            <a:avLst/>
+          </a:prstGeom>
+          <a:noFill/>
+          <a:ln/>
+        </p:spPr>
+        <p:txBody>
+          <a:bodyPr wrap="square" lIns="0" tIns="0" rIns="0" bIns="0" rtlCol="0" anchor="t"/>
+          <a:lstStyle/>
+          <a:p>
             <a:pPr indent="0" marL="0">
               <a:lnSpc>
-                <a:spcPts val="1700"/>
+                <a:spcPts val="1200"/>
               </a:lnSpc>
               <a:buNone/>
             </a:pPr>
             <a:r>
-              <a:rPr lang="en-US" sz="1450" dirty="0">
-                <a:solidFill>
-                  <a:srgbClr val="1A1A1A"/>
-                </a:solidFill>
-                <a:latin typeface="Arial" pitchFamily="34" charset="0"/>
-                <a:ea typeface="Arial" pitchFamily="34" charset="-122"/>
-                <a:cs typeface="Arial" pitchFamily="34" charset="-120"/>
-              </a:rPr>
-              <a:t>Cases are samples 1–27, controls 101–130. Separate acquisition blocks, so every run-order variable predicts the label perfectly.</a:t>
-            </a:r>
-            <a:endParaRPr lang="en-US" sz="1450" dirty="0"/>
-          </a:p>
-        </p:txBody>
-      </p:sp>
-      <p:sp>
-        <p:nvSpPr>
-          <p:cNvPr id="8" name="Shape 5"/>
-          <p:cNvSpPr/>
-          <p:nvPr/>
-        </p:nvSpPr>
-        <p:spPr>
-          <a:xfrm>
-            <a:off x="6217920" y="5687568"/>
-            <a:ext cx="5440680" cy="749808"/>
+              <a:rPr lang="en-US" sz="1050" dirty="0">
+                <a:solidFill>
+                  <a:srgbClr val="5A6068"/>
+                </a:solidFill>
+                <a:latin typeface="Arial" pitchFamily="34" charset="0"/>
+                <a:ea typeface="Arial" pitchFamily="34" charset="-122"/>
+                <a:cs typeface="Arial" pitchFamily="34" charset="-120"/>
+              </a:rPr>
+              <a:t>interleaved; noise at exactly chance (0.497)</a:t>
+            </a:r>
+            <a:endParaRPr lang="en-US" sz="1050" dirty="0"/>
+          </a:p>
+        </p:txBody>
+      </p:sp>
+      <p:sp>
+        <p:nvSpPr>
+          <p:cNvPr id="14" name="Shape 11"/>
+          <p:cNvSpPr/>
+          <p:nvPr/>
+        </p:nvSpPr>
+        <p:spPr>
+          <a:xfrm>
+            <a:off x="6153912" y="5669280"/>
+            <a:ext cx="2670048" cy="768096"/>
           </a:xfrm>
           <a:prstGeom prst="roundRect">
             <a:avLst>
-              <a:gd name="adj" fmla="val 9756"/>
+              <a:gd name="adj" fmla="val 9524"/>
             </a:avLst>
           </a:prstGeom>
           <a:solidFill>
-            <a:srgbClr val="FBEEF1"/>
+            <a:srgbClr val="EEF3F7"/>
           </a:solidFill>
           <a:ln/>
         </p:spPr>
       </p:sp>
       <p:sp>
         <p:nvSpPr>
-          <p:cNvPr id="9" name="Text 6"/>
-          <p:cNvSpPr/>
-          <p:nvPr/>
-        </p:nvSpPr>
-        <p:spPr>
-          <a:xfrm>
-            <a:off x="6446520" y="5724144"/>
-            <a:ext cx="4992624" cy="676656"/>
+          <p:cNvPr id="15" name="Text 12"/>
+          <p:cNvSpPr/>
+          <p:nvPr/>
+        </p:nvSpPr>
+        <p:spPr>
+          <a:xfrm>
+            <a:off x="6272784" y="5696712"/>
+            <a:ext cx="2432304" cy="219456"/>
           </a:xfrm>
           <a:prstGeom prst="rect">
             <a:avLst/>
@@ -18104,43 +18313,246 @@
         </p:spPr>
         <p:txBody>
           <a:bodyPr wrap="square" lIns="0" tIns="0" rIns="0" bIns="0" rtlCol="0" anchor="ctr"/>
+          <a:lstStyle/>
+          <a:p>
+            <a:pPr indent="0" marL="0">
+              <a:buNone/>
+            </a:pPr>
+            <a:r>
+              <a:rPr lang="en-US" sz="1300" b="1" dirty="0">
+                <a:solidFill>
+                  <a:srgbClr val="1A1A1A"/>
+                </a:solidFill>
+                <a:latin typeface="Arial" pitchFamily="34" charset="0"/>
+                <a:ea typeface="Arial" pitchFamily="34" charset="-122"/>
+                <a:cs typeface="Arial" pitchFamily="34" charset="-120"/>
+              </a:rPr>
+              <a:t>BrC-T2D diabetes</a:t>
+            </a:r>
+            <a:endParaRPr lang="en-US" sz="1300" dirty="0"/>
+          </a:p>
+        </p:txBody>
+      </p:sp>
+      <p:sp>
+        <p:nvSpPr>
+          <p:cNvPr id="16" name="Text 13"/>
+          <p:cNvSpPr/>
+          <p:nvPr/>
+        </p:nvSpPr>
+        <p:spPr>
+          <a:xfrm>
+            <a:off x="6272784" y="5897880"/>
+            <a:ext cx="2432304" cy="201168"/>
+          </a:xfrm>
+          <a:prstGeom prst="rect">
+            <a:avLst/>
+          </a:prstGeom>
+          <a:noFill/>
+          <a:ln/>
+        </p:spPr>
+        <p:txBody>
+          <a:bodyPr wrap="square" lIns="0" tIns="0" rIns="0" bIns="0" rtlCol="0" anchor="ctr"/>
+          <a:lstStyle/>
+          <a:p>
+            <a:pPr indent="0" marL="0">
+              <a:buNone/>
+            </a:pPr>
+            <a:r>
+              <a:rPr lang="en-US" sz="1350" b="1" dirty="0">
+                <a:solidFill>
+                  <a:srgbClr val="1C7293"/>
+                </a:solidFill>
+                <a:latin typeface="Arial" pitchFamily="34" charset="0"/>
+                <a:ea typeface="Arial" pitchFamily="34" charset="-122"/>
+                <a:cs typeface="Arial" pitchFamily="34" charset="-120"/>
+              </a:rPr>
+              <a:t>ambiguous</a:t>
+            </a:r>
+            <a:endParaRPr lang="en-US" sz="1350" dirty="0"/>
+          </a:p>
+        </p:txBody>
+      </p:sp>
+      <p:sp>
+        <p:nvSpPr>
+          <p:cNvPr id="17" name="Text 14"/>
+          <p:cNvSpPr/>
+          <p:nvPr/>
+        </p:nvSpPr>
+        <p:spPr>
+          <a:xfrm>
+            <a:off x="6272784" y="6089904"/>
+            <a:ext cx="2432304" cy="310896"/>
+          </a:xfrm>
+          <a:prstGeom prst="rect">
+            <a:avLst/>
+          </a:prstGeom>
+          <a:noFill/>
+          <a:ln/>
+        </p:spPr>
+        <p:txBody>
+          <a:bodyPr wrap="square" lIns="0" tIns="0" rIns="0" bIns="0" rtlCol="0" anchor="t"/>
           <a:lstStyle/>
           <a:p>
             <a:pPr indent="0" marL="0">
               <a:lnSpc>
-                <a:spcPts val="1700"/>
+                <a:spcPts val="1200"/>
               </a:lnSpc>
               <a:buNone/>
             </a:pPr>
             <a:r>
-              <a:rPr lang="en-US" sz="1450" b="1" dirty="0">
-                <a:solidFill>
-                  <a:srgbClr val="C1435B"/>
-                </a:solidFill>
-                <a:latin typeface="Arial" pitchFamily="34" charset="0"/>
-                <a:ea typeface="Arial" pitchFamily="34" charset="-122"/>
-                <a:cs typeface="Arial" pitchFamily="34" charset="-120"/>
-              </a:rPr>
-              <a:t>And measurable.  </a:t>
-            </a:r>
+              <a:rPr lang="en-US" sz="1050" dirty="0">
+                <a:solidFill>
+                  <a:srgbClr val="5A6068"/>
+                </a:solidFill>
+                <a:latin typeface="Arial" pitchFamily="34" charset="0"/>
+                <a:ea typeface="Arial" pitchFamily="34" charset="-122"/>
+                <a:cs typeface="Arial" pitchFamily="34" charset="-120"/>
+              </a:rPr>
+              <a:t>0.640 from noise — but only after rowMinMax</a:t>
+            </a:r>
+            <a:endParaRPr lang="en-US" sz="1050" dirty="0"/>
+          </a:p>
+        </p:txBody>
+      </p:sp>
+      <p:sp>
+        <p:nvSpPr>
+          <p:cNvPr id="18" name="Shape 15"/>
+          <p:cNvSpPr/>
+          <p:nvPr/>
+        </p:nvSpPr>
+        <p:spPr>
+          <a:xfrm>
+            <a:off x="8979408" y="5669280"/>
+            <a:ext cx="2670048" cy="768096"/>
+          </a:xfrm>
+          <a:prstGeom prst="roundRect">
+            <a:avLst>
+              <a:gd name="adj" fmla="val 9524"/>
+            </a:avLst>
+          </a:prstGeom>
+          <a:solidFill>
+            <a:srgbClr val="EEF3F7"/>
+          </a:solidFill>
+          <a:ln/>
+        </p:spPr>
+      </p:sp>
+      <p:sp>
+        <p:nvSpPr>
+          <p:cNvPr id="19" name="Text 16"/>
+          <p:cNvSpPr/>
+          <p:nvPr/>
+        </p:nvSpPr>
+        <p:spPr>
+          <a:xfrm>
+            <a:off x="9098280" y="5696712"/>
+            <a:ext cx="2432304" cy="219456"/>
+          </a:xfrm>
+          <a:prstGeom prst="rect">
+            <a:avLst/>
+          </a:prstGeom>
+          <a:noFill/>
+          <a:ln/>
+        </p:spPr>
+        <p:txBody>
+          <a:bodyPr wrap="square" lIns="0" tIns="0" rIns="0" bIns="0" rtlCol="0" anchor="ctr"/>
+          <a:lstStyle/>
+          <a:p>
+            <a:pPr indent="0" marL="0">
+              <a:buNone/>
+            </a:pPr>
+            <a:r>
+              <a:rPr lang="en-US" sz="1300" b="1" dirty="0">
+                <a:solidFill>
+                  <a:srgbClr val="1A1A1A"/>
+                </a:solidFill>
+                <a:latin typeface="Arial" pitchFamily="34" charset="0"/>
+                <a:ea typeface="Arial" pitchFamily="34" charset="-122"/>
+                <a:cs typeface="Arial" pitchFamily="34" charset="-120"/>
+              </a:rPr>
+              <a:t>563 / BrC cancer</a:t>
+            </a:r>
+            <a:endParaRPr lang="en-US" sz="1300" dirty="0"/>
+          </a:p>
+        </p:txBody>
+      </p:sp>
+      <p:sp>
+        <p:nvSpPr>
+          <p:cNvPr id="20" name="Text 17"/>
+          <p:cNvSpPr/>
+          <p:nvPr/>
+        </p:nvSpPr>
+        <p:spPr>
+          <a:xfrm>
+            <a:off x="9098280" y="5897880"/>
+            <a:ext cx="2432304" cy="201168"/>
+          </a:xfrm>
+          <a:prstGeom prst="rect">
+            <a:avLst/>
+          </a:prstGeom>
+          <a:noFill/>
+          <a:ln/>
+        </p:spPr>
+        <p:txBody>
+          <a:bodyPr wrap="square" lIns="0" tIns="0" rIns="0" bIns="0" rtlCol="0" anchor="ctr"/>
+          <a:lstStyle/>
+          <a:p>
+            <a:pPr indent="0" marL="0">
+              <a:buNone/>
+            </a:pPr>
+            <a:r>
+              <a:rPr lang="en-US" sz="1350" b="1" dirty="0">
+                <a:solidFill>
+                  <a:srgbClr val="B8860B"/>
+                </a:solidFill>
+                <a:latin typeface="Arial" pitchFamily="34" charset="0"/>
+                <a:ea typeface="Arial" pitchFamily="34" charset="-122"/>
+                <a:cs typeface="Arial" pitchFamily="34" charset="-120"/>
+              </a:rPr>
+              <a:t>order caveat</a:t>
+            </a:r>
+            <a:endParaRPr lang="en-US" sz="1350" dirty="0"/>
+          </a:p>
+        </p:txBody>
+      </p:sp>
+      <p:sp>
+        <p:nvSpPr>
+          <p:cNvPr id="21" name="Text 18"/>
+          <p:cNvSpPr/>
+          <p:nvPr/>
+        </p:nvSpPr>
+        <p:spPr>
+          <a:xfrm>
+            <a:off x="9098280" y="6089904"/>
+            <a:ext cx="2432304" cy="310896"/>
+          </a:xfrm>
+          <a:prstGeom prst="rect">
+            <a:avLst/>
+          </a:prstGeom>
+          <a:noFill/>
+          <a:ln/>
+        </p:spPr>
+        <p:txBody>
+          <a:bodyPr wrap="square" lIns="0" tIns="0" rIns="0" bIns="0" rtlCol="0" anchor="t"/>
+          <a:lstStyle/>
+          <a:p>
             <a:pPr indent="0" marL="0">
               <a:lnSpc>
-                <a:spcPts val="1700"/>
+                <a:spcPts val="1200"/>
               </a:lnSpc>
               <a:buNone/>
             </a:pPr>
             <a:r>
-              <a:rPr lang="en-US" sz="1450" dirty="0">
-                <a:solidFill>
-                  <a:srgbClr val="1A1A1A"/>
-                </a:solidFill>
-                <a:latin typeface="Arial" pitchFamily="34" charset="0"/>
-                <a:ea typeface="Arial" pitchFamily="34" charset="-122"/>
-                <a:cs typeface="Arial" pitchFamily="34" charset="-120"/>
-              </a:rPr>
-              <a:t>Spectral regions holding NO metabolites classify it at 0.726, p &lt; 0.005. There is no biological route to that.</a:t>
-            </a:r>
-            <a:endParaRPr lang="en-US" sz="1450" dirty="0"/>
+              <a:rPr lang="en-US" sz="1050" dirty="0">
+                <a:solidFill>
+                  <a:srgbClr val="5A6068"/>
+                </a:solidFill>
+                <a:latin typeface="Arial" pitchFamily="34" charset="0"/>
+                <a:ea typeface="Arial" pitchFamily="34" charset="-122"/>
+                <a:cs typeface="Arial" pitchFamily="34" charset="-120"/>
+              </a:rPr>
+              <a:t>AUC 0.76–0.78; no surviving noise signal</a:t>
+            </a:r>
+            <a:endParaRPr lang="en-US" sz="1050" dirty="0"/>
           </a:p>
         </p:txBody>
       </p:sp>
@@ -26349,7 +26761,7 @@
                 <a:ea typeface="Arial" pitchFamily="34" charset="-122"/>
                 <a:cs typeface="Arial" pitchFamily="34" charset="-120"/>
               </a:rPr>
-              <a:t>Audit the OTHER three cohorts the same way</a:t>
+              <a:t>Reconsider rowMinMax, and settle the diabetes ambiguity</a:t>
             </a:r>
             <a:endParaRPr lang="en-US" sz="1650" dirty="0"/>
           </a:p>
@@ -26391,7 +26803,7 @@
                 <a:ea typeface="Arial" pitchFamily="34" charset="-122"/>
                 <a:cs typeface="Arial" pitchFamily="34" charset="-120"/>
               </a:rPr>
-              <a:t>MTBLS326 is done and it failed (slide 23) — cases and controls sat in separate acquisition blocks, and signal-free spectral regions classify the label at 0.726, p &lt; 0.005. Barth, MTBLS563 and BrC-T2D have never been checked. Cheap, and it decides which targets are admissible evidence at all.</a:t>
+              <a:t>The audit (slide 23) found our own normalisation amplifies spurious signal on 2 of 5 targets: per-row min–max turns absolute intensity into an SNR feature, exactly what leaks batch. Re-run the pipeline under a normalisation-invariant scheme (PQN or unit-area) and re-check BrC-T2D diabetes, whose 0.640-from-noise appears only after rowMinMax.</a:t>
             </a:r>
             <a:endParaRPr lang="en-US" sz="1300" dirty="0"/>
           </a:p>
@@ -30997,7 +31409,7 @@
                 <a:ea typeface="Arial" pitchFamily="34" charset="-122"/>
                 <a:cs typeface="Arial" pitchFamily="34" charset="-120"/>
               </a:rPr>
-              <a:t>MTBLS326's classical score is a perfect 1.000 on n=42. It clears a permutation null — but we have now run the batch audit and it is CONFOUNDED BY DESIGN. Cases are samples 1–27, controls 101–130: separate acquisition blocks. Slide 23.</a:t>
+              <a:t>MTBLS326's classical score is a perfect 1.000 on n=42. It clears a permutation null — but the batch audit (slide 23) shows it is CONFOUNDED BY DESIGN: cases are samples 1–27, controls 101–130, separate acquisition blocks. Barth passes the same audit cleanly.</a:t>
             </a:r>
             <a:endParaRPr lang="en-US" sz="1550" dirty="0"/>
           </a:p>
